--- a/slides/pptx/week04.pptx
+++ b/slides/pptx/week04.pptx
@@ -23,9 +23,13 @@
     <p:sldId id="271" r:id="rId17"/>
     <p:sldId id="272" r:id="rId18"/>
     <p:sldId id="273" r:id="rId19"/>
+    <p:sldId id="274" r:id="rId20"/>
+    <p:sldId id="275" r:id="rId21"/>
+    <p:sldId id="276" r:id="rId22"/>
+    <p:sldId id="277" r:id="rId23"/>
   </p:sldIdLst>
   <p:notesMasterIdLst>
-    <p:notesMasterId r:id="rId20"/>
+    <p:notesMasterId r:id="rId24"/>
   </p:notesMasterIdLst>
   <p:sldSz cx="9144000" cy="5143500"/>
   <p:notesSz cx="5143500" cy="9144000"/>
@@ -607,7 +611,7 @@
           <a:p>
             <a:r>
               <a:rPr lang="en-US" dirty="0"/>
-              <a:t>Same pattern, deadlier outcome (RCE = own the server, not just the DB). Walk the metacharacters: `;` chains a second command. Ask: "what does `8.8.8.8; cat /etc/passwd` run?" ~5 min.</a:t>
+              <a:t>Point out injection isn't just login boxes — any input reaching an interpreter. Note verbose DB errors are a gift to attackers (schema leakage). Be clear Burp/sqlmap are industry-awareness, not something this week's worksheet has them install — every task here is a plain URL/curl payload. ~3 min.</a:t>
             </a:r>
             <a:endParaRPr lang="en-US" dirty="0"/>
           </a:p>
@@ -695,7 +699,7 @@
           <a:p>
             <a:r>
               <a:rPr lang="en-US" dirty="0"/>
-              <a:t>Connects to W1's /upload threat model — now it's a full exploit chain. The webshell is tiny and total. This reappears in the W6 log-reading slide. Stress the layered fix (type + extension + location + no-exec). ~5 min.</a:t>
+              <a:t>Same pattern, deadlier outcome (RCE = own the server, not just the DB). Walk the metacharacters: `;` chains a second command. Ask: "what does `8.8.8.8; cat /etc/passwd` run?" ~5 min.</a:t>
             </a:r>
             <a:endParaRPr lang="en-US" dirty="0"/>
           </a:p>
@@ -783,7 +787,7 @@
           <a:p>
             <a:r>
               <a:rPr lang="en-US" dirty="0"/>
-              <a:t>They map every lab finding to a CWE id. Quick slide — these are the ids to cite in the worksheet. ~1 min.</a:t>
+              <a:t>Connects to W1's /upload threat model. Be precise: this app does NOT give you a working webshell today — Task 4 is a documentation exercise ("what's missing, and why does that stop RCE?"), not a live exploit. Don't imply students will pop a shell; they'll reason about the one control standing between this bug and that outcome. ~5 min.</a:t>
             </a:r>
             <a:endParaRPr lang="en-US" dirty="0"/>
           </a:p>
@@ -871,7 +875,7 @@
           <a:p>
             <a:r>
               <a:rPr lang="en-US" dirty="0"/>
-              <a:t>The payoff. #1 message: parameterization makes data STAY data — the DB never parses it as SQL. For shells, pass an argv array, not a string. Least-privilege limits blast radius if they still get in. ~5 min.</a:t>
+              <a:t>Connects to W1's /upload threat model. Be precise: this app does NOT give you a working webshell today — Task 4 is a documentation exercise ("what's missing, and why does that stop RCE?"), not a live exploit. Don't imply students will pop a shell; they'll reason about the one control standing between this bug and that outcome. ~5 min.</a:t>
             </a:r>
             <a:endParaRPr lang="en-US" dirty="0"/>
           </a:p>
@@ -959,7 +963,7 @@
           <a:p>
             <a:r>
               <a:rPr lang="en-US" dirty="0"/>
-              <a:t>Explain before lab: levels escalate (raw → quoted → filtered → boss). Round 2 (patch it) is where the real learning is — and the deliverable. Leaderboard on capture time. Flags are per-student. ~3 min.</a:t>
+              <a:t>They map every lab finding to a CWE id — these three are what this week's worksheet actually grades. CWE-434 is a quarter of the exploitation score; don't drop it from this list. ~1 min.</a:t>
             </a:r>
             <a:endParaRPr lang="en-US" dirty="0"/>
           </a:p>
@@ -1047,7 +1051,7 @@
           <a:p>
             <a:r>
               <a:rPr lang="en-US" dirty="0"/>
-              <a:t>Logistics. Circulate with TAs. Remind: step 4 (rewrite + prove the payload now fails) is graded, not just the exploit. Also kick off the NoteVault project injection task (worksheet).</a:t>
+              <a:t>The payoff. #1 message: parameterization makes data STAY data — the DB never parses it as SQL. For shells, pass an argv array, not a string. Least-privilege limits blast radius if they still get in. ~5 min.</a:t>
             </a:r>
             <a:endParaRPr lang="en-US" dirty="0"/>
           </a:p>
@@ -1135,7 +1139,7 @@
           <a:p>
             <a:r>
               <a:rPr lang="en-US" dirty="0"/>
-              <a:t>Set expectations: before AND after code + proof. The AI-resilient tasks are part of the grade. Q6 of this week's quiz asks for their own payload + personal flag.</a:t>
+              <a:t>Explain before lab: this is NOT a tiered WAF-bypass ladder — it's 4 fixed attacks against app.py, then proving solution_app.py blocks all 4 ("boss defeated" = Task 5). No filter exists in the vulnerable app to bypass; don't set that expectation. DVWA/Juice Shop remain available as optional secondary targets, not the graded game. ~3 min.</a:t>
             </a:r>
             <a:endParaRPr lang="en-US" dirty="0"/>
           </a:p>
@@ -1223,7 +1227,7 @@
           <a:p>
             <a:r>
               <a:rPr lang="en-US" dirty="0"/>
-              <a:t>Recap in 3 lines. Cold-call: "what's the ONE fix for SQLi?" (parameterized queries). ~2 min.</a:t>
+              <a:t>Explain before lab: this is NOT a tiered WAF-bypass ladder — it's 4 fixed attacks against app.py, then proving solution_app.py blocks all 4 ("boss defeated" = Task 5). No filter exists in the vulnerable app to bypass; don't set that expectation. DVWA/Juice Shop remain available as optional secondary targets, not the graded game. ~3 min.</a:t>
             </a:r>
             <a:endParaRPr lang="en-US" dirty="0"/>
           </a:p>
@@ -1311,7 +1315,7 @@
           <a:p>
             <a:r>
               <a:rPr lang="en-US" dirty="0"/>
-              <a:t>Cliffhanger: "Next week the same trick runs in the victim's browser — and skims credit cards." Remind DVWA/Juice Shop ready in their VM.</a:t>
+              <a:t>Logistics. Circulate with TAs. Remind: step 4 (rewrite + prove the payload now fails) is graded, not just the exploit. Also kick off the NoteVault project injection task (worksheet).</a:t>
             </a:r>
             <a:endParaRPr lang="en-US" dirty="0"/>
           </a:p>
@@ -1335,6 +1339,94 @@
             <a:fld id="{F7021451-1387-4CA6-816F-3879F97B5CBC}" type="slidenum">
               <a:rPr lang="en-US"/>
               <a:t>18</a:t>
+            </a:fld>
+            <a:endParaRPr lang="en-US"/>
+          </a:p>
+        </p:txBody>
+      </p:sp>
+    </p:spTree>
+    <p:extLst>
+      <p:ext uri="{BB962C8B-B14F-4D97-AF65-F5344CB8AC3E}">
+        <p14:creationId xmlns:p14="http://schemas.microsoft.com/office/powerpoint/2010/main" val="1024086991"/>
+      </p:ext>
+    </p:extLst>
+  </p:cSld>
+  <p:clrMapOvr>
+    <a:masterClrMapping/>
+  </p:clrMapOvr>
+</p:notes>
+</file>
+
+<file path=ppt/notesSlides/notesSlide19.xml><?xml version="1.0" encoding="utf-8"?>
+<p:notes xmlns:a="http://schemas.openxmlformats.org/drawingml/2006/main" xmlns:r="http://schemas.openxmlformats.org/officeDocument/2006/relationships" xmlns:p="http://schemas.openxmlformats.org/presentationml/2006/main">
+  <p:cSld>
+    <p:spTree>
+      <p:nvGrpSpPr>
+        <p:cNvPr id="1" name=""/>
+        <p:cNvGrpSpPr/>
+        <p:nvPr/>
+      </p:nvGrpSpPr>
+      <p:grpSpPr>
+        <a:xfrm>
+          <a:off x="0" y="0"/>
+          <a:ext cx="0" cy="0"/>
+          <a:chOff x="0" y="0"/>
+          <a:chExt cx="0" cy="0"/>
+        </a:xfrm>
+      </p:grpSpPr>
+      <p:sp>
+        <p:nvSpPr>
+          <p:cNvPr id="2" name="Slide Image Placeholder 1"/>
+          <p:cNvSpPr>
+            <a:spLocks noGrp="1" noRot="1" noChangeAspect="1"/>
+          </p:cNvSpPr>
+          <p:nvPr>
+            <p:ph type="sldImg"/>
+          </p:nvPr>
+        </p:nvSpPr>
+        <p:spPr/>
+      </p:sp>
+      <p:sp>
+        <p:nvSpPr>
+          <p:cNvPr id="3" name="Notes Placeholder 2"/>
+          <p:cNvSpPr>
+            <a:spLocks noGrp="1"/>
+          </p:cNvSpPr>
+          <p:nvPr>
+            <p:ph type="body" idx="1"/>
+          </p:nvPr>
+        </p:nvSpPr>
+        <p:spPr/>
+        <p:txBody>
+          <a:bodyPr/>
+          <a:lstStyle/>
+          <a:p>
+            <a:r>
+              <a:rPr lang="en-US" dirty="0"/>
+              <a:t>Logistics. Circulate with TAs. Remind: step 4 (rewrite + prove the payload now fails) is graded, not just the exploit. Also kick off the NoteVault project injection task (worksheet).</a:t>
+            </a:r>
+            <a:endParaRPr lang="en-US" dirty="0"/>
+          </a:p>
+        </p:txBody>
+      </p:sp>
+      <p:sp>
+        <p:nvSpPr>
+          <p:cNvPr id="4" name="Slide Number Placeholder 3"/>
+          <p:cNvSpPr>
+            <a:spLocks noGrp="1"/>
+          </p:cNvSpPr>
+          <p:nvPr>
+            <p:ph type="sldNum" sz="quarter" idx="10"/>
+          </p:nvPr>
+        </p:nvSpPr>
+        <p:spPr/>
+        <p:txBody>
+          <a:bodyPr/>
+          <a:lstStyle/>
+          <a:p>
+            <a:fld id="{F7021451-1387-4CA6-816F-3879F97B5CBC}" type="slidenum">
+              <a:rPr lang="en-US"/>
+              <a:t>19</a:t>
             </a:fld>
             <a:endParaRPr lang="en-US"/>
           </a:p>
@@ -1441,6 +1533,270 @@
 </p:notes>
 </file>
 
+<file path=ppt/notesSlides/notesSlide20.xml><?xml version="1.0" encoding="utf-8"?>
+<p:notes xmlns:a="http://schemas.openxmlformats.org/drawingml/2006/main" xmlns:r="http://schemas.openxmlformats.org/officeDocument/2006/relationships" xmlns:p="http://schemas.openxmlformats.org/presentationml/2006/main">
+  <p:cSld>
+    <p:spTree>
+      <p:nvGrpSpPr>
+        <p:cNvPr id="1" name=""/>
+        <p:cNvGrpSpPr/>
+        <p:nvPr/>
+      </p:nvGrpSpPr>
+      <p:grpSpPr>
+        <a:xfrm>
+          <a:off x="0" y="0"/>
+          <a:ext cx="0" cy="0"/>
+          <a:chOff x="0" y="0"/>
+          <a:chExt cx="0" cy="0"/>
+        </a:xfrm>
+      </p:grpSpPr>
+      <p:sp>
+        <p:nvSpPr>
+          <p:cNvPr id="2" name="Slide Image Placeholder 1"/>
+          <p:cNvSpPr>
+            <a:spLocks noGrp="1" noRot="1" noChangeAspect="1"/>
+          </p:cNvSpPr>
+          <p:nvPr>
+            <p:ph type="sldImg"/>
+          </p:nvPr>
+        </p:nvSpPr>
+        <p:spPr/>
+      </p:sp>
+      <p:sp>
+        <p:nvSpPr>
+          <p:cNvPr id="3" name="Notes Placeholder 2"/>
+          <p:cNvSpPr>
+            <a:spLocks noGrp="1"/>
+          </p:cNvSpPr>
+          <p:nvPr>
+            <p:ph type="body" idx="1"/>
+          </p:nvPr>
+        </p:nvSpPr>
+        <p:spPr/>
+        <p:txBody>
+          <a:bodyPr/>
+          <a:lstStyle/>
+          <a:p>
+            <a:r>
+              <a:rPr lang="en-US" dirty="0"/>
+              <a:t>Set expectations: before AND after code + proof. The AI-resilient tasks are part of the grade. Q6 of this week's quiz asks for their own payload — confirm the current worksheet's exact wording before promising a "personal flag" on stage; check with the team if that's still accurate.</a:t>
+            </a:r>
+            <a:endParaRPr lang="en-US" dirty="0"/>
+          </a:p>
+        </p:txBody>
+      </p:sp>
+      <p:sp>
+        <p:nvSpPr>
+          <p:cNvPr id="4" name="Slide Number Placeholder 3"/>
+          <p:cNvSpPr>
+            <a:spLocks noGrp="1"/>
+          </p:cNvSpPr>
+          <p:nvPr>
+            <p:ph type="sldNum" sz="quarter" idx="10"/>
+          </p:nvPr>
+        </p:nvSpPr>
+        <p:spPr/>
+        <p:txBody>
+          <a:bodyPr/>
+          <a:lstStyle/>
+          <a:p>
+            <a:fld id="{F7021451-1387-4CA6-816F-3879F97B5CBC}" type="slidenum">
+              <a:rPr lang="en-US"/>
+              <a:t>20</a:t>
+            </a:fld>
+            <a:endParaRPr lang="en-US"/>
+          </a:p>
+        </p:txBody>
+      </p:sp>
+    </p:spTree>
+    <p:extLst>
+      <p:ext uri="{BB962C8B-B14F-4D97-AF65-F5344CB8AC3E}">
+        <p14:creationId xmlns:p14="http://schemas.microsoft.com/office/powerpoint/2010/main" val="1024086991"/>
+      </p:ext>
+    </p:extLst>
+  </p:cSld>
+  <p:clrMapOvr>
+    <a:masterClrMapping/>
+  </p:clrMapOvr>
+</p:notes>
+</file>
+
+<file path=ppt/notesSlides/notesSlide21.xml><?xml version="1.0" encoding="utf-8"?>
+<p:notes xmlns:a="http://schemas.openxmlformats.org/drawingml/2006/main" xmlns:r="http://schemas.openxmlformats.org/officeDocument/2006/relationships" xmlns:p="http://schemas.openxmlformats.org/presentationml/2006/main">
+  <p:cSld>
+    <p:spTree>
+      <p:nvGrpSpPr>
+        <p:cNvPr id="1" name=""/>
+        <p:cNvGrpSpPr/>
+        <p:nvPr/>
+      </p:nvGrpSpPr>
+      <p:grpSpPr>
+        <a:xfrm>
+          <a:off x="0" y="0"/>
+          <a:ext cx="0" cy="0"/>
+          <a:chOff x="0" y="0"/>
+          <a:chExt cx="0" cy="0"/>
+        </a:xfrm>
+      </p:grpSpPr>
+      <p:sp>
+        <p:nvSpPr>
+          <p:cNvPr id="2" name="Slide Image Placeholder 1"/>
+          <p:cNvSpPr>
+            <a:spLocks noGrp="1" noRot="1" noChangeAspect="1"/>
+          </p:cNvSpPr>
+          <p:nvPr>
+            <p:ph type="sldImg"/>
+          </p:nvPr>
+        </p:nvSpPr>
+        <p:spPr/>
+      </p:sp>
+      <p:sp>
+        <p:nvSpPr>
+          <p:cNvPr id="3" name="Notes Placeholder 2"/>
+          <p:cNvSpPr>
+            <a:spLocks noGrp="1"/>
+          </p:cNvSpPr>
+          <p:nvPr>
+            <p:ph type="body" idx="1"/>
+          </p:nvPr>
+        </p:nvSpPr>
+        <p:spPr/>
+        <p:txBody>
+          <a:bodyPr/>
+          <a:lstStyle/>
+          <a:p>
+            <a:r>
+              <a:rPr lang="en-US" dirty="0"/>
+              <a:t>Recap in 3 lines. Cold-call: "what's the ONE fix for SQLi?" (parameterized queries). ~2 min.</a:t>
+            </a:r>
+            <a:endParaRPr lang="en-US" dirty="0"/>
+          </a:p>
+        </p:txBody>
+      </p:sp>
+      <p:sp>
+        <p:nvSpPr>
+          <p:cNvPr id="4" name="Slide Number Placeholder 3"/>
+          <p:cNvSpPr>
+            <a:spLocks noGrp="1"/>
+          </p:cNvSpPr>
+          <p:nvPr>
+            <p:ph type="sldNum" sz="quarter" idx="10"/>
+          </p:nvPr>
+        </p:nvSpPr>
+        <p:spPr/>
+        <p:txBody>
+          <a:bodyPr/>
+          <a:lstStyle/>
+          <a:p>
+            <a:fld id="{F7021451-1387-4CA6-816F-3879F97B5CBC}" type="slidenum">
+              <a:rPr lang="en-US"/>
+              <a:t>21</a:t>
+            </a:fld>
+            <a:endParaRPr lang="en-US"/>
+          </a:p>
+        </p:txBody>
+      </p:sp>
+    </p:spTree>
+    <p:extLst>
+      <p:ext uri="{BB962C8B-B14F-4D97-AF65-F5344CB8AC3E}">
+        <p14:creationId xmlns:p14="http://schemas.microsoft.com/office/powerpoint/2010/main" val="1024086991"/>
+      </p:ext>
+    </p:extLst>
+  </p:cSld>
+  <p:clrMapOvr>
+    <a:masterClrMapping/>
+  </p:clrMapOvr>
+</p:notes>
+</file>
+
+<file path=ppt/notesSlides/notesSlide22.xml><?xml version="1.0" encoding="utf-8"?>
+<p:notes xmlns:a="http://schemas.openxmlformats.org/drawingml/2006/main" xmlns:r="http://schemas.openxmlformats.org/officeDocument/2006/relationships" xmlns:p="http://schemas.openxmlformats.org/presentationml/2006/main">
+  <p:cSld>
+    <p:spTree>
+      <p:nvGrpSpPr>
+        <p:cNvPr id="1" name=""/>
+        <p:cNvGrpSpPr/>
+        <p:nvPr/>
+      </p:nvGrpSpPr>
+      <p:grpSpPr>
+        <a:xfrm>
+          <a:off x="0" y="0"/>
+          <a:ext cx="0" cy="0"/>
+          <a:chOff x="0" y="0"/>
+          <a:chExt cx="0" cy="0"/>
+        </a:xfrm>
+      </p:grpSpPr>
+      <p:sp>
+        <p:nvSpPr>
+          <p:cNvPr id="2" name="Slide Image Placeholder 1"/>
+          <p:cNvSpPr>
+            <a:spLocks noGrp="1" noRot="1" noChangeAspect="1"/>
+          </p:cNvSpPr>
+          <p:nvPr>
+            <p:ph type="sldImg"/>
+          </p:nvPr>
+        </p:nvSpPr>
+        <p:spPr/>
+      </p:sp>
+      <p:sp>
+        <p:nvSpPr>
+          <p:cNvPr id="3" name="Notes Placeholder 2"/>
+          <p:cNvSpPr>
+            <a:spLocks noGrp="1"/>
+          </p:cNvSpPr>
+          <p:nvPr>
+            <p:ph type="body" idx="1"/>
+          </p:nvPr>
+        </p:nvSpPr>
+        <p:spPr/>
+        <p:txBody>
+          <a:bodyPr/>
+          <a:lstStyle/>
+          <a:p>
+            <a:r>
+              <a:rPr lang="en-US" dirty="0"/>
+              <a:t>Cliffhanger: "Next week the same trick runs in the victim's browser — and skims credit cards." Remind DVWA/Juice Shop ready in their VM.</a:t>
+            </a:r>
+            <a:endParaRPr lang="en-US" dirty="0"/>
+          </a:p>
+        </p:txBody>
+      </p:sp>
+      <p:sp>
+        <p:nvSpPr>
+          <p:cNvPr id="4" name="Slide Number Placeholder 3"/>
+          <p:cNvSpPr>
+            <a:spLocks noGrp="1"/>
+          </p:cNvSpPr>
+          <p:nvPr>
+            <p:ph type="sldNum" sz="quarter" idx="10"/>
+          </p:nvPr>
+        </p:nvSpPr>
+        <p:spPr/>
+        <p:txBody>
+          <a:bodyPr/>
+          <a:lstStyle/>
+          <a:p>
+            <a:fld id="{F7021451-1387-4CA6-816F-3879F97B5CBC}" type="slidenum">
+              <a:rPr lang="en-US"/>
+              <a:t>22</a:t>
+            </a:fld>
+            <a:endParaRPr lang="en-US"/>
+          </a:p>
+        </p:txBody>
+      </p:sp>
+    </p:spTree>
+    <p:extLst>
+      <p:ext uri="{BB962C8B-B14F-4D97-AF65-F5344CB8AC3E}">
+        <p14:creationId xmlns:p14="http://schemas.microsoft.com/office/powerpoint/2010/main" val="1024086991"/>
+      </p:ext>
+    </p:extLst>
+  </p:cSld>
+  <p:clrMapOvr>
+    <a:masterClrMapping/>
+  </p:clrMapOvr>
+</p:notes>
+</file>
+
 <file path=ppt/notesSlides/notesSlide3.xml><?xml version="1.0" encoding="utf-8"?>
 <p:notes xmlns:a="http://schemas.openxmlformats.org/drawingml/2006/main" xmlns:r="http://schemas.openxmlformats.org/officeDocument/2006/relationships" xmlns:p="http://schemas.openxmlformats.org/presentationml/2006/main">
   <p:cSld>
@@ -1663,7 +2019,7 @@
           <a:p>
             <a:r>
               <a:rPr lang="en-US" dirty="0"/>
-              <a:t>Walk the string-concatenation on the board: show how the quote in the input lands inside the SQL string and breaks out. Distinguish UNION (read other tables in one shot) vs blind (no output → infer via true/false or timing). ~7 min.</a:t>
+              <a:t>Walk the string-concatenation on the board: show how the quote in the input lands inside the SQL string and breaks out. This app is SQLite via Python's sqlite3 module — no stacked queries, no blind SQLi task this week (that's UNION-based, direct-output only). Don't promise a DROP TABLE demo works here; it doesn't. ~7 min.</a:t>
             </a:r>
             <a:endParaRPr lang="en-US" dirty="0"/>
           </a:p>
@@ -1751,7 +2107,7 @@
           <a:p>
             <a:r>
               <a:rPr lang="en-US" dirty="0"/>
-              <a:t>The worked example — slow down here. Decompose the payload token by token; this is exactly the SQLi Boss Fight round 1. Stress the space after `--` (MySQL needs it) — the #1 reason a student's payload "doesn't work". ~8 min.</a:t>
+              <a:t>The worked example — slow down here. Decompose the payload token by token; this is exactly the SQLi Boss Fight's auth-bypass hit. A common wrong instinct is to add `OR 1=1` and a `LIMIT` clause copied from a MySQL tutorial — walk through why neither is needed against this SQLite app, and why the bare `'--` is what the worksheet actually uses. ~8 min.</a:t>
             </a:r>
             <a:endParaRPr lang="en-US" dirty="0"/>
           </a:p>
@@ -1839,7 +2195,7 @@
           <a:p>
             <a:r>
               <a:rPr lang="en-US" dirty="0"/>
-              <a:t>Make it real — these are careers ended and companies fined. Equifax = a single unpatched input parser. Tie back: every breach here started as "untrusted data interpreted as code". ~4 min.</a:t>
+              <a:t>The worked example — slow down here. Decompose the payload token by token; this is exactly the SQLi Boss Fight's auth-bypass hit. A common wrong instinct is to add `OR 1=1` and a `LIMIT` clause copied from a MySQL tutorial — walk through why neither is needed against this SQLite app, and why the bare `'--` is what the worksheet actually uses. ~8 min.</a:t>
             </a:r>
             <a:endParaRPr lang="en-US" dirty="0"/>
           </a:p>
@@ -1927,7 +2283,7 @@
           <a:p>
             <a:r>
               <a:rPr lang="en-US" dirty="0"/>
-              <a:t>Key principle that recurs all term. Block-lists always lose (attackers invent new payloads); allow-lists define what's acceptable. Emphasize: validation is defense-in-depth, NOT the primary SQLi fix (that's parameterization — next). ~4 min.</a:t>
+              <a:t>Make it real — these are careers ended and companies fined. Equifax = a single unpatched input parser. Tie back: every breach here started as "untrusted data interpreted as code". ~4 min.</a:t>
             </a:r>
             <a:endParaRPr lang="en-US" dirty="0"/>
           </a:p>
@@ -2015,7 +2371,7 @@
           <a:p>
             <a:r>
               <a:rPr lang="en-US" dirty="0"/>
-              <a:t>Point out injection isn't just login boxes — any input reaching an interpreter. Note verbose DB errors are a gift to attackers (schema leakage). Reiterate ethics: sqlmap only on provided sandbox targets. ~3 min.</a:t>
+              <a:t>Key principle that recurs all term. Block-lists always lose (attackers invent new payloads); allow-lists define what's acceptable. Emphasize: validation is defense-in-depth, NOT the primary SQLi fix (that's parameterization — next). ~4 min.</a:t>
             </a:r>
             <a:endParaRPr lang="en-US" dirty="0"/>
           </a:p>
@@ -2648,7 +3004,7 @@
                 <a:ea typeface="Arial" pitchFamily="34" charset="-122"/>
                 <a:cs typeface="Arial" pitchFamily="34" charset="-120"/>
               </a:rPr>
-              <a:t>Command injection</a:t>
+              <a:t>Demo / attack surface</a:t>
             </a:r>
             <a:endParaRPr lang="en-US" sz="2600" dirty="0"/>
           </a:p>
@@ -2663,94 +3019,11 @@
         <p:spPr>
           <a:xfrm>
             <a:off x="457200" y="1325880"/>
-            <a:ext cx="8229600" cy="786384"/>
+            <a:ext cx="8229600" cy="1920240"/>
           </a:xfrm>
           <a:prstGeom prst="roundRect">
             <a:avLst>
-              <a:gd name="adj" fmla="val 6977"/>
-            </a:avLst>
-          </a:prstGeom>
-          <a:solidFill>
-            <a:srgbClr val="0A1020"/>
-          </a:solidFill>
-          <a:ln w="12700">
-            <a:solidFill>
-              <a:srgbClr val="E8EDF3"/>
-            </a:solidFill>
-            <a:prstDash val="solid"/>
-          </a:ln>
-        </p:spPr>
-      </p:sp>
-      <p:sp>
-        <p:nvSpPr>
-          <p:cNvPr id="6" name="Text 3"/>
-          <p:cNvSpPr/>
-          <p:nvPr/>
-        </p:nvSpPr>
-        <p:spPr>
-          <a:xfrm>
-            <a:off x="640080" y="1399032"/>
-            <a:ext cx="7863840" cy="640080"/>
-          </a:xfrm>
-          <a:prstGeom prst="rect">
-            <a:avLst/>
-          </a:prstGeom>
-          <a:noFill/>
-          <a:ln/>
-        </p:spPr>
-        <p:txBody>
-          <a:bodyPr wrap="square" lIns="0" tIns="0" rIns="0" bIns="0" rtlCol="0" anchor="t"/>
-          <a:lstStyle/>
-          <a:p>
-            <a:pPr indent="0" marL="0">
-              <a:buNone/>
-            </a:pPr>
-            <a:r>
-              <a:rPr lang="en-US" sz="1150" dirty="0">
-                <a:solidFill>
-                  <a:srgbClr val="9FE7D6"/>
-                </a:solidFill>
-                <a:latin typeface="Courier New" pitchFamily="34" charset="0"/>
-                <a:ea typeface="Courier New" pitchFamily="34" charset="-122"/>
-                <a:cs typeface="Courier New" pitchFamily="34" charset="-120"/>
-              </a:rPr>
-              <a:t>system("ping -c 1 " . $_GET['host']);   // vulnerable</a:t>
-            </a:r>
-            <a:endParaRPr lang="en-US" sz="1150" dirty="0"/>
-          </a:p>
-          <a:p>
-            <a:pPr indent="0" marL="0">
-              <a:buNone/>
-            </a:pPr>
-            <a:r>
-              <a:rPr lang="en-US" sz="1150" dirty="0">
-                <a:solidFill>
-                  <a:srgbClr val="9FE7D6"/>
-                </a:solidFill>
-                <a:latin typeface="Courier New" pitchFamily="34" charset="0"/>
-                <a:ea typeface="Courier New" pitchFamily="34" charset="-122"/>
-                <a:cs typeface="Courier New" pitchFamily="34" charset="-120"/>
-              </a:rPr>
-              <a:t>// host = 8.8.8.8; cat /etc/passwd</a:t>
-            </a:r>
-            <a:endParaRPr lang="en-US" sz="1150" dirty="0"/>
-          </a:p>
-        </p:txBody>
-      </p:sp>
-      <p:sp>
-        <p:nvSpPr>
-          <p:cNvPr id="7" name="Shape 4"/>
-          <p:cNvSpPr/>
-          <p:nvPr/>
-        </p:nvSpPr>
-        <p:spPr>
-          <a:xfrm>
-            <a:off x="457200" y="2276856"/>
-            <a:ext cx="8229600" cy="896112"/>
-          </a:xfrm>
-          <a:prstGeom prst="roundRect">
-            <a:avLst>
-              <a:gd name="adj" fmla="val 8163"/>
+              <a:gd name="adj" fmla="val 3810"/>
             </a:avLst>
           </a:prstGeom>
           <a:solidFill>
@@ -2768,14 +3041,14 @@
       </p:sp>
       <p:sp>
         <p:nvSpPr>
-          <p:cNvPr id="8" name="Text 5"/>
-          <p:cNvSpPr/>
-          <p:nvPr/>
-        </p:nvSpPr>
-        <p:spPr>
-          <a:xfrm>
-            <a:off x="731520" y="2386584"/>
-            <a:ext cx="7680960" cy="676656"/>
+          <p:cNvPr id="6" name="Text 3"/>
+          <p:cNvSpPr/>
+          <p:nvPr/>
+        </p:nvSpPr>
+        <p:spPr>
+          <a:xfrm>
+            <a:off x="731520" y="1435608"/>
+            <a:ext cx="7680960" cy="1700784"/>
           </a:xfrm>
           <a:prstGeom prst="rect">
             <a:avLst/>
@@ -2784,7 +3057,9 @@
           <a:ln/>
         </p:spPr>
         <p:txBody>
-          <a:bodyPr wrap="square" lIns="0" tIns="0" rIns="0" bIns="0" rtlCol="0" anchor="t"/>
+          <a:bodyPr wrap="square" lIns="0" tIns="0" rIns="0" bIns="0" rtlCol="0" anchor="t">
+            <a:normAutofit/>
+          </a:bodyPr>
           <a:lstStyle/>
           <a:p>
             <a:pPr marL="342900" indent="-342900">
@@ -2803,7 +3078,7 @@
                 <a:ea typeface="Calibri" pitchFamily="34" charset="-122"/>
                 <a:cs typeface="Calibri" pitchFamily="34" charset="-120"/>
               </a:rPr>
-              <a:t>Shell metacharacters: ; | &amp; $() \ &gt;</a:t>
+              <a:t>Login forms, search boxes, URL params, JSON fields, headers</a:t>
             </a:r>
             <a:endParaRPr lang="en-US" sz="1400" dirty="0"/>
           </a:p>
@@ -2824,45 +3099,87 @@
                 <a:ea typeface="Calibri" pitchFamily="34" charset="-122"/>
                 <a:cs typeface="Calibri" pitchFamily="34" charset="-120"/>
               </a:rPr>
-              <a:t>Leads to RCE — full server compromise</a:t>
+              <a:t>Error messages leak schema → enumeration</a:t>
             </a:r>
             <a:endParaRPr lang="en-US" sz="1400" dirty="0"/>
           </a:p>
-        </p:txBody>
-      </p:sp>
-      <p:sp>
-        <p:nvSpPr>
-          <p:cNvPr id="9" name="Text 6"/>
-          <p:cNvSpPr/>
-          <p:nvPr/>
-        </p:nvSpPr>
-        <p:spPr>
-          <a:xfrm>
-            <a:off x="457200" y="4800600"/>
-            <a:ext cx="6949440" cy="274320"/>
-          </a:xfrm>
-          <a:prstGeom prst="rect">
-            <a:avLst/>
-          </a:prstGeom>
-          <a:noFill/>
-          <a:ln/>
-        </p:spPr>
-        <p:txBody>
-          <a:bodyPr wrap="square" lIns="0" tIns="0" rIns="0" bIns="0" rtlCol="0" anchor="ctr"/>
-          <a:lstStyle/>
-          <a:p>
-            <a:pPr indent="0" marL="0">
-              <a:buNone/>
-            </a:pPr>
-            <a:r>
-              <a:rPr lang="en-US" sz="900" dirty="0">
-                <a:solidFill>
-                  <a:srgbClr val="64748B"/>
+          <a:p>
+            <a:pPr marL="342900" indent="-342900">
+              <a:spcAft>
+                <a:spcPts val="600"/>
+              </a:spcAft>
+              <a:buSzPct val="100000"/>
+              <a:buChar char="•"/>
+            </a:pPr>
+            <a:r>
+              <a:rPr lang="en-US" sz="1400" dirty="0">
+                <a:solidFill>
+                  <a:srgbClr val="1F2937"/>
                 </a:solidFill>
                 <a:latin typeface="Calibri" pitchFamily="34" charset="0"/>
                 <a:ea typeface="Calibri" pitchFamily="34" charset="-122"/>
                 <a:cs typeface="Calibri" pitchFamily="34" charset="-120"/>
               </a:rPr>
+              <a:t>Today's lab: raw payloads via browser/curl against app.py — no scanner needed to see the mechanism</a:t>
+            </a:r>
+            <a:endParaRPr lang="en-US" sz="1400" dirty="0"/>
+          </a:p>
+          <a:p>
+            <a:pPr marL="342900" indent="-342900">
+              <a:spcAft>
+                <a:spcPts val="600"/>
+              </a:spcAft>
+              <a:buSzPct val="100000"/>
+              <a:buChar char="•"/>
+            </a:pPr>
+            <a:r>
+              <a:rPr lang="en-US" sz="1400" dirty="0">
+                <a:solidFill>
+                  <a:srgbClr val="1F2937"/>
+                </a:solidFill>
+                <a:latin typeface="Calibri" pitchFamily="34" charset="0"/>
+                <a:ea typeface="Calibri" pitchFamily="34" charset="-122"/>
+                <a:cs typeface="Calibri" pitchFamily="34" charset="-120"/>
+              </a:rPr>
+              <a:t>Burp Suite / sqlmap are real-world tools worth knowing (sandbox-only, ethically) — not required for this week's tasks</a:t>
+            </a:r>
+            <a:endParaRPr lang="en-US" sz="1400" dirty="0"/>
+          </a:p>
+        </p:txBody>
+      </p:sp>
+      <p:sp>
+        <p:nvSpPr>
+          <p:cNvPr id="7" name="Text 4"/>
+          <p:cNvSpPr/>
+          <p:nvPr/>
+        </p:nvSpPr>
+        <p:spPr>
+          <a:xfrm>
+            <a:off x="457200" y="4800600"/>
+            <a:ext cx="6949440" cy="274320"/>
+          </a:xfrm>
+          <a:prstGeom prst="rect">
+            <a:avLst/>
+          </a:prstGeom>
+          <a:noFill/>
+          <a:ln/>
+        </p:spPr>
+        <p:txBody>
+          <a:bodyPr wrap="square" lIns="0" tIns="0" rIns="0" bIns="0" rtlCol="0" anchor="ctr"/>
+          <a:lstStyle/>
+          <a:p>
+            <a:pPr indent="0" marL="0">
+              <a:buNone/>
+            </a:pPr>
+            <a:r>
+              <a:rPr lang="en-US" sz="900" dirty="0">
+                <a:solidFill>
+                  <a:srgbClr val="64748B"/>
+                </a:solidFill>
+                <a:latin typeface="Calibri" pitchFamily="34" charset="0"/>
+                <a:ea typeface="Calibri" pitchFamily="34" charset="-122"/>
+                <a:cs typeface="Calibri" pitchFamily="34" charset="-120"/>
+              </a:rPr>
               <a:t>Software Security · Week 4</a:t>
             </a:r>
             <a:endParaRPr lang="en-US" sz="900" dirty="0"/>
@@ -2871,7 +3188,7 @@
       </p:sp>
       <p:pic>
         <p:nvPicPr>
-          <p:cNvPr id="10" name="Image 1" descr="/Users/pop7/Library/CloudStorage/OneDrive-MonsterConnectCo.,Ltd/Lecture/KOSEN69 - software-security/slides/pptx/assets/logo-small.png">    </p:cNvPr>
+          <p:cNvPr id="8" name="Image 1" descr="/Users/pop7/Library/CloudStorage/OneDrive-MonsterConnectCo.,Ltd/Lecture/KOSEN69 - software-security/slides/pptx/assets/logo-small.png">    </p:cNvPr>
           <p:cNvPicPr>
             <a:picLocks noChangeAspect="1"/>
           </p:cNvPicPr>
@@ -3009,7 +3326,7 @@
                 <a:ea typeface="Arial" pitchFamily="34" charset="-122"/>
                 <a:cs typeface="Arial" pitchFamily="34" charset="-120"/>
               </a:rPr>
-              <a:t>Upload → RCE (a classic chain)</a:t>
+              <a:t>Command injection</a:t>
             </a:r>
             <a:endParaRPr lang="en-US" sz="2600" dirty="0"/>
           </a:p>
@@ -3017,57 +3334,18 @@
       </p:sp>
       <p:sp>
         <p:nvSpPr>
-          <p:cNvPr id="5" name="Text 2"/>
-          <p:cNvSpPr/>
-          <p:nvPr/>
-        </p:nvSpPr>
-        <p:spPr>
-          <a:xfrm>
-            <a:off x="548640" y="1325880"/>
-            <a:ext cx="8046720" cy="548640"/>
-          </a:xfrm>
-          <a:prstGeom prst="rect">
-            <a:avLst/>
-          </a:prstGeom>
-          <a:noFill/>
-          <a:ln/>
-        </p:spPr>
-        <p:txBody>
-          <a:bodyPr wrap="square" lIns="0" tIns="0" rIns="0" bIns="0" rtlCol="0" anchor="t"/>
-          <a:lstStyle/>
-          <a:p>
-            <a:pPr indent="0" marL="0">
-              <a:buNone/>
-            </a:pPr>
-            <a:r>
-              <a:rPr lang="en-US" sz="1400" dirty="0">
-                <a:solidFill>
-                  <a:srgbClr val="1F2937"/>
-                </a:solidFill>
-                <a:latin typeface="Calibri" pitchFamily="34" charset="0"/>
-                <a:ea typeface="Calibri" pitchFamily="34" charset="-122"/>
-                <a:cs typeface="Calibri" pitchFamily="34" charset="-120"/>
-              </a:rPr>
-              <a:t>Attacker uploads shell.php:</a:t>
-            </a:r>
-            <a:endParaRPr lang="en-US" sz="1400" dirty="0"/>
-          </a:p>
-        </p:txBody>
-      </p:sp>
-      <p:sp>
-        <p:nvSpPr>
-          <p:cNvPr id="6" name="Shape 3"/>
-          <p:cNvSpPr/>
-          <p:nvPr/>
-        </p:nvSpPr>
-        <p:spPr>
-          <a:xfrm>
-            <a:off x="457200" y="1965960"/>
-            <a:ext cx="8229600" cy="530352"/>
+          <p:cNvPr id="5" name="Shape 2"/>
+          <p:cNvSpPr/>
+          <p:nvPr/>
+        </p:nvSpPr>
+        <p:spPr>
+          <a:xfrm>
+            <a:off x="457200" y="1325880"/>
+            <a:ext cx="8229600" cy="713232"/>
           </a:xfrm>
           <a:prstGeom prst="roundRect">
             <a:avLst>
-              <a:gd name="adj" fmla="val 10345"/>
+              <a:gd name="adj" fmla="val 7692"/>
             </a:avLst>
           </a:prstGeom>
           <a:solidFill>
@@ -3083,14 +3361,14 @@
       </p:sp>
       <p:sp>
         <p:nvSpPr>
-          <p:cNvPr id="7" name="Text 4"/>
-          <p:cNvSpPr/>
-          <p:nvPr/>
-        </p:nvSpPr>
-        <p:spPr>
-          <a:xfrm>
-            <a:off x="640080" y="2039112"/>
-            <a:ext cx="7863840" cy="384048"/>
+          <p:cNvPr id="6" name="Text 3"/>
+          <p:cNvSpPr/>
+          <p:nvPr/>
+        </p:nvSpPr>
+        <p:spPr>
+          <a:xfrm>
+            <a:off x="640080" y="1399032"/>
+            <a:ext cx="7863840" cy="566928"/>
           </a:xfrm>
           <a:prstGeom prst="rect">
             <a:avLst/>
@@ -3099,7 +3377,9 @@
           <a:ln/>
         </p:spPr>
         <p:txBody>
-          <a:bodyPr wrap="square" lIns="0" tIns="0" rIns="0" bIns="0" rtlCol="0" anchor="t"/>
+          <a:bodyPr wrap="square" lIns="0" tIns="0" rIns="0" bIns="0" rtlCol="0" anchor="t">
+            <a:normAutofit/>
+          </a:bodyPr>
           <a:lstStyle/>
           <a:p>
             <a:pPr indent="0" marL="0">
@@ -3114,26 +3394,43 @@
                 <a:ea typeface="Courier New" pitchFamily="34" charset="-122"/>
                 <a:cs typeface="Courier New" pitchFamily="34" charset="-120"/>
               </a:rPr>
-              <a:t>&lt;?php system($_GET['cmd']); ?&gt;</a:t>
+              <a:t>system("ping -c 1 " . $_GET['host']);   // vulnerable</a:t>
             </a:r>
             <a:endParaRPr lang="en-US" sz="1150" dirty="0"/>
           </a:p>
-        </p:txBody>
-      </p:sp>
-      <p:sp>
-        <p:nvSpPr>
-          <p:cNvPr id="8" name="Shape 5"/>
-          <p:cNvSpPr/>
-          <p:nvPr/>
-        </p:nvSpPr>
-        <p:spPr>
-          <a:xfrm>
-            <a:off x="457200" y="2660904"/>
-            <a:ext cx="8229600" cy="1207008"/>
+          <a:p>
+            <a:pPr indent="0" marL="0">
+              <a:buNone/>
+            </a:pPr>
+            <a:r>
+              <a:rPr lang="en-US" sz="1150" dirty="0">
+                <a:solidFill>
+                  <a:srgbClr val="9FE7D6"/>
+                </a:solidFill>
+                <a:latin typeface="Courier New" pitchFamily="34" charset="0"/>
+                <a:ea typeface="Courier New" pitchFamily="34" charset="-122"/>
+                <a:cs typeface="Courier New" pitchFamily="34" charset="-120"/>
+              </a:rPr>
+              <a:t>// host = 8.8.8.8; cat /etc/passwd</a:t>
+            </a:r>
+            <a:endParaRPr lang="en-US" sz="1150" dirty="0"/>
+          </a:p>
+        </p:txBody>
+      </p:sp>
+      <p:sp>
+        <p:nvSpPr>
+          <p:cNvPr id="7" name="Shape 4"/>
+          <p:cNvSpPr/>
+          <p:nvPr/>
+        </p:nvSpPr>
+        <p:spPr>
+          <a:xfrm>
+            <a:off x="457200" y="2203704"/>
+            <a:ext cx="8229600" cy="896112"/>
           </a:xfrm>
           <a:prstGeom prst="roundRect">
             <a:avLst>
-              <a:gd name="adj" fmla="val 6061"/>
+              <a:gd name="adj" fmla="val 8163"/>
             </a:avLst>
           </a:prstGeom>
           <a:solidFill>
@@ -3151,14 +3448,14 @@
       </p:sp>
       <p:sp>
         <p:nvSpPr>
-          <p:cNvPr id="9" name="Text 6"/>
-          <p:cNvSpPr/>
-          <p:nvPr/>
-        </p:nvSpPr>
-        <p:spPr>
-          <a:xfrm>
-            <a:off x="731520" y="2770632"/>
-            <a:ext cx="7680960" cy="987552"/>
+          <p:cNvPr id="8" name="Text 5"/>
+          <p:cNvSpPr/>
+          <p:nvPr/>
+        </p:nvSpPr>
+        <p:spPr>
+          <a:xfrm>
+            <a:off x="731520" y="2313432"/>
+            <a:ext cx="7680960" cy="676656"/>
           </a:xfrm>
           <a:prstGeom prst="rect">
             <a:avLst/>
@@ -3167,7 +3464,9 @@
           <a:ln/>
         </p:spPr>
         <p:txBody>
-          <a:bodyPr wrap="square" lIns="0" tIns="0" rIns="0" bIns="0" rtlCol="0" anchor="t"/>
+          <a:bodyPr wrap="square" lIns="0" tIns="0" rIns="0" bIns="0" rtlCol="0" anchor="t">
+            <a:normAutofit/>
+          </a:bodyPr>
           <a:lstStyle/>
           <a:p>
             <a:pPr marL="342900" indent="-342900">
@@ -3186,7 +3485,7 @@
                 <a:ea typeface="Calibri" pitchFamily="34" charset="-122"/>
                 <a:cs typeface="Calibri" pitchFamily="34" charset="-120"/>
               </a:rPr>
-              <a:t>Then: .../uploads/shell.php?cmd=ls%20-l → runs ls -l</a:t>
+              <a:t>Shell metacharacters: ; | &amp; $() \ &gt;`</a:t>
             </a:r>
             <a:endParaRPr lang="en-US" sz="1400" dirty="0"/>
           </a:p>
@@ -3207,66 +3506,45 @@
                 <a:ea typeface="Calibri" pitchFamily="34" charset="-122"/>
                 <a:cs typeface="Calibri" pitchFamily="34" charset="-120"/>
               </a:rPr>
-              <a:t>One file + one line = arbitrary commands</a:t>
+              <a:t>Leads to RCE — full server compromise</a:t>
             </a:r>
             <a:endParaRPr lang="en-US" sz="1400" dirty="0"/>
           </a:p>
-          <a:p>
-            <a:pPr marL="342900" indent="-342900">
-              <a:spcAft>
-                <a:spcPts val="600"/>
-              </a:spcAft>
-              <a:buSzPct val="100000"/>
-              <a:buChar char="•"/>
-            </a:pPr>
-            <a:r>
-              <a:rPr lang="en-US" sz="1400" dirty="0">
-                <a:solidFill>
-                  <a:srgbClr val="1F2937"/>
+        </p:txBody>
+      </p:sp>
+      <p:sp>
+        <p:nvSpPr>
+          <p:cNvPr id="9" name="Text 6"/>
+          <p:cNvSpPr/>
+          <p:nvPr/>
+        </p:nvSpPr>
+        <p:spPr>
+          <a:xfrm>
+            <a:off x="457200" y="4800600"/>
+            <a:ext cx="6949440" cy="274320"/>
+          </a:xfrm>
+          <a:prstGeom prst="rect">
+            <a:avLst/>
+          </a:prstGeom>
+          <a:noFill/>
+          <a:ln/>
+        </p:spPr>
+        <p:txBody>
+          <a:bodyPr wrap="square" lIns="0" tIns="0" rIns="0" bIns="0" rtlCol="0" anchor="ctr"/>
+          <a:lstStyle/>
+          <a:p>
+            <a:pPr indent="0" marL="0">
+              <a:buNone/>
+            </a:pPr>
+            <a:r>
+              <a:rPr lang="en-US" sz="900" dirty="0">
+                <a:solidFill>
+                  <a:srgbClr val="64748B"/>
                 </a:solidFill>
                 <a:latin typeface="Calibri" pitchFamily="34" charset="0"/>
                 <a:ea typeface="Calibri" pitchFamily="34" charset="-122"/>
                 <a:cs typeface="Calibri" pitchFamily="34" charset="-120"/>
               </a:rPr>
-              <a:t>Fix: validate file type via mime_content_type(), allow-list extensions, store uploads outside web root, no execute</a:t>
-            </a:r>
-            <a:endParaRPr lang="en-US" sz="1400" dirty="0"/>
-          </a:p>
-        </p:txBody>
-      </p:sp>
-      <p:sp>
-        <p:nvSpPr>
-          <p:cNvPr id="10" name="Text 7"/>
-          <p:cNvSpPr/>
-          <p:nvPr/>
-        </p:nvSpPr>
-        <p:spPr>
-          <a:xfrm>
-            <a:off x="457200" y="4800600"/>
-            <a:ext cx="6949440" cy="274320"/>
-          </a:xfrm>
-          <a:prstGeom prst="rect">
-            <a:avLst/>
-          </a:prstGeom>
-          <a:noFill/>
-          <a:ln/>
-        </p:spPr>
-        <p:txBody>
-          <a:bodyPr wrap="square" lIns="0" tIns="0" rIns="0" bIns="0" rtlCol="0" anchor="ctr"/>
-          <a:lstStyle/>
-          <a:p>
-            <a:pPr indent="0" marL="0">
-              <a:buNone/>
-            </a:pPr>
-            <a:r>
-              <a:rPr lang="en-US" sz="900" dirty="0">
-                <a:solidFill>
-                  <a:srgbClr val="64748B"/>
-                </a:solidFill>
-                <a:latin typeface="Calibri" pitchFamily="34" charset="0"/>
-                <a:ea typeface="Calibri" pitchFamily="34" charset="-122"/>
-                <a:cs typeface="Calibri" pitchFamily="34" charset="-120"/>
-              </a:rPr>
               <a:t>Software Security · Week 4</a:t>
             </a:r>
             <a:endParaRPr lang="en-US" sz="900" dirty="0"/>
@@ -3275,7 +3553,7 @@
       </p:sp>
       <p:pic>
         <p:nvPicPr>
-          <p:cNvPr id="11" name="Image 1" descr="/Users/pop7/Library/CloudStorage/OneDrive-MonsterConnectCo.,Ltd/Lecture/KOSEN69 - software-security/slides/pptx/assets/logo-small.png">    </p:cNvPr>
+          <p:cNvPr id="10" name="Image 1" descr="/Users/pop7/Library/CloudStorage/OneDrive-MonsterConnectCo.,Ltd/Lecture/KOSEN69 - software-security/slides/pptx/assets/logo-small.png">    </p:cNvPr>
           <p:cNvPicPr>
             <a:picLocks noChangeAspect="1"/>
           </p:cNvPicPr>
@@ -3413,7 +3691,7 @@
                 <a:ea typeface="Arial" pitchFamily="34" charset="-122"/>
                 <a:cs typeface="Arial" pitchFamily="34" charset="-120"/>
               </a:rPr>
-              <a:t>CWE mapping</a:t>
+              <a:t>Upload → RCE (a classic chain)</a:t>
             </a:r>
             <a:endParaRPr lang="en-US" sz="2600" dirty="0"/>
           </a:p>
@@ -3421,18 +3699,127 @@
       </p:sp>
       <p:sp>
         <p:nvSpPr>
-          <p:cNvPr id="5" name="Shape 2"/>
-          <p:cNvSpPr/>
-          <p:nvPr/>
-        </p:nvSpPr>
-        <p:spPr>
-          <a:xfrm>
-            <a:off x="457200" y="1325880"/>
-            <a:ext cx="8229600" cy="1517904"/>
+          <p:cNvPr id="5" name="Text 2"/>
+          <p:cNvSpPr/>
+          <p:nvPr/>
+        </p:nvSpPr>
+        <p:spPr>
+          <a:xfrm>
+            <a:off x="548640" y="1325880"/>
+            <a:ext cx="8046720" cy="548640"/>
+          </a:xfrm>
+          <a:prstGeom prst="rect">
+            <a:avLst/>
+          </a:prstGeom>
+          <a:noFill/>
+          <a:ln/>
+        </p:spPr>
+        <p:txBody>
+          <a:bodyPr wrap="square" lIns="0" tIns="0" rIns="0" bIns="0" rtlCol="0" anchor="t">
+            <a:normAutofit/>
+          </a:bodyPr>
+          <a:lstStyle/>
+          <a:p>
+            <a:pPr indent="0" marL="0">
+              <a:buNone/>
+            </a:pPr>
+            <a:r>
+              <a:rPr lang="en-US" sz="1400" dirty="0">
+                <a:solidFill>
+                  <a:srgbClr val="1F2937"/>
+                </a:solidFill>
+                <a:latin typeface="Calibri" pitchFamily="34" charset="0"/>
+                <a:ea typeface="Calibri" pitchFamily="34" charset="-122"/>
+                <a:cs typeface="Calibri" pitchFamily="34" charset="-120"/>
+              </a:rPr>
+              <a:t>The classic chain, attacker uploads shell.php:</a:t>
+            </a:r>
+            <a:endParaRPr lang="en-US" sz="1400" dirty="0"/>
+          </a:p>
+        </p:txBody>
+      </p:sp>
+      <p:sp>
+        <p:nvSpPr>
+          <p:cNvPr id="6" name="Shape 3"/>
+          <p:cNvSpPr/>
+          <p:nvPr/>
+        </p:nvSpPr>
+        <p:spPr>
+          <a:xfrm>
+            <a:off x="457200" y="1965960"/>
+            <a:ext cx="8229600" cy="493776"/>
           </a:xfrm>
           <a:prstGeom prst="roundRect">
             <a:avLst>
-              <a:gd name="adj" fmla="val 4819"/>
+              <a:gd name="adj" fmla="val 11111"/>
+            </a:avLst>
+          </a:prstGeom>
+          <a:solidFill>
+            <a:srgbClr val="0A1020"/>
+          </a:solidFill>
+          <a:ln w="12700">
+            <a:solidFill>
+              <a:srgbClr val="E8EDF3"/>
+            </a:solidFill>
+            <a:prstDash val="solid"/>
+          </a:ln>
+        </p:spPr>
+      </p:sp>
+      <p:sp>
+        <p:nvSpPr>
+          <p:cNvPr id="7" name="Text 4"/>
+          <p:cNvSpPr/>
+          <p:nvPr/>
+        </p:nvSpPr>
+        <p:spPr>
+          <a:xfrm>
+            <a:off x="640080" y="2039112"/>
+            <a:ext cx="7863840" cy="347472"/>
+          </a:xfrm>
+          <a:prstGeom prst="rect">
+            <a:avLst/>
+          </a:prstGeom>
+          <a:noFill/>
+          <a:ln/>
+        </p:spPr>
+        <p:txBody>
+          <a:bodyPr wrap="square" lIns="0" tIns="0" rIns="0" bIns="0" rtlCol="0" anchor="t">
+            <a:normAutofit/>
+          </a:bodyPr>
+          <a:lstStyle/>
+          <a:p>
+            <a:pPr indent="0" marL="0">
+              <a:buNone/>
+            </a:pPr>
+            <a:r>
+              <a:rPr lang="en-US" sz="1150" dirty="0">
+                <a:solidFill>
+                  <a:srgbClr val="9FE7D6"/>
+                </a:solidFill>
+                <a:latin typeface="Courier New" pitchFamily="34" charset="0"/>
+                <a:ea typeface="Courier New" pitchFamily="34" charset="-122"/>
+                <a:cs typeface="Courier New" pitchFamily="34" charset="-120"/>
+              </a:rPr>
+              <a:t>&lt;?php system($_GET['cmd']); ?&gt;</a:t>
+            </a:r>
+            <a:endParaRPr lang="en-US" sz="1150" dirty="0"/>
+          </a:p>
+        </p:txBody>
+      </p:sp>
+      <p:sp>
+        <p:nvSpPr>
+          <p:cNvPr id="8" name="Shape 5"/>
+          <p:cNvSpPr/>
+          <p:nvPr/>
+        </p:nvSpPr>
+        <p:spPr>
+          <a:xfrm>
+            <a:off x="457200" y="2624328"/>
+            <a:ext cx="8229600" cy="1901952"/>
+          </a:xfrm>
+          <a:prstGeom prst="roundRect">
+            <a:avLst>
+              <a:gd name="adj" fmla="val 3846"/>
             </a:avLst>
           </a:prstGeom>
           <a:solidFill>
@@ -3450,14 +3837,14 @@
       </p:sp>
       <p:sp>
         <p:nvSpPr>
-          <p:cNvPr id="6" name="Text 3"/>
-          <p:cNvSpPr/>
-          <p:nvPr/>
-        </p:nvSpPr>
-        <p:spPr>
-          <a:xfrm>
-            <a:off x="731520" y="1435608"/>
-            <a:ext cx="7680960" cy="1298448"/>
+          <p:cNvPr id="9" name="Text 6"/>
+          <p:cNvSpPr/>
+          <p:nvPr/>
+        </p:nvSpPr>
+        <p:spPr>
+          <a:xfrm>
+            <a:off x="731520" y="2734056"/>
+            <a:ext cx="7680960" cy="1682496"/>
           </a:xfrm>
           <a:prstGeom prst="rect">
             <a:avLst/>
@@ -3466,7 +3853,9 @@
           <a:ln/>
         </p:spPr>
         <p:txBody>
-          <a:bodyPr wrap="square" lIns="0" tIns="0" rIns="0" bIns="0" rtlCol="0" anchor="t"/>
+          <a:bodyPr wrap="square" lIns="0" tIns="0" rIns="0" bIns="0" rtlCol="0" anchor="t">
+            <a:normAutofit/>
+          </a:bodyPr>
           <a:lstStyle/>
           <a:p>
             <a:pPr marL="342900" indent="-342900">
@@ -3485,7 +3874,7 @@
                 <a:ea typeface="Calibri" pitchFamily="34" charset="-122"/>
                 <a:cs typeface="Calibri" pitchFamily="34" charset="-120"/>
               </a:rPr>
-              <a:t>CWE-89 — SQL injection</a:t>
+              <a:t>If the upload dir is web-served and PHP-executable: .../uploads/shell.php?cmd=ls%20-l → RCE</a:t>
             </a:r>
             <a:endParaRPr lang="en-US" sz="1400" dirty="0"/>
           </a:p>
@@ -3506,87 +3895,45 @@
                 <a:ea typeface="Calibri" pitchFamily="34" charset="-122"/>
                 <a:cs typeface="Calibri" pitchFamily="34" charset="-120"/>
               </a:rPr>
-              <a:t>CWE-78 — OS command injection</a:t>
+              <a:t>This week's lab stops one step earlier: CWE-434 unrestricted upload — the app accepts any file type/extension, but the upload directory is not served or executed. Your task: explain which missing control would complete the chain (type check, extension allow-list, storage outside web root, no-exec) — not demonstrate a live shell</a:t>
             </a:r>
             <a:endParaRPr lang="en-US" sz="1400" dirty="0"/>
           </a:p>
-          <a:p>
-            <a:pPr marL="342900" indent="-342900">
-              <a:spcAft>
-                <a:spcPts val="600"/>
-              </a:spcAft>
-              <a:buSzPct val="100000"/>
-              <a:buChar char="•"/>
-            </a:pPr>
-            <a:r>
-              <a:rPr lang="en-US" sz="1400" dirty="0">
-                <a:solidFill>
-                  <a:srgbClr val="1F2937"/>
+        </p:txBody>
+      </p:sp>
+      <p:sp>
+        <p:nvSpPr>
+          <p:cNvPr id="10" name="Text 7"/>
+          <p:cNvSpPr/>
+          <p:nvPr/>
+        </p:nvSpPr>
+        <p:spPr>
+          <a:xfrm>
+            <a:off x="457200" y="4800600"/>
+            <a:ext cx="6949440" cy="274320"/>
+          </a:xfrm>
+          <a:prstGeom prst="rect">
+            <a:avLst/>
+          </a:prstGeom>
+          <a:noFill/>
+          <a:ln/>
+        </p:spPr>
+        <p:txBody>
+          <a:bodyPr wrap="square" lIns="0" tIns="0" rIns="0" bIns="0" rtlCol="0" anchor="ctr"/>
+          <a:lstStyle/>
+          <a:p>
+            <a:pPr indent="0" marL="0">
+              <a:buNone/>
+            </a:pPr>
+            <a:r>
+              <a:rPr lang="en-US" sz="900" dirty="0">
+                <a:solidFill>
+                  <a:srgbClr val="64748B"/>
                 </a:solidFill>
                 <a:latin typeface="Calibri" pitchFamily="34" charset="0"/>
                 <a:ea typeface="Calibri" pitchFamily="34" charset="-122"/>
                 <a:cs typeface="Calibri" pitchFamily="34" charset="-120"/>
               </a:rPr>
-              <a:t>CWE-20 — improper input validation</a:t>
-            </a:r>
-            <a:endParaRPr lang="en-US" sz="1400" dirty="0"/>
-          </a:p>
-          <a:p>
-            <a:pPr marL="342900" indent="-342900">
-              <a:spcAft>
-                <a:spcPts val="600"/>
-              </a:spcAft>
-              <a:buSzPct val="100000"/>
-              <a:buChar char="•"/>
-            </a:pPr>
-            <a:r>
-              <a:rPr lang="en-US" sz="1400" dirty="0">
-                <a:solidFill>
-                  <a:srgbClr val="1F2937"/>
-                </a:solidFill>
-                <a:latin typeface="Calibri" pitchFamily="34" charset="0"/>
-                <a:ea typeface="Calibri" pitchFamily="34" charset="-122"/>
-                <a:cs typeface="Calibri" pitchFamily="34" charset="-120"/>
-              </a:rPr>
-              <a:t>CWE-77 — command injection (general)</a:t>
-            </a:r>
-            <a:endParaRPr lang="en-US" sz="1400" dirty="0"/>
-          </a:p>
-        </p:txBody>
-      </p:sp>
-      <p:sp>
-        <p:nvSpPr>
-          <p:cNvPr id="7" name="Text 4"/>
-          <p:cNvSpPr/>
-          <p:nvPr/>
-        </p:nvSpPr>
-        <p:spPr>
-          <a:xfrm>
-            <a:off x="457200" y="4800600"/>
-            <a:ext cx="6949440" cy="274320"/>
-          </a:xfrm>
-          <a:prstGeom prst="rect">
-            <a:avLst/>
-          </a:prstGeom>
-          <a:noFill/>
-          <a:ln/>
-        </p:spPr>
-        <p:txBody>
-          <a:bodyPr wrap="square" lIns="0" tIns="0" rIns="0" bIns="0" rtlCol="0" anchor="ctr"/>
-          <a:lstStyle/>
-          <a:p>
-            <a:pPr indent="0" marL="0">
-              <a:buNone/>
-            </a:pPr>
-            <a:r>
-              <a:rPr lang="en-US" sz="900" dirty="0">
-                <a:solidFill>
-                  <a:srgbClr val="64748B"/>
-                </a:solidFill>
-                <a:latin typeface="Calibri" pitchFamily="34" charset="0"/>
-                <a:ea typeface="Calibri" pitchFamily="34" charset="-122"/>
-                <a:cs typeface="Calibri" pitchFamily="34" charset="-120"/>
-              </a:rPr>
               <a:t>Software Security · Week 4</a:t>
             </a:r>
             <a:endParaRPr lang="en-US" sz="900" dirty="0"/>
@@ -3595,7 +3942,7 @@
       </p:sp>
       <p:pic>
         <p:nvPicPr>
-          <p:cNvPr id="8" name="Image 1" descr="/Users/pop7/Library/CloudStorage/OneDrive-MonsterConnectCo.,Ltd/Lecture/KOSEN69 - software-security/slides/pptx/assets/logo-small.png">    </p:cNvPr>
+          <p:cNvPr id="11" name="Image 1" descr="/Users/pop7/Library/CloudStorage/OneDrive-MonsterConnectCo.,Ltd/Lecture/KOSEN69 - software-security/slides/pptx/assets/logo-small.png">    </p:cNvPr>
           <p:cNvPicPr>
             <a:picLocks noChangeAspect="1"/>
           </p:cNvPicPr>
@@ -3733,7 +4080,7 @@
                 <a:ea typeface="Arial" pitchFamily="34" charset="-122"/>
                 <a:cs typeface="Arial" pitchFamily="34" charset="-120"/>
               </a:rPr>
-              <a:t>Defenses that actually work</a:t>
+              <a:t>Upload → RCE (a classic chain) (cont.)</a:t>
             </a:r>
             <a:endParaRPr lang="en-US" sz="2600" dirty="0"/>
           </a:p>
@@ -3748,11 +4095,11 @@
         <p:spPr>
           <a:xfrm>
             <a:off x="457200" y="1325880"/>
-            <a:ext cx="8229600" cy="1828800"/>
+            <a:ext cx="8229600" cy="786384"/>
           </a:xfrm>
           <a:prstGeom prst="roundRect">
             <a:avLst>
-              <a:gd name="adj" fmla="val 4000"/>
+              <a:gd name="adj" fmla="val 9302"/>
             </a:avLst>
           </a:prstGeom>
           <a:solidFill>
@@ -3777,7 +4124,7 @@
         <p:spPr>
           <a:xfrm>
             <a:off x="731520" y="1435608"/>
-            <a:ext cx="7680960" cy="1609344"/>
+            <a:ext cx="7680960" cy="566928"/>
           </a:xfrm>
           <a:prstGeom prst="rect">
             <a:avLst/>
@@ -3786,7 +4133,9 @@
           <a:ln/>
         </p:spPr>
         <p:txBody>
-          <a:bodyPr wrap="square" lIns="0" tIns="0" rIns="0" bIns="0" rtlCol="0" anchor="t"/>
+          <a:bodyPr wrap="square" lIns="0" tIns="0" rIns="0" bIns="0" rtlCol="0" anchor="t">
+            <a:normAutofit/>
+          </a:bodyPr>
           <a:lstStyle/>
           <a:p>
             <a:pPr marL="342900" indent="-342900">
@@ -3805,91 +4154,7 @@
                 <a:ea typeface="Calibri" pitchFamily="34" charset="-122"/>
                 <a:cs typeface="Calibri" pitchFamily="34" charset="-120"/>
               </a:rPr>
-              <a:t>Parameterized queries / prepared statements (the fix for SQLi)</a:t>
-            </a:r>
-            <a:endParaRPr lang="en-US" sz="1400" dirty="0"/>
-          </a:p>
-          <a:p>
-            <a:pPr marL="342900" indent="-342900">
-              <a:spcAft>
-                <a:spcPts val="600"/>
-              </a:spcAft>
-              <a:buSzPct val="100000"/>
-              <a:buChar char="•"/>
-            </a:pPr>
-            <a:r>
-              <a:rPr lang="en-US" sz="1400" dirty="0">
-                <a:solidFill>
-                  <a:srgbClr val="1F2937"/>
-                </a:solidFill>
-                <a:latin typeface="Calibri" pitchFamily="34" charset="0"/>
-                <a:ea typeface="Calibri" pitchFamily="34" charset="-122"/>
-                <a:cs typeface="Calibri" pitchFamily="34" charset="-120"/>
-              </a:rPr>
-              <a:t>ORM with bound parameters</a:t>
-            </a:r>
-            <a:endParaRPr lang="en-US" sz="1400" dirty="0"/>
-          </a:p>
-          <a:p>
-            <a:pPr marL="342900" indent="-342900">
-              <a:spcAft>
-                <a:spcPts val="600"/>
-              </a:spcAft>
-              <a:buSzPct val="100000"/>
-              <a:buChar char="•"/>
-            </a:pPr>
-            <a:r>
-              <a:rPr lang="en-US" sz="1400" dirty="0">
-                <a:solidFill>
-                  <a:srgbClr val="1F2937"/>
-                </a:solidFill>
-                <a:latin typeface="Calibri" pitchFamily="34" charset="0"/>
-                <a:ea typeface="Calibri" pitchFamily="34" charset="-122"/>
-                <a:cs typeface="Calibri" pitchFamily="34" charset="-120"/>
-              </a:rPr>
-              <a:t>Allow-list input validation (type, length, format)</a:t>
-            </a:r>
-            <a:endParaRPr lang="en-US" sz="1400" dirty="0"/>
-          </a:p>
-          <a:p>
-            <a:pPr marL="342900" indent="-342900">
-              <a:spcAft>
-                <a:spcPts val="600"/>
-              </a:spcAft>
-              <a:buSzPct val="100000"/>
-              <a:buChar char="•"/>
-            </a:pPr>
-            <a:r>
-              <a:rPr lang="en-US" sz="1400" dirty="0">
-                <a:solidFill>
-                  <a:srgbClr val="1F2937"/>
-                </a:solidFill>
-                <a:latin typeface="Calibri" pitchFamily="34" charset="0"/>
-                <a:ea typeface="Calibri" pitchFamily="34" charset="-122"/>
-                <a:cs typeface="Calibri" pitchFamily="34" charset="-120"/>
-              </a:rPr>
-              <a:t>Avoid shells: use exec APIs with arg arrays, not string concat</a:t>
-            </a:r>
-            <a:endParaRPr lang="en-US" sz="1400" dirty="0"/>
-          </a:p>
-          <a:p>
-            <a:pPr marL="342900" indent="-342900">
-              <a:spcAft>
-                <a:spcPts val="600"/>
-              </a:spcAft>
-              <a:buSzPct val="100000"/>
-              <a:buChar char="•"/>
-            </a:pPr>
-            <a:r>
-              <a:rPr lang="en-US" sz="1400" dirty="0">
-                <a:solidFill>
-                  <a:srgbClr val="1F2937"/>
-                </a:solidFill>
-                <a:latin typeface="Calibri" pitchFamily="34" charset="0"/>
-                <a:ea typeface="Calibri" pitchFamily="34" charset="-122"/>
-                <a:cs typeface="Calibri" pitchFamily="34" charset="-120"/>
-              </a:rPr>
-              <a:t>Least-privilege DB accounts</a:t>
+              <a:t>Fix: validate file type via mime_content_type(), allow-list extensions, store uploads outside web root, no execute</a:t>
             </a:r>
             <a:endParaRPr lang="en-US" sz="1400" dirty="0"/>
           </a:p>
@@ -4074,7 +4339,7 @@
                 <a:ea typeface="Arial" pitchFamily="34" charset="-122"/>
                 <a:cs typeface="Arial" pitchFamily="34" charset="-120"/>
               </a:rPr>
-              <a:t>⚔️ Game — SQLi Boss Fight</a:t>
+              <a:t>CWE mapping</a:t>
             </a:r>
             <a:endParaRPr lang="en-US" sz="2600" dirty="0"/>
           </a:p>
@@ -4082,14 +4347,43 @@
       </p:sp>
       <p:sp>
         <p:nvSpPr>
-          <p:cNvPr id="5" name="Text 2"/>
-          <p:cNvSpPr/>
-          <p:nvPr/>
-        </p:nvSpPr>
-        <p:spPr>
-          <a:xfrm>
-            <a:off x="548640" y="1325880"/>
-            <a:ext cx="8046720" cy="548640"/>
+          <p:cNvPr id="5" name="Shape 2"/>
+          <p:cNvSpPr/>
+          <p:nvPr/>
+        </p:nvSpPr>
+        <p:spPr>
+          <a:xfrm>
+            <a:off x="457200" y="1325880"/>
+            <a:ext cx="8229600" cy="1408176"/>
+          </a:xfrm>
+          <a:prstGeom prst="roundRect">
+            <a:avLst>
+              <a:gd name="adj" fmla="val 5195"/>
+            </a:avLst>
+          </a:prstGeom>
+          <a:solidFill>
+            <a:srgbClr val="F1F5F9"/>
+          </a:solidFill>
+          <a:ln/>
+          <a:effectLst>
+            <a:outerShdw sx="100000" sy="100000" kx="0" ky="0" algn="bl" rotWithShape="0" blurRad="76200" dist="25400" dir="5400000">
+              <a:srgbClr val="000000">
+                <a:alpha val="12000"/>
+              </a:srgbClr>
+            </a:outerShdw>
+          </a:effectLst>
+        </p:spPr>
+      </p:sp>
+      <p:sp>
+        <p:nvSpPr>
+          <p:cNvPr id="6" name="Text 3"/>
+          <p:cNvSpPr/>
+          <p:nvPr/>
+        </p:nvSpPr>
+        <p:spPr>
+          <a:xfrm>
+            <a:off x="731520" y="1435608"/>
+            <a:ext cx="7680960" cy="1188720"/>
           </a:xfrm>
           <a:prstGeom prst="rect">
             <a:avLst/>
@@ -4098,11 +4392,17 @@
           <a:ln/>
         </p:spPr>
         <p:txBody>
-          <a:bodyPr wrap="square" lIns="0" tIns="0" rIns="0" bIns="0" rtlCol="0" anchor="t"/>
-          <a:lstStyle/>
-          <a:p>
-            <a:pPr indent="0" marL="0">
-              <a:buNone/>
+          <a:bodyPr wrap="square" lIns="0" tIns="0" rIns="0" bIns="0" rtlCol="0" anchor="t">
+            <a:normAutofit/>
+          </a:bodyPr>
+          <a:lstStyle/>
+          <a:p>
+            <a:pPr marL="342900" indent="-342900">
+              <a:spcAft>
+                <a:spcPts val="600"/>
+              </a:spcAft>
+              <a:buSzPct val="100000"/>
+              <a:buChar char="•"/>
             </a:pPr>
             <a:r>
               <a:rPr lang="en-US" sz="1400" dirty="0">
@@ -4113,97 +4413,20 @@
                 <a:ea typeface="Calibri" pitchFamily="34" charset="-122"/>
                 <a:cs typeface="Calibri" pitchFamily="34" charset="-120"/>
               </a:rPr>
-              <a:t>Tiered challenges in DVWA / Juice Shop — easy → "boss" (stacked filters).</a:t>
+              <a:t>CWE-89 — SQL injection</a:t>
             </a:r>
             <a:endParaRPr lang="en-US" sz="1400" dirty="0"/>
           </a:p>
-        </p:txBody>
-      </p:sp>
-      <p:sp>
-        <p:nvSpPr>
-          <p:cNvPr id="6" name="Shape 3"/>
-          <p:cNvSpPr/>
-          <p:nvPr/>
-        </p:nvSpPr>
-        <p:spPr>
-          <a:xfrm>
-            <a:off x="502920" y="1965960"/>
-            <a:ext cx="384048" cy="384048"/>
-          </a:xfrm>
-          <a:prstGeom prst="ellipse">
-            <a:avLst/>
-          </a:prstGeom>
-          <a:solidFill>
-            <a:srgbClr val="E35205"/>
-          </a:solidFill>
-          <a:ln/>
-        </p:spPr>
-      </p:sp>
-      <p:sp>
-        <p:nvSpPr>
-          <p:cNvPr id="7" name="Text 4"/>
-          <p:cNvSpPr/>
-          <p:nvPr/>
-        </p:nvSpPr>
-        <p:spPr>
-          <a:xfrm>
-            <a:off x="502920" y="1965960"/>
-            <a:ext cx="384048" cy="384048"/>
-          </a:xfrm>
-          <a:prstGeom prst="rect">
-            <a:avLst/>
-          </a:prstGeom>
-          <a:noFill/>
-          <a:ln/>
-        </p:spPr>
-        <p:txBody>
-          <a:bodyPr wrap="square" lIns="0" tIns="0" rIns="0" bIns="0" rtlCol="0" anchor="ctr"/>
-          <a:lstStyle/>
-          <a:p>
-            <a:pPr algn="ctr" indent="0" marL="0">
-              <a:buNone/>
-            </a:pPr>
-            <a:r>
-              <a:rPr lang="en-US" sz="1500" b="1" dirty="0">
-                <a:solidFill>
-                  <a:srgbClr val="0E1726"/>
-                </a:solidFill>
-                <a:latin typeface="Arial" pitchFamily="34" charset="0"/>
-                <a:ea typeface="Arial" pitchFamily="34" charset="-122"/>
-                <a:cs typeface="Arial" pitchFamily="34" charset="-120"/>
-              </a:rPr>
-              <a:t>1</a:t>
-            </a:r>
-            <a:endParaRPr lang="en-US" sz="1500" dirty="0"/>
-          </a:p>
-        </p:txBody>
-      </p:sp>
-      <p:sp>
-        <p:nvSpPr>
-          <p:cNvPr id="8" name="Text 5"/>
-          <p:cNvSpPr/>
-          <p:nvPr/>
-        </p:nvSpPr>
-        <p:spPr>
-          <a:xfrm>
-            <a:off x="1051560" y="1965960"/>
-            <a:ext cx="7589520" cy="384048"/>
-          </a:xfrm>
-          <a:prstGeom prst="rect">
-            <a:avLst/>
-          </a:prstGeom>
-          <a:noFill/>
-          <a:ln/>
-        </p:spPr>
-        <p:txBody>
-          <a:bodyPr wrap="square" lIns="0" tIns="0" rIns="0" bIns="0" rtlCol="0" anchor="ctr"/>
-          <a:lstStyle/>
-          <a:p>
-            <a:pPr indent="0" marL="0">
-              <a:buNone/>
-            </a:pPr>
-            <a:r>
-              <a:rPr lang="en-US" sz="1350" dirty="0">
+          <a:p>
+            <a:pPr marL="342900" indent="-342900">
+              <a:spcAft>
+                <a:spcPts val="600"/>
+              </a:spcAft>
+              <a:buSzPct val="100000"/>
+              <a:buChar char="•"/>
+            </a:pPr>
+            <a:r>
+              <a:rPr lang="en-US" sz="1400" dirty="0">
                 <a:solidFill>
                   <a:srgbClr val="1F2937"/>
                 </a:solidFill>
@@ -4211,97 +4434,20 @@
                 <a:ea typeface="Calibri" pitchFamily="34" charset="-122"/>
                 <a:cs typeface="Calibri" pitchFamily="34" charset="-120"/>
               </a:rPr>
-              <a:t>Clear each level → unlock a flag</a:t>
-            </a:r>
-            <a:endParaRPr lang="en-US" sz="1350" dirty="0"/>
-          </a:p>
-        </p:txBody>
-      </p:sp>
-      <p:sp>
-        <p:nvSpPr>
-          <p:cNvPr id="9" name="Shape 6"/>
-          <p:cNvSpPr/>
-          <p:nvPr/>
-        </p:nvSpPr>
-        <p:spPr>
-          <a:xfrm>
-            <a:off x="502920" y="2423160"/>
-            <a:ext cx="384048" cy="384048"/>
-          </a:xfrm>
-          <a:prstGeom prst="ellipse">
-            <a:avLst/>
-          </a:prstGeom>
-          <a:solidFill>
-            <a:srgbClr val="E35205"/>
-          </a:solidFill>
-          <a:ln/>
-        </p:spPr>
-      </p:sp>
-      <p:sp>
-        <p:nvSpPr>
-          <p:cNvPr id="10" name="Text 7"/>
-          <p:cNvSpPr/>
-          <p:nvPr/>
-        </p:nvSpPr>
-        <p:spPr>
-          <a:xfrm>
-            <a:off x="502920" y="2423160"/>
-            <a:ext cx="384048" cy="384048"/>
-          </a:xfrm>
-          <a:prstGeom prst="rect">
-            <a:avLst/>
-          </a:prstGeom>
-          <a:noFill/>
-          <a:ln/>
-        </p:spPr>
-        <p:txBody>
-          <a:bodyPr wrap="square" lIns="0" tIns="0" rIns="0" bIns="0" rtlCol="0" anchor="ctr"/>
-          <a:lstStyle/>
-          <a:p>
-            <a:pPr algn="ctr" indent="0" marL="0">
-              <a:buNone/>
-            </a:pPr>
-            <a:r>
-              <a:rPr lang="en-US" sz="1500" b="1" dirty="0">
-                <a:solidFill>
-                  <a:srgbClr val="0E1726"/>
-                </a:solidFill>
-                <a:latin typeface="Arial" pitchFamily="34" charset="0"/>
-                <a:ea typeface="Arial" pitchFamily="34" charset="-122"/>
-                <a:cs typeface="Arial" pitchFamily="34" charset="-120"/>
-              </a:rPr>
-              <a:t>2</a:t>
-            </a:r>
-            <a:endParaRPr lang="en-US" sz="1500" dirty="0"/>
-          </a:p>
-        </p:txBody>
-      </p:sp>
-      <p:sp>
-        <p:nvSpPr>
-          <p:cNvPr id="11" name="Text 8"/>
-          <p:cNvSpPr/>
-          <p:nvPr/>
-        </p:nvSpPr>
-        <p:spPr>
-          <a:xfrm>
-            <a:off x="1051560" y="2423160"/>
-            <a:ext cx="7589520" cy="384048"/>
-          </a:xfrm>
-          <a:prstGeom prst="rect">
-            <a:avLst/>
-          </a:prstGeom>
-          <a:noFill/>
-          <a:ln/>
-        </p:spPr>
-        <p:txBody>
-          <a:bodyPr wrap="square" lIns="0" tIns="0" rIns="0" bIns="0" rtlCol="0" anchor="ctr"/>
-          <a:lstStyle/>
-          <a:p>
-            <a:pPr indent="0" marL="0">
-              <a:buNone/>
-            </a:pPr>
-            <a:r>
-              <a:rPr lang="en-US" sz="1350" dirty="0">
+              <a:t>CWE-78 — OS command injection (CWE-77 is its general parent — cite CWE-78, the specific one)</a:t>
+            </a:r>
+            <a:endParaRPr lang="en-US" sz="1400" dirty="0"/>
+          </a:p>
+          <a:p>
+            <a:pPr marL="342900" indent="-342900">
+              <a:spcAft>
+                <a:spcPts val="600"/>
+              </a:spcAft>
+              <a:buSzPct val="100000"/>
+              <a:buChar char="•"/>
+            </a:pPr>
+            <a:r>
+              <a:rPr lang="en-US" sz="1400" dirty="0">
                 <a:solidFill>
                   <a:srgbClr val="1F2937"/>
                 </a:solidFill>
@@ -4309,81 +4455,22 @@
                 <a:ea typeface="Calibri" pitchFamily="34" charset="-122"/>
                 <a:cs typeface="Calibri" pitchFamily="34" charset="-120"/>
               </a:rPr>
-              <a:t>Boss = bypass a naive filter / WAF</a:t>
-            </a:r>
-            <a:endParaRPr lang="en-US" sz="1350" dirty="0"/>
-          </a:p>
-        </p:txBody>
-      </p:sp>
-      <p:sp>
-        <p:nvSpPr>
-          <p:cNvPr id="12" name="Shape 9"/>
-          <p:cNvSpPr/>
-          <p:nvPr/>
-        </p:nvSpPr>
-        <p:spPr>
-          <a:xfrm>
-            <a:off x="502920" y="2880360"/>
-            <a:ext cx="384048" cy="384048"/>
-          </a:xfrm>
-          <a:prstGeom prst="ellipse">
-            <a:avLst/>
-          </a:prstGeom>
-          <a:solidFill>
-            <a:srgbClr val="E35205"/>
-          </a:solidFill>
-          <a:ln/>
-        </p:spPr>
-      </p:sp>
-      <p:sp>
-        <p:nvSpPr>
-          <p:cNvPr id="13" name="Text 10"/>
-          <p:cNvSpPr/>
-          <p:nvPr/>
-        </p:nvSpPr>
-        <p:spPr>
-          <a:xfrm>
-            <a:off x="502920" y="2880360"/>
-            <a:ext cx="384048" cy="384048"/>
-          </a:xfrm>
-          <a:prstGeom prst="rect">
-            <a:avLst/>
-          </a:prstGeom>
-          <a:noFill/>
-          <a:ln/>
-        </p:spPr>
-        <p:txBody>
-          <a:bodyPr wrap="square" lIns="0" tIns="0" rIns="0" bIns="0" rtlCol="0" anchor="ctr"/>
-          <a:lstStyle/>
-          <a:p>
-            <a:pPr algn="ctr" indent="0" marL="0">
-              <a:buNone/>
-            </a:pPr>
-            <a:r>
-              <a:rPr lang="en-US" sz="1500" b="1" dirty="0">
-                <a:solidFill>
-                  <a:srgbClr val="0E1726"/>
-                </a:solidFill>
-                <a:latin typeface="Arial" pitchFamily="34" charset="0"/>
-                <a:ea typeface="Arial" pitchFamily="34" charset="-122"/>
-                <a:cs typeface="Arial" pitchFamily="34" charset="-120"/>
-              </a:rPr>
-              <a:t>3</a:t>
-            </a:r>
-            <a:endParaRPr lang="en-US" sz="1500" dirty="0"/>
-          </a:p>
-        </p:txBody>
-      </p:sp>
-      <p:sp>
-        <p:nvSpPr>
-          <p:cNvPr id="14" name="Text 11"/>
-          <p:cNvSpPr/>
-          <p:nvPr/>
-        </p:nvSpPr>
-        <p:spPr>
-          <a:xfrm>
-            <a:off x="1051560" y="2880360"/>
-            <a:ext cx="7589520" cy="384048"/>
+              <a:t>CWE-434 — unrestricted upload of a dangerous file type</a:t>
+            </a:r>
+            <a:endParaRPr lang="en-US" sz="1400" dirty="0"/>
+          </a:p>
+        </p:txBody>
+      </p:sp>
+      <p:sp>
+        <p:nvSpPr>
+          <p:cNvPr id="7" name="Text 4"/>
+          <p:cNvSpPr/>
+          <p:nvPr/>
+        </p:nvSpPr>
+        <p:spPr>
+          <a:xfrm>
+            <a:off x="457200" y="4800600"/>
+            <a:ext cx="6949440" cy="274320"/>
           </a:xfrm>
           <a:prstGeom prst="rect">
             <a:avLst/>
@@ -4399,53 +4486,14 @@
               <a:buNone/>
             </a:pPr>
             <a:r>
-              <a:rPr lang="en-US" sz="1350" dirty="0">
-                <a:solidFill>
-                  <a:srgbClr val="1F2937"/>
+              <a:rPr lang="en-US" sz="900" dirty="0">
+                <a:solidFill>
+                  <a:srgbClr val="64748B"/>
                 </a:solidFill>
                 <a:latin typeface="Calibri" pitchFamily="34" charset="0"/>
                 <a:ea typeface="Calibri" pitchFamily="34" charset="-122"/>
                 <a:cs typeface="Calibri" pitchFamily="34" charset="-120"/>
               </a:rPr>
-              <a:t>Round 2: patch endpoints with prepared statements + validation</a:t>
-            </a:r>
-            <a:endParaRPr lang="en-US" sz="1350" dirty="0"/>
-          </a:p>
-        </p:txBody>
-      </p:sp>
-      <p:sp>
-        <p:nvSpPr>
-          <p:cNvPr id="15" name="Text 12"/>
-          <p:cNvSpPr/>
-          <p:nvPr/>
-        </p:nvSpPr>
-        <p:spPr>
-          <a:xfrm>
-            <a:off x="457200" y="4800600"/>
-            <a:ext cx="6949440" cy="274320"/>
-          </a:xfrm>
-          <a:prstGeom prst="rect">
-            <a:avLst/>
-          </a:prstGeom>
-          <a:noFill/>
-          <a:ln/>
-        </p:spPr>
-        <p:txBody>
-          <a:bodyPr wrap="square" lIns="0" tIns="0" rIns="0" bIns="0" rtlCol="0" anchor="ctr"/>
-          <a:lstStyle/>
-          <a:p>
-            <a:pPr indent="0" marL="0">
-              <a:buNone/>
-            </a:pPr>
-            <a:r>
-              <a:rPr lang="en-US" sz="900" dirty="0">
-                <a:solidFill>
-                  <a:srgbClr val="64748B"/>
-                </a:solidFill>
-                <a:latin typeface="Calibri" pitchFamily="34" charset="0"/>
-                <a:ea typeface="Calibri" pitchFamily="34" charset="-122"/>
-                <a:cs typeface="Calibri" pitchFamily="34" charset="-120"/>
-              </a:rPr>
               <a:t>Software Security · Week 4</a:t>
             </a:r>
             <a:endParaRPr lang="en-US" sz="900" dirty="0"/>
@@ -4454,7 +4502,7 @@
       </p:sp>
       <p:pic>
         <p:nvPicPr>
-          <p:cNvPr id="16" name="Image 1" descr="/Users/pop7/Library/CloudStorage/OneDrive-MonsterConnectCo.,Ltd/Lecture/KOSEN69 - software-security/slides/pptx/assets/logo-small.png">    </p:cNvPr>
+          <p:cNvPr id="8" name="Image 1" descr="/Users/pop7/Library/CloudStorage/OneDrive-MonsterConnectCo.,Ltd/Lecture/KOSEN69 - software-security/slides/pptx/assets/logo-small.png">    </p:cNvPr>
           <p:cNvPicPr>
             <a:picLocks noChangeAspect="1"/>
           </p:cNvPicPr>
@@ -4592,7 +4640,7 @@
                 <a:ea typeface="Arial" pitchFamily="34" charset="-122"/>
                 <a:cs typeface="Arial" pitchFamily="34" charset="-120"/>
               </a:rPr>
-              <a:t>Lab steps</a:t>
+              <a:t>Defenses that actually work</a:t>
             </a:r>
             <a:endParaRPr lang="en-US" sz="2600" dirty="0"/>
           </a:p>
@@ -4607,17 +4655,24 @@
         <p:spPr>
           <a:xfrm>
             <a:off x="457200" y="1325880"/>
-            <a:ext cx="8229600" cy="822960"/>
+            <a:ext cx="8229600" cy="1828800"/>
           </a:xfrm>
           <a:prstGeom prst="roundRect">
             <a:avLst>
-              <a:gd name="adj" fmla="val 8889"/>
+              <a:gd name="adj" fmla="val 4000"/>
             </a:avLst>
           </a:prstGeom>
           <a:solidFill>
-            <a:srgbClr val="E8EDF3"/>
+            <a:srgbClr val="F1F5F9"/>
           </a:solidFill>
           <a:ln/>
+          <a:effectLst>
+            <a:outerShdw sx="100000" sy="100000" kx="0" ky="0" algn="bl" rotWithShape="0" blurRad="76200" dist="25400" dir="5400000">
+              <a:srgbClr val="000000">
+                <a:alpha val="12000"/>
+              </a:srgbClr>
+            </a:outerShdw>
+          </a:effectLst>
         </p:spPr>
       </p:sp>
       <p:sp>
@@ -4628,8 +4683,8 @@
         </p:nvSpPr>
         <p:spPr>
           <a:xfrm>
-            <a:off x="731520" y="1325880"/>
-            <a:ext cx="7680960" cy="822960"/>
+            <a:off x="731520" y="1435608"/>
+            <a:ext cx="7680960" cy="1609344"/>
           </a:xfrm>
           <a:prstGeom prst="rect">
             <a:avLst/>
@@ -4638,178 +4693,41 @@
           <a:ln/>
         </p:spPr>
         <p:txBody>
-          <a:bodyPr wrap="square" lIns="0" tIns="0" rIns="0" bIns="0" rtlCol="0" anchor="ctr"/>
-          <a:lstStyle/>
-          <a:p>
-            <a:pPr indent="0" marL="0">
-              <a:buNone/>
-            </a:pPr>
-            <a:r>
-              <a:rPr lang="en-US" sz="1400" i="1" dirty="0">
-                <a:solidFill>
-                  <a:srgbClr val="E35205"/>
+          <a:bodyPr wrap="square" lIns="0" tIns="0" rIns="0" bIns="0" rtlCol="0" anchor="t">
+            <a:normAutofit/>
+          </a:bodyPr>
+          <a:lstStyle/>
+          <a:p>
+            <a:pPr marL="342900" indent="-342900">
+              <a:spcAft>
+                <a:spcPts val="600"/>
+              </a:spcAft>
+              <a:buSzPct val="100000"/>
+              <a:buChar char="•"/>
+            </a:pPr>
+            <a:r>
+              <a:rPr lang="en-US" sz="1400" dirty="0">
+                <a:solidFill>
+                  <a:srgbClr val="1F2937"/>
                 </a:solidFill>
                 <a:latin typeface="Calibri" pitchFamily="34" charset="0"/>
                 <a:ea typeface="Calibri" pitchFamily="34" charset="-122"/>
                 <a:cs typeface="Calibri" pitchFamily="34" charset="-120"/>
               </a:rPr>
-              <a:t>📋 Worksheet 4 — labs/week04-injection/worksheet.md (Part 3) · kickoff: docker compose up → http://localhost:8080</a:t>
+              <a:t>Parameterized queries / prepared statements (the fix for SQLi)</a:t>
             </a:r>
             <a:endParaRPr lang="en-US" sz="1400" dirty="0"/>
           </a:p>
-        </p:txBody>
-      </p:sp>
-      <p:sp>
-        <p:nvSpPr>
-          <p:cNvPr id="7" name="Shape 4"/>
-          <p:cNvSpPr/>
-          <p:nvPr/>
-        </p:nvSpPr>
-        <p:spPr>
-          <a:xfrm>
-            <a:off x="457200" y="2313432"/>
-            <a:ext cx="8229600" cy="530352"/>
-          </a:xfrm>
-          <a:prstGeom prst="roundRect">
-            <a:avLst>
-              <a:gd name="adj" fmla="val 10345"/>
-            </a:avLst>
-          </a:prstGeom>
-          <a:solidFill>
-            <a:srgbClr val="0A1020"/>
-          </a:solidFill>
-          <a:ln w="12700">
-            <a:solidFill>
-              <a:srgbClr val="E8EDF3"/>
-            </a:solidFill>
-            <a:prstDash val="solid"/>
-          </a:ln>
-        </p:spPr>
-      </p:sp>
-      <p:sp>
-        <p:nvSpPr>
-          <p:cNvPr id="8" name="Text 5"/>
-          <p:cNvSpPr/>
-          <p:nvPr/>
-        </p:nvSpPr>
-        <p:spPr>
-          <a:xfrm>
-            <a:off x="640080" y="2386584"/>
-            <a:ext cx="7863840" cy="384048"/>
-          </a:xfrm>
-          <a:prstGeom prst="rect">
-            <a:avLst/>
-          </a:prstGeom>
-          <a:noFill/>
-          <a:ln/>
-        </p:spPr>
-        <p:txBody>
-          <a:bodyPr wrap="square" lIns="0" tIns="0" rIns="0" bIns="0" rtlCol="0" anchor="t"/>
-          <a:lstStyle/>
-          <a:p>
-            <a:pPr indent="0" marL="0">
-              <a:buNone/>
-            </a:pPr>
-            <a:r>
-              <a:rPr lang="en-US" sz="1150" dirty="0">
-                <a:solidFill>
-                  <a:srgbClr val="9FE7D6"/>
-                </a:solidFill>
-                <a:latin typeface="Courier New" pitchFamily="34" charset="0"/>
-                <a:ea typeface="Courier New" pitchFamily="34" charset="-122"/>
-                <a:cs typeface="Courier New" pitchFamily="34" charset="-120"/>
-              </a:rPr>
-              <a:t>docker run --rm -p 80:80 vulnerables/web-dvwa   # optional extra target (or Juice Shop)</a:t>
-            </a:r>
-            <a:endParaRPr lang="en-US" sz="1150" dirty="0"/>
-          </a:p>
-        </p:txBody>
-      </p:sp>
-      <p:sp>
-        <p:nvSpPr>
-          <p:cNvPr id="9" name="Shape 6"/>
-          <p:cNvSpPr/>
-          <p:nvPr/>
-        </p:nvSpPr>
-        <p:spPr>
-          <a:xfrm>
-            <a:off x="502920" y="3008376"/>
-            <a:ext cx="384048" cy="384048"/>
-          </a:xfrm>
-          <a:prstGeom prst="ellipse">
-            <a:avLst/>
-          </a:prstGeom>
-          <a:solidFill>
-            <a:srgbClr val="E35205"/>
-          </a:solidFill>
-          <a:ln/>
-        </p:spPr>
-      </p:sp>
-      <p:sp>
-        <p:nvSpPr>
-          <p:cNvPr id="10" name="Text 7"/>
-          <p:cNvSpPr/>
-          <p:nvPr/>
-        </p:nvSpPr>
-        <p:spPr>
-          <a:xfrm>
-            <a:off x="502920" y="3008376"/>
-            <a:ext cx="384048" cy="384048"/>
-          </a:xfrm>
-          <a:prstGeom prst="rect">
-            <a:avLst/>
-          </a:prstGeom>
-          <a:noFill/>
-          <a:ln/>
-        </p:spPr>
-        <p:txBody>
-          <a:bodyPr wrap="square" lIns="0" tIns="0" rIns="0" bIns="0" rtlCol="0" anchor="ctr"/>
-          <a:lstStyle/>
-          <a:p>
-            <a:pPr algn="ctr" indent="0" marL="0">
-              <a:buNone/>
-            </a:pPr>
-            <a:r>
-              <a:rPr lang="en-US" sz="1500" b="1" dirty="0">
-                <a:solidFill>
-                  <a:srgbClr val="0E1726"/>
-                </a:solidFill>
-                <a:latin typeface="Arial" pitchFamily="34" charset="0"/>
-                <a:ea typeface="Arial" pitchFamily="34" charset="-122"/>
-                <a:cs typeface="Arial" pitchFamily="34" charset="-120"/>
-              </a:rPr>
-              <a:t>1</a:t>
-            </a:r>
-            <a:endParaRPr lang="en-US" sz="1500" dirty="0"/>
-          </a:p>
-        </p:txBody>
-      </p:sp>
-      <p:sp>
-        <p:nvSpPr>
-          <p:cNvPr id="11" name="Text 8"/>
-          <p:cNvSpPr/>
-          <p:nvPr/>
-        </p:nvSpPr>
-        <p:spPr>
-          <a:xfrm>
-            <a:off x="1051560" y="3008376"/>
-            <a:ext cx="7589520" cy="384048"/>
-          </a:xfrm>
-          <a:prstGeom prst="rect">
-            <a:avLst/>
-          </a:prstGeom>
-          <a:noFill/>
-          <a:ln/>
-        </p:spPr>
-        <p:txBody>
-          <a:bodyPr wrap="square" lIns="0" tIns="0" rIns="0" bIns="0" rtlCol="0" anchor="ctr"/>
-          <a:lstStyle/>
-          <a:p>
-            <a:pPr indent="0" marL="0">
-              <a:buNone/>
-            </a:pPr>
-            <a:r>
-              <a:rPr lang="en-US" sz="1350" dirty="0">
+          <a:p>
+            <a:pPr marL="342900" indent="-342900">
+              <a:spcAft>
+                <a:spcPts val="600"/>
+              </a:spcAft>
+              <a:buSzPct val="100000"/>
+              <a:buChar char="•"/>
+            </a:pPr>
+            <a:r>
+              <a:rPr lang="en-US" sz="1400" dirty="0">
                 <a:solidFill>
                   <a:srgbClr val="1F2937"/>
                 </a:solidFill>
@@ -4817,97 +4735,20 @@
                 <a:ea typeface="Calibri" pitchFamily="34" charset="-122"/>
                 <a:cs typeface="Calibri" pitchFamily="34" charset="-120"/>
               </a:rPr>
-              <a:t>Find an injectable parameter</a:t>
-            </a:r>
-            <a:endParaRPr lang="en-US" sz="1350" dirty="0"/>
-          </a:p>
-        </p:txBody>
-      </p:sp>
-      <p:sp>
-        <p:nvSpPr>
-          <p:cNvPr id="12" name="Shape 9"/>
-          <p:cNvSpPr/>
-          <p:nvPr/>
-        </p:nvSpPr>
-        <p:spPr>
-          <a:xfrm>
-            <a:off x="502920" y="3465576"/>
-            <a:ext cx="384048" cy="384048"/>
-          </a:xfrm>
-          <a:prstGeom prst="ellipse">
-            <a:avLst/>
-          </a:prstGeom>
-          <a:solidFill>
-            <a:srgbClr val="E35205"/>
-          </a:solidFill>
-          <a:ln/>
-        </p:spPr>
-      </p:sp>
-      <p:sp>
-        <p:nvSpPr>
-          <p:cNvPr id="13" name="Text 10"/>
-          <p:cNvSpPr/>
-          <p:nvPr/>
-        </p:nvSpPr>
-        <p:spPr>
-          <a:xfrm>
-            <a:off x="502920" y="3465576"/>
-            <a:ext cx="384048" cy="384048"/>
-          </a:xfrm>
-          <a:prstGeom prst="rect">
-            <a:avLst/>
-          </a:prstGeom>
-          <a:noFill/>
-          <a:ln/>
-        </p:spPr>
-        <p:txBody>
-          <a:bodyPr wrap="square" lIns="0" tIns="0" rIns="0" bIns="0" rtlCol="0" anchor="ctr"/>
-          <a:lstStyle/>
-          <a:p>
-            <a:pPr algn="ctr" indent="0" marL="0">
-              <a:buNone/>
-            </a:pPr>
-            <a:r>
-              <a:rPr lang="en-US" sz="1500" b="1" dirty="0">
-                <a:solidFill>
-                  <a:srgbClr val="0E1726"/>
-                </a:solidFill>
-                <a:latin typeface="Arial" pitchFamily="34" charset="0"/>
-                <a:ea typeface="Arial" pitchFamily="34" charset="-122"/>
-                <a:cs typeface="Arial" pitchFamily="34" charset="-120"/>
-              </a:rPr>
-              <a:t>2</a:t>
-            </a:r>
-            <a:endParaRPr lang="en-US" sz="1500" dirty="0"/>
-          </a:p>
-        </p:txBody>
-      </p:sp>
-      <p:sp>
-        <p:nvSpPr>
-          <p:cNvPr id="14" name="Text 11"/>
-          <p:cNvSpPr/>
-          <p:nvPr/>
-        </p:nvSpPr>
-        <p:spPr>
-          <a:xfrm>
-            <a:off x="1051560" y="3465576"/>
-            <a:ext cx="7589520" cy="384048"/>
-          </a:xfrm>
-          <a:prstGeom prst="rect">
-            <a:avLst/>
-          </a:prstGeom>
-          <a:noFill/>
-          <a:ln/>
-        </p:spPr>
-        <p:txBody>
-          <a:bodyPr wrap="square" lIns="0" tIns="0" rIns="0" bIns="0" rtlCol="0" anchor="ctr"/>
-          <a:lstStyle/>
-          <a:p>
-            <a:pPr indent="0" marL="0">
-              <a:buNone/>
-            </a:pPr>
-            <a:r>
-              <a:rPr lang="en-US" sz="1350" dirty="0">
+              <a:t>ORM with bound parameters</a:t>
+            </a:r>
+            <a:endParaRPr lang="en-US" sz="1400" dirty="0"/>
+          </a:p>
+          <a:p>
+            <a:pPr marL="342900" indent="-342900">
+              <a:spcAft>
+                <a:spcPts val="600"/>
+              </a:spcAft>
+              <a:buSzPct val="100000"/>
+              <a:buChar char="•"/>
+            </a:pPr>
+            <a:r>
+              <a:rPr lang="en-US" sz="1400" dirty="0">
                 <a:solidFill>
                   <a:srgbClr val="1F2937"/>
                 </a:solidFill>
@@ -4915,97 +4756,20 @@
                 <a:ea typeface="Calibri" pitchFamily="34" charset="-122"/>
                 <a:cs typeface="Calibri" pitchFamily="34" charset="-120"/>
               </a:rPr>
-              <a:t>Extract data (UNION / blind)</a:t>
-            </a:r>
-            <a:endParaRPr lang="en-US" sz="1350" dirty="0"/>
-          </a:p>
-        </p:txBody>
-      </p:sp>
-      <p:sp>
-        <p:nvSpPr>
-          <p:cNvPr id="15" name="Shape 12"/>
-          <p:cNvSpPr/>
-          <p:nvPr/>
-        </p:nvSpPr>
-        <p:spPr>
-          <a:xfrm>
-            <a:off x="502920" y="3922776"/>
-            <a:ext cx="384048" cy="384048"/>
-          </a:xfrm>
-          <a:prstGeom prst="ellipse">
-            <a:avLst/>
-          </a:prstGeom>
-          <a:solidFill>
-            <a:srgbClr val="E35205"/>
-          </a:solidFill>
-          <a:ln/>
-        </p:spPr>
-      </p:sp>
-      <p:sp>
-        <p:nvSpPr>
-          <p:cNvPr id="16" name="Text 13"/>
-          <p:cNvSpPr/>
-          <p:nvPr/>
-        </p:nvSpPr>
-        <p:spPr>
-          <a:xfrm>
-            <a:off x="502920" y="3922776"/>
-            <a:ext cx="384048" cy="384048"/>
-          </a:xfrm>
-          <a:prstGeom prst="rect">
-            <a:avLst/>
-          </a:prstGeom>
-          <a:noFill/>
-          <a:ln/>
-        </p:spPr>
-        <p:txBody>
-          <a:bodyPr wrap="square" lIns="0" tIns="0" rIns="0" bIns="0" rtlCol="0" anchor="ctr"/>
-          <a:lstStyle/>
-          <a:p>
-            <a:pPr algn="ctr" indent="0" marL="0">
-              <a:buNone/>
-            </a:pPr>
-            <a:r>
-              <a:rPr lang="en-US" sz="1500" b="1" dirty="0">
-                <a:solidFill>
-                  <a:srgbClr val="0E1726"/>
-                </a:solidFill>
-                <a:latin typeface="Arial" pitchFamily="34" charset="0"/>
-                <a:ea typeface="Arial" pitchFamily="34" charset="-122"/>
-                <a:cs typeface="Arial" pitchFamily="34" charset="-120"/>
-              </a:rPr>
-              <a:t>3</a:t>
-            </a:r>
-            <a:endParaRPr lang="en-US" sz="1500" dirty="0"/>
-          </a:p>
-        </p:txBody>
-      </p:sp>
-      <p:sp>
-        <p:nvSpPr>
-          <p:cNvPr id="17" name="Text 14"/>
-          <p:cNvSpPr/>
-          <p:nvPr/>
-        </p:nvSpPr>
-        <p:spPr>
-          <a:xfrm>
-            <a:off x="1051560" y="3922776"/>
-            <a:ext cx="7589520" cy="384048"/>
-          </a:xfrm>
-          <a:prstGeom prst="rect">
-            <a:avLst/>
-          </a:prstGeom>
-          <a:noFill/>
-          <a:ln/>
-        </p:spPr>
-        <p:txBody>
-          <a:bodyPr wrap="square" lIns="0" tIns="0" rIns="0" bIns="0" rtlCol="0" anchor="ctr"/>
-          <a:lstStyle/>
-          <a:p>
-            <a:pPr indent="0" marL="0">
-              <a:buNone/>
-            </a:pPr>
-            <a:r>
-              <a:rPr lang="en-US" sz="1350" dirty="0">
+              <a:t>Allow-list input validation (type, length, format)</a:t>
+            </a:r>
+            <a:endParaRPr lang="en-US" sz="1400" dirty="0"/>
+          </a:p>
+          <a:p>
+            <a:pPr marL="342900" indent="-342900">
+              <a:spcAft>
+                <a:spcPts val="600"/>
+              </a:spcAft>
+              <a:buSzPct val="100000"/>
+              <a:buChar char="•"/>
+            </a:pPr>
+            <a:r>
+              <a:rPr lang="en-US" sz="1400" dirty="0">
                 <a:solidFill>
                   <a:srgbClr val="1F2937"/>
                 </a:solidFill>
@@ -5013,45 +4777,66 @@
                 <a:ea typeface="Calibri" pitchFamily="34" charset="-122"/>
                 <a:cs typeface="Calibri" pitchFamily="34" charset="-120"/>
               </a:rPr>
-              <a:t>Achieve command injection where present</a:t>
-            </a:r>
-            <a:endParaRPr lang="en-US" sz="1350" dirty="0"/>
-          </a:p>
-        </p:txBody>
-      </p:sp>
-      <p:sp>
-        <p:nvSpPr>
-          <p:cNvPr id="18" name="Text 15"/>
-          <p:cNvSpPr/>
-          <p:nvPr/>
-        </p:nvSpPr>
-        <p:spPr>
-          <a:xfrm>
-            <a:off x="457200" y="4800600"/>
-            <a:ext cx="6949440" cy="274320"/>
-          </a:xfrm>
-          <a:prstGeom prst="rect">
-            <a:avLst/>
-          </a:prstGeom>
-          <a:noFill/>
-          <a:ln/>
-        </p:spPr>
-        <p:txBody>
-          <a:bodyPr wrap="square" lIns="0" tIns="0" rIns="0" bIns="0" rtlCol="0" anchor="ctr"/>
-          <a:lstStyle/>
-          <a:p>
-            <a:pPr indent="0" marL="0">
-              <a:buNone/>
-            </a:pPr>
-            <a:r>
-              <a:rPr lang="en-US" sz="900" dirty="0">
-                <a:solidFill>
-                  <a:srgbClr val="64748B"/>
+              <a:t>Avoid shells: use exec APIs with arg arrays, not string concat</a:t>
+            </a:r>
+            <a:endParaRPr lang="en-US" sz="1400" dirty="0"/>
+          </a:p>
+          <a:p>
+            <a:pPr marL="342900" indent="-342900">
+              <a:spcAft>
+                <a:spcPts val="600"/>
+              </a:spcAft>
+              <a:buSzPct val="100000"/>
+              <a:buChar char="•"/>
+            </a:pPr>
+            <a:r>
+              <a:rPr lang="en-US" sz="1400" dirty="0">
+                <a:solidFill>
+                  <a:srgbClr val="1F2937"/>
                 </a:solidFill>
                 <a:latin typeface="Calibri" pitchFamily="34" charset="0"/>
                 <a:ea typeface="Calibri" pitchFamily="34" charset="-122"/>
                 <a:cs typeface="Calibri" pitchFamily="34" charset="-120"/>
               </a:rPr>
+              <a:t>Least-privilege DB accounts</a:t>
+            </a:r>
+            <a:endParaRPr lang="en-US" sz="1400" dirty="0"/>
+          </a:p>
+        </p:txBody>
+      </p:sp>
+      <p:sp>
+        <p:nvSpPr>
+          <p:cNvPr id="7" name="Text 4"/>
+          <p:cNvSpPr/>
+          <p:nvPr/>
+        </p:nvSpPr>
+        <p:spPr>
+          <a:xfrm>
+            <a:off x="457200" y="4800600"/>
+            <a:ext cx="6949440" cy="274320"/>
+          </a:xfrm>
+          <a:prstGeom prst="rect">
+            <a:avLst/>
+          </a:prstGeom>
+          <a:noFill/>
+          <a:ln/>
+        </p:spPr>
+        <p:txBody>
+          <a:bodyPr wrap="square" lIns="0" tIns="0" rIns="0" bIns="0" rtlCol="0" anchor="ctr"/>
+          <a:lstStyle/>
+          <a:p>
+            <a:pPr indent="0" marL="0">
+              <a:buNone/>
+            </a:pPr>
+            <a:r>
+              <a:rPr lang="en-US" sz="900" dirty="0">
+                <a:solidFill>
+                  <a:srgbClr val="64748B"/>
+                </a:solidFill>
+                <a:latin typeface="Calibri" pitchFamily="34" charset="0"/>
+                <a:ea typeface="Calibri" pitchFamily="34" charset="-122"/>
+                <a:cs typeface="Calibri" pitchFamily="34" charset="-120"/>
+              </a:rPr>
               <a:t>Software Security · Week 4</a:t>
             </a:r>
             <a:endParaRPr lang="en-US" sz="900" dirty="0"/>
@@ -5060,7 +4845,7 @@
       </p:sp>
       <p:pic>
         <p:nvPicPr>
-          <p:cNvPr id="19" name="Image 1" descr="/Users/pop7/Library/CloudStorage/OneDrive-MonsterConnectCo.,Ltd/Lecture/KOSEN69 - software-security/slides/pptx/assets/logo-small.png">    </p:cNvPr>
+          <p:cNvPr id="8" name="Image 1" descr="/Users/pop7/Library/CloudStorage/OneDrive-MonsterConnectCo.,Ltd/Lecture/KOSEN69 - software-security/slides/pptx/assets/logo-small.png">    </p:cNvPr>
           <p:cNvPicPr>
             <a:picLocks noChangeAspect="1"/>
           </p:cNvPicPr>
@@ -5198,7 +4983,7 @@
                 <a:ea typeface="Arial" pitchFamily="34" charset="-122"/>
                 <a:cs typeface="Arial" pitchFamily="34" charset="-120"/>
               </a:rPr>
-              <a:t>Deliverable</a:t>
+              <a:t>⚔️ Game — SQLi Boss Fight</a:t>
             </a:r>
             <a:endParaRPr lang="en-US" sz="2600" dirty="0"/>
           </a:p>
@@ -5206,43 +4991,14 @@
       </p:sp>
       <p:sp>
         <p:nvSpPr>
-          <p:cNvPr id="5" name="Shape 2"/>
-          <p:cNvSpPr/>
-          <p:nvPr/>
-        </p:nvSpPr>
-        <p:spPr>
-          <a:xfrm>
-            <a:off x="457200" y="1325880"/>
-            <a:ext cx="8229600" cy="1517904"/>
-          </a:xfrm>
-          <a:prstGeom prst="roundRect">
-            <a:avLst>
-              <a:gd name="adj" fmla="val 4819"/>
-            </a:avLst>
-          </a:prstGeom>
-          <a:solidFill>
-            <a:srgbClr val="F1F5F9"/>
-          </a:solidFill>
-          <a:ln/>
-          <a:effectLst>
-            <a:outerShdw sx="100000" sy="100000" kx="0" ky="0" algn="bl" rotWithShape="0" blurRad="76200" dist="25400" dir="5400000">
-              <a:srgbClr val="000000">
-                <a:alpha val="12000"/>
-              </a:srgbClr>
-            </a:outerShdw>
-          </a:effectLst>
-        </p:spPr>
-      </p:sp>
-      <p:sp>
-        <p:nvSpPr>
-          <p:cNvPr id="6" name="Text 3"/>
-          <p:cNvSpPr/>
-          <p:nvPr/>
-        </p:nvSpPr>
-        <p:spPr>
-          <a:xfrm>
-            <a:off x="731520" y="1435608"/>
-            <a:ext cx="7680960" cy="1298448"/>
+          <p:cNvPr id="5" name="Text 2"/>
+          <p:cNvSpPr/>
+          <p:nvPr/>
+        </p:nvSpPr>
+        <p:spPr>
+          <a:xfrm>
+            <a:off x="548640" y="1325880"/>
+            <a:ext cx="8046720" cy="548640"/>
           </a:xfrm>
           <a:prstGeom prst="rect">
             <a:avLst/>
@@ -5251,15 +5007,13 @@
           <a:ln/>
         </p:spPr>
         <p:txBody>
-          <a:bodyPr wrap="square" lIns="0" tIns="0" rIns="0" bIns="0" rtlCol="0" anchor="t"/>
-          <a:lstStyle/>
-          <a:p>
-            <a:pPr marL="342900" indent="-342900">
-              <a:spcAft>
-                <a:spcPts val="600"/>
-              </a:spcAft>
-              <a:buSzPct val="100000"/>
-              <a:buChar char="•"/>
+          <a:bodyPr wrap="square" lIns="0" tIns="0" rIns="0" bIns="0" rtlCol="0" anchor="t">
+            <a:normAutofit/>
+          </a:bodyPr>
+          <a:lstStyle/>
+          <a:p>
+            <a:pPr indent="0" marL="0">
+              <a:buNone/>
             </a:pPr>
             <a:r>
               <a:rPr lang="en-US" sz="1400" dirty="0">
@@ -5270,20 +5024,99 @@
                 <a:ea typeface="Calibri" pitchFamily="34" charset="-122"/>
                 <a:cs typeface="Calibri" pitchFamily="34" charset="-120"/>
               </a:rPr>
-              <a:t>Findings: each injection point + payload + impact (CWE-mapped)</a:t>
+              <a:t>Four hits against this week's own app — no filters to bypass, the app has none:</a:t>
             </a:r>
             <a:endParaRPr lang="en-US" sz="1400" dirty="0"/>
           </a:p>
-          <a:p>
-            <a:pPr marL="342900" indent="-342900">
-              <a:spcAft>
-                <a:spcPts val="600"/>
-              </a:spcAft>
-              <a:buSzPct val="100000"/>
-              <a:buChar char="•"/>
-            </a:pPr>
-            <a:r>
-              <a:rPr lang="en-US" sz="1400" dirty="0">
+        </p:txBody>
+      </p:sp>
+      <p:sp>
+        <p:nvSpPr>
+          <p:cNvPr id="6" name="Shape 3"/>
+          <p:cNvSpPr/>
+          <p:nvPr/>
+        </p:nvSpPr>
+        <p:spPr>
+          <a:xfrm>
+            <a:off x="502920" y="1965960"/>
+            <a:ext cx="384048" cy="384048"/>
+          </a:xfrm>
+          <a:prstGeom prst="ellipse">
+            <a:avLst/>
+          </a:prstGeom>
+          <a:solidFill>
+            <a:srgbClr val="E35205"/>
+          </a:solidFill>
+          <a:ln/>
+        </p:spPr>
+      </p:sp>
+      <p:sp>
+        <p:nvSpPr>
+          <p:cNvPr id="7" name="Text 4"/>
+          <p:cNvSpPr/>
+          <p:nvPr/>
+        </p:nvSpPr>
+        <p:spPr>
+          <a:xfrm>
+            <a:off x="502920" y="1965960"/>
+            <a:ext cx="384048" cy="384048"/>
+          </a:xfrm>
+          <a:prstGeom prst="rect">
+            <a:avLst/>
+          </a:prstGeom>
+          <a:noFill/>
+          <a:ln/>
+        </p:spPr>
+        <p:txBody>
+          <a:bodyPr wrap="square" lIns="0" tIns="0" rIns="0" bIns="0" rtlCol="0" anchor="ctr"/>
+          <a:lstStyle/>
+          <a:p>
+            <a:pPr algn="ctr" indent="0" marL="0">
+              <a:buNone/>
+            </a:pPr>
+            <a:r>
+              <a:rPr lang="en-US" sz="1500" b="1" dirty="0">
+                <a:solidFill>
+                  <a:srgbClr val="0E1726"/>
+                </a:solidFill>
+                <a:latin typeface="Arial" pitchFamily="34" charset="0"/>
+                <a:ea typeface="Arial" pitchFamily="34" charset="-122"/>
+                <a:cs typeface="Arial" pitchFamily="34" charset="-120"/>
+              </a:rPr>
+              <a:t>1</a:t>
+            </a:r>
+            <a:endParaRPr lang="en-US" sz="1500" dirty="0"/>
+          </a:p>
+        </p:txBody>
+      </p:sp>
+      <p:sp>
+        <p:nvSpPr>
+          <p:cNvPr id="8" name="Text 5"/>
+          <p:cNvSpPr/>
+          <p:nvPr/>
+        </p:nvSpPr>
+        <p:spPr>
+          <a:xfrm>
+            <a:off x="1051560" y="1965960"/>
+            <a:ext cx="7589520" cy="402336"/>
+          </a:xfrm>
+          <a:prstGeom prst="rect">
+            <a:avLst/>
+          </a:prstGeom>
+          <a:noFill/>
+          <a:ln/>
+        </p:spPr>
+        <p:txBody>
+          <a:bodyPr wrap="square" lIns="0" tIns="0" rIns="0" bIns="0" rtlCol="0" anchor="ctr">
+            <a:normAutofit/>
+          </a:bodyPr>
+          <a:lstStyle/>
+          <a:p>
+            <a:pPr indent="0" marL="0">
+              <a:buNone/>
+            </a:pPr>
+            <a:r>
+              <a:rPr lang="en-US" sz="1350" dirty="0">
                 <a:solidFill>
                   <a:srgbClr val="1F2937"/>
                 </a:solidFill>
@@ -5291,20 +5124,99 @@
                 <a:ea typeface="Calibri" pitchFamily="34" charset="-122"/>
                 <a:cs typeface="Calibri" pitchFamily="34" charset="-120"/>
               </a:rPr>
-              <a:t>The fixed code (prepared statements / validation)</a:t>
-            </a:r>
-            <a:endParaRPr lang="en-US" sz="1400" dirty="0"/>
-          </a:p>
-          <a:p>
-            <a:pPr marL="342900" indent="-342900">
-              <a:spcAft>
-                <a:spcPts val="600"/>
-              </a:spcAft>
-              <a:buSzPct val="100000"/>
-              <a:buChar char="•"/>
-            </a:pPr>
-            <a:r>
-              <a:rPr lang="en-US" sz="1400" dirty="0">
+              <a:t>Auth bypass (alice'--)</a:t>
+            </a:r>
+            <a:endParaRPr lang="en-US" sz="1350" dirty="0"/>
+          </a:p>
+        </p:txBody>
+      </p:sp>
+      <p:sp>
+        <p:nvSpPr>
+          <p:cNvPr id="9" name="Shape 6"/>
+          <p:cNvSpPr/>
+          <p:nvPr/>
+        </p:nvSpPr>
+        <p:spPr>
+          <a:xfrm>
+            <a:off x="502920" y="2441448"/>
+            <a:ext cx="384048" cy="384048"/>
+          </a:xfrm>
+          <a:prstGeom prst="ellipse">
+            <a:avLst/>
+          </a:prstGeom>
+          <a:solidFill>
+            <a:srgbClr val="E35205"/>
+          </a:solidFill>
+          <a:ln/>
+        </p:spPr>
+      </p:sp>
+      <p:sp>
+        <p:nvSpPr>
+          <p:cNvPr id="10" name="Text 7"/>
+          <p:cNvSpPr/>
+          <p:nvPr/>
+        </p:nvSpPr>
+        <p:spPr>
+          <a:xfrm>
+            <a:off x="502920" y="2441448"/>
+            <a:ext cx="384048" cy="384048"/>
+          </a:xfrm>
+          <a:prstGeom prst="rect">
+            <a:avLst/>
+          </a:prstGeom>
+          <a:noFill/>
+          <a:ln/>
+        </p:spPr>
+        <p:txBody>
+          <a:bodyPr wrap="square" lIns="0" tIns="0" rIns="0" bIns="0" rtlCol="0" anchor="ctr"/>
+          <a:lstStyle/>
+          <a:p>
+            <a:pPr algn="ctr" indent="0" marL="0">
+              <a:buNone/>
+            </a:pPr>
+            <a:r>
+              <a:rPr lang="en-US" sz="1500" b="1" dirty="0">
+                <a:solidFill>
+                  <a:srgbClr val="0E1726"/>
+                </a:solidFill>
+                <a:latin typeface="Arial" pitchFamily="34" charset="0"/>
+                <a:ea typeface="Arial" pitchFamily="34" charset="-122"/>
+                <a:cs typeface="Arial" pitchFamily="34" charset="-120"/>
+              </a:rPr>
+              <a:t>2</a:t>
+            </a:r>
+            <a:endParaRPr lang="en-US" sz="1500" dirty="0"/>
+          </a:p>
+        </p:txBody>
+      </p:sp>
+      <p:sp>
+        <p:nvSpPr>
+          <p:cNvPr id="11" name="Text 8"/>
+          <p:cNvSpPr/>
+          <p:nvPr/>
+        </p:nvSpPr>
+        <p:spPr>
+          <a:xfrm>
+            <a:off x="1051560" y="2441448"/>
+            <a:ext cx="7589520" cy="402336"/>
+          </a:xfrm>
+          <a:prstGeom prst="rect">
+            <a:avLst/>
+          </a:prstGeom>
+          <a:noFill/>
+          <a:ln/>
+        </p:spPr>
+        <p:txBody>
+          <a:bodyPr wrap="square" lIns="0" tIns="0" rIns="0" bIns="0" rtlCol="0" anchor="ctr">
+            <a:normAutofit/>
+          </a:bodyPr>
+          <a:lstStyle/>
+          <a:p>
+            <a:pPr indent="0" marL="0">
+              <a:buNone/>
+            </a:pPr>
+            <a:r>
+              <a:rPr lang="en-US" sz="1350" dirty="0">
                 <a:solidFill>
                   <a:srgbClr val="1F2937"/>
                 </a:solidFill>
@@ -5312,20 +5224,99 @@
                 <a:ea typeface="Calibri" pitchFamily="34" charset="-122"/>
                 <a:cs typeface="Calibri" pitchFamily="34" charset="-120"/>
               </a:rPr>
-              <a:t>Proof the payload no longer works</a:t>
-            </a:r>
-            <a:endParaRPr lang="en-US" sz="1400" dirty="0"/>
-          </a:p>
-          <a:p>
-            <a:pPr marL="342900" indent="-342900">
-              <a:spcAft>
-                <a:spcPts val="600"/>
-              </a:spcAft>
-              <a:buSzPct val="100000"/>
-              <a:buChar char="•"/>
-            </a:pPr>
-            <a:r>
-              <a:rPr lang="en-US" sz="1400" dirty="0">
+              <a:t>UNION dump (steal all credentials)</a:t>
+            </a:r>
+            <a:endParaRPr lang="en-US" sz="1350" dirty="0"/>
+          </a:p>
+        </p:txBody>
+      </p:sp>
+      <p:sp>
+        <p:nvSpPr>
+          <p:cNvPr id="12" name="Shape 9"/>
+          <p:cNvSpPr/>
+          <p:nvPr/>
+        </p:nvSpPr>
+        <p:spPr>
+          <a:xfrm>
+            <a:off x="502920" y="2916936"/>
+            <a:ext cx="384048" cy="384048"/>
+          </a:xfrm>
+          <a:prstGeom prst="ellipse">
+            <a:avLst/>
+          </a:prstGeom>
+          <a:solidFill>
+            <a:srgbClr val="E35205"/>
+          </a:solidFill>
+          <a:ln/>
+        </p:spPr>
+      </p:sp>
+      <p:sp>
+        <p:nvSpPr>
+          <p:cNvPr id="13" name="Text 10"/>
+          <p:cNvSpPr/>
+          <p:nvPr/>
+        </p:nvSpPr>
+        <p:spPr>
+          <a:xfrm>
+            <a:off x="502920" y="2916936"/>
+            <a:ext cx="384048" cy="384048"/>
+          </a:xfrm>
+          <a:prstGeom prst="rect">
+            <a:avLst/>
+          </a:prstGeom>
+          <a:noFill/>
+          <a:ln/>
+        </p:spPr>
+        <p:txBody>
+          <a:bodyPr wrap="square" lIns="0" tIns="0" rIns="0" bIns="0" rtlCol="0" anchor="ctr"/>
+          <a:lstStyle/>
+          <a:p>
+            <a:pPr algn="ctr" indent="0" marL="0">
+              <a:buNone/>
+            </a:pPr>
+            <a:r>
+              <a:rPr lang="en-US" sz="1500" b="1" dirty="0">
+                <a:solidFill>
+                  <a:srgbClr val="0E1726"/>
+                </a:solidFill>
+                <a:latin typeface="Arial" pitchFamily="34" charset="0"/>
+                <a:ea typeface="Arial" pitchFamily="34" charset="-122"/>
+                <a:cs typeface="Arial" pitchFamily="34" charset="-120"/>
+              </a:rPr>
+              <a:t>3</a:t>
+            </a:r>
+            <a:endParaRPr lang="en-US" sz="1500" dirty="0"/>
+          </a:p>
+        </p:txBody>
+      </p:sp>
+      <p:sp>
+        <p:nvSpPr>
+          <p:cNvPr id="14" name="Text 11"/>
+          <p:cNvSpPr/>
+          <p:nvPr/>
+        </p:nvSpPr>
+        <p:spPr>
+          <a:xfrm>
+            <a:off x="1051560" y="2916936"/>
+            <a:ext cx="7589520" cy="402336"/>
+          </a:xfrm>
+          <a:prstGeom prst="rect">
+            <a:avLst/>
+          </a:prstGeom>
+          <a:noFill/>
+          <a:ln/>
+        </p:spPr>
+        <p:txBody>
+          <a:bodyPr wrap="square" lIns="0" tIns="0" rIns="0" bIns="0" rtlCol="0" anchor="ctr">
+            <a:normAutofit/>
+          </a:bodyPr>
+          <a:lstStyle/>
+          <a:p>
+            <a:pPr indent="0" marL="0">
+              <a:buNone/>
+            </a:pPr>
+            <a:r>
+              <a:rPr lang="en-US" sz="1350" dirty="0">
                 <a:solidFill>
                   <a:srgbClr val="1F2937"/>
                 </a:solidFill>
@@ -5333,22 +5324,42 @@
                 <a:ea typeface="Calibri" pitchFamily="34" charset="-122"/>
                 <a:cs typeface="Calibri" pitchFamily="34" charset="-120"/>
               </a:rPr>
-              <a:t>+ Audit the AI / EiPE / Prompt Problem (see worksheet)</a:t>
-            </a:r>
-            <a:endParaRPr lang="en-US" sz="1400" dirty="0"/>
-          </a:p>
-        </p:txBody>
-      </p:sp>
-      <p:sp>
-        <p:nvSpPr>
-          <p:cNvPr id="7" name="Text 4"/>
-          <p:cNvSpPr/>
-          <p:nvPr/>
-        </p:nvSpPr>
-        <p:spPr>
-          <a:xfrm>
-            <a:off x="457200" y="4800600"/>
-            <a:ext cx="6949440" cy="274320"/>
+              <a:t>Command injection</a:t>
+            </a:r>
+            <a:endParaRPr lang="en-US" sz="1350" dirty="0"/>
+          </a:p>
+        </p:txBody>
+      </p:sp>
+      <p:sp>
+        <p:nvSpPr>
+          <p:cNvPr id="15" name="Shape 12"/>
+          <p:cNvSpPr/>
+          <p:nvPr/>
+        </p:nvSpPr>
+        <p:spPr>
+          <a:xfrm>
+            <a:off x="502920" y="3392424"/>
+            <a:ext cx="384048" cy="384048"/>
+          </a:xfrm>
+          <a:prstGeom prst="ellipse">
+            <a:avLst/>
+          </a:prstGeom>
+          <a:solidFill>
+            <a:srgbClr val="E35205"/>
+          </a:solidFill>
+          <a:ln/>
+        </p:spPr>
+      </p:sp>
+      <p:sp>
+        <p:nvSpPr>
+          <p:cNvPr id="16" name="Text 13"/>
+          <p:cNvSpPr/>
+          <p:nvPr/>
+        </p:nvSpPr>
+        <p:spPr>
+          <a:xfrm>
+            <a:off x="502920" y="3392424"/>
+            <a:ext cx="384048" cy="384048"/>
           </a:xfrm>
           <a:prstGeom prst="rect">
             <a:avLst/>
@@ -5358,20 +5369,100 @@
         </p:spPr>
         <p:txBody>
           <a:bodyPr wrap="square" lIns="0" tIns="0" rIns="0" bIns="0" rtlCol="0" anchor="ctr"/>
+          <a:lstStyle/>
+          <a:p>
+            <a:pPr algn="ctr" indent="0" marL="0">
+              <a:buNone/>
+            </a:pPr>
+            <a:r>
+              <a:rPr lang="en-US" sz="1500" b="1" dirty="0">
+                <a:solidFill>
+                  <a:srgbClr val="0E1726"/>
+                </a:solidFill>
+                <a:latin typeface="Arial" pitchFamily="34" charset="0"/>
+                <a:ea typeface="Arial" pitchFamily="34" charset="-122"/>
+                <a:cs typeface="Arial" pitchFamily="34" charset="-120"/>
+              </a:rPr>
+              <a:t>4</a:t>
+            </a:r>
+            <a:endParaRPr lang="en-US" sz="1500" dirty="0"/>
+          </a:p>
+        </p:txBody>
+      </p:sp>
+      <p:sp>
+        <p:nvSpPr>
+          <p:cNvPr id="17" name="Text 14"/>
+          <p:cNvSpPr/>
+          <p:nvPr/>
+        </p:nvSpPr>
+        <p:spPr>
+          <a:xfrm>
+            <a:off x="1051560" y="3392424"/>
+            <a:ext cx="7589520" cy="402336"/>
+          </a:xfrm>
+          <a:prstGeom prst="rect">
+            <a:avLst/>
+          </a:prstGeom>
+          <a:noFill/>
+          <a:ln/>
+        </p:spPr>
+        <p:txBody>
+          <a:bodyPr wrap="square" lIns="0" tIns="0" rIns="0" bIns="0" rtlCol="0" anchor="ctr">
+            <a:normAutofit/>
+          </a:bodyPr>
           <a:lstStyle/>
           <a:p>
             <a:pPr indent="0" marL="0">
               <a:buNone/>
             </a:pPr>
             <a:r>
-              <a:rPr lang="en-US" sz="900" dirty="0">
-                <a:solidFill>
-                  <a:srgbClr val="64748B"/>
+              <a:rPr lang="en-US" sz="1350" dirty="0">
+                <a:solidFill>
+                  <a:srgbClr val="1F2937"/>
                 </a:solidFill>
                 <a:latin typeface="Calibri" pitchFamily="34" charset="0"/>
                 <a:ea typeface="Calibri" pitchFamily="34" charset="-122"/>
                 <a:cs typeface="Calibri" pitchFamily="34" charset="-120"/>
               </a:rPr>
+              <a:t>Unrestricted upload</a:t>
+            </a:r>
+            <a:endParaRPr lang="en-US" sz="1350" dirty="0"/>
+          </a:p>
+        </p:txBody>
+      </p:sp>
+      <p:sp>
+        <p:nvSpPr>
+          <p:cNvPr id="18" name="Text 15"/>
+          <p:cNvSpPr/>
+          <p:nvPr/>
+        </p:nvSpPr>
+        <p:spPr>
+          <a:xfrm>
+            <a:off x="457200" y="4800600"/>
+            <a:ext cx="6949440" cy="274320"/>
+          </a:xfrm>
+          <a:prstGeom prst="rect">
+            <a:avLst/>
+          </a:prstGeom>
+          <a:noFill/>
+          <a:ln/>
+        </p:spPr>
+        <p:txBody>
+          <a:bodyPr wrap="square" lIns="0" tIns="0" rIns="0" bIns="0" rtlCol="0" anchor="ctr"/>
+          <a:lstStyle/>
+          <a:p>
+            <a:pPr indent="0" marL="0">
+              <a:buNone/>
+            </a:pPr>
+            <a:r>
+              <a:rPr lang="en-US" sz="900" dirty="0">
+                <a:solidFill>
+                  <a:srgbClr val="64748B"/>
+                </a:solidFill>
+                <a:latin typeface="Calibri" pitchFamily="34" charset="0"/>
+                <a:ea typeface="Calibri" pitchFamily="34" charset="-122"/>
+                <a:cs typeface="Calibri" pitchFamily="34" charset="-120"/>
+              </a:rPr>
               <a:t>Software Security · Week 4</a:t>
             </a:r>
             <a:endParaRPr lang="en-US" sz="900" dirty="0"/>
@@ -5380,7 +5471,7 @@
       </p:sp>
       <p:pic>
         <p:nvPicPr>
-          <p:cNvPr id="8" name="Image 1" descr="/Users/pop7/Library/CloudStorage/OneDrive-MonsterConnectCo.,Ltd/Lecture/KOSEN69 - software-security/slides/pptx/assets/logo-small.png">    </p:cNvPr>
+          <p:cNvPr id="19" name="Image 1" descr="/Users/pop7/Library/CloudStorage/OneDrive-MonsterConnectCo.,Ltd/Lecture/KOSEN69 - software-security/slides/pptx/assets/logo-small.png">    </p:cNvPr>
           <p:cNvPicPr>
             <a:picLocks noChangeAspect="1"/>
           </p:cNvPicPr>
@@ -5518,7 +5609,7 @@
                 <a:ea typeface="Arial" pitchFamily="34" charset="-122"/>
                 <a:cs typeface="Arial" pitchFamily="34" charset="-120"/>
               </a:rPr>
-              <a:t>Key takeaways</a:t>
+              <a:t>⚔️ Game — SQLi Boss Fight (cont.)</a:t>
             </a:r>
             <a:endParaRPr lang="en-US" sz="2600" dirty="0"/>
           </a:p>
@@ -5532,25 +5623,16 @@
         </p:nvSpPr>
         <p:spPr>
           <a:xfrm>
-            <a:off x="457200" y="1325880"/>
-            <a:ext cx="8229600" cy="1207008"/>
-          </a:xfrm>
-          <a:prstGeom prst="roundRect">
-            <a:avLst>
-              <a:gd name="adj" fmla="val 6061"/>
-            </a:avLst>
+            <a:off x="502920" y="1325880"/>
+            <a:ext cx="384048" cy="384048"/>
+          </a:xfrm>
+          <a:prstGeom prst="ellipse">
+            <a:avLst/>
           </a:prstGeom>
           <a:solidFill>
-            <a:srgbClr val="F1F5F9"/>
+            <a:srgbClr val="E35205"/>
           </a:solidFill>
           <a:ln/>
-          <a:effectLst>
-            <a:outerShdw sx="100000" sy="100000" kx="0" ky="0" algn="bl" rotWithShape="0" blurRad="76200" dist="25400" dir="5400000">
-              <a:srgbClr val="000000">
-                <a:alpha val="12000"/>
-              </a:srgbClr>
-            </a:outerShdw>
-          </a:effectLst>
         </p:spPr>
       </p:sp>
       <p:sp>
@@ -5561,8 +5643,8 @@
         </p:nvSpPr>
         <p:spPr>
           <a:xfrm>
-            <a:off x="731520" y="1435608"/>
-            <a:ext cx="7680960" cy="987552"/>
+            <a:off x="502920" y="1325880"/>
+            <a:ext cx="384048" cy="384048"/>
           </a:xfrm>
           <a:prstGeom prst="rect">
             <a:avLst/>
@@ -5571,18 +5653,55 @@
           <a:ln/>
         </p:spPr>
         <p:txBody>
-          <a:bodyPr wrap="square" lIns="0" tIns="0" rIns="0" bIns="0" rtlCol="0" anchor="t"/>
-          <a:lstStyle/>
-          <a:p>
-            <a:pPr marL="342900" indent="-342900">
-              <a:spcAft>
-                <a:spcPts val="600"/>
-              </a:spcAft>
-              <a:buSzPct val="100000"/>
-              <a:buChar char="•"/>
-            </a:pPr>
-            <a:r>
-              <a:rPr lang="en-US" sz="1400" dirty="0">
+          <a:bodyPr wrap="square" lIns="0" tIns="0" rIns="0" bIns="0" rtlCol="0" anchor="ctr"/>
+          <a:lstStyle/>
+          <a:p>
+            <a:pPr algn="ctr" indent="0" marL="0">
+              <a:buNone/>
+            </a:pPr>
+            <a:r>
+              <a:rPr lang="en-US" sz="1500" b="1" dirty="0">
+                <a:solidFill>
+                  <a:srgbClr val="0E1726"/>
+                </a:solidFill>
+                <a:latin typeface="Arial" pitchFamily="34" charset="0"/>
+                <a:ea typeface="Arial" pitchFamily="34" charset="-122"/>
+                <a:cs typeface="Arial" pitchFamily="34" charset="-120"/>
+              </a:rPr>
+              <a:t>5</a:t>
+            </a:r>
+            <a:endParaRPr lang="en-US" sz="1500" dirty="0"/>
+          </a:p>
+        </p:txBody>
+      </p:sp>
+      <p:sp>
+        <p:nvSpPr>
+          <p:cNvPr id="7" name="Text 4"/>
+          <p:cNvSpPr/>
+          <p:nvPr/>
+        </p:nvSpPr>
+        <p:spPr>
+          <a:xfrm>
+            <a:off x="1051560" y="1325880"/>
+            <a:ext cx="7589520" cy="658368"/>
+          </a:xfrm>
+          <a:prstGeom prst="rect">
+            <a:avLst/>
+          </a:prstGeom>
+          <a:noFill/>
+          <a:ln/>
+        </p:spPr>
+        <p:txBody>
+          <a:bodyPr wrap="square" lIns="0" tIns="0" rIns="0" bIns="0" rtlCol="0" anchor="ctr">
+            <a:normAutofit/>
+          </a:bodyPr>
+          <a:lstStyle/>
+          <a:p>
+            <a:pPr indent="0" marL="0">
+              <a:buNone/>
+            </a:pPr>
+            <a:r>
+              <a:rPr lang="en-US" sz="1350" dirty="0">
                 <a:solidFill>
                   <a:srgbClr val="1F2937"/>
                 </a:solidFill>
@@ -5590,87 +5709,45 @@
                 <a:ea typeface="Calibri" pitchFamily="34" charset="-122"/>
                 <a:cs typeface="Calibri" pitchFamily="34" charset="-120"/>
               </a:rPr>
-              <a:t>Never build interpreter strings from untrusted input</a:t>
-            </a:r>
-            <a:endParaRPr lang="en-US" sz="1400" dirty="0"/>
-          </a:p>
-          <a:p>
-            <a:pPr marL="342900" indent="-342900">
-              <a:spcAft>
-                <a:spcPts val="600"/>
-              </a:spcAft>
-              <a:buSzPct val="100000"/>
-              <a:buChar char="•"/>
-            </a:pPr>
-            <a:r>
-              <a:rPr lang="en-US" sz="1400" dirty="0">
-                <a:solidFill>
-                  <a:srgbClr val="1F2937"/>
+              <a:t>Boss defeated: run solution_app.py, prove all four attacks now fail, cite the exact fix line for each</a:t>
+            </a:r>
+            <a:endParaRPr lang="en-US" sz="1350" dirty="0"/>
+          </a:p>
+        </p:txBody>
+      </p:sp>
+      <p:sp>
+        <p:nvSpPr>
+          <p:cNvPr id="8" name="Text 5"/>
+          <p:cNvSpPr/>
+          <p:nvPr/>
+        </p:nvSpPr>
+        <p:spPr>
+          <a:xfrm>
+            <a:off x="457200" y="4800600"/>
+            <a:ext cx="6949440" cy="274320"/>
+          </a:xfrm>
+          <a:prstGeom prst="rect">
+            <a:avLst/>
+          </a:prstGeom>
+          <a:noFill/>
+          <a:ln/>
+        </p:spPr>
+        <p:txBody>
+          <a:bodyPr wrap="square" lIns="0" tIns="0" rIns="0" bIns="0" rtlCol="0" anchor="ctr"/>
+          <a:lstStyle/>
+          <a:p>
+            <a:pPr indent="0" marL="0">
+              <a:buNone/>
+            </a:pPr>
+            <a:r>
+              <a:rPr lang="en-US" sz="900" dirty="0">
+                <a:solidFill>
+                  <a:srgbClr val="64748B"/>
                 </a:solidFill>
                 <a:latin typeface="Calibri" pitchFamily="34" charset="0"/>
                 <a:ea typeface="Calibri" pitchFamily="34" charset="-122"/>
                 <a:cs typeface="Calibri" pitchFamily="34" charset="-120"/>
               </a:rPr>
-              <a:t>Parameterize first; validate as defense-in-depth</a:t>
-            </a:r>
-            <a:endParaRPr lang="en-US" sz="1400" dirty="0"/>
-          </a:p>
-          <a:p>
-            <a:pPr marL="342900" indent="-342900">
-              <a:spcAft>
-                <a:spcPts val="600"/>
-              </a:spcAft>
-              <a:buSzPct val="100000"/>
-              <a:buChar char="•"/>
-            </a:pPr>
-            <a:r>
-              <a:rPr lang="en-US" sz="1400" dirty="0">
-                <a:solidFill>
-                  <a:srgbClr val="1F2937"/>
-                </a:solidFill>
-                <a:latin typeface="Calibri" pitchFamily="34" charset="0"/>
-                <a:ea typeface="Calibri" pitchFamily="34" charset="-122"/>
-                <a:cs typeface="Calibri" pitchFamily="34" charset="-120"/>
-              </a:rPr>
-              <a:t>Injection = data treated as code</a:t>
-            </a:r>
-            <a:endParaRPr lang="en-US" sz="1400" dirty="0"/>
-          </a:p>
-        </p:txBody>
-      </p:sp>
-      <p:sp>
-        <p:nvSpPr>
-          <p:cNvPr id="7" name="Text 4"/>
-          <p:cNvSpPr/>
-          <p:nvPr/>
-        </p:nvSpPr>
-        <p:spPr>
-          <a:xfrm>
-            <a:off x="457200" y="4800600"/>
-            <a:ext cx="6949440" cy="274320"/>
-          </a:xfrm>
-          <a:prstGeom prst="rect">
-            <a:avLst/>
-          </a:prstGeom>
-          <a:noFill/>
-          <a:ln/>
-        </p:spPr>
-        <p:txBody>
-          <a:bodyPr wrap="square" lIns="0" tIns="0" rIns="0" bIns="0" rtlCol="0" anchor="ctr"/>
-          <a:lstStyle/>
-          <a:p>
-            <a:pPr indent="0" marL="0">
-              <a:buNone/>
-            </a:pPr>
-            <a:r>
-              <a:rPr lang="en-US" sz="900" dirty="0">
-                <a:solidFill>
-                  <a:srgbClr val="64748B"/>
-                </a:solidFill>
-                <a:latin typeface="Calibri" pitchFamily="34" charset="0"/>
-                <a:ea typeface="Calibri" pitchFamily="34" charset="-122"/>
-                <a:cs typeface="Calibri" pitchFamily="34" charset="-120"/>
-              </a:rPr>
               <a:t>Software Security · Week 4</a:t>
             </a:r>
             <a:endParaRPr lang="en-US" sz="900" dirty="0"/>
@@ -5679,7 +5756,7 @@
       </p:sp>
       <p:pic>
         <p:nvPicPr>
-          <p:cNvPr id="8" name="Image 1" descr="/Users/pop7/Library/CloudStorage/OneDrive-MonsterConnectCo.,Ltd/Lecture/KOSEN69 - software-security/slides/pptx/assets/logo-small.png">    </p:cNvPr>
+          <p:cNvPr id="9" name="Image 1" descr="/Users/pop7/Library/CloudStorage/OneDrive-MonsterConnectCo.,Ltd/Lecture/KOSEN69 - software-security/slides/pptx/assets/logo-small.png">    </p:cNvPr>
           <p:cNvPicPr>
             <a:picLocks noChangeAspect="1"/>
           </p:cNvPicPr>
@@ -5735,14 +5812,65 @@
       </p:grpSpPr>
       <p:sp>
         <p:nvSpPr>
-          <p:cNvPr id="2" name="Text 0"/>
-          <p:cNvSpPr/>
-          <p:nvPr/>
-        </p:nvSpPr>
-        <p:spPr>
-          <a:xfrm>
-            <a:off x="640080" y="1737360"/>
-            <a:ext cx="7863840" cy="1097280"/>
+          <p:cNvPr id="2" name="Shape 0"/>
+          <p:cNvSpPr/>
+          <p:nvPr/>
+        </p:nvSpPr>
+        <p:spPr>
+          <a:xfrm>
+            <a:off x="457200" y="384048"/>
+            <a:ext cx="530352" cy="530352"/>
+          </a:xfrm>
+          <a:prstGeom prst="ellipse">
+            <a:avLst/>
+          </a:prstGeom>
+          <a:solidFill>
+            <a:srgbClr val="E35205"/>
+          </a:solidFill>
+          <a:ln/>
+          <a:effectLst>
+            <a:outerShdw sx="100000" sy="100000" kx="0" ky="0" algn="bl" rotWithShape="0" blurRad="76200" dist="25400" dir="5400000">
+              <a:srgbClr val="000000">
+                <a:alpha val="12000"/>
+              </a:srgbClr>
+            </a:outerShdw>
+          </a:effectLst>
+        </p:spPr>
+      </p:sp>
+      <p:pic>
+        <p:nvPicPr>
+          <p:cNvPr id="3" name="Image 0" descr="preencoded.png">    </p:cNvPr>
+          <p:cNvPicPr>
+            <a:picLocks noChangeAspect="1"/>
+          </p:cNvPicPr>
+          <p:nvPr/>
+        </p:nvPicPr>
+        <p:blipFill>
+          <a:blip r:embed="rId1"/>
+          <a:stretch>
+            <a:fillRect/>
+          </a:stretch>
+        </p:blipFill>
+        <p:spPr>
+          <a:xfrm>
+            <a:off x="594360" y="521208"/>
+            <a:ext cx="256032" cy="256032"/>
+          </a:xfrm>
+          <a:prstGeom prst="rect">
+            <a:avLst/>
+          </a:prstGeom>
+        </p:spPr>
+      </p:pic>
+      <p:sp>
+        <p:nvSpPr>
+          <p:cNvPr id="4" name="Text 1"/>
+          <p:cNvSpPr/>
+          <p:nvPr/>
+        </p:nvSpPr>
+        <p:spPr>
+          <a:xfrm>
+            <a:off x="1143000" y="329184"/>
+            <a:ext cx="7498080" cy="603504"/>
           </a:xfrm>
           <a:prstGeom prst="rect">
             <a:avLst/>
@@ -5758,7 +5886,7 @@
               <a:buNone/>
             </a:pPr>
             <a:r>
-              <a:rPr lang="en-US" sz="4600" b="1" dirty="0">
+              <a:rPr lang="en-US" sz="2600" b="1" dirty="0">
                 <a:solidFill>
                   <a:srgbClr val="1F2937"/>
                 </a:solidFill>
@@ -5766,22 +5894,44 @@
                 <a:ea typeface="Arial" pitchFamily="34" charset="-122"/>
                 <a:cs typeface="Arial" pitchFamily="34" charset="-120"/>
               </a:rPr>
-              <a:t>Questions?</a:t>
-            </a:r>
-            <a:endParaRPr lang="en-US" sz="4600" dirty="0"/>
-          </a:p>
-        </p:txBody>
-      </p:sp>
-      <p:sp>
-        <p:nvSpPr>
-          <p:cNvPr id="3" name="Text 1"/>
-          <p:cNvSpPr/>
-          <p:nvPr/>
-        </p:nvSpPr>
-        <p:spPr>
-          <a:xfrm>
-            <a:off x="658368" y="2834640"/>
-            <a:ext cx="7863840" cy="731520"/>
+              <a:t>Lab steps</a:t>
+            </a:r>
+            <a:endParaRPr lang="en-US" sz="2600" dirty="0"/>
+          </a:p>
+        </p:txBody>
+      </p:sp>
+      <p:sp>
+        <p:nvSpPr>
+          <p:cNvPr id="5" name="Shape 2"/>
+          <p:cNvSpPr/>
+          <p:nvPr/>
+        </p:nvSpPr>
+        <p:spPr>
+          <a:xfrm>
+            <a:off x="457200" y="1325880"/>
+            <a:ext cx="8229600" cy="822960"/>
+          </a:xfrm>
+          <a:prstGeom prst="roundRect">
+            <a:avLst>
+              <a:gd name="adj" fmla="val 8889"/>
+            </a:avLst>
+          </a:prstGeom>
+          <a:solidFill>
+            <a:srgbClr val="E8EDF3"/>
+          </a:solidFill>
+          <a:ln/>
+        </p:spPr>
+      </p:sp>
+      <p:sp>
+        <p:nvSpPr>
+          <p:cNvPr id="6" name="Text 3"/>
+          <p:cNvSpPr/>
+          <p:nvPr/>
+        </p:nvSpPr>
+        <p:spPr>
+          <a:xfrm>
+            <a:off x="731520" y="1325880"/>
+            <a:ext cx="7680960" cy="822960"/>
           </a:xfrm>
           <a:prstGeom prst="rect">
             <a:avLst/>
@@ -5790,14 +5940,16 @@
           <a:ln/>
         </p:spPr>
         <p:txBody>
-          <a:bodyPr wrap="square" lIns="0" tIns="0" rIns="0" bIns="0" rtlCol="0" anchor="ctr"/>
+          <a:bodyPr wrap="square" lIns="0" tIns="0" rIns="0" bIns="0" rtlCol="0" anchor="ctr">
+            <a:normAutofit/>
+          </a:bodyPr>
           <a:lstStyle/>
           <a:p>
             <a:pPr indent="0" marL="0">
               <a:buNone/>
             </a:pPr>
             <a:r>
-              <a:rPr lang="en-US" sz="1800" dirty="0">
+              <a:rPr lang="en-US" sz="1400" i="1" dirty="0">
                 <a:solidFill>
                   <a:srgbClr val="E35205"/>
                 </a:solidFill>
@@ -5805,22 +5957,814 @@
                 <a:ea typeface="Calibri" pitchFamily="34" charset="-122"/>
                 <a:cs typeface="Calibri" pitchFamily="34" charset="-120"/>
               </a:rPr>
-              <a:t>Next week: XSS &amp; client-side risks</a:t>
-            </a:r>
-            <a:endParaRPr lang="en-US" sz="1800" dirty="0"/>
+              <a:t>📋 Worksheet 4 — labs/week04-injection/worksheet.md (Part 3) · kickoff: docker compose up → http://localhost:8080</a:t>
+            </a:r>
+            <a:endParaRPr lang="en-US" sz="1400" dirty="0"/>
+          </a:p>
+        </p:txBody>
+      </p:sp>
+      <p:sp>
+        <p:nvSpPr>
+          <p:cNvPr id="7" name="Shape 4"/>
+          <p:cNvSpPr/>
+          <p:nvPr/>
+        </p:nvSpPr>
+        <p:spPr>
+          <a:xfrm>
+            <a:off x="457200" y="2313432"/>
+            <a:ext cx="8229600" cy="493776"/>
+          </a:xfrm>
+          <a:prstGeom prst="roundRect">
+            <a:avLst>
+              <a:gd name="adj" fmla="val 11111"/>
+            </a:avLst>
+          </a:prstGeom>
+          <a:solidFill>
+            <a:srgbClr val="0A1020"/>
+          </a:solidFill>
+          <a:ln w="12700">
+            <a:solidFill>
+              <a:srgbClr val="E8EDF3"/>
+            </a:solidFill>
+            <a:prstDash val="solid"/>
+          </a:ln>
+        </p:spPr>
+      </p:sp>
+      <p:sp>
+        <p:nvSpPr>
+          <p:cNvPr id="8" name="Text 5"/>
+          <p:cNvSpPr/>
+          <p:nvPr/>
+        </p:nvSpPr>
+        <p:spPr>
+          <a:xfrm>
+            <a:off x="640080" y="2386584"/>
+            <a:ext cx="7863840" cy="347472"/>
+          </a:xfrm>
+          <a:prstGeom prst="rect">
+            <a:avLst/>
+          </a:prstGeom>
+          <a:noFill/>
+          <a:ln/>
+        </p:spPr>
+        <p:txBody>
+          <a:bodyPr wrap="square" lIns="0" tIns="0" rIns="0" bIns="0" rtlCol="0" anchor="t">
+            <a:normAutofit/>
+          </a:bodyPr>
+          <a:lstStyle/>
+          <a:p>
+            <a:pPr indent="0" marL="0">
+              <a:buNone/>
+            </a:pPr>
+            <a:r>
+              <a:rPr lang="en-US" sz="1150" dirty="0">
+                <a:solidFill>
+                  <a:srgbClr val="9FE7D6"/>
+                </a:solidFill>
+                <a:latin typeface="Courier New" pitchFamily="34" charset="0"/>
+                <a:ea typeface="Courier New" pitchFamily="34" charset="-122"/>
+                <a:cs typeface="Courier New" pitchFamily="34" charset="-120"/>
+              </a:rPr>
+              <a:t>docker run --rm -p 80:80 vulnerables/web-dvwa   # optional extra target (or Juice Shop)</a:t>
+            </a:r>
+            <a:endParaRPr lang="en-US" sz="1150" dirty="0"/>
+          </a:p>
+        </p:txBody>
+      </p:sp>
+      <p:sp>
+        <p:nvSpPr>
+          <p:cNvPr id="9" name="Shape 6"/>
+          <p:cNvSpPr/>
+          <p:nvPr/>
+        </p:nvSpPr>
+        <p:spPr>
+          <a:xfrm>
+            <a:off x="502920" y="2971800"/>
+            <a:ext cx="384048" cy="384048"/>
+          </a:xfrm>
+          <a:prstGeom prst="ellipse">
+            <a:avLst/>
+          </a:prstGeom>
+          <a:solidFill>
+            <a:srgbClr val="E35205"/>
+          </a:solidFill>
+          <a:ln/>
+        </p:spPr>
+      </p:sp>
+      <p:sp>
+        <p:nvSpPr>
+          <p:cNvPr id="10" name="Text 7"/>
+          <p:cNvSpPr/>
+          <p:nvPr/>
+        </p:nvSpPr>
+        <p:spPr>
+          <a:xfrm>
+            <a:off x="502920" y="2971800"/>
+            <a:ext cx="384048" cy="384048"/>
+          </a:xfrm>
+          <a:prstGeom prst="rect">
+            <a:avLst/>
+          </a:prstGeom>
+          <a:noFill/>
+          <a:ln/>
+        </p:spPr>
+        <p:txBody>
+          <a:bodyPr wrap="square" lIns="0" tIns="0" rIns="0" bIns="0" rtlCol="0" anchor="ctr"/>
+          <a:lstStyle/>
+          <a:p>
+            <a:pPr algn="ctr" indent="0" marL="0">
+              <a:buNone/>
+            </a:pPr>
+            <a:r>
+              <a:rPr lang="en-US" sz="1500" b="1" dirty="0">
+                <a:solidFill>
+                  <a:srgbClr val="0E1726"/>
+                </a:solidFill>
+                <a:latin typeface="Arial" pitchFamily="34" charset="0"/>
+                <a:ea typeface="Arial" pitchFamily="34" charset="-122"/>
+                <a:cs typeface="Arial" pitchFamily="34" charset="-120"/>
+              </a:rPr>
+              <a:t>1</a:t>
+            </a:r>
+            <a:endParaRPr lang="en-US" sz="1500" dirty="0"/>
+          </a:p>
+        </p:txBody>
+      </p:sp>
+      <p:sp>
+        <p:nvSpPr>
+          <p:cNvPr id="11" name="Text 8"/>
+          <p:cNvSpPr/>
+          <p:nvPr/>
+        </p:nvSpPr>
+        <p:spPr>
+          <a:xfrm>
+            <a:off x="1051560" y="2971800"/>
+            <a:ext cx="7589520" cy="402336"/>
+          </a:xfrm>
+          <a:prstGeom prst="rect">
+            <a:avLst/>
+          </a:prstGeom>
+          <a:noFill/>
+          <a:ln/>
+        </p:spPr>
+        <p:txBody>
+          <a:bodyPr wrap="square" lIns="0" tIns="0" rIns="0" bIns="0" rtlCol="0" anchor="ctr">
+            <a:normAutofit/>
+          </a:bodyPr>
+          <a:lstStyle/>
+          <a:p>
+            <a:pPr indent="0" marL="0">
+              <a:buNone/>
+            </a:pPr>
+            <a:r>
+              <a:rPr lang="en-US" sz="1350" dirty="0">
+                <a:solidFill>
+                  <a:srgbClr val="1F2937"/>
+                </a:solidFill>
+                <a:latin typeface="Calibri" pitchFamily="34" charset="0"/>
+                <a:ea typeface="Calibri" pitchFamily="34" charset="-122"/>
+                <a:cs typeface="Calibri" pitchFamily="34" charset="-120"/>
+              </a:rPr>
+              <a:t>Find an injectable parameter, bypass auth</a:t>
+            </a:r>
+            <a:endParaRPr lang="en-US" sz="1350" dirty="0"/>
+          </a:p>
+        </p:txBody>
+      </p:sp>
+      <p:sp>
+        <p:nvSpPr>
+          <p:cNvPr id="12" name="Shape 9"/>
+          <p:cNvSpPr/>
+          <p:nvPr/>
+        </p:nvSpPr>
+        <p:spPr>
+          <a:xfrm>
+            <a:off x="502920" y="3447288"/>
+            <a:ext cx="384048" cy="384048"/>
+          </a:xfrm>
+          <a:prstGeom prst="ellipse">
+            <a:avLst/>
+          </a:prstGeom>
+          <a:solidFill>
+            <a:srgbClr val="E35205"/>
+          </a:solidFill>
+          <a:ln/>
+        </p:spPr>
+      </p:sp>
+      <p:sp>
+        <p:nvSpPr>
+          <p:cNvPr id="13" name="Text 10"/>
+          <p:cNvSpPr/>
+          <p:nvPr/>
+        </p:nvSpPr>
+        <p:spPr>
+          <a:xfrm>
+            <a:off x="502920" y="3447288"/>
+            <a:ext cx="384048" cy="384048"/>
+          </a:xfrm>
+          <a:prstGeom prst="rect">
+            <a:avLst/>
+          </a:prstGeom>
+          <a:noFill/>
+          <a:ln/>
+        </p:spPr>
+        <p:txBody>
+          <a:bodyPr wrap="square" lIns="0" tIns="0" rIns="0" bIns="0" rtlCol="0" anchor="ctr"/>
+          <a:lstStyle/>
+          <a:p>
+            <a:pPr algn="ctr" indent="0" marL="0">
+              <a:buNone/>
+            </a:pPr>
+            <a:r>
+              <a:rPr lang="en-US" sz="1500" b="1" dirty="0">
+                <a:solidFill>
+                  <a:srgbClr val="0E1726"/>
+                </a:solidFill>
+                <a:latin typeface="Arial" pitchFamily="34" charset="0"/>
+                <a:ea typeface="Arial" pitchFamily="34" charset="-122"/>
+                <a:cs typeface="Arial" pitchFamily="34" charset="-120"/>
+              </a:rPr>
+              <a:t>2</a:t>
+            </a:r>
+            <a:endParaRPr lang="en-US" sz="1500" dirty="0"/>
+          </a:p>
+        </p:txBody>
+      </p:sp>
+      <p:sp>
+        <p:nvSpPr>
+          <p:cNvPr id="14" name="Text 11"/>
+          <p:cNvSpPr/>
+          <p:nvPr/>
+        </p:nvSpPr>
+        <p:spPr>
+          <a:xfrm>
+            <a:off x="1051560" y="3447288"/>
+            <a:ext cx="7589520" cy="402336"/>
+          </a:xfrm>
+          <a:prstGeom prst="rect">
+            <a:avLst/>
+          </a:prstGeom>
+          <a:noFill/>
+          <a:ln/>
+        </p:spPr>
+        <p:txBody>
+          <a:bodyPr wrap="square" lIns="0" tIns="0" rIns="0" bIns="0" rtlCol="0" anchor="ctr">
+            <a:normAutofit/>
+          </a:bodyPr>
+          <a:lstStyle/>
+          <a:p>
+            <a:pPr indent="0" marL="0">
+              <a:buNone/>
+            </a:pPr>
+            <a:r>
+              <a:rPr lang="en-US" sz="1350" dirty="0">
+                <a:solidFill>
+                  <a:srgbClr val="1F2937"/>
+                </a:solidFill>
+                <a:latin typeface="Calibri" pitchFamily="34" charset="0"/>
+                <a:ea typeface="Calibri" pitchFamily="34" charset="-122"/>
+                <a:cs typeface="Calibri" pitchFamily="34" charset="-120"/>
+              </a:rPr>
+              <a:t>Extract data (UNION dump)</a:t>
+            </a:r>
+            <a:endParaRPr lang="en-US" sz="1350" dirty="0"/>
+          </a:p>
+        </p:txBody>
+      </p:sp>
+      <p:sp>
+        <p:nvSpPr>
+          <p:cNvPr id="15" name="Shape 12"/>
+          <p:cNvSpPr/>
+          <p:nvPr/>
+        </p:nvSpPr>
+        <p:spPr>
+          <a:xfrm>
+            <a:off x="502920" y="3922776"/>
+            <a:ext cx="384048" cy="384048"/>
+          </a:xfrm>
+          <a:prstGeom prst="ellipse">
+            <a:avLst/>
+          </a:prstGeom>
+          <a:solidFill>
+            <a:srgbClr val="E35205"/>
+          </a:solidFill>
+          <a:ln/>
+        </p:spPr>
+      </p:sp>
+      <p:sp>
+        <p:nvSpPr>
+          <p:cNvPr id="16" name="Text 13"/>
+          <p:cNvSpPr/>
+          <p:nvPr/>
+        </p:nvSpPr>
+        <p:spPr>
+          <a:xfrm>
+            <a:off x="502920" y="3922776"/>
+            <a:ext cx="384048" cy="384048"/>
+          </a:xfrm>
+          <a:prstGeom prst="rect">
+            <a:avLst/>
+          </a:prstGeom>
+          <a:noFill/>
+          <a:ln/>
+        </p:spPr>
+        <p:txBody>
+          <a:bodyPr wrap="square" lIns="0" tIns="0" rIns="0" bIns="0" rtlCol="0" anchor="ctr"/>
+          <a:lstStyle/>
+          <a:p>
+            <a:pPr algn="ctr" indent="0" marL="0">
+              <a:buNone/>
+            </a:pPr>
+            <a:r>
+              <a:rPr lang="en-US" sz="1500" b="1" dirty="0">
+                <a:solidFill>
+                  <a:srgbClr val="0E1726"/>
+                </a:solidFill>
+                <a:latin typeface="Arial" pitchFamily="34" charset="0"/>
+                <a:ea typeface="Arial" pitchFamily="34" charset="-122"/>
+                <a:cs typeface="Arial" pitchFamily="34" charset="-120"/>
+              </a:rPr>
+              <a:t>3</a:t>
+            </a:r>
+            <a:endParaRPr lang="en-US" sz="1500" dirty="0"/>
+          </a:p>
+        </p:txBody>
+      </p:sp>
+      <p:sp>
+        <p:nvSpPr>
+          <p:cNvPr id="17" name="Text 14"/>
+          <p:cNvSpPr/>
+          <p:nvPr/>
+        </p:nvSpPr>
+        <p:spPr>
+          <a:xfrm>
+            <a:off x="1051560" y="3922776"/>
+            <a:ext cx="7589520" cy="402336"/>
+          </a:xfrm>
+          <a:prstGeom prst="rect">
+            <a:avLst/>
+          </a:prstGeom>
+          <a:noFill/>
+          <a:ln/>
+        </p:spPr>
+        <p:txBody>
+          <a:bodyPr wrap="square" lIns="0" tIns="0" rIns="0" bIns="0" rtlCol="0" anchor="ctr">
+            <a:normAutofit/>
+          </a:bodyPr>
+          <a:lstStyle/>
+          <a:p>
+            <a:pPr indent="0" marL="0">
+              <a:buNone/>
+            </a:pPr>
+            <a:r>
+              <a:rPr lang="en-US" sz="1350" dirty="0">
+                <a:solidFill>
+                  <a:srgbClr val="1F2937"/>
+                </a:solidFill>
+                <a:latin typeface="Calibri" pitchFamily="34" charset="0"/>
+                <a:ea typeface="Calibri" pitchFamily="34" charset="-122"/>
+                <a:cs typeface="Calibri" pitchFamily="34" charset="-120"/>
+              </a:rPr>
+              <a:t>Achieve command injection</a:t>
+            </a:r>
+            <a:endParaRPr lang="en-US" sz="1350" dirty="0"/>
+          </a:p>
+        </p:txBody>
+      </p:sp>
+      <p:sp>
+        <p:nvSpPr>
+          <p:cNvPr id="18" name="Text 15"/>
+          <p:cNvSpPr/>
+          <p:nvPr/>
+        </p:nvSpPr>
+        <p:spPr>
+          <a:xfrm>
+            <a:off x="457200" y="4800600"/>
+            <a:ext cx="6949440" cy="274320"/>
+          </a:xfrm>
+          <a:prstGeom prst="rect">
+            <a:avLst/>
+          </a:prstGeom>
+          <a:noFill/>
+          <a:ln/>
+        </p:spPr>
+        <p:txBody>
+          <a:bodyPr wrap="square" lIns="0" tIns="0" rIns="0" bIns="0" rtlCol="0" anchor="ctr"/>
+          <a:lstStyle/>
+          <a:p>
+            <a:pPr indent="0" marL="0">
+              <a:buNone/>
+            </a:pPr>
+            <a:r>
+              <a:rPr lang="en-US" sz="900" dirty="0">
+                <a:solidFill>
+                  <a:srgbClr val="64748B"/>
+                </a:solidFill>
+                <a:latin typeface="Calibri" pitchFamily="34" charset="0"/>
+                <a:ea typeface="Calibri" pitchFamily="34" charset="-122"/>
+                <a:cs typeface="Calibri" pitchFamily="34" charset="-120"/>
+              </a:rPr>
+              <a:t>Software Security · Week 4</a:t>
+            </a:r>
+            <a:endParaRPr lang="en-US" sz="900" dirty="0"/>
           </a:p>
         </p:txBody>
       </p:sp>
       <p:pic>
         <p:nvPicPr>
-          <p:cNvPr id="4" name="Image 0" descr="/Users/pop7/Library/CloudStorage/OneDrive-MonsterConnectCo.,Ltd/Lecture/KOSEN69 - software-security/slides/pptx/assets/logo-small.png">    </p:cNvPr>
+          <p:cNvPr id="19" name="Image 1" descr="/Users/pop7/Library/CloudStorage/OneDrive-MonsterConnectCo.,Ltd/Lecture/KOSEN69 - software-security/slides/pptx/assets/logo-small.png">    </p:cNvPr>
           <p:cNvPicPr>
             <a:picLocks noChangeAspect="1"/>
           </p:cNvPicPr>
           <p:nvPr/>
         </p:nvPicPr>
         <p:blipFill>
+          <a:blip r:embed="rId2"/>
+          <a:stretch>
+            <a:fillRect/>
+          </a:stretch>
+        </p:blipFill>
+        <p:spPr>
+          <a:xfrm>
+            <a:off x="7882128" y="4700016"/>
+            <a:ext cx="768096" cy="356616"/>
+          </a:xfrm>
+          <a:prstGeom prst="rect">
+            <a:avLst/>
+          </a:prstGeom>
+        </p:spPr>
+      </p:pic>
+    </p:spTree>
+  </p:cSld>
+  <p:clrMapOvr>
+    <a:masterClrMapping/>
+  </p:clrMapOvr>
+</p:sld>
+</file>
+
+<file path=ppt/slides/slide19.xml><?xml version="1.0" encoding="utf-8"?>
+<p:sld xmlns:a="http://schemas.openxmlformats.org/drawingml/2006/main" xmlns:r="http://schemas.openxmlformats.org/officeDocument/2006/relationships" xmlns:p="http://schemas.openxmlformats.org/presentationml/2006/main">
+  <p:cSld name="Slide 19">
+    <p:bg>
+      <p:bgPr>
+        <a:solidFill>
+          <a:srgbClr val="FFFFFF"/>
+        </a:solidFill>
+      </p:bgPr>
+    </p:bg>
+    <p:spTree>
+      <p:nvGrpSpPr>
+        <p:cNvPr id="1" name=""/>
+        <p:cNvGrpSpPr/>
+        <p:nvPr/>
+      </p:nvGrpSpPr>
+      <p:grpSpPr>
+        <a:xfrm>
+          <a:off x="0" y="0"/>
+          <a:ext cx="0" cy="0"/>
+          <a:chOff x="0" y="0"/>
+          <a:chExt cx="0" cy="0"/>
+        </a:xfrm>
+      </p:grpSpPr>
+      <p:sp>
+        <p:nvSpPr>
+          <p:cNvPr id="2" name="Shape 0"/>
+          <p:cNvSpPr/>
+          <p:nvPr/>
+        </p:nvSpPr>
+        <p:spPr>
+          <a:xfrm>
+            <a:off x="457200" y="384048"/>
+            <a:ext cx="530352" cy="530352"/>
+          </a:xfrm>
+          <a:prstGeom prst="ellipse">
+            <a:avLst/>
+          </a:prstGeom>
+          <a:solidFill>
+            <a:srgbClr val="E35205"/>
+          </a:solidFill>
+          <a:ln/>
+          <a:effectLst>
+            <a:outerShdw sx="100000" sy="100000" kx="0" ky="0" algn="bl" rotWithShape="0" blurRad="76200" dist="25400" dir="5400000">
+              <a:srgbClr val="000000">
+                <a:alpha val="12000"/>
+              </a:srgbClr>
+            </a:outerShdw>
+          </a:effectLst>
+        </p:spPr>
+      </p:sp>
+      <p:pic>
+        <p:nvPicPr>
+          <p:cNvPr id="3" name="Image 0" descr="preencoded.png">    </p:cNvPr>
+          <p:cNvPicPr>
+            <a:picLocks noChangeAspect="1"/>
+          </p:cNvPicPr>
+          <p:nvPr/>
+        </p:nvPicPr>
+        <p:blipFill>
           <a:blip r:embed="rId1"/>
+          <a:stretch>
+            <a:fillRect/>
+          </a:stretch>
+        </p:blipFill>
+        <p:spPr>
+          <a:xfrm>
+            <a:off x="594360" y="521208"/>
+            <a:ext cx="256032" cy="256032"/>
+          </a:xfrm>
+          <a:prstGeom prst="rect">
+            <a:avLst/>
+          </a:prstGeom>
+        </p:spPr>
+      </p:pic>
+      <p:sp>
+        <p:nvSpPr>
+          <p:cNvPr id="4" name="Text 1"/>
+          <p:cNvSpPr/>
+          <p:nvPr/>
+        </p:nvSpPr>
+        <p:spPr>
+          <a:xfrm>
+            <a:off x="1143000" y="329184"/>
+            <a:ext cx="7498080" cy="603504"/>
+          </a:xfrm>
+          <a:prstGeom prst="rect">
+            <a:avLst/>
+          </a:prstGeom>
+          <a:noFill/>
+          <a:ln/>
+        </p:spPr>
+        <p:txBody>
+          <a:bodyPr wrap="square" lIns="0" tIns="0" rIns="0" bIns="0" rtlCol="0" anchor="ctr"/>
+          <a:lstStyle/>
+          <a:p>
+            <a:pPr indent="0" marL="0">
+              <a:buNone/>
+            </a:pPr>
+            <a:r>
+              <a:rPr lang="en-US" sz="2600" b="1" dirty="0">
+                <a:solidFill>
+                  <a:srgbClr val="1F2937"/>
+                </a:solidFill>
+                <a:latin typeface="Arial" pitchFamily="34" charset="0"/>
+                <a:ea typeface="Arial" pitchFamily="34" charset="-122"/>
+                <a:cs typeface="Arial" pitchFamily="34" charset="-120"/>
+              </a:rPr>
+              <a:t>Lab steps (cont.)</a:t>
+            </a:r>
+            <a:endParaRPr lang="en-US" sz="2600" dirty="0"/>
+          </a:p>
+        </p:txBody>
+      </p:sp>
+      <p:sp>
+        <p:nvSpPr>
+          <p:cNvPr id="5" name="Shape 2"/>
+          <p:cNvSpPr/>
+          <p:nvPr/>
+        </p:nvSpPr>
+        <p:spPr>
+          <a:xfrm>
+            <a:off x="502920" y="1325880"/>
+            <a:ext cx="384048" cy="384048"/>
+          </a:xfrm>
+          <a:prstGeom prst="ellipse">
+            <a:avLst/>
+          </a:prstGeom>
+          <a:solidFill>
+            <a:srgbClr val="E35205"/>
+          </a:solidFill>
+          <a:ln/>
+        </p:spPr>
+      </p:sp>
+      <p:sp>
+        <p:nvSpPr>
+          <p:cNvPr id="6" name="Text 3"/>
+          <p:cNvSpPr/>
+          <p:nvPr/>
+        </p:nvSpPr>
+        <p:spPr>
+          <a:xfrm>
+            <a:off x="502920" y="1325880"/>
+            <a:ext cx="384048" cy="384048"/>
+          </a:xfrm>
+          <a:prstGeom prst="rect">
+            <a:avLst/>
+          </a:prstGeom>
+          <a:noFill/>
+          <a:ln/>
+        </p:spPr>
+        <p:txBody>
+          <a:bodyPr wrap="square" lIns="0" tIns="0" rIns="0" bIns="0" rtlCol="0" anchor="ctr"/>
+          <a:lstStyle/>
+          <a:p>
+            <a:pPr algn="ctr" indent="0" marL="0">
+              <a:buNone/>
+            </a:pPr>
+            <a:r>
+              <a:rPr lang="en-US" sz="1500" b="1" dirty="0">
+                <a:solidFill>
+                  <a:srgbClr val="0E1726"/>
+                </a:solidFill>
+                <a:latin typeface="Arial" pitchFamily="34" charset="0"/>
+                <a:ea typeface="Arial" pitchFamily="34" charset="-122"/>
+                <a:cs typeface="Arial" pitchFamily="34" charset="-120"/>
+              </a:rPr>
+              <a:t>4</a:t>
+            </a:r>
+            <a:endParaRPr lang="en-US" sz="1500" dirty="0"/>
+          </a:p>
+        </p:txBody>
+      </p:sp>
+      <p:sp>
+        <p:nvSpPr>
+          <p:cNvPr id="7" name="Text 4"/>
+          <p:cNvSpPr/>
+          <p:nvPr/>
+        </p:nvSpPr>
+        <p:spPr>
+          <a:xfrm>
+            <a:off x="1051560" y="1325880"/>
+            <a:ext cx="7589520" cy="402336"/>
+          </a:xfrm>
+          <a:prstGeom prst="rect">
+            <a:avLst/>
+          </a:prstGeom>
+          <a:noFill/>
+          <a:ln/>
+        </p:spPr>
+        <p:txBody>
+          <a:bodyPr wrap="square" lIns="0" tIns="0" rIns="0" bIns="0" rtlCol="0" anchor="ctr">
+            <a:normAutofit/>
+          </a:bodyPr>
+          <a:lstStyle/>
+          <a:p>
+            <a:pPr indent="0" marL="0">
+              <a:buNone/>
+            </a:pPr>
+            <a:r>
+              <a:rPr lang="en-US" sz="1350" dirty="0">
+                <a:solidFill>
+                  <a:srgbClr val="1F2937"/>
+                </a:solidFill>
+                <a:latin typeface="Calibri" pitchFamily="34" charset="0"/>
+                <a:ea typeface="Calibri" pitchFamily="34" charset="-122"/>
+                <a:cs typeface="Calibri" pitchFamily="34" charset="-120"/>
+              </a:rPr>
+              <a:t>Probe the upload endpoint — document the missing control</a:t>
+            </a:r>
+            <a:endParaRPr lang="en-US" sz="1350" dirty="0"/>
+          </a:p>
+        </p:txBody>
+      </p:sp>
+      <p:sp>
+        <p:nvSpPr>
+          <p:cNvPr id="8" name="Shape 5"/>
+          <p:cNvSpPr/>
+          <p:nvPr/>
+        </p:nvSpPr>
+        <p:spPr>
+          <a:xfrm>
+            <a:off x="502920" y="1801368"/>
+            <a:ext cx="384048" cy="384048"/>
+          </a:xfrm>
+          <a:prstGeom prst="ellipse">
+            <a:avLst/>
+          </a:prstGeom>
+          <a:solidFill>
+            <a:srgbClr val="E35205"/>
+          </a:solidFill>
+          <a:ln/>
+        </p:spPr>
+      </p:sp>
+      <p:sp>
+        <p:nvSpPr>
+          <p:cNvPr id="9" name="Text 6"/>
+          <p:cNvSpPr/>
+          <p:nvPr/>
+        </p:nvSpPr>
+        <p:spPr>
+          <a:xfrm>
+            <a:off x="502920" y="1801368"/>
+            <a:ext cx="384048" cy="384048"/>
+          </a:xfrm>
+          <a:prstGeom prst="rect">
+            <a:avLst/>
+          </a:prstGeom>
+          <a:noFill/>
+          <a:ln/>
+        </p:spPr>
+        <p:txBody>
+          <a:bodyPr wrap="square" lIns="0" tIns="0" rIns="0" bIns="0" rtlCol="0" anchor="ctr"/>
+          <a:lstStyle/>
+          <a:p>
+            <a:pPr algn="ctr" indent="0" marL="0">
+              <a:buNone/>
+            </a:pPr>
+            <a:r>
+              <a:rPr lang="en-US" sz="1500" b="1" dirty="0">
+                <a:solidFill>
+                  <a:srgbClr val="0E1726"/>
+                </a:solidFill>
+                <a:latin typeface="Arial" pitchFamily="34" charset="0"/>
+                <a:ea typeface="Arial" pitchFamily="34" charset="-122"/>
+                <a:cs typeface="Arial" pitchFamily="34" charset="-120"/>
+              </a:rPr>
+              <a:t>5</a:t>
+            </a:r>
+            <a:endParaRPr lang="en-US" sz="1500" dirty="0"/>
+          </a:p>
+        </p:txBody>
+      </p:sp>
+      <p:sp>
+        <p:nvSpPr>
+          <p:cNvPr id="10" name="Text 7"/>
+          <p:cNvSpPr/>
+          <p:nvPr/>
+        </p:nvSpPr>
+        <p:spPr>
+          <a:xfrm>
+            <a:off x="1051560" y="1801368"/>
+            <a:ext cx="7589520" cy="402336"/>
+          </a:xfrm>
+          <a:prstGeom prst="rect">
+            <a:avLst/>
+          </a:prstGeom>
+          <a:noFill/>
+          <a:ln/>
+        </p:spPr>
+        <p:txBody>
+          <a:bodyPr wrap="square" lIns="0" tIns="0" rIns="0" bIns="0" rtlCol="0" anchor="ctr">
+            <a:normAutofit/>
+          </a:bodyPr>
+          <a:lstStyle/>
+          <a:p>
+            <a:pPr indent="0" marL="0">
+              <a:buNone/>
+            </a:pPr>
+            <a:r>
+              <a:rPr lang="en-US" sz="1350" dirty="0">
+                <a:solidFill>
+                  <a:srgbClr val="1F2937"/>
+                </a:solidFill>
+                <a:latin typeface="Calibri" pitchFamily="34" charset="0"/>
+                <a:ea typeface="Calibri" pitchFamily="34" charset="-122"/>
+                <a:cs typeface="Calibri" pitchFamily="34" charset="-120"/>
+              </a:rPr>
+              <a:t>Rewrite the endpoints safely &amp; re-test</a:t>
+            </a:r>
+            <a:endParaRPr lang="en-US" sz="1350" dirty="0"/>
+          </a:p>
+        </p:txBody>
+      </p:sp>
+      <p:sp>
+        <p:nvSpPr>
+          <p:cNvPr id="11" name="Text 8"/>
+          <p:cNvSpPr/>
+          <p:nvPr/>
+        </p:nvSpPr>
+        <p:spPr>
+          <a:xfrm>
+            <a:off x="457200" y="4800600"/>
+            <a:ext cx="6949440" cy="274320"/>
+          </a:xfrm>
+          <a:prstGeom prst="rect">
+            <a:avLst/>
+          </a:prstGeom>
+          <a:noFill/>
+          <a:ln/>
+        </p:spPr>
+        <p:txBody>
+          <a:bodyPr wrap="square" lIns="0" tIns="0" rIns="0" bIns="0" rtlCol="0" anchor="ctr"/>
+          <a:lstStyle/>
+          <a:p>
+            <a:pPr indent="0" marL="0">
+              <a:buNone/>
+            </a:pPr>
+            <a:r>
+              <a:rPr lang="en-US" sz="900" dirty="0">
+                <a:solidFill>
+                  <a:srgbClr val="64748B"/>
+                </a:solidFill>
+                <a:latin typeface="Calibri" pitchFamily="34" charset="0"/>
+                <a:ea typeface="Calibri" pitchFamily="34" charset="-122"/>
+                <a:cs typeface="Calibri" pitchFamily="34" charset="-120"/>
+              </a:rPr>
+              <a:t>Software Security · Week 4</a:t>
+            </a:r>
+            <a:endParaRPr lang="en-US" sz="900" dirty="0"/>
+          </a:p>
+        </p:txBody>
+      </p:sp>
+      <p:pic>
+        <p:nvPicPr>
+          <p:cNvPr id="12" name="Image 1" descr="/Users/pop7/Library/CloudStorage/OneDrive-MonsterConnectCo.,Ltd/Lecture/KOSEN69 - software-security/slides/pptx/assets/logo-small.png">    </p:cNvPr>
+          <p:cNvPicPr>
+            <a:picLocks noChangeAspect="1"/>
+          </p:cNvPicPr>
+          <p:nvPr/>
+        </p:nvPicPr>
+        <p:blipFill>
+          <a:blip r:embed="rId2"/>
           <a:stretch>
             <a:fillRect/>
           </a:stretch>
@@ -6004,7 +6948,9 @@
           <a:ln/>
         </p:spPr>
         <p:txBody>
-          <a:bodyPr wrap="square" lIns="0" tIns="0" rIns="0" bIns="0" rtlCol="0" anchor="t"/>
+          <a:bodyPr wrap="square" lIns="0" tIns="0" rIns="0" bIns="0" rtlCol="0" anchor="t">
+            <a:normAutofit/>
+          </a:bodyPr>
           <a:lstStyle/>
           <a:p>
             <a:pPr marL="342900" indent="-342900">
@@ -6183,6 +7129,763 @@
         </p:nvPicPr>
         <p:blipFill>
           <a:blip r:embed="rId2"/>
+          <a:stretch>
+            <a:fillRect/>
+          </a:stretch>
+        </p:blipFill>
+        <p:spPr>
+          <a:xfrm>
+            <a:off x="7882128" y="4700016"/>
+            <a:ext cx="768096" cy="356616"/>
+          </a:xfrm>
+          <a:prstGeom prst="rect">
+            <a:avLst/>
+          </a:prstGeom>
+        </p:spPr>
+      </p:pic>
+    </p:spTree>
+  </p:cSld>
+  <p:clrMapOvr>
+    <a:masterClrMapping/>
+  </p:clrMapOvr>
+</p:sld>
+</file>
+
+<file path=ppt/slides/slide20.xml><?xml version="1.0" encoding="utf-8"?>
+<p:sld xmlns:a="http://schemas.openxmlformats.org/drawingml/2006/main" xmlns:r="http://schemas.openxmlformats.org/officeDocument/2006/relationships" xmlns:p="http://schemas.openxmlformats.org/presentationml/2006/main">
+  <p:cSld name="Slide 20">
+    <p:bg>
+      <p:bgPr>
+        <a:solidFill>
+          <a:srgbClr val="FFFFFF"/>
+        </a:solidFill>
+      </p:bgPr>
+    </p:bg>
+    <p:spTree>
+      <p:nvGrpSpPr>
+        <p:cNvPr id="1" name=""/>
+        <p:cNvGrpSpPr/>
+        <p:nvPr/>
+      </p:nvGrpSpPr>
+      <p:grpSpPr>
+        <a:xfrm>
+          <a:off x="0" y="0"/>
+          <a:ext cx="0" cy="0"/>
+          <a:chOff x="0" y="0"/>
+          <a:chExt cx="0" cy="0"/>
+        </a:xfrm>
+      </p:grpSpPr>
+      <p:sp>
+        <p:nvSpPr>
+          <p:cNvPr id="2" name="Shape 0"/>
+          <p:cNvSpPr/>
+          <p:nvPr/>
+        </p:nvSpPr>
+        <p:spPr>
+          <a:xfrm>
+            <a:off x="457200" y="384048"/>
+            <a:ext cx="530352" cy="530352"/>
+          </a:xfrm>
+          <a:prstGeom prst="ellipse">
+            <a:avLst/>
+          </a:prstGeom>
+          <a:solidFill>
+            <a:srgbClr val="E35205"/>
+          </a:solidFill>
+          <a:ln/>
+          <a:effectLst>
+            <a:outerShdw sx="100000" sy="100000" kx="0" ky="0" algn="bl" rotWithShape="0" blurRad="76200" dist="25400" dir="5400000">
+              <a:srgbClr val="000000">
+                <a:alpha val="12000"/>
+              </a:srgbClr>
+            </a:outerShdw>
+          </a:effectLst>
+        </p:spPr>
+      </p:sp>
+      <p:pic>
+        <p:nvPicPr>
+          <p:cNvPr id="3" name="Image 0" descr="preencoded.png">    </p:cNvPr>
+          <p:cNvPicPr>
+            <a:picLocks noChangeAspect="1"/>
+          </p:cNvPicPr>
+          <p:nvPr/>
+        </p:nvPicPr>
+        <p:blipFill>
+          <a:blip r:embed="rId1"/>
+          <a:stretch>
+            <a:fillRect/>
+          </a:stretch>
+        </p:blipFill>
+        <p:spPr>
+          <a:xfrm>
+            <a:off x="594360" y="521208"/>
+            <a:ext cx="256032" cy="256032"/>
+          </a:xfrm>
+          <a:prstGeom prst="rect">
+            <a:avLst/>
+          </a:prstGeom>
+        </p:spPr>
+      </p:pic>
+      <p:sp>
+        <p:nvSpPr>
+          <p:cNvPr id="4" name="Text 1"/>
+          <p:cNvSpPr/>
+          <p:nvPr/>
+        </p:nvSpPr>
+        <p:spPr>
+          <a:xfrm>
+            <a:off x="1143000" y="329184"/>
+            <a:ext cx="7498080" cy="603504"/>
+          </a:xfrm>
+          <a:prstGeom prst="rect">
+            <a:avLst/>
+          </a:prstGeom>
+          <a:noFill/>
+          <a:ln/>
+        </p:spPr>
+        <p:txBody>
+          <a:bodyPr wrap="square" lIns="0" tIns="0" rIns="0" bIns="0" rtlCol="0" anchor="ctr"/>
+          <a:lstStyle/>
+          <a:p>
+            <a:pPr indent="0" marL="0">
+              <a:buNone/>
+            </a:pPr>
+            <a:r>
+              <a:rPr lang="en-US" sz="2600" b="1" dirty="0">
+                <a:solidFill>
+                  <a:srgbClr val="1F2937"/>
+                </a:solidFill>
+                <a:latin typeface="Arial" pitchFamily="34" charset="0"/>
+                <a:ea typeface="Arial" pitchFamily="34" charset="-122"/>
+                <a:cs typeface="Arial" pitchFamily="34" charset="-120"/>
+              </a:rPr>
+              <a:t>Deliverable</a:t>
+            </a:r>
+            <a:endParaRPr lang="en-US" sz="2600" dirty="0"/>
+          </a:p>
+        </p:txBody>
+      </p:sp>
+      <p:sp>
+        <p:nvSpPr>
+          <p:cNvPr id="5" name="Shape 2"/>
+          <p:cNvSpPr/>
+          <p:nvPr/>
+        </p:nvSpPr>
+        <p:spPr>
+          <a:xfrm>
+            <a:off x="457200" y="1325880"/>
+            <a:ext cx="8229600" cy="1517904"/>
+          </a:xfrm>
+          <a:prstGeom prst="roundRect">
+            <a:avLst>
+              <a:gd name="adj" fmla="val 4819"/>
+            </a:avLst>
+          </a:prstGeom>
+          <a:solidFill>
+            <a:srgbClr val="F1F5F9"/>
+          </a:solidFill>
+          <a:ln/>
+          <a:effectLst>
+            <a:outerShdw sx="100000" sy="100000" kx="0" ky="0" algn="bl" rotWithShape="0" blurRad="76200" dist="25400" dir="5400000">
+              <a:srgbClr val="000000">
+                <a:alpha val="12000"/>
+              </a:srgbClr>
+            </a:outerShdw>
+          </a:effectLst>
+        </p:spPr>
+      </p:sp>
+      <p:sp>
+        <p:nvSpPr>
+          <p:cNvPr id="6" name="Text 3"/>
+          <p:cNvSpPr/>
+          <p:nvPr/>
+        </p:nvSpPr>
+        <p:spPr>
+          <a:xfrm>
+            <a:off x="731520" y="1435608"/>
+            <a:ext cx="7680960" cy="1298448"/>
+          </a:xfrm>
+          <a:prstGeom prst="rect">
+            <a:avLst/>
+          </a:prstGeom>
+          <a:noFill/>
+          <a:ln/>
+        </p:spPr>
+        <p:txBody>
+          <a:bodyPr wrap="square" lIns="0" tIns="0" rIns="0" bIns="0" rtlCol="0" anchor="t">
+            <a:normAutofit/>
+          </a:bodyPr>
+          <a:lstStyle/>
+          <a:p>
+            <a:pPr marL="342900" indent="-342900">
+              <a:spcAft>
+                <a:spcPts val="600"/>
+              </a:spcAft>
+              <a:buSzPct val="100000"/>
+              <a:buChar char="•"/>
+            </a:pPr>
+            <a:r>
+              <a:rPr lang="en-US" sz="1400" dirty="0">
+                <a:solidFill>
+                  <a:srgbClr val="1F2937"/>
+                </a:solidFill>
+                <a:latin typeface="Calibri" pitchFamily="34" charset="0"/>
+                <a:ea typeface="Calibri" pitchFamily="34" charset="-122"/>
+                <a:cs typeface="Calibri" pitchFamily="34" charset="-120"/>
+              </a:rPr>
+              <a:t>Findings: each injection point + payload + impact (CWE-mapped)</a:t>
+            </a:r>
+            <a:endParaRPr lang="en-US" sz="1400" dirty="0"/>
+          </a:p>
+          <a:p>
+            <a:pPr marL="342900" indent="-342900">
+              <a:spcAft>
+                <a:spcPts val="600"/>
+              </a:spcAft>
+              <a:buSzPct val="100000"/>
+              <a:buChar char="•"/>
+            </a:pPr>
+            <a:r>
+              <a:rPr lang="en-US" sz="1400" dirty="0">
+                <a:solidFill>
+                  <a:srgbClr val="1F2937"/>
+                </a:solidFill>
+                <a:latin typeface="Calibri" pitchFamily="34" charset="0"/>
+                <a:ea typeface="Calibri" pitchFamily="34" charset="-122"/>
+                <a:cs typeface="Calibri" pitchFamily="34" charset="-120"/>
+              </a:rPr>
+              <a:t>The fixed code (prepared statements / validation)</a:t>
+            </a:r>
+            <a:endParaRPr lang="en-US" sz="1400" dirty="0"/>
+          </a:p>
+          <a:p>
+            <a:pPr marL="342900" indent="-342900">
+              <a:spcAft>
+                <a:spcPts val="600"/>
+              </a:spcAft>
+              <a:buSzPct val="100000"/>
+              <a:buChar char="•"/>
+            </a:pPr>
+            <a:r>
+              <a:rPr lang="en-US" sz="1400" dirty="0">
+                <a:solidFill>
+                  <a:srgbClr val="1F2937"/>
+                </a:solidFill>
+                <a:latin typeface="Calibri" pitchFamily="34" charset="0"/>
+                <a:ea typeface="Calibri" pitchFamily="34" charset="-122"/>
+                <a:cs typeface="Calibri" pitchFamily="34" charset="-120"/>
+              </a:rPr>
+              <a:t>Proof the payload no longer works</a:t>
+            </a:r>
+            <a:endParaRPr lang="en-US" sz="1400" dirty="0"/>
+          </a:p>
+          <a:p>
+            <a:pPr marL="342900" indent="-342900">
+              <a:spcAft>
+                <a:spcPts val="600"/>
+              </a:spcAft>
+              <a:buSzPct val="100000"/>
+              <a:buChar char="•"/>
+            </a:pPr>
+            <a:r>
+              <a:rPr lang="en-US" sz="1400" dirty="0">
+                <a:solidFill>
+                  <a:srgbClr val="1F2937"/>
+                </a:solidFill>
+                <a:latin typeface="Calibri" pitchFamily="34" charset="0"/>
+                <a:ea typeface="Calibri" pitchFamily="34" charset="-122"/>
+                <a:cs typeface="Calibri" pitchFamily="34" charset="-120"/>
+              </a:rPr>
+              <a:t>+ Audit the AI / EiPE / Prompt Problem (see worksheet)</a:t>
+            </a:r>
+            <a:endParaRPr lang="en-US" sz="1400" dirty="0"/>
+          </a:p>
+        </p:txBody>
+      </p:sp>
+      <p:sp>
+        <p:nvSpPr>
+          <p:cNvPr id="7" name="Text 4"/>
+          <p:cNvSpPr/>
+          <p:nvPr/>
+        </p:nvSpPr>
+        <p:spPr>
+          <a:xfrm>
+            <a:off x="457200" y="4800600"/>
+            <a:ext cx="6949440" cy="274320"/>
+          </a:xfrm>
+          <a:prstGeom prst="rect">
+            <a:avLst/>
+          </a:prstGeom>
+          <a:noFill/>
+          <a:ln/>
+        </p:spPr>
+        <p:txBody>
+          <a:bodyPr wrap="square" lIns="0" tIns="0" rIns="0" bIns="0" rtlCol="0" anchor="ctr"/>
+          <a:lstStyle/>
+          <a:p>
+            <a:pPr indent="0" marL="0">
+              <a:buNone/>
+            </a:pPr>
+            <a:r>
+              <a:rPr lang="en-US" sz="900" dirty="0">
+                <a:solidFill>
+                  <a:srgbClr val="64748B"/>
+                </a:solidFill>
+                <a:latin typeface="Calibri" pitchFamily="34" charset="0"/>
+                <a:ea typeface="Calibri" pitchFamily="34" charset="-122"/>
+                <a:cs typeface="Calibri" pitchFamily="34" charset="-120"/>
+              </a:rPr>
+              <a:t>Software Security · Week 4</a:t>
+            </a:r>
+            <a:endParaRPr lang="en-US" sz="900" dirty="0"/>
+          </a:p>
+        </p:txBody>
+      </p:sp>
+      <p:pic>
+        <p:nvPicPr>
+          <p:cNvPr id="8" name="Image 1" descr="/Users/pop7/Library/CloudStorage/OneDrive-MonsterConnectCo.,Ltd/Lecture/KOSEN69 - software-security/slides/pptx/assets/logo-small.png">    </p:cNvPr>
+          <p:cNvPicPr>
+            <a:picLocks noChangeAspect="1"/>
+          </p:cNvPicPr>
+          <p:nvPr/>
+        </p:nvPicPr>
+        <p:blipFill>
+          <a:blip r:embed="rId2"/>
+          <a:stretch>
+            <a:fillRect/>
+          </a:stretch>
+        </p:blipFill>
+        <p:spPr>
+          <a:xfrm>
+            <a:off x="7882128" y="4700016"/>
+            <a:ext cx="768096" cy="356616"/>
+          </a:xfrm>
+          <a:prstGeom prst="rect">
+            <a:avLst/>
+          </a:prstGeom>
+        </p:spPr>
+      </p:pic>
+    </p:spTree>
+  </p:cSld>
+  <p:clrMapOvr>
+    <a:masterClrMapping/>
+  </p:clrMapOvr>
+</p:sld>
+</file>
+
+<file path=ppt/slides/slide21.xml><?xml version="1.0" encoding="utf-8"?>
+<p:sld xmlns:a="http://schemas.openxmlformats.org/drawingml/2006/main" xmlns:r="http://schemas.openxmlformats.org/officeDocument/2006/relationships" xmlns:p="http://schemas.openxmlformats.org/presentationml/2006/main">
+  <p:cSld name="Slide 21">
+    <p:bg>
+      <p:bgPr>
+        <a:solidFill>
+          <a:srgbClr val="FFFFFF"/>
+        </a:solidFill>
+      </p:bgPr>
+    </p:bg>
+    <p:spTree>
+      <p:nvGrpSpPr>
+        <p:cNvPr id="1" name=""/>
+        <p:cNvGrpSpPr/>
+        <p:nvPr/>
+      </p:nvGrpSpPr>
+      <p:grpSpPr>
+        <a:xfrm>
+          <a:off x="0" y="0"/>
+          <a:ext cx="0" cy="0"/>
+          <a:chOff x="0" y="0"/>
+          <a:chExt cx="0" cy="0"/>
+        </a:xfrm>
+      </p:grpSpPr>
+      <p:sp>
+        <p:nvSpPr>
+          <p:cNvPr id="2" name="Shape 0"/>
+          <p:cNvSpPr/>
+          <p:nvPr/>
+        </p:nvSpPr>
+        <p:spPr>
+          <a:xfrm>
+            <a:off x="457200" y="384048"/>
+            <a:ext cx="530352" cy="530352"/>
+          </a:xfrm>
+          <a:prstGeom prst="ellipse">
+            <a:avLst/>
+          </a:prstGeom>
+          <a:solidFill>
+            <a:srgbClr val="E35205"/>
+          </a:solidFill>
+          <a:ln/>
+          <a:effectLst>
+            <a:outerShdw sx="100000" sy="100000" kx="0" ky="0" algn="bl" rotWithShape="0" blurRad="76200" dist="25400" dir="5400000">
+              <a:srgbClr val="000000">
+                <a:alpha val="12000"/>
+              </a:srgbClr>
+            </a:outerShdw>
+          </a:effectLst>
+        </p:spPr>
+      </p:sp>
+      <p:pic>
+        <p:nvPicPr>
+          <p:cNvPr id="3" name="Image 0" descr="preencoded.png">    </p:cNvPr>
+          <p:cNvPicPr>
+            <a:picLocks noChangeAspect="1"/>
+          </p:cNvPicPr>
+          <p:nvPr/>
+        </p:nvPicPr>
+        <p:blipFill>
+          <a:blip r:embed="rId1"/>
+          <a:stretch>
+            <a:fillRect/>
+          </a:stretch>
+        </p:blipFill>
+        <p:spPr>
+          <a:xfrm>
+            <a:off x="594360" y="521208"/>
+            <a:ext cx="256032" cy="256032"/>
+          </a:xfrm>
+          <a:prstGeom prst="rect">
+            <a:avLst/>
+          </a:prstGeom>
+        </p:spPr>
+      </p:pic>
+      <p:sp>
+        <p:nvSpPr>
+          <p:cNvPr id="4" name="Text 1"/>
+          <p:cNvSpPr/>
+          <p:nvPr/>
+        </p:nvSpPr>
+        <p:spPr>
+          <a:xfrm>
+            <a:off x="1143000" y="329184"/>
+            <a:ext cx="7498080" cy="603504"/>
+          </a:xfrm>
+          <a:prstGeom prst="rect">
+            <a:avLst/>
+          </a:prstGeom>
+          <a:noFill/>
+          <a:ln/>
+        </p:spPr>
+        <p:txBody>
+          <a:bodyPr wrap="square" lIns="0" tIns="0" rIns="0" bIns="0" rtlCol="0" anchor="ctr"/>
+          <a:lstStyle/>
+          <a:p>
+            <a:pPr indent="0" marL="0">
+              <a:buNone/>
+            </a:pPr>
+            <a:r>
+              <a:rPr lang="en-US" sz="2600" b="1" dirty="0">
+                <a:solidFill>
+                  <a:srgbClr val="1F2937"/>
+                </a:solidFill>
+                <a:latin typeface="Arial" pitchFamily="34" charset="0"/>
+                <a:ea typeface="Arial" pitchFamily="34" charset="-122"/>
+                <a:cs typeface="Arial" pitchFamily="34" charset="-120"/>
+              </a:rPr>
+              <a:t>Key takeaways</a:t>
+            </a:r>
+            <a:endParaRPr lang="en-US" sz="2600" dirty="0"/>
+          </a:p>
+        </p:txBody>
+      </p:sp>
+      <p:sp>
+        <p:nvSpPr>
+          <p:cNvPr id="5" name="Shape 2"/>
+          <p:cNvSpPr/>
+          <p:nvPr/>
+        </p:nvSpPr>
+        <p:spPr>
+          <a:xfrm>
+            <a:off x="457200" y="1325880"/>
+            <a:ext cx="8229600" cy="1207008"/>
+          </a:xfrm>
+          <a:prstGeom prst="roundRect">
+            <a:avLst>
+              <a:gd name="adj" fmla="val 6061"/>
+            </a:avLst>
+          </a:prstGeom>
+          <a:solidFill>
+            <a:srgbClr val="F1F5F9"/>
+          </a:solidFill>
+          <a:ln/>
+          <a:effectLst>
+            <a:outerShdw sx="100000" sy="100000" kx="0" ky="0" algn="bl" rotWithShape="0" blurRad="76200" dist="25400" dir="5400000">
+              <a:srgbClr val="000000">
+                <a:alpha val="12000"/>
+              </a:srgbClr>
+            </a:outerShdw>
+          </a:effectLst>
+        </p:spPr>
+      </p:sp>
+      <p:sp>
+        <p:nvSpPr>
+          <p:cNvPr id="6" name="Text 3"/>
+          <p:cNvSpPr/>
+          <p:nvPr/>
+        </p:nvSpPr>
+        <p:spPr>
+          <a:xfrm>
+            <a:off x="731520" y="1435608"/>
+            <a:ext cx="7680960" cy="987552"/>
+          </a:xfrm>
+          <a:prstGeom prst="rect">
+            <a:avLst/>
+          </a:prstGeom>
+          <a:noFill/>
+          <a:ln/>
+        </p:spPr>
+        <p:txBody>
+          <a:bodyPr wrap="square" lIns="0" tIns="0" rIns="0" bIns="0" rtlCol="0" anchor="t">
+            <a:normAutofit/>
+          </a:bodyPr>
+          <a:lstStyle/>
+          <a:p>
+            <a:pPr marL="342900" indent="-342900">
+              <a:spcAft>
+                <a:spcPts val="600"/>
+              </a:spcAft>
+              <a:buSzPct val="100000"/>
+              <a:buChar char="•"/>
+            </a:pPr>
+            <a:r>
+              <a:rPr lang="en-US" sz="1400" dirty="0">
+                <a:solidFill>
+                  <a:srgbClr val="1F2937"/>
+                </a:solidFill>
+                <a:latin typeface="Calibri" pitchFamily="34" charset="0"/>
+                <a:ea typeface="Calibri" pitchFamily="34" charset="-122"/>
+                <a:cs typeface="Calibri" pitchFamily="34" charset="-120"/>
+              </a:rPr>
+              <a:t>Never build interpreter strings from untrusted input</a:t>
+            </a:r>
+            <a:endParaRPr lang="en-US" sz="1400" dirty="0"/>
+          </a:p>
+          <a:p>
+            <a:pPr marL="342900" indent="-342900">
+              <a:spcAft>
+                <a:spcPts val="600"/>
+              </a:spcAft>
+              <a:buSzPct val="100000"/>
+              <a:buChar char="•"/>
+            </a:pPr>
+            <a:r>
+              <a:rPr lang="en-US" sz="1400" dirty="0">
+                <a:solidFill>
+                  <a:srgbClr val="1F2937"/>
+                </a:solidFill>
+                <a:latin typeface="Calibri" pitchFamily="34" charset="0"/>
+                <a:ea typeface="Calibri" pitchFamily="34" charset="-122"/>
+                <a:cs typeface="Calibri" pitchFamily="34" charset="-120"/>
+              </a:rPr>
+              <a:t>Parameterize first; validate as defense-in-depth</a:t>
+            </a:r>
+            <a:endParaRPr lang="en-US" sz="1400" dirty="0"/>
+          </a:p>
+          <a:p>
+            <a:pPr marL="342900" indent="-342900">
+              <a:spcAft>
+                <a:spcPts val="600"/>
+              </a:spcAft>
+              <a:buSzPct val="100000"/>
+              <a:buChar char="•"/>
+            </a:pPr>
+            <a:r>
+              <a:rPr lang="en-US" sz="1400" dirty="0">
+                <a:solidFill>
+                  <a:srgbClr val="1F2937"/>
+                </a:solidFill>
+                <a:latin typeface="Calibri" pitchFamily="34" charset="0"/>
+                <a:ea typeface="Calibri" pitchFamily="34" charset="-122"/>
+                <a:cs typeface="Calibri" pitchFamily="34" charset="-120"/>
+              </a:rPr>
+              <a:t>Injection = data treated as code</a:t>
+            </a:r>
+            <a:endParaRPr lang="en-US" sz="1400" dirty="0"/>
+          </a:p>
+        </p:txBody>
+      </p:sp>
+      <p:sp>
+        <p:nvSpPr>
+          <p:cNvPr id="7" name="Text 4"/>
+          <p:cNvSpPr/>
+          <p:nvPr/>
+        </p:nvSpPr>
+        <p:spPr>
+          <a:xfrm>
+            <a:off x="457200" y="4800600"/>
+            <a:ext cx="6949440" cy="274320"/>
+          </a:xfrm>
+          <a:prstGeom prst="rect">
+            <a:avLst/>
+          </a:prstGeom>
+          <a:noFill/>
+          <a:ln/>
+        </p:spPr>
+        <p:txBody>
+          <a:bodyPr wrap="square" lIns="0" tIns="0" rIns="0" bIns="0" rtlCol="0" anchor="ctr"/>
+          <a:lstStyle/>
+          <a:p>
+            <a:pPr indent="0" marL="0">
+              <a:buNone/>
+            </a:pPr>
+            <a:r>
+              <a:rPr lang="en-US" sz="900" dirty="0">
+                <a:solidFill>
+                  <a:srgbClr val="64748B"/>
+                </a:solidFill>
+                <a:latin typeface="Calibri" pitchFamily="34" charset="0"/>
+                <a:ea typeface="Calibri" pitchFamily="34" charset="-122"/>
+                <a:cs typeface="Calibri" pitchFamily="34" charset="-120"/>
+              </a:rPr>
+              <a:t>Software Security · Week 4</a:t>
+            </a:r>
+            <a:endParaRPr lang="en-US" sz="900" dirty="0"/>
+          </a:p>
+        </p:txBody>
+      </p:sp>
+      <p:pic>
+        <p:nvPicPr>
+          <p:cNvPr id="8" name="Image 1" descr="/Users/pop7/Library/CloudStorage/OneDrive-MonsterConnectCo.,Ltd/Lecture/KOSEN69 - software-security/slides/pptx/assets/logo-small.png">    </p:cNvPr>
+          <p:cNvPicPr>
+            <a:picLocks noChangeAspect="1"/>
+          </p:cNvPicPr>
+          <p:nvPr/>
+        </p:nvPicPr>
+        <p:blipFill>
+          <a:blip r:embed="rId2"/>
+          <a:stretch>
+            <a:fillRect/>
+          </a:stretch>
+        </p:blipFill>
+        <p:spPr>
+          <a:xfrm>
+            <a:off x="7882128" y="4700016"/>
+            <a:ext cx="768096" cy="356616"/>
+          </a:xfrm>
+          <a:prstGeom prst="rect">
+            <a:avLst/>
+          </a:prstGeom>
+        </p:spPr>
+      </p:pic>
+    </p:spTree>
+  </p:cSld>
+  <p:clrMapOvr>
+    <a:masterClrMapping/>
+  </p:clrMapOvr>
+</p:sld>
+</file>
+
+<file path=ppt/slides/slide22.xml><?xml version="1.0" encoding="utf-8"?>
+<p:sld xmlns:a="http://schemas.openxmlformats.org/drawingml/2006/main" xmlns:r="http://schemas.openxmlformats.org/officeDocument/2006/relationships" xmlns:p="http://schemas.openxmlformats.org/presentationml/2006/main">
+  <p:cSld name="Slide 22">
+    <p:bg>
+      <p:bgPr>
+        <a:solidFill>
+          <a:srgbClr val="FFFFFF"/>
+        </a:solidFill>
+      </p:bgPr>
+    </p:bg>
+    <p:spTree>
+      <p:nvGrpSpPr>
+        <p:cNvPr id="1" name=""/>
+        <p:cNvGrpSpPr/>
+        <p:nvPr/>
+      </p:nvGrpSpPr>
+      <p:grpSpPr>
+        <a:xfrm>
+          <a:off x="0" y="0"/>
+          <a:ext cx="0" cy="0"/>
+          <a:chOff x="0" y="0"/>
+          <a:chExt cx="0" cy="0"/>
+        </a:xfrm>
+      </p:grpSpPr>
+      <p:sp>
+        <p:nvSpPr>
+          <p:cNvPr id="2" name="Text 0"/>
+          <p:cNvSpPr/>
+          <p:nvPr/>
+        </p:nvSpPr>
+        <p:spPr>
+          <a:xfrm>
+            <a:off x="640080" y="1737360"/>
+            <a:ext cx="7863840" cy="1097280"/>
+          </a:xfrm>
+          <a:prstGeom prst="rect">
+            <a:avLst/>
+          </a:prstGeom>
+          <a:noFill/>
+          <a:ln/>
+        </p:spPr>
+        <p:txBody>
+          <a:bodyPr wrap="square" lIns="0" tIns="0" rIns="0" bIns="0" rtlCol="0" anchor="ctr"/>
+          <a:lstStyle/>
+          <a:p>
+            <a:pPr indent="0" marL="0">
+              <a:buNone/>
+            </a:pPr>
+            <a:r>
+              <a:rPr lang="en-US" sz="4600" b="1" dirty="0">
+                <a:solidFill>
+                  <a:srgbClr val="1F2937"/>
+                </a:solidFill>
+                <a:latin typeface="Arial" pitchFamily="34" charset="0"/>
+                <a:ea typeface="Arial" pitchFamily="34" charset="-122"/>
+                <a:cs typeface="Arial" pitchFamily="34" charset="-120"/>
+              </a:rPr>
+              <a:t>Questions?</a:t>
+            </a:r>
+            <a:endParaRPr lang="en-US" sz="4600" dirty="0"/>
+          </a:p>
+        </p:txBody>
+      </p:sp>
+      <p:sp>
+        <p:nvSpPr>
+          <p:cNvPr id="3" name="Text 1"/>
+          <p:cNvSpPr/>
+          <p:nvPr/>
+        </p:nvSpPr>
+        <p:spPr>
+          <a:xfrm>
+            <a:off x="658368" y="2834640"/>
+            <a:ext cx="7863840" cy="731520"/>
+          </a:xfrm>
+          <a:prstGeom prst="rect">
+            <a:avLst/>
+          </a:prstGeom>
+          <a:noFill/>
+          <a:ln/>
+        </p:spPr>
+        <p:txBody>
+          <a:bodyPr wrap="square" lIns="0" tIns="0" rIns="0" bIns="0" rtlCol="0" anchor="ctr"/>
+          <a:lstStyle/>
+          <a:p>
+            <a:pPr indent="0" marL="0">
+              <a:buNone/>
+            </a:pPr>
+            <a:r>
+              <a:rPr lang="en-US" sz="1800" dirty="0">
+                <a:solidFill>
+                  <a:srgbClr val="E35205"/>
+                </a:solidFill>
+                <a:latin typeface="Calibri" pitchFamily="34" charset="0"/>
+                <a:ea typeface="Calibri" pitchFamily="34" charset="-122"/>
+                <a:cs typeface="Calibri" pitchFamily="34" charset="-120"/>
+              </a:rPr>
+              <a:t>Next week: XSS &amp; client-side risks</a:t>
+            </a:r>
+            <a:endParaRPr lang="en-US" sz="1800" dirty="0"/>
+          </a:p>
+        </p:txBody>
+      </p:sp>
+      <p:pic>
+        <p:nvPicPr>
+          <p:cNvPr id="4" name="Image 0" descr="/Users/pop7/Library/CloudStorage/OneDrive-MonsterConnectCo.,Ltd/Lecture/KOSEN69 - software-security/slides/pptx/assets/logo-small.png">    </p:cNvPr>
+          <p:cNvPicPr>
+            <a:picLocks noChangeAspect="1"/>
+          </p:cNvPicPr>
+          <p:nvPr/>
+        </p:nvPicPr>
+        <p:blipFill>
+          <a:blip r:embed="rId1"/>
           <a:stretch>
             <a:fillRect/>
           </a:stretch>
@@ -6366,7 +8069,9 @@
           <a:ln/>
         </p:spPr>
         <p:txBody>
-          <a:bodyPr wrap="square" lIns="0" tIns="0" rIns="0" bIns="0" rtlCol="0" anchor="t"/>
+          <a:bodyPr wrap="square" lIns="0" tIns="0" rIns="0" bIns="0" rtlCol="0" anchor="t">
+            <a:normAutofit/>
+          </a:bodyPr>
           <a:lstStyle/>
           <a:p>
             <a:pPr marL="342900" indent="-342900">
@@ -6658,7 +8363,9 @@
           <a:ln/>
         </p:spPr>
         <p:txBody>
-          <a:bodyPr wrap="square" lIns="0" tIns="0" rIns="0" bIns="0" rtlCol="0" anchor="ctr"/>
+          <a:bodyPr wrap="square" lIns="0" tIns="0" rIns="0" bIns="0" rtlCol="0" anchor="ctr">
+            <a:normAutofit/>
+          </a:bodyPr>
           <a:lstStyle/>
           <a:p>
             <a:pPr indent="0" marL="0">
@@ -6726,7 +8433,9 @@
           <a:ln/>
         </p:spPr>
         <p:txBody>
-          <a:bodyPr wrap="square" lIns="0" tIns="0" rIns="0" bIns="0" rtlCol="0" anchor="t"/>
+          <a:bodyPr wrap="square" lIns="0" tIns="0" rIns="0" bIns="0" rtlCol="0" anchor="t">
+            <a:normAutofit/>
+          </a:bodyPr>
           <a:lstStyle/>
           <a:p>
             <a:pPr marL="342900" indent="-342900">
@@ -6987,11 +8696,11 @@
         <p:spPr>
           <a:xfrm>
             <a:off x="457200" y="1325880"/>
-            <a:ext cx="8229600" cy="786384"/>
+            <a:ext cx="8229600" cy="713232"/>
           </a:xfrm>
           <a:prstGeom prst="roundRect">
             <a:avLst>
-              <a:gd name="adj" fmla="val 6977"/>
+              <a:gd name="adj" fmla="val 7692"/>
             </a:avLst>
           </a:prstGeom>
           <a:solidFill>
@@ -7014,7 +8723,7 @@
         <p:spPr>
           <a:xfrm>
             <a:off x="640080" y="1399032"/>
-            <a:ext cx="7863840" cy="640080"/>
+            <a:ext cx="7863840" cy="566928"/>
           </a:xfrm>
           <a:prstGeom prst="rect">
             <a:avLst/>
@@ -7023,7 +8732,9 @@
           <a:ln/>
         </p:spPr>
         <p:txBody>
-          <a:bodyPr wrap="square" lIns="0" tIns="0" rIns="0" bIns="0" rtlCol="0" anchor="t"/>
+          <a:bodyPr wrap="square" lIns="0" tIns="0" rIns="0" bIns="0" rtlCol="0" anchor="t">
+            <a:normAutofit/>
+          </a:bodyPr>
           <a:lstStyle/>
           <a:p>
             <a:pPr indent="0" marL="0">
@@ -7038,7 +8749,7 @@
                 <a:ea typeface="Courier New" pitchFamily="34" charset="-122"/>
                 <a:cs typeface="Courier New" pitchFamily="34" charset="-120"/>
               </a:rPr>
-              <a:t>-- vulnerable</a:t>
+              <a:t>-- vulnerable (this week's app.py, SQLite)</a:t>
             </a:r>
             <a:endParaRPr lang="en-US" sz="1150" dirty="0"/>
           </a:p>
@@ -7055,7 +8766,7 @@
                 <a:ea typeface="Courier New" pitchFamily="34" charset="-122"/>
                 <a:cs typeface="Courier New" pitchFamily="34" charset="-120"/>
               </a:rPr>
-              <a:t>"SELECT * FROM users WHERE name = '" + input + "'"</a:t>
+              <a:t>"SELECT * FROM users WHERE username = '" + input + "'"</a:t>
             </a:r>
             <a:endParaRPr lang="en-US" sz="1150" dirty="0"/>
           </a:p>
@@ -7069,12 +8780,12 @@
         </p:nvSpPr>
         <p:spPr>
           <a:xfrm>
-            <a:off x="457200" y="2276856"/>
-            <a:ext cx="8229600" cy="1207008"/>
+            <a:off x="457200" y="2203704"/>
+            <a:ext cx="8229600" cy="1609344"/>
           </a:xfrm>
           <a:prstGeom prst="roundRect">
             <a:avLst>
-              <a:gd name="adj" fmla="val 6061"/>
+              <a:gd name="adj" fmla="val 4545"/>
             </a:avLst>
           </a:prstGeom>
           <a:solidFill>
@@ -7098,8 +8809,8 @@
         </p:nvSpPr>
         <p:spPr>
           <a:xfrm>
-            <a:off x="731520" y="2386584"/>
-            <a:ext cx="7680960" cy="987552"/>
+            <a:off x="731520" y="2313432"/>
+            <a:ext cx="7680960" cy="1389888"/>
           </a:xfrm>
           <a:prstGeom prst="rect">
             <a:avLst/>
@@ -7108,7 +8819,9 @@
           <a:ln/>
         </p:spPr>
         <p:txBody>
-          <a:bodyPr wrap="square" lIns="0" tIns="0" rIns="0" bIns="0" rtlCol="0" anchor="t"/>
+          <a:bodyPr wrap="square" lIns="0" tIns="0" rIns="0" bIns="0" rtlCol="0" anchor="t">
+            <a:normAutofit/>
+          </a:bodyPr>
           <a:lstStyle/>
           <a:p>
             <a:pPr marL="342900" indent="-342900">
@@ -7148,7 +8861,7 @@
                 <a:ea typeface="Calibri" pitchFamily="34" charset="-122"/>
                 <a:cs typeface="Calibri" pitchFamily="34" charset="-120"/>
               </a:rPr>
-              <a:t>Input '; DROP TABLE users; -- → tampering</a:t>
+              <a:t>UNION-based → read other tables in one shot (today's lab)</a:t>
             </a:r>
             <a:endParaRPr lang="en-US" sz="1400" dirty="0"/>
           </a:p>
@@ -7169,7 +8882,7 @@
                 <a:ea typeface="Calibri" pitchFamily="34" charset="-122"/>
                 <a:cs typeface="Calibri" pitchFamily="34" charset="-120"/>
               </a:rPr>
-              <a:t>UNION-based → read other tables; blind → infer bit by bit</a:t>
+              <a:t>Stacked queries ('; DROP TABLE users; --) are the textbook example, but don't assume they work everywhere — Python's sqlite3 refuses multiple statements in one execute() call; this week's target raises an error instead</a:t>
             </a:r>
             <a:endParaRPr lang="en-US" sz="1400" dirty="0"/>
           </a:p>
@@ -7378,7 +9091,9 @@
           <a:ln/>
         </p:spPr>
         <p:txBody>
-          <a:bodyPr wrap="square" lIns="0" tIns="0" rIns="0" bIns="0" rtlCol="0" anchor="t"/>
+          <a:bodyPr wrap="square" lIns="0" tIns="0" rIns="0" bIns="0" rtlCol="0" anchor="t">
+            <a:normAutofit/>
+          </a:bodyPr>
           <a:lstStyle/>
           <a:p>
             <a:pPr indent="0" marL="0">
@@ -7408,11 +9123,11 @@
         <p:spPr>
           <a:xfrm>
             <a:off x="457200" y="1965960"/>
-            <a:ext cx="8229600" cy="530352"/>
+            <a:ext cx="8229600" cy="493776"/>
           </a:xfrm>
           <a:prstGeom prst="roundRect">
             <a:avLst>
-              <a:gd name="adj" fmla="val 10345"/>
+              <a:gd name="adj" fmla="val 11111"/>
             </a:avLst>
           </a:prstGeom>
           <a:solidFill>
@@ -7435,7 +9150,7 @@
         <p:spPr>
           <a:xfrm>
             <a:off x="640080" y="2039112"/>
-            <a:ext cx="7863840" cy="384048"/>
+            <a:ext cx="7863840" cy="347472"/>
           </a:xfrm>
           <a:prstGeom prst="rect">
             <a:avLst/>
@@ -7444,7 +9159,9 @@
           <a:ln/>
         </p:spPr>
         <p:txBody>
-          <a:bodyPr wrap="square" lIns="0" tIns="0" rIns="0" bIns="0" rtlCol="0" anchor="t"/>
+          <a:bodyPr wrap="square" lIns="0" tIns="0" rIns="0" bIns="0" rtlCol="0" anchor="t">
+            <a:normAutofit/>
+          </a:bodyPr>
           <a:lstStyle/>
           <a:p>
             <a:pPr indent="0" marL="0">
@@ -7459,7 +9176,7 @@
                 <a:ea typeface="Courier New" pitchFamily="34" charset="-122"/>
                 <a:cs typeface="Courier New" pitchFamily="34" charset="-120"/>
               </a:rPr>
-              <a:t>' OR 1 = 1 LIMIT 1; -- a</a:t>
+              <a:t>alice'--</a:t>
             </a:r>
             <a:endParaRPr lang="en-US" sz="1150" dirty="0"/>
           </a:p>
@@ -7473,12 +9190,12 @@
         </p:nvSpPr>
         <p:spPr>
           <a:xfrm>
-            <a:off x="457200" y="2660904"/>
-            <a:ext cx="8229600" cy="530352"/>
+            <a:off x="457200" y="2624328"/>
+            <a:ext cx="8229600" cy="493776"/>
           </a:xfrm>
           <a:prstGeom prst="roundRect">
             <a:avLst>
-              <a:gd name="adj" fmla="val 10345"/>
+              <a:gd name="adj" fmla="val 11111"/>
             </a:avLst>
           </a:prstGeom>
           <a:solidFill>
@@ -7500,8 +9217,8 @@
         </p:nvSpPr>
         <p:spPr>
           <a:xfrm>
-            <a:off x="640080" y="2734056"/>
-            <a:ext cx="7863840" cy="384048"/>
+            <a:off x="640080" y="2697480"/>
+            <a:ext cx="7863840" cy="347472"/>
           </a:xfrm>
           <a:prstGeom prst="rect">
             <a:avLst/>
@@ -7510,7 +9227,9 @@
           <a:ln/>
         </p:spPr>
         <p:txBody>
-          <a:bodyPr wrap="square" lIns="0" tIns="0" rIns="0" bIns="0" rtlCol="0" anchor="t"/>
+          <a:bodyPr wrap="square" lIns="0" tIns="0" rIns="0" bIns="0" rtlCol="0" anchor="t">
+            <a:normAutofit/>
+          </a:bodyPr>
           <a:lstStyle/>
           <a:p>
             <a:pPr indent="0" marL="0">
@@ -7525,7 +9244,7 @@
                 <a:ea typeface="Courier New" pitchFamily="34" charset="-122"/>
                 <a:cs typeface="Courier New" pitchFamily="34" charset="-120"/>
               </a:rPr>
-              <a:t>SELECT * FROM users WHERE user = '' OR 1 = 1 LIMIT 1; -- a AND password = '';</a:t>
+              <a:t>SELECT * FROM users WHERE username = 'alice'--' AND password = '...';</a:t>
             </a:r>
             <a:endParaRPr lang="en-US" sz="1150" dirty="0"/>
           </a:p>
@@ -7539,12 +9258,12 @@
         </p:nvSpPr>
         <p:spPr>
           <a:xfrm>
-            <a:off x="457200" y="3355848"/>
-            <a:ext cx="8229600" cy="1207008"/>
+            <a:off x="457200" y="3282696"/>
+            <a:ext cx="8229600" cy="896112"/>
           </a:xfrm>
           <a:prstGeom prst="roundRect">
             <a:avLst>
-              <a:gd name="adj" fmla="val 6061"/>
+              <a:gd name="adj" fmla="val 8163"/>
             </a:avLst>
           </a:prstGeom>
           <a:solidFill>
@@ -7568,8 +9287,8 @@
         </p:nvSpPr>
         <p:spPr>
           <a:xfrm>
-            <a:off x="731520" y="3465576"/>
-            <a:ext cx="7680960" cy="987552"/>
+            <a:off x="731520" y="3392424"/>
+            <a:ext cx="7680960" cy="676656"/>
           </a:xfrm>
           <a:prstGeom prst="rect">
             <a:avLst/>
@@ -7578,7 +9297,9 @@
           <a:ln/>
         </p:spPr>
         <p:txBody>
-          <a:bodyPr wrap="square" lIns="0" tIns="0" rIns="0" bIns="0" rtlCol="0" anchor="t"/>
+          <a:bodyPr wrap="square" lIns="0" tIns="0" rIns="0" bIns="0" rtlCol="0" anchor="t">
+            <a:normAutofit/>
+          </a:bodyPr>
           <a:lstStyle/>
           <a:p>
             <a:pPr marL="342900" indent="-342900">
@@ -7597,7 +9318,7 @@
                 <a:ea typeface="Calibri" pitchFamily="34" charset="-122"/>
                 <a:cs typeface="Calibri" pitchFamily="34" charset="-120"/>
               </a:rPr>
-              <a:t>' closes the string · OR 1=1 always true</a:t>
+              <a:t>' closes the string literal you're injected into</a:t>
             </a:r>
             <a:endParaRPr lang="en-US" sz="1400" dirty="0"/>
           </a:p>
@@ -7618,28 +9339,7 @@
                 <a:ea typeface="Calibri" pitchFamily="34" charset="-122"/>
                 <a:cs typeface="Calibri" pitchFamily="34" charset="-120"/>
               </a:rPr>
-              <a:t>LIMIT 1 → satisfies a num_rows == 1 check</a:t>
-            </a:r>
-            <a:endParaRPr lang="en-US" sz="1400" dirty="0"/>
-          </a:p>
-          <a:p>
-            <a:pPr marL="342900" indent="-342900">
-              <a:spcAft>
-                <a:spcPts val="600"/>
-              </a:spcAft>
-              <a:buSzPct val="100000"/>
-              <a:buChar char="•"/>
-            </a:pPr>
-            <a:r>
-              <a:rPr lang="en-US" sz="1400" dirty="0">
-                <a:solidFill>
-                  <a:srgbClr val="1F2937"/>
-                </a:solidFill>
-                <a:latin typeface="Calibri" pitchFamily="34" charset="0"/>
-                <a:ea typeface="Calibri" pitchFamily="34" charset="-122"/>
-                <a:cs typeface="Calibri" pitchFamily="34" charset="-120"/>
-              </a:rPr>
-              <a:t>-- a comments out the password check (note the space!)</a:t>
+              <a:t>-- comments out everything after it, including the password check</a:t>
             </a:r>
             <a:endParaRPr lang="en-US" sz="1400" dirty="0"/>
           </a:p>
@@ -7824,7 +9524,7 @@
                 <a:ea typeface="Arial" pitchFamily="34" charset="-122"/>
                 <a:cs typeface="Arial" pitchFamily="34" charset="-120"/>
               </a:rPr>
-              <a:t>Real-world impact</a:t>
+              <a:t>Auth bypass — anatomy of one payload (cont.)</a:t>
             </a:r>
             <a:endParaRPr lang="en-US" sz="2600" dirty="0"/>
           </a:p>
@@ -7839,11 +9539,11 @@
         <p:spPr>
           <a:xfrm>
             <a:off x="457200" y="1325880"/>
-            <a:ext cx="8229600" cy="1517904"/>
+            <a:ext cx="8229600" cy="987552"/>
           </a:xfrm>
           <a:prstGeom prst="roundRect">
             <a:avLst>
-              <a:gd name="adj" fmla="val 4819"/>
+              <a:gd name="adj" fmla="val 7407"/>
             </a:avLst>
           </a:prstGeom>
           <a:solidFill>
@@ -7868,7 +9568,7 @@
         <p:spPr>
           <a:xfrm>
             <a:off x="731520" y="1435608"/>
-            <a:ext cx="7680960" cy="1298448"/>
+            <a:ext cx="7680960" cy="768096"/>
           </a:xfrm>
           <a:prstGeom prst="rect">
             <a:avLst/>
@@ -7877,7 +9577,9 @@
           <a:ln/>
         </p:spPr>
         <p:txBody>
-          <a:bodyPr wrap="square" lIns="0" tIns="0" rIns="0" bIns="0" rtlCol="0" anchor="t"/>
+          <a:bodyPr wrap="square" lIns="0" tIns="0" rIns="0" bIns="0" rtlCol="0" anchor="t">
+            <a:normAutofit/>
+          </a:bodyPr>
           <a:lstStyle/>
           <a:p>
             <a:pPr marL="342900" indent="-342900">
@@ -7896,70 +9598,7 @@
                 <a:ea typeface="Calibri" pitchFamily="34" charset="-122"/>
                 <a:cs typeface="Calibri" pitchFamily="34" charset="-120"/>
               </a:rPr>
-              <a:t>Equifax (2017): unvalidated HTTP header → Struts RCE (CVE-2017-5638); 147M people, ~$700M settlement</a:t>
-            </a:r>
-            <a:endParaRPr lang="en-US" sz="1400" dirty="0"/>
-          </a:p>
-          <a:p>
-            <a:pPr marL="342900" indent="-342900">
-              <a:spcAft>
-                <a:spcPts val="600"/>
-              </a:spcAft>
-              <a:buSzPct val="100000"/>
-              <a:buChar char="•"/>
-            </a:pPr>
-            <a:r>
-              <a:rPr lang="en-US" sz="1400" dirty="0">
-                <a:solidFill>
-                  <a:srgbClr val="1F2937"/>
-                </a:solidFill>
-                <a:latin typeface="Calibri" pitchFamily="34" charset="0"/>
-                <a:ea typeface="Calibri" pitchFamily="34" charset="-122"/>
-                <a:cs typeface="Calibri" pitchFamily="34" charset="-120"/>
-              </a:rPr>
-              <a:t>Heartland (2008): SQLi into payment systems → 130M+ cards</a:t>
-            </a:r>
-            <a:endParaRPr lang="en-US" sz="1400" dirty="0"/>
-          </a:p>
-          <a:p>
-            <a:pPr marL="342900" indent="-342900">
-              <a:spcAft>
-                <a:spcPts val="600"/>
-              </a:spcAft>
-              <a:buSzPct val="100000"/>
-              <a:buChar char="•"/>
-            </a:pPr>
-            <a:r>
-              <a:rPr lang="en-US" sz="1400" dirty="0">
-                <a:solidFill>
-                  <a:srgbClr val="1F2937"/>
-                </a:solidFill>
-                <a:latin typeface="Calibri" pitchFamily="34" charset="0"/>
-                <a:ea typeface="Calibri" pitchFamily="34" charset="-122"/>
-                <a:cs typeface="Calibri" pitchFamily="34" charset="-120"/>
-              </a:rPr>
-              <a:t>Bulgaria: data on almost all adults leaked via SQLi</a:t>
-            </a:r>
-            <a:endParaRPr lang="en-US" sz="1400" dirty="0"/>
-          </a:p>
-          <a:p>
-            <a:pPr marL="342900" indent="-342900">
-              <a:spcAft>
-                <a:spcPts val="600"/>
-              </a:spcAft>
-              <a:buSzPct val="100000"/>
-              <a:buChar char="•"/>
-            </a:pPr>
-            <a:r>
-              <a:rPr lang="en-US" sz="1400" dirty="0">
-                <a:solidFill>
-                  <a:srgbClr val="1F2937"/>
-                </a:solidFill>
-                <a:latin typeface="Calibri" pitchFamily="34" charset="0"/>
-                <a:ea typeface="Calibri" pitchFamily="34" charset="-122"/>
-                <a:cs typeface="Calibri" pitchFamily="34" charset="-120"/>
-              </a:rPr>
-              <a:t>Impact: data leak/modification, full DB control, DoS, reputation</a:t>
+              <a:t>No trailing space, no LIMIT trick needed — this app is SQLite via fetchone(), not a MySQL row-count gate; don't carry over MySQL-specific folklore ("needs a space after --") — that's a different engine's quirk</a:t>
             </a:r>
             <a:endParaRPr lang="en-US" sz="1400" dirty="0"/>
           </a:p>
@@ -8144,7 +9783,7 @@
                 <a:ea typeface="Arial" pitchFamily="34" charset="-122"/>
                 <a:cs typeface="Arial" pitchFamily="34" charset="-120"/>
               </a:rPr>
-              <a:t>Validate: allow-list, not block-list</a:t>
+              <a:t>Real-world impact</a:t>
             </a:r>
             <a:endParaRPr lang="en-US" sz="2600" dirty="0"/>
           </a:p>
@@ -8159,11 +9798,11 @@
         <p:spPr>
           <a:xfrm>
             <a:off x="457200" y="1325880"/>
-            <a:ext cx="8229600" cy="1517904"/>
+            <a:ext cx="8229600" cy="1719072"/>
           </a:xfrm>
           <a:prstGeom prst="roundRect">
             <a:avLst>
-              <a:gd name="adj" fmla="val 4819"/>
+              <a:gd name="adj" fmla="val 4255"/>
             </a:avLst>
           </a:prstGeom>
           <a:solidFill>
@@ -8188,7 +9827,7 @@
         <p:spPr>
           <a:xfrm>
             <a:off x="731520" y="1435608"/>
-            <a:ext cx="7680960" cy="1298448"/>
+            <a:ext cx="7680960" cy="1499616"/>
           </a:xfrm>
           <a:prstGeom prst="rect">
             <a:avLst/>
@@ -8197,7 +9836,9 @@
           <a:ln/>
         </p:spPr>
         <p:txBody>
-          <a:bodyPr wrap="square" lIns="0" tIns="0" rIns="0" bIns="0" rtlCol="0" anchor="t"/>
+          <a:bodyPr wrap="square" lIns="0" tIns="0" rIns="0" bIns="0" rtlCol="0" anchor="t">
+            <a:normAutofit/>
+          </a:bodyPr>
           <a:lstStyle/>
           <a:p>
             <a:pPr marL="342900" indent="-342900">
@@ -8216,7 +9857,7 @@
                 <a:ea typeface="Calibri" pitchFamily="34" charset="-122"/>
                 <a:cs typeface="Calibri" pitchFamily="34" charset="-120"/>
               </a:rPr>
-              <a:t>Allow-list (preferred): accept only known-good (e.g. 0–9 for a phone)</a:t>
+              <a:t>Equifax (2017): unvalidated HTTP header → Struts RCE (CVE-2017-5638); 147M people, ~$700M settlement</a:t>
             </a:r>
             <a:endParaRPr lang="en-US" sz="1400" dirty="0"/>
           </a:p>
@@ -8237,7 +9878,7 @@
                 <a:ea typeface="Calibri" pitchFamily="34" charset="-122"/>
                 <a:cs typeface="Calibri" pitchFamily="34" charset="-120"/>
               </a:rPr>
-              <a:t>Block-list: ban known-bad → bypassed by new payloads</a:t>
+              <a:t>Heartland (2008): SQLi into payment systems → 130M+ cards</a:t>
             </a:r>
             <a:endParaRPr lang="en-US" sz="1400" dirty="0"/>
           </a:p>
@@ -8258,7 +9899,7 @@
                 <a:ea typeface="Calibri" pitchFamily="34" charset="-122"/>
                 <a:cs typeface="Calibri" pitchFamily="34" charset="-120"/>
               </a:rPr>
-              <a:t>Validate type · length · range · format</a:t>
+              <a:t>Bulgaria: data on almost all adults leaked via SQLi</a:t>
             </a:r>
             <a:endParaRPr lang="en-US" sz="1400" dirty="0"/>
           </a:p>
@@ -8279,7 +9920,7 @@
                 <a:ea typeface="Calibri" pitchFamily="34" charset="-122"/>
                 <a:cs typeface="Calibri" pitchFamily="34" charset="-120"/>
               </a:rPr>
-              <a:t>Client-side for UX, server-side for security</a:t>
+              <a:t>Impact: data leak/modification, full DB control, DoS, reputation</a:t>
             </a:r>
             <a:endParaRPr lang="en-US" sz="1400" dirty="0"/>
           </a:p>
@@ -8464,7 +10105,7 @@
                 <a:ea typeface="Arial" pitchFamily="34" charset="-122"/>
                 <a:cs typeface="Arial" pitchFamily="34" charset="-120"/>
               </a:rPr>
-              <a:t>Demo / attack surface</a:t>
+              <a:t>Validate: allow-list, not block-list</a:t>
             </a:r>
             <a:endParaRPr lang="en-US" sz="2600" dirty="0"/>
           </a:p>
@@ -8479,11 +10120,11 @@
         <p:spPr>
           <a:xfrm>
             <a:off x="457200" y="1325880"/>
-            <a:ext cx="8229600" cy="1207008"/>
+            <a:ext cx="8229600" cy="1517904"/>
           </a:xfrm>
           <a:prstGeom prst="roundRect">
             <a:avLst>
-              <a:gd name="adj" fmla="val 6061"/>
+              <a:gd name="adj" fmla="val 4819"/>
             </a:avLst>
           </a:prstGeom>
           <a:solidFill>
@@ -8508,7 +10149,7 @@
         <p:spPr>
           <a:xfrm>
             <a:off x="731520" y="1435608"/>
-            <a:ext cx="7680960" cy="987552"/>
+            <a:ext cx="7680960" cy="1298448"/>
           </a:xfrm>
           <a:prstGeom prst="rect">
             <a:avLst/>
@@ -8517,7 +10158,9 @@
           <a:ln/>
         </p:spPr>
         <p:txBody>
-          <a:bodyPr wrap="square" lIns="0" tIns="0" rIns="0" bIns="0" rtlCol="0" anchor="t"/>
+          <a:bodyPr wrap="square" lIns="0" tIns="0" rIns="0" bIns="0" rtlCol="0" anchor="t">
+            <a:normAutofit/>
+          </a:bodyPr>
           <a:lstStyle/>
           <a:p>
             <a:pPr marL="342900" indent="-342900">
@@ -8536,7 +10179,7 @@
                 <a:ea typeface="Calibri" pitchFamily="34" charset="-122"/>
                 <a:cs typeface="Calibri" pitchFamily="34" charset="-120"/>
               </a:rPr>
-              <a:t>Login forms, search boxes, URL params, JSON fields, headers</a:t>
+              <a:t>Allow-list (preferred): accept only known-good (e.g. 0–9 for a phone)</a:t>
             </a:r>
             <a:endParaRPr lang="en-US" sz="1400" dirty="0"/>
           </a:p>
@@ -8557,7 +10200,7 @@
                 <a:ea typeface="Calibri" pitchFamily="34" charset="-122"/>
                 <a:cs typeface="Calibri" pitchFamily="34" charset="-120"/>
               </a:rPr>
-              <a:t>Error messages leak schema → enumeration</a:t>
+              <a:t>Block-list: ban known-bad → bypassed by new payloads</a:t>
             </a:r>
             <a:endParaRPr lang="en-US" sz="1400" dirty="0"/>
           </a:p>
@@ -8578,7 +10221,28 @@
                 <a:ea typeface="Calibri" pitchFamily="34" charset="-122"/>
                 <a:cs typeface="Calibri" pitchFamily="34" charset="-120"/>
               </a:rPr>
-              <a:t>Tooling: Burp Suite, sqlmap (sandbox only)</a:t>
+              <a:t>Validate type · length · range · format</a:t>
+            </a:r>
+            <a:endParaRPr lang="en-US" sz="1400" dirty="0"/>
+          </a:p>
+          <a:p>
+            <a:pPr marL="342900" indent="-342900">
+              <a:spcAft>
+                <a:spcPts val="600"/>
+              </a:spcAft>
+              <a:buSzPct val="100000"/>
+              <a:buChar char="•"/>
+            </a:pPr>
+            <a:r>
+              <a:rPr lang="en-US" sz="1400" dirty="0">
+                <a:solidFill>
+                  <a:srgbClr val="1F2937"/>
+                </a:solidFill>
+                <a:latin typeface="Calibri" pitchFamily="34" charset="0"/>
+                <a:ea typeface="Calibri" pitchFamily="34" charset="-122"/>
+                <a:cs typeface="Calibri" pitchFamily="34" charset="-120"/>
+              </a:rPr>
+              <a:t>Client-side for UX, server-side for security</a:t>
             </a:r>
             <a:endParaRPr lang="en-US" sz="1400" dirty="0"/>
           </a:p>

--- a/slides/pptx/week04.pptx
+++ b/slides/pptx/week04.pptx
@@ -27,9 +27,11 @@
     <p:sldId id="275" r:id="rId21"/>
     <p:sldId id="276" r:id="rId22"/>
     <p:sldId id="277" r:id="rId23"/>
+    <p:sldId id="278" r:id="rId24"/>
+    <p:sldId id="279" r:id="rId25"/>
   </p:sldIdLst>
   <p:notesMasterIdLst>
-    <p:notesMasterId r:id="rId24"/>
+    <p:notesMasterId r:id="rId26"/>
   </p:notesMasterIdLst>
   <p:sldSz cx="9144000" cy="5143500"/>
   <p:notesSz cx="5143500" cy="9144000"/>
@@ -611,7 +613,7 @@
           <a:p>
             <a:r>
               <a:rPr lang="en-US" dirty="0"/>
-              <a:t>Point out injection isn't just login boxes — any input reaching an interpreter. Note verbose DB errors are a gift to attackers (schema leakage). Be clear Burp/sqlmap are industry-awareness, not something this week's worksheet has them install — every task here is a plain URL/curl payload. ~3 min.</a:t>
+              <a:t>Key principle that recurs all term. Block-lists always lose (attackers invent new payloads); allow-lists define what's acceptable. Emphasize: validation is defense-in-depth, NOT the primary SQLi fix (that's parameterization — next). ~4 min.</a:t>
             </a:r>
             <a:endParaRPr lang="en-US" dirty="0"/>
           </a:p>
@@ -699,7 +701,7 @@
           <a:p>
             <a:r>
               <a:rPr lang="en-US" dirty="0"/>
-              <a:t>Same pattern, deadlier outcome (RCE = own the server, not just the DB). Walk the metacharacters: `;` chains a second command. Ask: "what does `8.8.8.8; cat /etc/passwd` run?" ~5 min.</a:t>
+              <a:t>Point out injection isn't just login boxes — any input reaching an interpreter. Note verbose DB errors are a gift to attackers (schema leakage). Be clear Burp/sqlmap are industry-awareness, not something this week's worksheet has them install — every task here is a plain URL/curl payload. ~3 min.</a:t>
             </a:r>
             <a:endParaRPr lang="en-US" dirty="0"/>
           </a:p>
@@ -787,7 +789,7 @@
           <a:p>
             <a:r>
               <a:rPr lang="en-US" dirty="0"/>
-              <a:t>Connects to W1's /upload threat model. Be precise: this app does NOT give you a working webshell today — Task 4 is a documentation exercise ("what's missing, and why does that stop RCE?"), not a live exploit. Don't imply students will pop a shell; they'll reason about the one control standing between this bug and that outcome. ~5 min.</a:t>
+              <a:t>Same pattern, deadlier outcome (RCE = own the server, not just the DB). Walk the metacharacters: `;` chains a second command. Ask: "what does `8.8.8.8; cat /etc/passwd` run?" ~5 min.</a:t>
             </a:r>
             <a:endParaRPr lang="en-US" dirty="0"/>
           </a:p>
@@ -963,7 +965,7 @@
           <a:p>
             <a:r>
               <a:rPr lang="en-US" dirty="0"/>
-              <a:t>They map every lab finding to a CWE id — these three are what this week's worksheet actually grades. CWE-434 is a quarter of the exploitation score; don't drop it from this list. ~1 min.</a:t>
+              <a:t>Connects to W1's /upload threat model. Be precise: this app does NOT give you a working webshell today — Task 4 is a documentation exercise ("what's missing, and why does that stop RCE?"), not a live exploit. Don't imply students will pop a shell; they'll reason about the one control standing between this bug and that outcome. ~5 min.</a:t>
             </a:r>
             <a:endParaRPr lang="en-US" dirty="0"/>
           </a:p>
@@ -1051,7 +1053,7 @@
           <a:p>
             <a:r>
               <a:rPr lang="en-US" dirty="0"/>
-              <a:t>The payoff. #1 message: parameterization makes data STAY data — the DB never parses it as SQL. For shells, pass an argv array, not a string. Least-privilege limits blast radius if they still get in. ~5 min.</a:t>
+              <a:t>They map every lab finding to a CWE id — these three are what this week's worksheet actually grades. CWE-434 is a quarter of the exploitation score; don't drop it from this list. ~1 min.</a:t>
             </a:r>
             <a:endParaRPr lang="en-US" dirty="0"/>
           </a:p>
@@ -1139,7 +1141,7 @@
           <a:p>
             <a:r>
               <a:rPr lang="en-US" dirty="0"/>
-              <a:t>Explain before lab: this is NOT a tiered WAF-bypass ladder — it's 4 fixed attacks against app.py, then proving solution_app.py blocks all 4 ("boss defeated" = Task 5). No filter exists in the vulnerable app to bypass; don't set that expectation. DVWA/Juice Shop remain available as optional secondary targets, not the graded game. ~3 min.</a:t>
+              <a:t>The payoff. #1 message: parameterization makes data STAY data — the DB never parses it as SQL. For shells, pass an argv array, not a string. Least-privilege limits blast radius if they still get in. ~5 min.</a:t>
             </a:r>
             <a:endParaRPr lang="en-US" dirty="0"/>
           </a:p>
@@ -1227,7 +1229,7 @@
           <a:p>
             <a:r>
               <a:rPr lang="en-US" dirty="0"/>
-              <a:t>Explain before lab: this is NOT a tiered WAF-bypass ladder — it's 4 fixed attacks against app.py, then proving solution_app.py blocks all 4 ("boss defeated" = Task 5). No filter exists in the vulnerable app to bypass; don't set that expectation. DVWA/Juice Shop remain available as optional secondary targets, not the graded game. ~3 min.</a:t>
+              <a:t>Synthesis slide — the SAME untrusted value from request.args/request.files is what feeds all three attacks just covered. Land on the closing line: escaping quotes does nothing to a semicolon in a shell, and a safe filename does nothing to SQL. Sets up "Defenses" as three separate fixes, not one. ~4 min.</a:t>
             </a:r>
             <a:endParaRPr lang="en-US" dirty="0"/>
           </a:p>
@@ -1315,7 +1317,7 @@
           <a:p>
             <a:r>
               <a:rPr lang="en-US" dirty="0"/>
-              <a:t>Logistics. Circulate with TAs. Remind: step 4 (rewrite + prove the payload now fails) is graded, not just the exploit. Also kick off the NoteVault project injection task (worksheet).</a:t>
+              <a:t>Explain before lab: this is NOT a tiered WAF-bypass ladder — it's 4 fixed attacks against app.py, then proving solution_app.py blocks all 4 ("boss defeated" = Task 5). No filter exists in the vulnerable app to bypass; don't set that expectation. DVWA/Juice Shop remain available as optional secondary targets, not the graded game. ~3 min.</a:t>
             </a:r>
             <a:endParaRPr lang="en-US" dirty="0"/>
           </a:p>
@@ -1403,7 +1405,7 @@
           <a:p>
             <a:r>
               <a:rPr lang="en-US" dirty="0"/>
-              <a:t>Logistics. Circulate with TAs. Remind: step 4 (rewrite + prove the payload now fails) is graded, not just the exploit. Also kick off the NoteVault project injection task (worksheet).</a:t>
+              <a:t>Explain before lab: this is NOT a tiered WAF-bypass ladder — it's 4 fixed attacks against app.py, then proving solution_app.py blocks all 4 ("boss defeated" = Task 5). No filter exists in the vulnerable app to bypass; don't set that expectation. DVWA/Juice Shop remain available as optional secondary targets, not the graded game. ~3 min.</a:t>
             </a:r>
             <a:endParaRPr lang="en-US" dirty="0"/>
           </a:p>
@@ -1579,7 +1581,7 @@
           <a:p>
             <a:r>
               <a:rPr lang="en-US" dirty="0"/>
-              <a:t>Set expectations: before AND after code + proof. The AI-resilient tasks are part of the grade. Q6 of this week's quiz asks for their own payload — confirm the current worksheet's exact wording before promising a "personal flag" on stage; check with the team if that's still accurate.</a:t>
+              <a:t>Logistics. Circulate with TAs. Remind: step 4 (rewrite + prove the payload now fails) is graded, not just the exploit. Also kick off the NoteVault project injection task (worksheet).</a:t>
             </a:r>
             <a:endParaRPr lang="en-US" dirty="0"/>
           </a:p>
@@ -1667,7 +1669,7 @@
           <a:p>
             <a:r>
               <a:rPr lang="en-US" dirty="0"/>
-              <a:t>Recap in 3 lines. Cold-call: "what's the ONE fix for SQLi?" (parameterized queries). ~2 min.</a:t>
+              <a:t>Logistics. Circulate with TAs. Remind: step 4 (rewrite + prove the payload now fails) is graded, not just the exploit. Also kick off the NoteVault project injection task (worksheet).</a:t>
             </a:r>
             <a:endParaRPr lang="en-US" dirty="0"/>
           </a:p>
@@ -1755,7 +1757,7 @@
           <a:p>
             <a:r>
               <a:rPr lang="en-US" dirty="0"/>
-              <a:t>Cliffhanger: "Next week the same trick runs in the victim's browser — and skims credit cards." Remind DVWA/Juice Shop ready in their VM.</a:t>
+              <a:t>Set expectations: before AND after code + proof. The AI-resilient tasks are part of the grade. Q6 of this week's quiz asks for their own payload — confirm the current worksheet's exact wording before promising a "personal flag" on stage; check with the team if that's still accurate.</a:t>
             </a:r>
             <a:endParaRPr lang="en-US" dirty="0"/>
           </a:p>
@@ -1779,6 +1781,182 @@
             <a:fld id="{F7021451-1387-4CA6-816F-3879F97B5CBC}" type="slidenum">
               <a:rPr lang="en-US"/>
               <a:t>22</a:t>
+            </a:fld>
+            <a:endParaRPr lang="en-US"/>
+          </a:p>
+        </p:txBody>
+      </p:sp>
+    </p:spTree>
+    <p:extLst>
+      <p:ext uri="{BB962C8B-B14F-4D97-AF65-F5344CB8AC3E}">
+        <p14:creationId xmlns:p14="http://schemas.microsoft.com/office/powerpoint/2010/main" val="1024086991"/>
+      </p:ext>
+    </p:extLst>
+  </p:cSld>
+  <p:clrMapOvr>
+    <a:masterClrMapping/>
+  </p:clrMapOvr>
+</p:notes>
+</file>
+
+<file path=ppt/notesSlides/notesSlide23.xml><?xml version="1.0" encoding="utf-8"?>
+<p:notes xmlns:a="http://schemas.openxmlformats.org/drawingml/2006/main" xmlns:r="http://schemas.openxmlformats.org/officeDocument/2006/relationships" xmlns:p="http://schemas.openxmlformats.org/presentationml/2006/main">
+  <p:cSld>
+    <p:spTree>
+      <p:nvGrpSpPr>
+        <p:cNvPr id="1" name=""/>
+        <p:cNvGrpSpPr/>
+        <p:nvPr/>
+      </p:nvGrpSpPr>
+      <p:grpSpPr>
+        <a:xfrm>
+          <a:off x="0" y="0"/>
+          <a:ext cx="0" cy="0"/>
+          <a:chOff x="0" y="0"/>
+          <a:chExt cx="0" cy="0"/>
+        </a:xfrm>
+      </p:grpSpPr>
+      <p:sp>
+        <p:nvSpPr>
+          <p:cNvPr id="2" name="Slide Image Placeholder 1"/>
+          <p:cNvSpPr>
+            <a:spLocks noGrp="1" noRot="1" noChangeAspect="1"/>
+          </p:cNvSpPr>
+          <p:nvPr>
+            <p:ph type="sldImg"/>
+          </p:nvPr>
+        </p:nvSpPr>
+        <p:spPr/>
+      </p:sp>
+      <p:sp>
+        <p:nvSpPr>
+          <p:cNvPr id="3" name="Notes Placeholder 2"/>
+          <p:cNvSpPr>
+            <a:spLocks noGrp="1"/>
+          </p:cNvSpPr>
+          <p:nvPr>
+            <p:ph type="body" idx="1"/>
+          </p:nvPr>
+        </p:nvSpPr>
+        <p:spPr/>
+        <p:txBody>
+          <a:bodyPr/>
+          <a:lstStyle/>
+          <a:p>
+            <a:r>
+              <a:rPr lang="en-US" dirty="0"/>
+              <a:t>Recap in 3 lines. Cold-call: "what's the ONE fix for SQLi?" (parameterized queries). ~2 min.</a:t>
+            </a:r>
+            <a:endParaRPr lang="en-US" dirty="0"/>
+          </a:p>
+        </p:txBody>
+      </p:sp>
+      <p:sp>
+        <p:nvSpPr>
+          <p:cNvPr id="4" name="Slide Number Placeholder 3"/>
+          <p:cNvSpPr>
+            <a:spLocks noGrp="1"/>
+          </p:cNvSpPr>
+          <p:nvPr>
+            <p:ph type="sldNum" sz="quarter" idx="10"/>
+          </p:nvPr>
+        </p:nvSpPr>
+        <p:spPr/>
+        <p:txBody>
+          <a:bodyPr/>
+          <a:lstStyle/>
+          <a:p>
+            <a:fld id="{F7021451-1387-4CA6-816F-3879F97B5CBC}" type="slidenum">
+              <a:rPr lang="en-US"/>
+              <a:t>23</a:t>
+            </a:fld>
+            <a:endParaRPr lang="en-US"/>
+          </a:p>
+        </p:txBody>
+      </p:sp>
+    </p:spTree>
+    <p:extLst>
+      <p:ext uri="{BB962C8B-B14F-4D97-AF65-F5344CB8AC3E}">
+        <p14:creationId xmlns:p14="http://schemas.microsoft.com/office/powerpoint/2010/main" val="1024086991"/>
+      </p:ext>
+    </p:extLst>
+  </p:cSld>
+  <p:clrMapOvr>
+    <a:masterClrMapping/>
+  </p:clrMapOvr>
+</p:notes>
+</file>
+
+<file path=ppt/notesSlides/notesSlide24.xml><?xml version="1.0" encoding="utf-8"?>
+<p:notes xmlns:a="http://schemas.openxmlformats.org/drawingml/2006/main" xmlns:r="http://schemas.openxmlformats.org/officeDocument/2006/relationships" xmlns:p="http://schemas.openxmlformats.org/presentationml/2006/main">
+  <p:cSld>
+    <p:spTree>
+      <p:nvGrpSpPr>
+        <p:cNvPr id="1" name=""/>
+        <p:cNvGrpSpPr/>
+        <p:nvPr/>
+      </p:nvGrpSpPr>
+      <p:grpSpPr>
+        <a:xfrm>
+          <a:off x="0" y="0"/>
+          <a:ext cx="0" cy="0"/>
+          <a:chOff x="0" y="0"/>
+          <a:chExt cx="0" cy="0"/>
+        </a:xfrm>
+      </p:grpSpPr>
+      <p:sp>
+        <p:nvSpPr>
+          <p:cNvPr id="2" name="Slide Image Placeholder 1"/>
+          <p:cNvSpPr>
+            <a:spLocks noGrp="1" noRot="1" noChangeAspect="1"/>
+          </p:cNvSpPr>
+          <p:nvPr>
+            <p:ph type="sldImg"/>
+          </p:nvPr>
+        </p:nvSpPr>
+        <p:spPr/>
+      </p:sp>
+      <p:sp>
+        <p:nvSpPr>
+          <p:cNvPr id="3" name="Notes Placeholder 2"/>
+          <p:cNvSpPr>
+            <a:spLocks noGrp="1"/>
+          </p:cNvSpPr>
+          <p:nvPr>
+            <p:ph type="body" idx="1"/>
+          </p:nvPr>
+        </p:nvSpPr>
+        <p:spPr/>
+        <p:txBody>
+          <a:bodyPr/>
+          <a:lstStyle/>
+          <a:p>
+            <a:r>
+              <a:rPr lang="en-US" dirty="0"/>
+              <a:t>Cliffhanger: "Next week the same trick runs in the victim's browser — and skims credit cards." Remind DVWA/Juice Shop ready in their VM.</a:t>
+            </a:r>
+            <a:endParaRPr lang="en-US" dirty="0"/>
+          </a:p>
+        </p:txBody>
+      </p:sp>
+      <p:sp>
+        <p:nvSpPr>
+          <p:cNvPr id="4" name="Slide Number Placeholder 3"/>
+          <p:cNvSpPr>
+            <a:spLocks noGrp="1"/>
+          </p:cNvSpPr>
+          <p:nvPr>
+            <p:ph type="sldNum" sz="quarter" idx="10"/>
+          </p:nvPr>
+        </p:nvSpPr>
+        <p:spPr/>
+        <p:txBody>
+          <a:bodyPr/>
+          <a:lstStyle/>
+          <a:p>
+            <a:fld id="{F7021451-1387-4CA6-816F-3879F97B5CBC}" type="slidenum">
+              <a:rPr lang="en-US"/>
+              <a:t>24</a:t>
             </a:fld>
             <a:endParaRPr lang="en-US"/>
           </a:p>
@@ -2107,7 +2285,7 @@
           <a:p>
             <a:r>
               <a:rPr lang="en-US" dirty="0"/>
-              <a:t>The worked example — slow down here. Decompose the payload token by token; this is exactly the SQLi Boss Fight's auth-bypass hit. A common wrong instinct is to add `OR 1=1` and a `LIMIT` clause copied from a MySQL tutorial — walk through why neither is needed against this SQLite app, and why the bare `'--` is what the worksheet actually uses. ~8 min.</a:t>
+              <a:t>Live payoff for "the quote lands inside the string and breaks out" — the sim renders the actual token boundaries shifting as they type, so the break-out is something they watch happen, not a claim on a slide. ~4 min.</a:t>
             </a:r>
             <a:endParaRPr lang="en-US" dirty="0"/>
           </a:p>
@@ -2283,7 +2461,7 @@
           <a:p>
             <a:r>
               <a:rPr lang="en-US" dirty="0"/>
-              <a:t>Make it real — these are careers ended and companies fined. Equifax = a single unpatched input parser. Tie back: every breach here started as "untrusted data interpreted as code". ~4 min.</a:t>
+              <a:t>The worked example — slow down here. Decompose the payload token by token; this is exactly the SQLi Boss Fight's auth-bypass hit. A common wrong instinct is to add `OR 1=1` and a `LIMIT` clause copied from a MySQL tutorial — walk through why neither is needed against this SQLite app, and why the bare `'--` is what the worksheet actually uses. ~8 min.</a:t>
             </a:r>
             <a:endParaRPr lang="en-US" dirty="0"/>
           </a:p>
@@ -2371,7 +2549,7 @@
           <a:p>
             <a:r>
               <a:rPr lang="en-US" dirty="0"/>
-              <a:t>Key principle that recurs all term. Block-lists always lose (attackers invent new payloads); allow-lists define what's acceptable. Emphasize: validation is defense-in-depth, NOT the primary SQLi fix (that's parameterization — next). ~4 min.</a:t>
+              <a:t>Make it real — these are careers ended and companies fined. Equifax = a single unpatched input parser. Tie back: every breach here started as "untrusted data interpreted as code". ~4 min.</a:t>
             </a:r>
             <a:endParaRPr lang="en-US" dirty="0"/>
           </a:p>
@@ -3004,7 +3182,7 @@
                 <a:ea typeface="Arial" pitchFamily="34" charset="-122"/>
                 <a:cs typeface="Arial" pitchFamily="34" charset="-120"/>
               </a:rPr>
-              <a:t>Demo / attack surface</a:t>
+              <a:t>Validate: allow-list, not block-list</a:t>
             </a:r>
             <a:endParaRPr lang="en-US" sz="2600" dirty="0"/>
           </a:p>
@@ -3019,11 +3197,11 @@
         <p:spPr>
           <a:xfrm>
             <a:off x="457200" y="1325880"/>
-            <a:ext cx="8229600" cy="1920240"/>
+            <a:ext cx="8229600" cy="1517904"/>
           </a:xfrm>
           <a:prstGeom prst="roundRect">
             <a:avLst>
-              <a:gd name="adj" fmla="val 3810"/>
+              <a:gd name="adj" fmla="val 4819"/>
             </a:avLst>
           </a:prstGeom>
           <a:solidFill>
@@ -3048,7 +3226,7 @@
         <p:spPr>
           <a:xfrm>
             <a:off x="731520" y="1435608"/>
-            <a:ext cx="7680960" cy="1700784"/>
+            <a:ext cx="7680960" cy="1298448"/>
           </a:xfrm>
           <a:prstGeom prst="rect">
             <a:avLst/>
@@ -3078,7 +3256,7 @@
                 <a:ea typeface="Calibri" pitchFamily="34" charset="-122"/>
                 <a:cs typeface="Calibri" pitchFamily="34" charset="-120"/>
               </a:rPr>
-              <a:t>Login forms, search boxes, URL params, JSON fields, headers</a:t>
+              <a:t>Allow-list (preferred): accept only known-good (e.g. 0–9 for a phone)</a:t>
             </a:r>
             <a:endParaRPr lang="en-US" sz="1400" dirty="0"/>
           </a:p>
@@ -3099,7 +3277,7 @@
                 <a:ea typeface="Calibri" pitchFamily="34" charset="-122"/>
                 <a:cs typeface="Calibri" pitchFamily="34" charset="-120"/>
               </a:rPr>
-              <a:t>Error messages leak schema → enumeration</a:t>
+              <a:t>Block-list: ban known-bad → bypassed by new payloads</a:t>
             </a:r>
             <a:endParaRPr lang="en-US" sz="1400" dirty="0"/>
           </a:p>
@@ -3120,7 +3298,7 @@
                 <a:ea typeface="Calibri" pitchFamily="34" charset="-122"/>
                 <a:cs typeface="Calibri" pitchFamily="34" charset="-120"/>
               </a:rPr>
-              <a:t>Today's lab: raw payloads via browser/curl against app.py — no scanner needed to see the mechanism</a:t>
+              <a:t>Validate type · length · range · format</a:t>
             </a:r>
             <a:endParaRPr lang="en-US" sz="1400" dirty="0"/>
           </a:p>
@@ -3141,7 +3319,7 @@
                 <a:ea typeface="Calibri" pitchFamily="34" charset="-122"/>
                 <a:cs typeface="Calibri" pitchFamily="34" charset="-120"/>
               </a:rPr>
-              <a:t>Burp Suite / sqlmap are real-world tools worth knowing (sandbox-only, ethically) — not required for this week's tasks</a:t>
+              <a:t>Client-side for UX, server-side for security</a:t>
             </a:r>
             <a:endParaRPr lang="en-US" sz="1400" dirty="0"/>
           </a:p>
@@ -3326,7 +3504,7 @@
                 <a:ea typeface="Arial" pitchFamily="34" charset="-122"/>
                 <a:cs typeface="Arial" pitchFamily="34" charset="-120"/>
               </a:rPr>
-              <a:t>Command injection</a:t>
+              <a:t>Demo / attack surface</a:t>
             </a:r>
             <a:endParaRPr lang="en-US" sz="2600" dirty="0"/>
           </a:p>
@@ -3341,96 +3519,11 @@
         <p:spPr>
           <a:xfrm>
             <a:off x="457200" y="1325880"/>
-            <a:ext cx="8229600" cy="713232"/>
+            <a:ext cx="8229600" cy="1920240"/>
           </a:xfrm>
           <a:prstGeom prst="roundRect">
             <a:avLst>
-              <a:gd name="adj" fmla="val 7692"/>
-            </a:avLst>
-          </a:prstGeom>
-          <a:solidFill>
-            <a:srgbClr val="0A1020"/>
-          </a:solidFill>
-          <a:ln w="12700">
-            <a:solidFill>
-              <a:srgbClr val="E8EDF3"/>
-            </a:solidFill>
-            <a:prstDash val="solid"/>
-          </a:ln>
-        </p:spPr>
-      </p:sp>
-      <p:sp>
-        <p:nvSpPr>
-          <p:cNvPr id="6" name="Text 3"/>
-          <p:cNvSpPr/>
-          <p:nvPr/>
-        </p:nvSpPr>
-        <p:spPr>
-          <a:xfrm>
-            <a:off x="640080" y="1399032"/>
-            <a:ext cx="7863840" cy="566928"/>
-          </a:xfrm>
-          <a:prstGeom prst="rect">
-            <a:avLst/>
-          </a:prstGeom>
-          <a:noFill/>
-          <a:ln/>
-        </p:spPr>
-        <p:txBody>
-          <a:bodyPr wrap="square" lIns="0" tIns="0" rIns="0" bIns="0" rtlCol="0" anchor="t">
-            <a:normAutofit/>
-          </a:bodyPr>
-          <a:lstStyle/>
-          <a:p>
-            <a:pPr indent="0" marL="0">
-              <a:buNone/>
-            </a:pPr>
-            <a:r>
-              <a:rPr lang="en-US" sz="1150" dirty="0">
-                <a:solidFill>
-                  <a:srgbClr val="9FE7D6"/>
-                </a:solidFill>
-                <a:latin typeface="Courier New" pitchFamily="34" charset="0"/>
-                <a:ea typeface="Courier New" pitchFamily="34" charset="-122"/>
-                <a:cs typeface="Courier New" pitchFamily="34" charset="-120"/>
-              </a:rPr>
-              <a:t>system("ping -c 1 " . $_GET['host']);   // vulnerable</a:t>
-            </a:r>
-            <a:endParaRPr lang="en-US" sz="1150" dirty="0"/>
-          </a:p>
-          <a:p>
-            <a:pPr indent="0" marL="0">
-              <a:buNone/>
-            </a:pPr>
-            <a:r>
-              <a:rPr lang="en-US" sz="1150" dirty="0">
-                <a:solidFill>
-                  <a:srgbClr val="9FE7D6"/>
-                </a:solidFill>
-                <a:latin typeface="Courier New" pitchFamily="34" charset="0"/>
-                <a:ea typeface="Courier New" pitchFamily="34" charset="-122"/>
-                <a:cs typeface="Courier New" pitchFamily="34" charset="-120"/>
-              </a:rPr>
-              <a:t>// host = 8.8.8.8; cat /etc/passwd</a:t>
-            </a:r>
-            <a:endParaRPr lang="en-US" sz="1150" dirty="0"/>
-          </a:p>
-        </p:txBody>
-      </p:sp>
-      <p:sp>
-        <p:nvSpPr>
-          <p:cNvPr id="7" name="Shape 4"/>
-          <p:cNvSpPr/>
-          <p:nvPr/>
-        </p:nvSpPr>
-        <p:spPr>
-          <a:xfrm>
-            <a:off x="457200" y="2203704"/>
-            <a:ext cx="8229600" cy="896112"/>
-          </a:xfrm>
-          <a:prstGeom prst="roundRect">
-            <a:avLst>
-              <a:gd name="adj" fmla="val 8163"/>
+              <a:gd name="adj" fmla="val 3810"/>
             </a:avLst>
           </a:prstGeom>
           <a:solidFill>
@@ -3448,14 +3541,14 @@
       </p:sp>
       <p:sp>
         <p:nvSpPr>
-          <p:cNvPr id="8" name="Text 5"/>
-          <p:cNvSpPr/>
-          <p:nvPr/>
-        </p:nvSpPr>
-        <p:spPr>
-          <a:xfrm>
-            <a:off x="731520" y="2313432"/>
-            <a:ext cx="7680960" cy="676656"/>
+          <p:cNvPr id="6" name="Text 3"/>
+          <p:cNvSpPr/>
+          <p:nvPr/>
+        </p:nvSpPr>
+        <p:spPr>
+          <a:xfrm>
+            <a:off x="731520" y="1435608"/>
+            <a:ext cx="7680960" cy="1700784"/>
           </a:xfrm>
           <a:prstGeom prst="rect">
             <a:avLst/>
@@ -3485,7 +3578,7 @@
                 <a:ea typeface="Calibri" pitchFamily="34" charset="-122"/>
                 <a:cs typeface="Calibri" pitchFamily="34" charset="-120"/>
               </a:rPr>
-              <a:t>Shell metacharacters: ; | &amp; $() \ &gt;`</a:t>
+              <a:t>Login forms, search boxes, URL params, JSON fields, headers</a:t>
             </a:r>
             <a:endParaRPr lang="en-US" sz="1400" dirty="0"/>
           </a:p>
@@ -3506,45 +3599,87 @@
                 <a:ea typeface="Calibri" pitchFamily="34" charset="-122"/>
                 <a:cs typeface="Calibri" pitchFamily="34" charset="-120"/>
               </a:rPr>
-              <a:t>Leads to RCE — full server compromise</a:t>
+              <a:t>Error messages leak schema → enumeration</a:t>
             </a:r>
             <a:endParaRPr lang="en-US" sz="1400" dirty="0"/>
           </a:p>
-        </p:txBody>
-      </p:sp>
-      <p:sp>
-        <p:nvSpPr>
-          <p:cNvPr id="9" name="Text 6"/>
-          <p:cNvSpPr/>
-          <p:nvPr/>
-        </p:nvSpPr>
-        <p:spPr>
-          <a:xfrm>
-            <a:off x="457200" y="4800600"/>
-            <a:ext cx="6949440" cy="274320"/>
-          </a:xfrm>
-          <a:prstGeom prst="rect">
-            <a:avLst/>
-          </a:prstGeom>
-          <a:noFill/>
-          <a:ln/>
-        </p:spPr>
-        <p:txBody>
-          <a:bodyPr wrap="square" lIns="0" tIns="0" rIns="0" bIns="0" rtlCol="0" anchor="ctr"/>
-          <a:lstStyle/>
-          <a:p>
-            <a:pPr indent="0" marL="0">
-              <a:buNone/>
-            </a:pPr>
-            <a:r>
-              <a:rPr lang="en-US" sz="900" dirty="0">
-                <a:solidFill>
-                  <a:srgbClr val="64748B"/>
+          <a:p>
+            <a:pPr marL="342900" indent="-342900">
+              <a:spcAft>
+                <a:spcPts val="600"/>
+              </a:spcAft>
+              <a:buSzPct val="100000"/>
+              <a:buChar char="•"/>
+            </a:pPr>
+            <a:r>
+              <a:rPr lang="en-US" sz="1400" dirty="0">
+                <a:solidFill>
+                  <a:srgbClr val="1F2937"/>
                 </a:solidFill>
                 <a:latin typeface="Calibri" pitchFamily="34" charset="0"/>
                 <a:ea typeface="Calibri" pitchFamily="34" charset="-122"/>
                 <a:cs typeface="Calibri" pitchFamily="34" charset="-120"/>
               </a:rPr>
+              <a:t>Today's lab: raw payloads via browser/curl against app.py — no scanner needed to see the mechanism</a:t>
+            </a:r>
+            <a:endParaRPr lang="en-US" sz="1400" dirty="0"/>
+          </a:p>
+          <a:p>
+            <a:pPr marL="342900" indent="-342900">
+              <a:spcAft>
+                <a:spcPts val="600"/>
+              </a:spcAft>
+              <a:buSzPct val="100000"/>
+              <a:buChar char="•"/>
+            </a:pPr>
+            <a:r>
+              <a:rPr lang="en-US" sz="1400" dirty="0">
+                <a:solidFill>
+                  <a:srgbClr val="1F2937"/>
+                </a:solidFill>
+                <a:latin typeface="Calibri" pitchFamily="34" charset="0"/>
+                <a:ea typeface="Calibri" pitchFamily="34" charset="-122"/>
+                <a:cs typeface="Calibri" pitchFamily="34" charset="-120"/>
+              </a:rPr>
+              <a:t>Burp Suite / sqlmap are real-world tools worth knowing (sandbox-only, ethically) — not required for this week's tasks</a:t>
+            </a:r>
+            <a:endParaRPr lang="en-US" sz="1400" dirty="0"/>
+          </a:p>
+        </p:txBody>
+      </p:sp>
+      <p:sp>
+        <p:nvSpPr>
+          <p:cNvPr id="7" name="Text 4"/>
+          <p:cNvSpPr/>
+          <p:nvPr/>
+        </p:nvSpPr>
+        <p:spPr>
+          <a:xfrm>
+            <a:off x="457200" y="4800600"/>
+            <a:ext cx="6949440" cy="274320"/>
+          </a:xfrm>
+          <a:prstGeom prst="rect">
+            <a:avLst/>
+          </a:prstGeom>
+          <a:noFill/>
+          <a:ln/>
+        </p:spPr>
+        <p:txBody>
+          <a:bodyPr wrap="square" lIns="0" tIns="0" rIns="0" bIns="0" rtlCol="0" anchor="ctr"/>
+          <a:lstStyle/>
+          <a:p>
+            <a:pPr indent="0" marL="0">
+              <a:buNone/>
+            </a:pPr>
+            <a:r>
+              <a:rPr lang="en-US" sz="900" dirty="0">
+                <a:solidFill>
+                  <a:srgbClr val="64748B"/>
+                </a:solidFill>
+                <a:latin typeface="Calibri" pitchFamily="34" charset="0"/>
+                <a:ea typeface="Calibri" pitchFamily="34" charset="-122"/>
+                <a:cs typeface="Calibri" pitchFamily="34" charset="-120"/>
+              </a:rPr>
               <a:t>Software Security · Week 4</a:t>
             </a:r>
             <a:endParaRPr lang="en-US" sz="900" dirty="0"/>
@@ -3553,7 +3688,7 @@
       </p:sp>
       <p:pic>
         <p:nvPicPr>
-          <p:cNvPr id="10" name="Image 1" descr="/Users/pop7/Library/CloudStorage/OneDrive-MonsterConnectCo.,Ltd/Lecture/KOSEN69 - software-security/slides/pptx/assets/logo-small.png">    </p:cNvPr>
+          <p:cNvPr id="8" name="Image 1" descr="/Users/pop7/Library/CloudStorage/OneDrive-MonsterConnectCo.,Ltd/Lecture/KOSEN69 - software-security/slides/pptx/assets/logo-small.png">    </p:cNvPr>
           <p:cNvPicPr>
             <a:picLocks noChangeAspect="1"/>
           </p:cNvPicPr>
@@ -3691,7 +3826,7 @@
                 <a:ea typeface="Arial" pitchFamily="34" charset="-122"/>
                 <a:cs typeface="Arial" pitchFamily="34" charset="-120"/>
               </a:rPr>
-              <a:t>Upload → RCE (a classic chain)</a:t>
+              <a:t>Command injection</a:t>
             </a:r>
             <a:endParaRPr lang="en-US" sz="2600" dirty="0"/>
           </a:p>
@@ -3699,59 +3834,18 @@
       </p:sp>
       <p:sp>
         <p:nvSpPr>
-          <p:cNvPr id="5" name="Text 2"/>
-          <p:cNvSpPr/>
-          <p:nvPr/>
-        </p:nvSpPr>
-        <p:spPr>
-          <a:xfrm>
-            <a:off x="548640" y="1325880"/>
-            <a:ext cx="8046720" cy="548640"/>
-          </a:xfrm>
-          <a:prstGeom prst="rect">
-            <a:avLst/>
-          </a:prstGeom>
-          <a:noFill/>
-          <a:ln/>
-        </p:spPr>
-        <p:txBody>
-          <a:bodyPr wrap="square" lIns="0" tIns="0" rIns="0" bIns="0" rtlCol="0" anchor="t">
-            <a:normAutofit/>
-          </a:bodyPr>
-          <a:lstStyle/>
-          <a:p>
-            <a:pPr indent="0" marL="0">
-              <a:buNone/>
-            </a:pPr>
-            <a:r>
-              <a:rPr lang="en-US" sz="1400" dirty="0">
-                <a:solidFill>
-                  <a:srgbClr val="1F2937"/>
-                </a:solidFill>
-                <a:latin typeface="Calibri" pitchFamily="34" charset="0"/>
-                <a:ea typeface="Calibri" pitchFamily="34" charset="-122"/>
-                <a:cs typeface="Calibri" pitchFamily="34" charset="-120"/>
-              </a:rPr>
-              <a:t>The classic chain, attacker uploads shell.php:</a:t>
-            </a:r>
-            <a:endParaRPr lang="en-US" sz="1400" dirty="0"/>
-          </a:p>
-        </p:txBody>
-      </p:sp>
-      <p:sp>
-        <p:nvSpPr>
-          <p:cNvPr id="6" name="Shape 3"/>
-          <p:cNvSpPr/>
-          <p:nvPr/>
-        </p:nvSpPr>
-        <p:spPr>
-          <a:xfrm>
-            <a:off x="457200" y="1965960"/>
-            <a:ext cx="8229600" cy="493776"/>
+          <p:cNvPr id="5" name="Shape 2"/>
+          <p:cNvSpPr/>
+          <p:nvPr/>
+        </p:nvSpPr>
+        <p:spPr>
+          <a:xfrm>
+            <a:off x="457200" y="1325880"/>
+            <a:ext cx="8229600" cy="713232"/>
           </a:xfrm>
           <a:prstGeom prst="roundRect">
             <a:avLst>
-              <a:gd name="adj" fmla="val 11111"/>
+              <a:gd name="adj" fmla="val 7692"/>
             </a:avLst>
           </a:prstGeom>
           <a:solidFill>
@@ -3767,14 +3861,14 @@
       </p:sp>
       <p:sp>
         <p:nvSpPr>
-          <p:cNvPr id="7" name="Text 4"/>
-          <p:cNvSpPr/>
-          <p:nvPr/>
-        </p:nvSpPr>
-        <p:spPr>
-          <a:xfrm>
-            <a:off x="640080" y="2039112"/>
-            <a:ext cx="7863840" cy="347472"/>
+          <p:cNvPr id="6" name="Text 3"/>
+          <p:cNvSpPr/>
+          <p:nvPr/>
+        </p:nvSpPr>
+        <p:spPr>
+          <a:xfrm>
+            <a:off x="640080" y="1399032"/>
+            <a:ext cx="7863840" cy="566928"/>
           </a:xfrm>
           <a:prstGeom prst="rect">
             <a:avLst/>
@@ -3800,26 +3894,43 @@
                 <a:ea typeface="Courier New" pitchFamily="34" charset="-122"/>
                 <a:cs typeface="Courier New" pitchFamily="34" charset="-120"/>
               </a:rPr>
-              <a:t>&lt;?php system($_GET['cmd']); ?&gt;</a:t>
+              <a:t>system("ping -c 1 " . $_GET['host']);   // vulnerable</a:t>
             </a:r>
             <a:endParaRPr lang="en-US" sz="1150" dirty="0"/>
           </a:p>
-        </p:txBody>
-      </p:sp>
-      <p:sp>
-        <p:nvSpPr>
-          <p:cNvPr id="8" name="Shape 5"/>
-          <p:cNvSpPr/>
-          <p:nvPr/>
-        </p:nvSpPr>
-        <p:spPr>
-          <a:xfrm>
-            <a:off x="457200" y="2624328"/>
-            <a:ext cx="8229600" cy="1901952"/>
+          <a:p>
+            <a:pPr indent="0" marL="0">
+              <a:buNone/>
+            </a:pPr>
+            <a:r>
+              <a:rPr lang="en-US" sz="1150" dirty="0">
+                <a:solidFill>
+                  <a:srgbClr val="9FE7D6"/>
+                </a:solidFill>
+                <a:latin typeface="Courier New" pitchFamily="34" charset="0"/>
+                <a:ea typeface="Courier New" pitchFamily="34" charset="-122"/>
+                <a:cs typeface="Courier New" pitchFamily="34" charset="-120"/>
+              </a:rPr>
+              <a:t>// host = 8.8.8.8; cat /etc/passwd</a:t>
+            </a:r>
+            <a:endParaRPr lang="en-US" sz="1150" dirty="0"/>
+          </a:p>
+        </p:txBody>
+      </p:sp>
+      <p:sp>
+        <p:nvSpPr>
+          <p:cNvPr id="7" name="Shape 4"/>
+          <p:cNvSpPr/>
+          <p:nvPr/>
+        </p:nvSpPr>
+        <p:spPr>
+          <a:xfrm>
+            <a:off x="457200" y="2203704"/>
+            <a:ext cx="8229600" cy="896112"/>
           </a:xfrm>
           <a:prstGeom prst="roundRect">
             <a:avLst>
-              <a:gd name="adj" fmla="val 3846"/>
+              <a:gd name="adj" fmla="val 8163"/>
             </a:avLst>
           </a:prstGeom>
           <a:solidFill>
@@ -3837,14 +3948,14 @@
       </p:sp>
       <p:sp>
         <p:nvSpPr>
-          <p:cNvPr id="9" name="Text 6"/>
-          <p:cNvSpPr/>
-          <p:nvPr/>
-        </p:nvSpPr>
-        <p:spPr>
-          <a:xfrm>
-            <a:off x="731520" y="2734056"/>
-            <a:ext cx="7680960" cy="1682496"/>
+          <p:cNvPr id="8" name="Text 5"/>
+          <p:cNvSpPr/>
+          <p:nvPr/>
+        </p:nvSpPr>
+        <p:spPr>
+          <a:xfrm>
+            <a:off x="731520" y="2313432"/>
+            <a:ext cx="7680960" cy="676656"/>
           </a:xfrm>
           <a:prstGeom prst="rect">
             <a:avLst/>
@@ -3874,7 +3985,7 @@
                 <a:ea typeface="Calibri" pitchFamily="34" charset="-122"/>
                 <a:cs typeface="Calibri" pitchFamily="34" charset="-120"/>
               </a:rPr>
-              <a:t>If the upload dir is web-served and PHP-executable: .../uploads/shell.php?cmd=ls%20-l → RCE</a:t>
+              <a:t>Shell metacharacters: ; | &amp; $() \ &gt;`</a:t>
             </a:r>
             <a:endParaRPr lang="en-US" sz="1400" dirty="0"/>
           </a:p>
@@ -3895,7 +4006,7 @@
                 <a:ea typeface="Calibri" pitchFamily="34" charset="-122"/>
                 <a:cs typeface="Calibri" pitchFamily="34" charset="-120"/>
               </a:rPr>
-              <a:t>This week's lab stops one step earlier: CWE-434 unrestricted upload — the app accepts any file type/extension, but the upload directory is not served or executed. Your task: explain which missing control would complete the chain (type check, extension allow-list, storage outside web root, no-exec) — not demonstrate a live shell</a:t>
+              <a:t>Leads to RCE — full server compromise</a:t>
             </a:r>
             <a:endParaRPr lang="en-US" sz="1400" dirty="0"/>
           </a:p>
@@ -3903,7 +4014,7 @@
       </p:sp>
       <p:sp>
         <p:nvSpPr>
-          <p:cNvPr id="10" name="Text 7"/>
+          <p:cNvPr id="9" name="Text 6"/>
           <p:cNvSpPr/>
           <p:nvPr/>
         </p:nvSpPr>
@@ -3942,7 +4053,7 @@
       </p:sp>
       <p:pic>
         <p:nvPicPr>
-          <p:cNvPr id="11" name="Image 1" descr="/Users/pop7/Library/CloudStorage/OneDrive-MonsterConnectCo.,Ltd/Lecture/KOSEN69 - software-security/slides/pptx/assets/logo-small.png">    </p:cNvPr>
+          <p:cNvPr id="10" name="Image 1" descr="/Users/pop7/Library/CloudStorage/OneDrive-MonsterConnectCo.,Ltd/Lecture/KOSEN69 - software-security/slides/pptx/assets/logo-small.png">    </p:cNvPr>
           <p:cNvPicPr>
             <a:picLocks noChangeAspect="1"/>
           </p:cNvPicPr>
@@ -4080,7 +4191,7 @@
                 <a:ea typeface="Arial" pitchFamily="34" charset="-122"/>
                 <a:cs typeface="Arial" pitchFamily="34" charset="-120"/>
               </a:rPr>
-              <a:t>Upload → RCE (a classic chain) (cont.)</a:t>
+              <a:t>Upload → RCE (a classic chain)</a:t>
             </a:r>
             <a:endParaRPr lang="en-US" sz="2600" dirty="0"/>
           </a:p>
@@ -4088,18 +4199,127 @@
       </p:sp>
       <p:sp>
         <p:nvSpPr>
-          <p:cNvPr id="5" name="Shape 2"/>
-          <p:cNvSpPr/>
-          <p:nvPr/>
-        </p:nvSpPr>
-        <p:spPr>
-          <a:xfrm>
-            <a:off x="457200" y="1325880"/>
-            <a:ext cx="8229600" cy="786384"/>
+          <p:cNvPr id="5" name="Text 2"/>
+          <p:cNvSpPr/>
+          <p:nvPr/>
+        </p:nvSpPr>
+        <p:spPr>
+          <a:xfrm>
+            <a:off x="548640" y="1325880"/>
+            <a:ext cx="8046720" cy="548640"/>
+          </a:xfrm>
+          <a:prstGeom prst="rect">
+            <a:avLst/>
+          </a:prstGeom>
+          <a:noFill/>
+          <a:ln/>
+        </p:spPr>
+        <p:txBody>
+          <a:bodyPr wrap="square" lIns="0" tIns="0" rIns="0" bIns="0" rtlCol="0" anchor="t">
+            <a:normAutofit/>
+          </a:bodyPr>
+          <a:lstStyle/>
+          <a:p>
+            <a:pPr indent="0" marL="0">
+              <a:buNone/>
+            </a:pPr>
+            <a:r>
+              <a:rPr lang="en-US" sz="1400" dirty="0">
+                <a:solidFill>
+                  <a:srgbClr val="1F2937"/>
+                </a:solidFill>
+                <a:latin typeface="Calibri" pitchFamily="34" charset="0"/>
+                <a:ea typeface="Calibri" pitchFamily="34" charset="-122"/>
+                <a:cs typeface="Calibri" pitchFamily="34" charset="-120"/>
+              </a:rPr>
+              <a:t>The classic chain, attacker uploads shell.php:</a:t>
+            </a:r>
+            <a:endParaRPr lang="en-US" sz="1400" dirty="0"/>
+          </a:p>
+        </p:txBody>
+      </p:sp>
+      <p:sp>
+        <p:nvSpPr>
+          <p:cNvPr id="6" name="Shape 3"/>
+          <p:cNvSpPr/>
+          <p:nvPr/>
+        </p:nvSpPr>
+        <p:spPr>
+          <a:xfrm>
+            <a:off x="457200" y="1965960"/>
+            <a:ext cx="8229600" cy="493776"/>
           </a:xfrm>
           <a:prstGeom prst="roundRect">
             <a:avLst>
-              <a:gd name="adj" fmla="val 9302"/>
+              <a:gd name="adj" fmla="val 11111"/>
+            </a:avLst>
+          </a:prstGeom>
+          <a:solidFill>
+            <a:srgbClr val="0A1020"/>
+          </a:solidFill>
+          <a:ln w="12700">
+            <a:solidFill>
+              <a:srgbClr val="E8EDF3"/>
+            </a:solidFill>
+            <a:prstDash val="solid"/>
+          </a:ln>
+        </p:spPr>
+      </p:sp>
+      <p:sp>
+        <p:nvSpPr>
+          <p:cNvPr id="7" name="Text 4"/>
+          <p:cNvSpPr/>
+          <p:nvPr/>
+        </p:nvSpPr>
+        <p:spPr>
+          <a:xfrm>
+            <a:off x="640080" y="2039112"/>
+            <a:ext cx="7863840" cy="347472"/>
+          </a:xfrm>
+          <a:prstGeom prst="rect">
+            <a:avLst/>
+          </a:prstGeom>
+          <a:noFill/>
+          <a:ln/>
+        </p:spPr>
+        <p:txBody>
+          <a:bodyPr wrap="square" lIns="0" tIns="0" rIns="0" bIns="0" rtlCol="0" anchor="t">
+            <a:normAutofit/>
+          </a:bodyPr>
+          <a:lstStyle/>
+          <a:p>
+            <a:pPr indent="0" marL="0">
+              <a:buNone/>
+            </a:pPr>
+            <a:r>
+              <a:rPr lang="en-US" sz="1150" dirty="0">
+                <a:solidFill>
+                  <a:srgbClr val="9FE7D6"/>
+                </a:solidFill>
+                <a:latin typeface="Courier New" pitchFamily="34" charset="0"/>
+                <a:ea typeface="Courier New" pitchFamily="34" charset="-122"/>
+                <a:cs typeface="Courier New" pitchFamily="34" charset="-120"/>
+              </a:rPr>
+              <a:t>&lt;?php system($_GET['cmd']); ?&gt;</a:t>
+            </a:r>
+            <a:endParaRPr lang="en-US" sz="1150" dirty="0"/>
+          </a:p>
+        </p:txBody>
+      </p:sp>
+      <p:sp>
+        <p:nvSpPr>
+          <p:cNvPr id="8" name="Shape 5"/>
+          <p:cNvSpPr/>
+          <p:nvPr/>
+        </p:nvSpPr>
+        <p:spPr>
+          <a:xfrm>
+            <a:off x="457200" y="2624328"/>
+            <a:ext cx="8229600" cy="1901952"/>
+          </a:xfrm>
+          <a:prstGeom prst="roundRect">
+            <a:avLst>
+              <a:gd name="adj" fmla="val 3846"/>
             </a:avLst>
           </a:prstGeom>
           <a:solidFill>
@@ -4117,14 +4337,14 @@
       </p:sp>
       <p:sp>
         <p:nvSpPr>
-          <p:cNvPr id="6" name="Text 3"/>
-          <p:cNvSpPr/>
-          <p:nvPr/>
-        </p:nvSpPr>
-        <p:spPr>
-          <a:xfrm>
-            <a:off x="731520" y="1435608"/>
-            <a:ext cx="7680960" cy="566928"/>
+          <p:cNvPr id="9" name="Text 6"/>
+          <p:cNvSpPr/>
+          <p:nvPr/>
+        </p:nvSpPr>
+        <p:spPr>
+          <a:xfrm>
+            <a:off x="731520" y="2734056"/>
+            <a:ext cx="7680960" cy="1682496"/>
           </a:xfrm>
           <a:prstGeom prst="rect">
             <a:avLst/>
@@ -4154,45 +4374,66 @@
                 <a:ea typeface="Calibri" pitchFamily="34" charset="-122"/>
                 <a:cs typeface="Calibri" pitchFamily="34" charset="-120"/>
               </a:rPr>
-              <a:t>Fix: validate file type via mime_content_type(), allow-list extensions, store uploads outside web root, no execute</a:t>
+              <a:t>If the upload dir is web-served and PHP-executable: .../uploads/shell.php?cmd=ls%20-l → RCE</a:t>
             </a:r>
             <a:endParaRPr lang="en-US" sz="1400" dirty="0"/>
           </a:p>
-        </p:txBody>
-      </p:sp>
-      <p:sp>
-        <p:nvSpPr>
-          <p:cNvPr id="7" name="Text 4"/>
-          <p:cNvSpPr/>
-          <p:nvPr/>
-        </p:nvSpPr>
-        <p:spPr>
-          <a:xfrm>
-            <a:off x="457200" y="4800600"/>
-            <a:ext cx="6949440" cy="274320"/>
-          </a:xfrm>
-          <a:prstGeom prst="rect">
-            <a:avLst/>
-          </a:prstGeom>
-          <a:noFill/>
-          <a:ln/>
-        </p:spPr>
-        <p:txBody>
-          <a:bodyPr wrap="square" lIns="0" tIns="0" rIns="0" bIns="0" rtlCol="0" anchor="ctr"/>
-          <a:lstStyle/>
-          <a:p>
-            <a:pPr indent="0" marL="0">
-              <a:buNone/>
-            </a:pPr>
-            <a:r>
-              <a:rPr lang="en-US" sz="900" dirty="0">
-                <a:solidFill>
-                  <a:srgbClr val="64748B"/>
+          <a:p>
+            <a:pPr marL="342900" indent="-342900">
+              <a:spcAft>
+                <a:spcPts val="600"/>
+              </a:spcAft>
+              <a:buSzPct val="100000"/>
+              <a:buChar char="•"/>
+            </a:pPr>
+            <a:r>
+              <a:rPr lang="en-US" sz="1400" dirty="0">
+                <a:solidFill>
+                  <a:srgbClr val="1F2937"/>
                 </a:solidFill>
                 <a:latin typeface="Calibri" pitchFamily="34" charset="0"/>
                 <a:ea typeface="Calibri" pitchFamily="34" charset="-122"/>
                 <a:cs typeface="Calibri" pitchFamily="34" charset="-120"/>
               </a:rPr>
+              <a:t>This week's lab stops one step earlier: CWE-434 unrestricted upload — the app accepts any file type/extension, but the upload directory is not served or executed. Your task: explain which missing control would complete the chain (type check, extension allow-list, storage outside web root, no-exec) — not demonstrate a live shell</a:t>
+            </a:r>
+            <a:endParaRPr lang="en-US" sz="1400" dirty="0"/>
+          </a:p>
+        </p:txBody>
+      </p:sp>
+      <p:sp>
+        <p:nvSpPr>
+          <p:cNvPr id="10" name="Text 7"/>
+          <p:cNvSpPr/>
+          <p:nvPr/>
+        </p:nvSpPr>
+        <p:spPr>
+          <a:xfrm>
+            <a:off x="457200" y="4800600"/>
+            <a:ext cx="6949440" cy="274320"/>
+          </a:xfrm>
+          <a:prstGeom prst="rect">
+            <a:avLst/>
+          </a:prstGeom>
+          <a:noFill/>
+          <a:ln/>
+        </p:spPr>
+        <p:txBody>
+          <a:bodyPr wrap="square" lIns="0" tIns="0" rIns="0" bIns="0" rtlCol="0" anchor="ctr"/>
+          <a:lstStyle/>
+          <a:p>
+            <a:pPr indent="0" marL="0">
+              <a:buNone/>
+            </a:pPr>
+            <a:r>
+              <a:rPr lang="en-US" sz="900" dirty="0">
+                <a:solidFill>
+                  <a:srgbClr val="64748B"/>
+                </a:solidFill>
+                <a:latin typeface="Calibri" pitchFamily="34" charset="0"/>
+                <a:ea typeface="Calibri" pitchFamily="34" charset="-122"/>
+                <a:cs typeface="Calibri" pitchFamily="34" charset="-120"/>
+              </a:rPr>
               <a:t>Software Security · Week 4</a:t>
             </a:r>
             <a:endParaRPr lang="en-US" sz="900" dirty="0"/>
@@ -4201,7 +4442,7 @@
       </p:sp>
       <p:pic>
         <p:nvPicPr>
-          <p:cNvPr id="8" name="Image 1" descr="/Users/pop7/Library/CloudStorage/OneDrive-MonsterConnectCo.,Ltd/Lecture/KOSEN69 - software-security/slides/pptx/assets/logo-small.png">    </p:cNvPr>
+          <p:cNvPr id="11" name="Image 1" descr="/Users/pop7/Library/CloudStorage/OneDrive-MonsterConnectCo.,Ltd/Lecture/KOSEN69 - software-security/slides/pptx/assets/logo-small.png">    </p:cNvPr>
           <p:cNvPicPr>
             <a:picLocks noChangeAspect="1"/>
           </p:cNvPicPr>
@@ -4339,7 +4580,7 @@
                 <a:ea typeface="Arial" pitchFamily="34" charset="-122"/>
                 <a:cs typeface="Arial" pitchFamily="34" charset="-120"/>
               </a:rPr>
-              <a:t>CWE mapping</a:t>
+              <a:t>Upload → RCE (a classic chain) (cont.)</a:t>
             </a:r>
             <a:endParaRPr lang="en-US" sz="2600" dirty="0"/>
           </a:p>
@@ -4354,11 +4595,11 @@
         <p:spPr>
           <a:xfrm>
             <a:off x="457200" y="1325880"/>
-            <a:ext cx="8229600" cy="1408176"/>
+            <a:ext cx="8229600" cy="786384"/>
           </a:xfrm>
           <a:prstGeom prst="roundRect">
             <a:avLst>
-              <a:gd name="adj" fmla="val 5195"/>
+              <a:gd name="adj" fmla="val 9302"/>
             </a:avLst>
           </a:prstGeom>
           <a:solidFill>
@@ -4383,7 +4624,7 @@
         <p:spPr>
           <a:xfrm>
             <a:off x="731520" y="1435608"/>
-            <a:ext cx="7680960" cy="1188720"/>
+            <a:ext cx="7680960" cy="566928"/>
           </a:xfrm>
           <a:prstGeom prst="rect">
             <a:avLst/>
@@ -4413,49 +4654,7 @@
                 <a:ea typeface="Calibri" pitchFamily="34" charset="-122"/>
                 <a:cs typeface="Calibri" pitchFamily="34" charset="-120"/>
               </a:rPr>
-              <a:t>CWE-89 — SQL injection</a:t>
-            </a:r>
-            <a:endParaRPr lang="en-US" sz="1400" dirty="0"/>
-          </a:p>
-          <a:p>
-            <a:pPr marL="342900" indent="-342900">
-              <a:spcAft>
-                <a:spcPts val="600"/>
-              </a:spcAft>
-              <a:buSzPct val="100000"/>
-              <a:buChar char="•"/>
-            </a:pPr>
-            <a:r>
-              <a:rPr lang="en-US" sz="1400" dirty="0">
-                <a:solidFill>
-                  <a:srgbClr val="1F2937"/>
-                </a:solidFill>
-                <a:latin typeface="Calibri" pitchFamily="34" charset="0"/>
-                <a:ea typeface="Calibri" pitchFamily="34" charset="-122"/>
-                <a:cs typeface="Calibri" pitchFamily="34" charset="-120"/>
-              </a:rPr>
-              <a:t>CWE-78 — OS command injection (CWE-77 is its general parent — cite CWE-78, the specific one)</a:t>
-            </a:r>
-            <a:endParaRPr lang="en-US" sz="1400" dirty="0"/>
-          </a:p>
-          <a:p>
-            <a:pPr marL="342900" indent="-342900">
-              <a:spcAft>
-                <a:spcPts val="600"/>
-              </a:spcAft>
-              <a:buSzPct val="100000"/>
-              <a:buChar char="•"/>
-            </a:pPr>
-            <a:r>
-              <a:rPr lang="en-US" sz="1400" dirty="0">
-                <a:solidFill>
-                  <a:srgbClr val="1F2937"/>
-                </a:solidFill>
-                <a:latin typeface="Calibri" pitchFamily="34" charset="0"/>
-                <a:ea typeface="Calibri" pitchFamily="34" charset="-122"/>
-                <a:cs typeface="Calibri" pitchFamily="34" charset="-120"/>
-              </a:rPr>
-              <a:t>CWE-434 — unrestricted upload of a dangerous file type</a:t>
+              <a:t>Fix: validate file type via mime_content_type(), allow-list extensions, store uploads outside web root, no execute</a:t>
             </a:r>
             <a:endParaRPr lang="en-US" sz="1400" dirty="0"/>
           </a:p>
@@ -4640,7 +4839,7 @@
                 <a:ea typeface="Arial" pitchFamily="34" charset="-122"/>
                 <a:cs typeface="Arial" pitchFamily="34" charset="-120"/>
               </a:rPr>
-              <a:t>Defenses that actually work</a:t>
+              <a:t>CWE mapping</a:t>
             </a:r>
             <a:endParaRPr lang="en-US" sz="2600" dirty="0"/>
           </a:p>
@@ -4655,11 +4854,11 @@
         <p:spPr>
           <a:xfrm>
             <a:off x="457200" y="1325880"/>
-            <a:ext cx="8229600" cy="1828800"/>
+            <a:ext cx="8229600" cy="1408176"/>
           </a:xfrm>
           <a:prstGeom prst="roundRect">
             <a:avLst>
-              <a:gd name="adj" fmla="val 4000"/>
+              <a:gd name="adj" fmla="val 5195"/>
             </a:avLst>
           </a:prstGeom>
           <a:solidFill>
@@ -4684,7 +4883,7 @@
         <p:spPr>
           <a:xfrm>
             <a:off x="731520" y="1435608"/>
-            <a:ext cx="7680960" cy="1609344"/>
+            <a:ext cx="7680960" cy="1188720"/>
           </a:xfrm>
           <a:prstGeom prst="rect">
             <a:avLst/>
@@ -4714,7 +4913,7 @@
                 <a:ea typeface="Calibri" pitchFamily="34" charset="-122"/>
                 <a:cs typeface="Calibri" pitchFamily="34" charset="-120"/>
               </a:rPr>
-              <a:t>Parameterized queries / prepared statements (the fix for SQLi)</a:t>
+              <a:t>CWE-89 — SQL injection</a:t>
             </a:r>
             <a:endParaRPr lang="en-US" sz="1400" dirty="0"/>
           </a:p>
@@ -4735,7 +4934,7 @@
                 <a:ea typeface="Calibri" pitchFamily="34" charset="-122"/>
                 <a:cs typeface="Calibri" pitchFamily="34" charset="-120"/>
               </a:rPr>
-              <a:t>ORM with bound parameters</a:t>
+              <a:t>CWE-78 — OS command injection (CWE-77 is its general parent — cite CWE-78, the specific one)</a:t>
             </a:r>
             <a:endParaRPr lang="en-US" sz="1400" dirty="0"/>
           </a:p>
@@ -4756,49 +4955,7 @@
                 <a:ea typeface="Calibri" pitchFamily="34" charset="-122"/>
                 <a:cs typeface="Calibri" pitchFamily="34" charset="-120"/>
               </a:rPr>
-              <a:t>Allow-list input validation (type, length, format)</a:t>
-            </a:r>
-            <a:endParaRPr lang="en-US" sz="1400" dirty="0"/>
-          </a:p>
-          <a:p>
-            <a:pPr marL="342900" indent="-342900">
-              <a:spcAft>
-                <a:spcPts val="600"/>
-              </a:spcAft>
-              <a:buSzPct val="100000"/>
-              <a:buChar char="•"/>
-            </a:pPr>
-            <a:r>
-              <a:rPr lang="en-US" sz="1400" dirty="0">
-                <a:solidFill>
-                  <a:srgbClr val="1F2937"/>
-                </a:solidFill>
-                <a:latin typeface="Calibri" pitchFamily="34" charset="0"/>
-                <a:ea typeface="Calibri" pitchFamily="34" charset="-122"/>
-                <a:cs typeface="Calibri" pitchFamily="34" charset="-120"/>
-              </a:rPr>
-              <a:t>Avoid shells: use exec APIs with arg arrays, not string concat</a:t>
-            </a:r>
-            <a:endParaRPr lang="en-US" sz="1400" dirty="0"/>
-          </a:p>
-          <a:p>
-            <a:pPr marL="342900" indent="-342900">
-              <a:spcAft>
-                <a:spcPts val="600"/>
-              </a:spcAft>
-              <a:buSzPct val="100000"/>
-              <a:buChar char="•"/>
-            </a:pPr>
-            <a:r>
-              <a:rPr lang="en-US" sz="1400" dirty="0">
-                <a:solidFill>
-                  <a:srgbClr val="1F2937"/>
-                </a:solidFill>
-                <a:latin typeface="Calibri" pitchFamily="34" charset="0"/>
-                <a:ea typeface="Calibri" pitchFamily="34" charset="-122"/>
-                <a:cs typeface="Calibri" pitchFamily="34" charset="-120"/>
-              </a:rPr>
-              <a:t>Least-privilege DB accounts</a:t>
+              <a:t>CWE-434 — unrestricted upload of a dangerous file type</a:t>
             </a:r>
             <a:endParaRPr lang="en-US" sz="1400" dirty="0"/>
           </a:p>
@@ -4983,7 +5140,7 @@
                 <a:ea typeface="Arial" pitchFamily="34" charset="-122"/>
                 <a:cs typeface="Arial" pitchFamily="34" charset="-120"/>
               </a:rPr>
-              <a:t>⚔️ Game — SQLi Boss Fight</a:t>
+              <a:t>Defenses that actually work</a:t>
             </a:r>
             <a:endParaRPr lang="en-US" sz="2600" dirty="0"/>
           </a:p>
@@ -4991,14 +5148,43 @@
       </p:sp>
       <p:sp>
         <p:nvSpPr>
-          <p:cNvPr id="5" name="Text 2"/>
-          <p:cNvSpPr/>
-          <p:nvPr/>
-        </p:nvSpPr>
-        <p:spPr>
-          <a:xfrm>
-            <a:off x="548640" y="1325880"/>
-            <a:ext cx="8046720" cy="548640"/>
+          <p:cNvPr id="5" name="Shape 2"/>
+          <p:cNvSpPr/>
+          <p:nvPr/>
+        </p:nvSpPr>
+        <p:spPr>
+          <a:xfrm>
+            <a:off x="457200" y="1325880"/>
+            <a:ext cx="8229600" cy="1828800"/>
+          </a:xfrm>
+          <a:prstGeom prst="roundRect">
+            <a:avLst>
+              <a:gd name="adj" fmla="val 4000"/>
+            </a:avLst>
+          </a:prstGeom>
+          <a:solidFill>
+            <a:srgbClr val="F1F5F9"/>
+          </a:solidFill>
+          <a:ln/>
+          <a:effectLst>
+            <a:outerShdw sx="100000" sy="100000" kx="0" ky="0" algn="bl" rotWithShape="0" blurRad="76200" dist="25400" dir="5400000">
+              <a:srgbClr val="000000">
+                <a:alpha val="12000"/>
+              </a:srgbClr>
+            </a:outerShdw>
+          </a:effectLst>
+        </p:spPr>
+      </p:sp>
+      <p:sp>
+        <p:nvSpPr>
+          <p:cNvPr id="6" name="Text 3"/>
+          <p:cNvSpPr/>
+          <p:nvPr/>
+        </p:nvSpPr>
+        <p:spPr>
+          <a:xfrm>
+            <a:off x="731520" y="1435608"/>
+            <a:ext cx="7680960" cy="1609344"/>
           </a:xfrm>
           <a:prstGeom prst="rect">
             <a:avLst/>
@@ -5012,8 +5198,12 @@
           </a:bodyPr>
           <a:lstStyle/>
           <a:p>
-            <a:pPr indent="0" marL="0">
-              <a:buNone/>
+            <a:pPr marL="342900" indent="-342900">
+              <a:spcAft>
+                <a:spcPts val="600"/>
+              </a:spcAft>
+              <a:buSzPct val="100000"/>
+              <a:buChar char="•"/>
             </a:pPr>
             <a:r>
               <a:rPr lang="en-US" sz="1400" dirty="0">
@@ -5024,99 +5214,20 @@
                 <a:ea typeface="Calibri" pitchFamily="34" charset="-122"/>
                 <a:cs typeface="Calibri" pitchFamily="34" charset="-120"/>
               </a:rPr>
-              <a:t>Four hits against this week's own app — no filters to bypass, the app has none:</a:t>
+              <a:t>Parameterized queries / prepared statements (the fix for SQLi)</a:t>
             </a:r>
             <a:endParaRPr lang="en-US" sz="1400" dirty="0"/>
           </a:p>
-        </p:txBody>
-      </p:sp>
-      <p:sp>
-        <p:nvSpPr>
-          <p:cNvPr id="6" name="Shape 3"/>
-          <p:cNvSpPr/>
-          <p:nvPr/>
-        </p:nvSpPr>
-        <p:spPr>
-          <a:xfrm>
-            <a:off x="502920" y="1965960"/>
-            <a:ext cx="384048" cy="384048"/>
-          </a:xfrm>
-          <a:prstGeom prst="ellipse">
-            <a:avLst/>
-          </a:prstGeom>
-          <a:solidFill>
-            <a:srgbClr val="E35205"/>
-          </a:solidFill>
-          <a:ln/>
-        </p:spPr>
-      </p:sp>
-      <p:sp>
-        <p:nvSpPr>
-          <p:cNvPr id="7" name="Text 4"/>
-          <p:cNvSpPr/>
-          <p:nvPr/>
-        </p:nvSpPr>
-        <p:spPr>
-          <a:xfrm>
-            <a:off x="502920" y="1965960"/>
-            <a:ext cx="384048" cy="384048"/>
-          </a:xfrm>
-          <a:prstGeom prst="rect">
-            <a:avLst/>
-          </a:prstGeom>
-          <a:noFill/>
-          <a:ln/>
-        </p:spPr>
-        <p:txBody>
-          <a:bodyPr wrap="square" lIns="0" tIns="0" rIns="0" bIns="0" rtlCol="0" anchor="ctr"/>
-          <a:lstStyle/>
-          <a:p>
-            <a:pPr algn="ctr" indent="0" marL="0">
-              <a:buNone/>
-            </a:pPr>
-            <a:r>
-              <a:rPr lang="en-US" sz="1500" b="1" dirty="0">
-                <a:solidFill>
-                  <a:srgbClr val="0E1726"/>
-                </a:solidFill>
-                <a:latin typeface="Arial" pitchFamily="34" charset="0"/>
-                <a:ea typeface="Arial" pitchFamily="34" charset="-122"/>
-                <a:cs typeface="Arial" pitchFamily="34" charset="-120"/>
-              </a:rPr>
-              <a:t>1</a:t>
-            </a:r>
-            <a:endParaRPr lang="en-US" sz="1500" dirty="0"/>
-          </a:p>
-        </p:txBody>
-      </p:sp>
-      <p:sp>
-        <p:nvSpPr>
-          <p:cNvPr id="8" name="Text 5"/>
-          <p:cNvSpPr/>
-          <p:nvPr/>
-        </p:nvSpPr>
-        <p:spPr>
-          <a:xfrm>
-            <a:off x="1051560" y="1965960"/>
-            <a:ext cx="7589520" cy="402336"/>
-          </a:xfrm>
-          <a:prstGeom prst="rect">
-            <a:avLst/>
-          </a:prstGeom>
-          <a:noFill/>
-          <a:ln/>
-        </p:spPr>
-        <p:txBody>
-          <a:bodyPr wrap="square" lIns="0" tIns="0" rIns="0" bIns="0" rtlCol="0" anchor="ctr">
-            <a:normAutofit/>
-          </a:bodyPr>
-          <a:lstStyle/>
-          <a:p>
-            <a:pPr indent="0" marL="0">
-              <a:buNone/>
-            </a:pPr>
-            <a:r>
-              <a:rPr lang="en-US" sz="1350" dirty="0">
+          <a:p>
+            <a:pPr marL="342900" indent="-342900">
+              <a:spcAft>
+                <a:spcPts val="600"/>
+              </a:spcAft>
+              <a:buSzPct val="100000"/>
+              <a:buChar char="•"/>
+            </a:pPr>
+            <a:r>
+              <a:rPr lang="en-US" sz="1400" dirty="0">
                 <a:solidFill>
                   <a:srgbClr val="1F2937"/>
                 </a:solidFill>
@@ -5124,99 +5235,20 @@
                 <a:ea typeface="Calibri" pitchFamily="34" charset="-122"/>
                 <a:cs typeface="Calibri" pitchFamily="34" charset="-120"/>
               </a:rPr>
-              <a:t>Auth bypass (alice'--)</a:t>
-            </a:r>
-            <a:endParaRPr lang="en-US" sz="1350" dirty="0"/>
-          </a:p>
-        </p:txBody>
-      </p:sp>
-      <p:sp>
-        <p:nvSpPr>
-          <p:cNvPr id="9" name="Shape 6"/>
-          <p:cNvSpPr/>
-          <p:nvPr/>
-        </p:nvSpPr>
-        <p:spPr>
-          <a:xfrm>
-            <a:off x="502920" y="2441448"/>
-            <a:ext cx="384048" cy="384048"/>
-          </a:xfrm>
-          <a:prstGeom prst="ellipse">
-            <a:avLst/>
-          </a:prstGeom>
-          <a:solidFill>
-            <a:srgbClr val="E35205"/>
-          </a:solidFill>
-          <a:ln/>
-        </p:spPr>
-      </p:sp>
-      <p:sp>
-        <p:nvSpPr>
-          <p:cNvPr id="10" name="Text 7"/>
-          <p:cNvSpPr/>
-          <p:nvPr/>
-        </p:nvSpPr>
-        <p:spPr>
-          <a:xfrm>
-            <a:off x="502920" y="2441448"/>
-            <a:ext cx="384048" cy="384048"/>
-          </a:xfrm>
-          <a:prstGeom prst="rect">
-            <a:avLst/>
-          </a:prstGeom>
-          <a:noFill/>
-          <a:ln/>
-        </p:spPr>
-        <p:txBody>
-          <a:bodyPr wrap="square" lIns="0" tIns="0" rIns="0" bIns="0" rtlCol="0" anchor="ctr"/>
-          <a:lstStyle/>
-          <a:p>
-            <a:pPr algn="ctr" indent="0" marL="0">
-              <a:buNone/>
-            </a:pPr>
-            <a:r>
-              <a:rPr lang="en-US" sz="1500" b="1" dirty="0">
-                <a:solidFill>
-                  <a:srgbClr val="0E1726"/>
-                </a:solidFill>
-                <a:latin typeface="Arial" pitchFamily="34" charset="0"/>
-                <a:ea typeface="Arial" pitchFamily="34" charset="-122"/>
-                <a:cs typeface="Arial" pitchFamily="34" charset="-120"/>
-              </a:rPr>
-              <a:t>2</a:t>
-            </a:r>
-            <a:endParaRPr lang="en-US" sz="1500" dirty="0"/>
-          </a:p>
-        </p:txBody>
-      </p:sp>
-      <p:sp>
-        <p:nvSpPr>
-          <p:cNvPr id="11" name="Text 8"/>
-          <p:cNvSpPr/>
-          <p:nvPr/>
-        </p:nvSpPr>
-        <p:spPr>
-          <a:xfrm>
-            <a:off x="1051560" y="2441448"/>
-            <a:ext cx="7589520" cy="402336"/>
-          </a:xfrm>
-          <a:prstGeom prst="rect">
-            <a:avLst/>
-          </a:prstGeom>
-          <a:noFill/>
-          <a:ln/>
-        </p:spPr>
-        <p:txBody>
-          <a:bodyPr wrap="square" lIns="0" tIns="0" rIns="0" bIns="0" rtlCol="0" anchor="ctr">
-            <a:normAutofit/>
-          </a:bodyPr>
-          <a:lstStyle/>
-          <a:p>
-            <a:pPr indent="0" marL="0">
-              <a:buNone/>
-            </a:pPr>
-            <a:r>
-              <a:rPr lang="en-US" sz="1350" dirty="0">
+              <a:t>ORM with bound parameters</a:t>
+            </a:r>
+            <a:endParaRPr lang="en-US" sz="1400" dirty="0"/>
+          </a:p>
+          <a:p>
+            <a:pPr marL="342900" indent="-342900">
+              <a:spcAft>
+                <a:spcPts val="600"/>
+              </a:spcAft>
+              <a:buSzPct val="100000"/>
+              <a:buChar char="•"/>
+            </a:pPr>
+            <a:r>
+              <a:rPr lang="en-US" sz="1400" dirty="0">
                 <a:solidFill>
                   <a:srgbClr val="1F2937"/>
                 </a:solidFill>
@@ -5224,99 +5256,20 @@
                 <a:ea typeface="Calibri" pitchFamily="34" charset="-122"/>
                 <a:cs typeface="Calibri" pitchFamily="34" charset="-120"/>
               </a:rPr>
-              <a:t>UNION dump (steal all credentials)</a:t>
-            </a:r>
-            <a:endParaRPr lang="en-US" sz="1350" dirty="0"/>
-          </a:p>
-        </p:txBody>
-      </p:sp>
-      <p:sp>
-        <p:nvSpPr>
-          <p:cNvPr id="12" name="Shape 9"/>
-          <p:cNvSpPr/>
-          <p:nvPr/>
-        </p:nvSpPr>
-        <p:spPr>
-          <a:xfrm>
-            <a:off x="502920" y="2916936"/>
-            <a:ext cx="384048" cy="384048"/>
-          </a:xfrm>
-          <a:prstGeom prst="ellipse">
-            <a:avLst/>
-          </a:prstGeom>
-          <a:solidFill>
-            <a:srgbClr val="E35205"/>
-          </a:solidFill>
-          <a:ln/>
-        </p:spPr>
-      </p:sp>
-      <p:sp>
-        <p:nvSpPr>
-          <p:cNvPr id="13" name="Text 10"/>
-          <p:cNvSpPr/>
-          <p:nvPr/>
-        </p:nvSpPr>
-        <p:spPr>
-          <a:xfrm>
-            <a:off x="502920" y="2916936"/>
-            <a:ext cx="384048" cy="384048"/>
-          </a:xfrm>
-          <a:prstGeom prst="rect">
-            <a:avLst/>
-          </a:prstGeom>
-          <a:noFill/>
-          <a:ln/>
-        </p:spPr>
-        <p:txBody>
-          <a:bodyPr wrap="square" lIns="0" tIns="0" rIns="0" bIns="0" rtlCol="0" anchor="ctr"/>
-          <a:lstStyle/>
-          <a:p>
-            <a:pPr algn="ctr" indent="0" marL="0">
-              <a:buNone/>
-            </a:pPr>
-            <a:r>
-              <a:rPr lang="en-US" sz="1500" b="1" dirty="0">
-                <a:solidFill>
-                  <a:srgbClr val="0E1726"/>
-                </a:solidFill>
-                <a:latin typeface="Arial" pitchFamily="34" charset="0"/>
-                <a:ea typeface="Arial" pitchFamily="34" charset="-122"/>
-                <a:cs typeface="Arial" pitchFamily="34" charset="-120"/>
-              </a:rPr>
-              <a:t>3</a:t>
-            </a:r>
-            <a:endParaRPr lang="en-US" sz="1500" dirty="0"/>
-          </a:p>
-        </p:txBody>
-      </p:sp>
-      <p:sp>
-        <p:nvSpPr>
-          <p:cNvPr id="14" name="Text 11"/>
-          <p:cNvSpPr/>
-          <p:nvPr/>
-        </p:nvSpPr>
-        <p:spPr>
-          <a:xfrm>
-            <a:off x="1051560" y="2916936"/>
-            <a:ext cx="7589520" cy="402336"/>
-          </a:xfrm>
-          <a:prstGeom prst="rect">
-            <a:avLst/>
-          </a:prstGeom>
-          <a:noFill/>
-          <a:ln/>
-        </p:spPr>
-        <p:txBody>
-          <a:bodyPr wrap="square" lIns="0" tIns="0" rIns="0" bIns="0" rtlCol="0" anchor="ctr">
-            <a:normAutofit/>
-          </a:bodyPr>
-          <a:lstStyle/>
-          <a:p>
-            <a:pPr indent="0" marL="0">
-              <a:buNone/>
-            </a:pPr>
-            <a:r>
-              <a:rPr lang="en-US" sz="1350" dirty="0">
+              <a:t>Allow-list input validation (type, length, format)</a:t>
+            </a:r>
+            <a:endParaRPr lang="en-US" sz="1400" dirty="0"/>
+          </a:p>
+          <a:p>
+            <a:pPr marL="342900" indent="-342900">
+              <a:spcAft>
+                <a:spcPts val="600"/>
+              </a:spcAft>
+              <a:buSzPct val="100000"/>
+              <a:buChar char="•"/>
+            </a:pPr>
+            <a:r>
+              <a:rPr lang="en-US" sz="1400" dirty="0">
                 <a:solidFill>
                   <a:srgbClr val="1F2937"/>
                 </a:solidFill>
@@ -5324,99 +5277,20 @@
                 <a:ea typeface="Calibri" pitchFamily="34" charset="-122"/>
                 <a:cs typeface="Calibri" pitchFamily="34" charset="-120"/>
               </a:rPr>
-              <a:t>Command injection</a:t>
-            </a:r>
-            <a:endParaRPr lang="en-US" sz="1350" dirty="0"/>
-          </a:p>
-        </p:txBody>
-      </p:sp>
-      <p:sp>
-        <p:nvSpPr>
-          <p:cNvPr id="15" name="Shape 12"/>
-          <p:cNvSpPr/>
-          <p:nvPr/>
-        </p:nvSpPr>
-        <p:spPr>
-          <a:xfrm>
-            <a:off x="502920" y="3392424"/>
-            <a:ext cx="384048" cy="384048"/>
-          </a:xfrm>
-          <a:prstGeom prst="ellipse">
-            <a:avLst/>
-          </a:prstGeom>
-          <a:solidFill>
-            <a:srgbClr val="E35205"/>
-          </a:solidFill>
-          <a:ln/>
-        </p:spPr>
-      </p:sp>
-      <p:sp>
-        <p:nvSpPr>
-          <p:cNvPr id="16" name="Text 13"/>
-          <p:cNvSpPr/>
-          <p:nvPr/>
-        </p:nvSpPr>
-        <p:spPr>
-          <a:xfrm>
-            <a:off x="502920" y="3392424"/>
-            <a:ext cx="384048" cy="384048"/>
-          </a:xfrm>
-          <a:prstGeom prst="rect">
-            <a:avLst/>
-          </a:prstGeom>
-          <a:noFill/>
-          <a:ln/>
-        </p:spPr>
-        <p:txBody>
-          <a:bodyPr wrap="square" lIns="0" tIns="0" rIns="0" bIns="0" rtlCol="0" anchor="ctr"/>
-          <a:lstStyle/>
-          <a:p>
-            <a:pPr algn="ctr" indent="0" marL="0">
-              <a:buNone/>
-            </a:pPr>
-            <a:r>
-              <a:rPr lang="en-US" sz="1500" b="1" dirty="0">
-                <a:solidFill>
-                  <a:srgbClr val="0E1726"/>
-                </a:solidFill>
-                <a:latin typeface="Arial" pitchFamily="34" charset="0"/>
-                <a:ea typeface="Arial" pitchFamily="34" charset="-122"/>
-                <a:cs typeface="Arial" pitchFamily="34" charset="-120"/>
-              </a:rPr>
-              <a:t>4</a:t>
-            </a:r>
-            <a:endParaRPr lang="en-US" sz="1500" dirty="0"/>
-          </a:p>
-        </p:txBody>
-      </p:sp>
-      <p:sp>
-        <p:nvSpPr>
-          <p:cNvPr id="17" name="Text 14"/>
-          <p:cNvSpPr/>
-          <p:nvPr/>
-        </p:nvSpPr>
-        <p:spPr>
-          <a:xfrm>
-            <a:off x="1051560" y="3392424"/>
-            <a:ext cx="7589520" cy="402336"/>
-          </a:xfrm>
-          <a:prstGeom prst="rect">
-            <a:avLst/>
-          </a:prstGeom>
-          <a:noFill/>
-          <a:ln/>
-        </p:spPr>
-        <p:txBody>
-          <a:bodyPr wrap="square" lIns="0" tIns="0" rIns="0" bIns="0" rtlCol="0" anchor="ctr">
-            <a:normAutofit/>
-          </a:bodyPr>
-          <a:lstStyle/>
-          <a:p>
-            <a:pPr indent="0" marL="0">
-              <a:buNone/>
-            </a:pPr>
-            <a:r>
-              <a:rPr lang="en-US" sz="1350" dirty="0">
+              <a:t>Avoid shells: use exec APIs with arg arrays, not string concat</a:t>
+            </a:r>
+            <a:endParaRPr lang="en-US" sz="1400" dirty="0"/>
+          </a:p>
+          <a:p>
+            <a:pPr marL="342900" indent="-342900">
+              <a:spcAft>
+                <a:spcPts val="600"/>
+              </a:spcAft>
+              <a:buSzPct val="100000"/>
+              <a:buChar char="•"/>
+            </a:pPr>
+            <a:r>
+              <a:rPr lang="en-US" sz="1400" dirty="0">
                 <a:solidFill>
                   <a:srgbClr val="1F2937"/>
                 </a:solidFill>
@@ -5424,15 +5298,15 @@
                 <a:ea typeface="Calibri" pitchFamily="34" charset="-122"/>
                 <a:cs typeface="Calibri" pitchFamily="34" charset="-120"/>
               </a:rPr>
-              <a:t>Unrestricted upload</a:t>
-            </a:r>
-            <a:endParaRPr lang="en-US" sz="1350" dirty="0"/>
-          </a:p>
-        </p:txBody>
-      </p:sp>
-      <p:sp>
-        <p:nvSpPr>
-          <p:cNvPr id="18" name="Text 15"/>
+              <a:t>Least-privilege DB accounts</a:t>
+            </a:r>
+            <a:endParaRPr lang="en-US" sz="1400" dirty="0"/>
+          </a:p>
+        </p:txBody>
+      </p:sp>
+      <p:sp>
+        <p:nvSpPr>
+          <p:cNvPr id="7" name="Text 4"/>
           <p:cNvSpPr/>
           <p:nvPr/>
         </p:nvSpPr>
@@ -5471,7 +5345,7 @@
       </p:sp>
       <p:pic>
         <p:nvPicPr>
-          <p:cNvPr id="19" name="Image 1" descr="/Users/pop7/Library/CloudStorage/OneDrive-MonsterConnectCo.,Ltd/Lecture/KOSEN69 - software-security/slides/pptx/assets/logo-small.png">    </p:cNvPr>
+          <p:cNvPr id="8" name="Image 1" descr="/Users/pop7/Library/CloudStorage/OneDrive-MonsterConnectCo.,Ltd/Lecture/KOSEN69 - software-security/slides/pptx/assets/logo-small.png">    </p:cNvPr>
           <p:cNvPicPr>
             <a:picLocks noChangeAspect="1"/>
           </p:cNvPicPr>
@@ -5609,7 +5483,7 @@
                 <a:ea typeface="Arial" pitchFamily="34" charset="-122"/>
                 <a:cs typeface="Arial" pitchFamily="34" charset="-120"/>
               </a:rPr>
-              <a:t>⚔️ Game — SQLi Boss Fight (cont.)</a:t>
+              <a:t>One value, three interpreters</a:t>
             </a:r>
             <a:endParaRPr lang="en-US" sz="2600" dirty="0"/>
           </a:p>
@@ -5617,34 +5491,14 @@
       </p:sp>
       <p:sp>
         <p:nvSpPr>
-          <p:cNvPr id="5" name="Shape 2"/>
-          <p:cNvSpPr/>
-          <p:nvPr/>
-        </p:nvSpPr>
-        <p:spPr>
-          <a:xfrm>
-            <a:off x="502920" y="1325880"/>
-            <a:ext cx="384048" cy="384048"/>
-          </a:xfrm>
-          <a:prstGeom prst="ellipse">
-            <a:avLst/>
-          </a:prstGeom>
-          <a:solidFill>
-            <a:srgbClr val="E35205"/>
-          </a:solidFill>
-          <a:ln/>
-        </p:spPr>
-      </p:sp>
-      <p:sp>
-        <p:nvSpPr>
-          <p:cNvPr id="6" name="Text 3"/>
-          <p:cNvSpPr/>
-          <p:nvPr/>
-        </p:nvSpPr>
-        <p:spPr>
-          <a:xfrm>
-            <a:off x="502920" y="1325880"/>
-            <a:ext cx="384048" cy="384048"/>
+          <p:cNvPr id="5" name="Text 2"/>
+          <p:cNvSpPr/>
+          <p:nvPr/>
+        </p:nvSpPr>
+        <p:spPr>
+          <a:xfrm>
+            <a:off x="548640" y="1325880"/>
+            <a:ext cx="8046720" cy="1645920"/>
           </a:xfrm>
           <a:prstGeom prst="rect">
             <a:avLst/>
@@ -5653,46 +5507,7 @@
           <a:ln/>
         </p:spPr>
         <p:txBody>
-          <a:bodyPr wrap="square" lIns="0" tIns="0" rIns="0" bIns="0" rtlCol="0" anchor="ctr"/>
-          <a:lstStyle/>
-          <a:p>
-            <a:pPr algn="ctr" indent="0" marL="0">
-              <a:buNone/>
-            </a:pPr>
-            <a:r>
-              <a:rPr lang="en-US" sz="1500" b="1" dirty="0">
-                <a:solidFill>
-                  <a:srgbClr val="0E1726"/>
-                </a:solidFill>
-                <a:latin typeface="Arial" pitchFamily="34" charset="0"/>
-                <a:ea typeface="Arial" pitchFamily="34" charset="-122"/>
-                <a:cs typeface="Arial" pitchFamily="34" charset="-120"/>
-              </a:rPr>
-              <a:t>5</a:t>
-            </a:r>
-            <a:endParaRPr lang="en-US" sz="1500" dirty="0"/>
-          </a:p>
-        </p:txBody>
-      </p:sp>
-      <p:sp>
-        <p:nvSpPr>
-          <p:cNvPr id="7" name="Text 4"/>
-          <p:cNvSpPr/>
-          <p:nvPr/>
-        </p:nvSpPr>
-        <p:spPr>
-          <a:xfrm>
-            <a:off x="1051560" y="1325880"/>
-            <a:ext cx="7589520" cy="658368"/>
-          </a:xfrm>
-          <a:prstGeom prst="rect">
-            <a:avLst/>
-          </a:prstGeom>
-          <a:noFill/>
-          <a:ln/>
-        </p:spPr>
-        <p:txBody>
-          <a:bodyPr wrap="square" lIns="0" tIns="0" rIns="0" bIns="0" rtlCol="0" anchor="ctr">
+          <a:bodyPr wrap="square" lIns="0" tIns="0" rIns="0" bIns="0" rtlCol="0" anchor="t">
             <a:normAutofit/>
           </a:bodyPr>
           <a:lstStyle/>
@@ -5701,7 +5516,7 @@
               <a:buNone/>
             </a:pPr>
             <a:r>
-              <a:rPr lang="en-US" sz="1350" dirty="0">
+              <a:rPr lang="en-US" sz="1400" dirty="0">
                 <a:solidFill>
                   <a:srgbClr val="1F2937"/>
                 </a:solidFill>
@@ -5709,15 +5524,15 @@
                 <a:ea typeface="Calibri" pitchFamily="34" charset="-122"/>
                 <a:cs typeface="Calibri" pitchFamily="34" charset="-120"/>
               </a:rPr>
-              <a:t>Boss defeated: run solution_app.py, prove all four attacks now fail, cite the exact fix line for each</a:t>
-            </a:r>
-            <a:endParaRPr lang="en-US" sz="1350" dirty="0"/>
-          </a:p>
-        </p:txBody>
-      </p:sp>
-      <p:sp>
-        <p:nvSpPr>
-          <p:cNvPr id="8" name="Text 5"/>
+              <a:t>See diagram: One untrusted request value reaches three different interpreters — SQL (CWE-89, fixed by a parameterized query), the OS shell (CWE-78, fixed by an argument vector with shell=False), and a filesystem write (CWE-434, fixed by an extension allow-list). One input filter cannot guard three grammars — the fix belongs at the sink that parses the value, not at the source. (web only)</a:t>
+            </a:r>
+            <a:endParaRPr lang="en-US" sz="1400" dirty="0"/>
+          </a:p>
+        </p:txBody>
+      </p:sp>
+      <p:sp>
+        <p:nvSpPr>
+          <p:cNvPr id="6" name="Text 3"/>
           <p:cNvSpPr/>
           <p:nvPr/>
         </p:nvSpPr>
@@ -5756,7 +5571,7 @@
       </p:sp>
       <p:pic>
         <p:nvPicPr>
-          <p:cNvPr id="9" name="Image 1" descr="/Users/pop7/Library/CloudStorage/OneDrive-MonsterConnectCo.,Ltd/Lecture/KOSEN69 - software-security/slides/pptx/assets/logo-small.png">    </p:cNvPr>
+          <p:cNvPr id="7" name="Image 1" descr="/Users/pop7/Library/CloudStorage/OneDrive-MonsterConnectCo.,Ltd/Lecture/KOSEN69 - software-security/slides/pptx/assets/logo-small.png">    </p:cNvPr>
           <p:cNvPicPr>
             <a:picLocks noChangeAspect="1"/>
           </p:cNvPicPr>
@@ -5894,7 +5709,7 @@
                 <a:ea typeface="Arial" pitchFamily="34" charset="-122"/>
                 <a:cs typeface="Arial" pitchFamily="34" charset="-120"/>
               </a:rPr>
-              <a:t>Lab steps</a:t>
+              <a:t>⚔️ Game — SQLi Boss Fight</a:t>
             </a:r>
             <a:endParaRPr lang="en-US" sz="2600" dirty="0"/>
           </a:p>
@@ -5902,36 +5717,114 @@
       </p:sp>
       <p:sp>
         <p:nvSpPr>
-          <p:cNvPr id="5" name="Shape 2"/>
-          <p:cNvSpPr/>
-          <p:nvPr/>
-        </p:nvSpPr>
-        <p:spPr>
-          <a:xfrm>
-            <a:off x="457200" y="1325880"/>
-            <a:ext cx="8229600" cy="822960"/>
-          </a:xfrm>
-          <a:prstGeom prst="roundRect">
-            <a:avLst>
-              <a:gd name="adj" fmla="val 8889"/>
-            </a:avLst>
+          <p:cNvPr id="5" name="Text 2"/>
+          <p:cNvSpPr/>
+          <p:nvPr/>
+        </p:nvSpPr>
+        <p:spPr>
+          <a:xfrm>
+            <a:off x="548640" y="1325880"/>
+            <a:ext cx="8046720" cy="548640"/>
+          </a:xfrm>
+          <a:prstGeom prst="rect">
+            <a:avLst/>
+          </a:prstGeom>
+          <a:noFill/>
+          <a:ln/>
+        </p:spPr>
+        <p:txBody>
+          <a:bodyPr wrap="square" lIns="0" tIns="0" rIns="0" bIns="0" rtlCol="0" anchor="t">
+            <a:normAutofit/>
+          </a:bodyPr>
+          <a:lstStyle/>
+          <a:p>
+            <a:pPr indent="0" marL="0">
+              <a:buNone/>
+            </a:pPr>
+            <a:r>
+              <a:rPr lang="en-US" sz="1400" dirty="0">
+                <a:solidFill>
+                  <a:srgbClr val="1F2937"/>
+                </a:solidFill>
+                <a:latin typeface="Calibri" pitchFamily="34" charset="0"/>
+                <a:ea typeface="Calibri" pitchFamily="34" charset="-122"/>
+                <a:cs typeface="Calibri" pitchFamily="34" charset="-120"/>
+              </a:rPr>
+              <a:t>Four hits against this week's own app — no filters to bypass, the app has none:</a:t>
+            </a:r>
+            <a:endParaRPr lang="en-US" sz="1400" dirty="0"/>
+          </a:p>
+        </p:txBody>
+      </p:sp>
+      <p:sp>
+        <p:nvSpPr>
+          <p:cNvPr id="6" name="Shape 3"/>
+          <p:cNvSpPr/>
+          <p:nvPr/>
+        </p:nvSpPr>
+        <p:spPr>
+          <a:xfrm>
+            <a:off x="502920" y="1965960"/>
+            <a:ext cx="384048" cy="384048"/>
+          </a:xfrm>
+          <a:prstGeom prst="ellipse">
+            <a:avLst/>
           </a:prstGeom>
           <a:solidFill>
-            <a:srgbClr val="E8EDF3"/>
+            <a:srgbClr val="E35205"/>
           </a:solidFill>
           <a:ln/>
         </p:spPr>
       </p:sp>
       <p:sp>
         <p:nvSpPr>
-          <p:cNvPr id="6" name="Text 3"/>
-          <p:cNvSpPr/>
-          <p:nvPr/>
-        </p:nvSpPr>
-        <p:spPr>
-          <a:xfrm>
-            <a:off x="731520" y="1325880"/>
-            <a:ext cx="7680960" cy="822960"/>
+          <p:cNvPr id="7" name="Text 4"/>
+          <p:cNvSpPr/>
+          <p:nvPr/>
+        </p:nvSpPr>
+        <p:spPr>
+          <a:xfrm>
+            <a:off x="502920" y="1965960"/>
+            <a:ext cx="384048" cy="384048"/>
+          </a:xfrm>
+          <a:prstGeom prst="rect">
+            <a:avLst/>
+          </a:prstGeom>
+          <a:noFill/>
+          <a:ln/>
+        </p:spPr>
+        <p:txBody>
+          <a:bodyPr wrap="square" lIns="0" tIns="0" rIns="0" bIns="0" rtlCol="0" anchor="ctr"/>
+          <a:lstStyle/>
+          <a:p>
+            <a:pPr algn="ctr" indent="0" marL="0">
+              <a:buNone/>
+            </a:pPr>
+            <a:r>
+              <a:rPr lang="en-US" sz="1500" b="1" dirty="0">
+                <a:solidFill>
+                  <a:srgbClr val="0E1726"/>
+                </a:solidFill>
+                <a:latin typeface="Arial" pitchFamily="34" charset="0"/>
+                <a:ea typeface="Arial" pitchFamily="34" charset="-122"/>
+                <a:cs typeface="Arial" pitchFamily="34" charset="-120"/>
+              </a:rPr>
+              <a:t>1</a:t>
+            </a:r>
+            <a:endParaRPr lang="en-US" sz="1500" dirty="0"/>
+          </a:p>
+        </p:txBody>
+      </p:sp>
+      <p:sp>
+        <p:nvSpPr>
+          <p:cNvPr id="8" name="Text 5"/>
+          <p:cNvSpPr/>
+          <p:nvPr/>
+        </p:nvSpPr>
+        <p:spPr>
+          <a:xfrm>
+            <a:off x="1051560" y="1965960"/>
+            <a:ext cx="7589520" cy="402336"/>
           </a:xfrm>
           <a:prstGeom prst="rect">
             <a:avLst/>
@@ -5949,85 +5842,17 @@
               <a:buNone/>
             </a:pPr>
             <a:r>
-              <a:rPr lang="en-US" sz="1400" i="1" dirty="0">
-                <a:solidFill>
-                  <a:srgbClr val="E35205"/>
+              <a:rPr lang="en-US" sz="1350" dirty="0">
+                <a:solidFill>
+                  <a:srgbClr val="1F2937"/>
                 </a:solidFill>
                 <a:latin typeface="Calibri" pitchFamily="34" charset="0"/>
                 <a:ea typeface="Calibri" pitchFamily="34" charset="-122"/>
                 <a:cs typeface="Calibri" pitchFamily="34" charset="-120"/>
               </a:rPr>
-              <a:t>📋 Worksheet 4 — labs/week04-injection/worksheet.md (Part 3) · kickoff: docker compose up → http://localhost:8080</a:t>
-            </a:r>
-            <a:endParaRPr lang="en-US" sz="1400" dirty="0"/>
-          </a:p>
-        </p:txBody>
-      </p:sp>
-      <p:sp>
-        <p:nvSpPr>
-          <p:cNvPr id="7" name="Shape 4"/>
-          <p:cNvSpPr/>
-          <p:nvPr/>
-        </p:nvSpPr>
-        <p:spPr>
-          <a:xfrm>
-            <a:off x="457200" y="2313432"/>
-            <a:ext cx="8229600" cy="493776"/>
-          </a:xfrm>
-          <a:prstGeom prst="roundRect">
-            <a:avLst>
-              <a:gd name="adj" fmla="val 11111"/>
-            </a:avLst>
-          </a:prstGeom>
-          <a:solidFill>
-            <a:srgbClr val="0A1020"/>
-          </a:solidFill>
-          <a:ln w="12700">
-            <a:solidFill>
-              <a:srgbClr val="E8EDF3"/>
-            </a:solidFill>
-            <a:prstDash val="solid"/>
-          </a:ln>
-        </p:spPr>
-      </p:sp>
-      <p:sp>
-        <p:nvSpPr>
-          <p:cNvPr id="8" name="Text 5"/>
-          <p:cNvSpPr/>
-          <p:nvPr/>
-        </p:nvSpPr>
-        <p:spPr>
-          <a:xfrm>
-            <a:off x="640080" y="2386584"/>
-            <a:ext cx="7863840" cy="347472"/>
-          </a:xfrm>
-          <a:prstGeom prst="rect">
-            <a:avLst/>
-          </a:prstGeom>
-          <a:noFill/>
-          <a:ln/>
-        </p:spPr>
-        <p:txBody>
-          <a:bodyPr wrap="square" lIns="0" tIns="0" rIns="0" bIns="0" rtlCol="0" anchor="t">
-            <a:normAutofit/>
-          </a:bodyPr>
-          <a:lstStyle/>
-          <a:p>
-            <a:pPr indent="0" marL="0">
-              <a:buNone/>
-            </a:pPr>
-            <a:r>
-              <a:rPr lang="en-US" sz="1150" dirty="0">
-                <a:solidFill>
-                  <a:srgbClr val="9FE7D6"/>
-                </a:solidFill>
-                <a:latin typeface="Courier New" pitchFamily="34" charset="0"/>
-                <a:ea typeface="Courier New" pitchFamily="34" charset="-122"/>
-                <a:cs typeface="Courier New" pitchFamily="34" charset="-120"/>
-              </a:rPr>
-              <a:t>docker run --rm -p 80:80 vulnerables/web-dvwa   # optional extra target (or Juice Shop)</a:t>
-            </a:r>
-            <a:endParaRPr lang="en-US" sz="1150" dirty="0"/>
+              <a:t>Auth bypass (alice'--)</a:t>
+            </a:r>
+            <a:endParaRPr lang="en-US" sz="1350" dirty="0"/>
           </a:p>
         </p:txBody>
       </p:sp>
@@ -6039,7 +5864,7 @@
         </p:nvSpPr>
         <p:spPr>
           <a:xfrm>
-            <a:off x="502920" y="2971800"/>
+            <a:off x="502920" y="2441448"/>
             <a:ext cx="384048" cy="384048"/>
           </a:xfrm>
           <a:prstGeom prst="ellipse">
@@ -6059,7 +5884,7 @@
         </p:nvSpPr>
         <p:spPr>
           <a:xfrm>
-            <a:off x="502920" y="2971800"/>
+            <a:off x="502920" y="2441448"/>
             <a:ext cx="384048" cy="384048"/>
           </a:xfrm>
           <a:prstGeom prst="rect">
@@ -6084,7 +5909,7 @@
                 <a:ea typeface="Arial" pitchFamily="34" charset="-122"/>
                 <a:cs typeface="Arial" pitchFamily="34" charset="-120"/>
               </a:rPr>
-              <a:t>1</a:t>
+              <a:t>2</a:t>
             </a:r>
             <a:endParaRPr lang="en-US" sz="1500" dirty="0"/>
           </a:p>
@@ -6098,7 +5923,7 @@
         </p:nvSpPr>
         <p:spPr>
           <a:xfrm>
-            <a:off x="1051560" y="2971800"/>
+            <a:off x="1051560" y="2441448"/>
             <a:ext cx="7589520" cy="402336"/>
           </a:xfrm>
           <a:prstGeom prst="rect">
@@ -6125,7 +5950,7 @@
                 <a:ea typeface="Calibri" pitchFamily="34" charset="-122"/>
                 <a:cs typeface="Calibri" pitchFamily="34" charset="-120"/>
               </a:rPr>
-              <a:t>Find an injectable parameter, bypass auth</a:t>
+              <a:t>UNION dump (steal all credentials)</a:t>
             </a:r>
             <a:endParaRPr lang="en-US" sz="1350" dirty="0"/>
           </a:p>
@@ -6139,7 +5964,7 @@
         </p:nvSpPr>
         <p:spPr>
           <a:xfrm>
-            <a:off x="502920" y="3447288"/>
+            <a:off x="502920" y="2916936"/>
             <a:ext cx="384048" cy="384048"/>
           </a:xfrm>
           <a:prstGeom prst="ellipse">
@@ -6159,7 +5984,7 @@
         </p:nvSpPr>
         <p:spPr>
           <a:xfrm>
-            <a:off x="502920" y="3447288"/>
+            <a:off x="502920" y="2916936"/>
             <a:ext cx="384048" cy="384048"/>
           </a:xfrm>
           <a:prstGeom prst="rect">
@@ -6184,7 +6009,7 @@
                 <a:ea typeface="Arial" pitchFamily="34" charset="-122"/>
                 <a:cs typeface="Arial" pitchFamily="34" charset="-120"/>
               </a:rPr>
-              <a:t>2</a:t>
+              <a:t>3</a:t>
             </a:r>
             <a:endParaRPr lang="en-US" sz="1500" dirty="0"/>
           </a:p>
@@ -6198,7 +6023,7 @@
         </p:nvSpPr>
         <p:spPr>
           <a:xfrm>
-            <a:off x="1051560" y="3447288"/>
+            <a:off x="1051560" y="2916936"/>
             <a:ext cx="7589520" cy="402336"/>
           </a:xfrm>
           <a:prstGeom prst="rect">
@@ -6225,7 +6050,7 @@
                 <a:ea typeface="Calibri" pitchFamily="34" charset="-122"/>
                 <a:cs typeface="Calibri" pitchFamily="34" charset="-120"/>
               </a:rPr>
-              <a:t>Extract data (UNION dump)</a:t>
+              <a:t>Command injection</a:t>
             </a:r>
             <a:endParaRPr lang="en-US" sz="1350" dirty="0"/>
           </a:p>
@@ -6239,7 +6064,7 @@
         </p:nvSpPr>
         <p:spPr>
           <a:xfrm>
-            <a:off x="502920" y="3922776"/>
+            <a:off x="502920" y="3392424"/>
             <a:ext cx="384048" cy="384048"/>
           </a:xfrm>
           <a:prstGeom prst="ellipse">
@@ -6259,7 +6084,7 @@
         </p:nvSpPr>
         <p:spPr>
           <a:xfrm>
-            <a:off x="502920" y="3922776"/>
+            <a:off x="502920" y="3392424"/>
             <a:ext cx="384048" cy="384048"/>
           </a:xfrm>
           <a:prstGeom prst="rect">
@@ -6284,7 +6109,7 @@
                 <a:ea typeface="Arial" pitchFamily="34" charset="-122"/>
                 <a:cs typeface="Arial" pitchFamily="34" charset="-120"/>
               </a:rPr>
-              <a:t>3</a:t>
+              <a:t>4</a:t>
             </a:r>
             <a:endParaRPr lang="en-US" sz="1500" dirty="0"/>
           </a:p>
@@ -6298,7 +6123,7 @@
         </p:nvSpPr>
         <p:spPr>
           <a:xfrm>
-            <a:off x="1051560" y="3922776"/>
+            <a:off x="1051560" y="3392424"/>
             <a:ext cx="7589520" cy="402336"/>
           </a:xfrm>
           <a:prstGeom prst="rect">
@@ -6325,7 +6150,7 @@
                 <a:ea typeface="Calibri" pitchFamily="34" charset="-122"/>
                 <a:cs typeface="Calibri" pitchFamily="34" charset="-120"/>
               </a:rPr>
-              <a:t>Achieve command injection</a:t>
+              <a:t>Unrestricted upload</a:t>
             </a:r>
             <a:endParaRPr lang="en-US" sz="1350" dirty="0"/>
           </a:p>
@@ -6510,7 +6335,7 @@
                 <a:ea typeface="Arial" pitchFamily="34" charset="-122"/>
                 <a:cs typeface="Arial" pitchFamily="34" charset="-120"/>
               </a:rPr>
-              <a:t>Lab steps (cont.)</a:t>
+              <a:t>⚔️ Game — SQLi Boss Fight (cont.)</a:t>
             </a:r>
             <a:endParaRPr lang="en-US" sz="2600" dirty="0"/>
           </a:p>
@@ -6569,7 +6394,7 @@
                 <a:ea typeface="Arial" pitchFamily="34" charset="-122"/>
                 <a:cs typeface="Arial" pitchFamily="34" charset="-120"/>
               </a:rPr>
-              <a:t>4</a:t>
+              <a:t>5</a:t>
             </a:r>
             <a:endParaRPr lang="en-US" sz="1500" dirty="0"/>
           </a:p>
@@ -6584,7 +6409,7 @@
         <p:spPr>
           <a:xfrm>
             <a:off x="1051560" y="1325880"/>
-            <a:ext cx="7589520" cy="402336"/>
+            <a:ext cx="7589520" cy="658368"/>
           </a:xfrm>
           <a:prstGeom prst="rect">
             <a:avLst/>
@@ -6610,7 +6435,7 @@
                 <a:ea typeface="Calibri" pitchFamily="34" charset="-122"/>
                 <a:cs typeface="Calibri" pitchFamily="34" charset="-120"/>
               </a:rPr>
-              <a:t>Probe the upload endpoint — document the missing control</a:t>
+              <a:t>Boss defeated: run solution_app.py, prove all four attacks now fail, cite the exact fix line for each</a:t>
             </a:r>
             <a:endParaRPr lang="en-US" sz="1350" dirty="0"/>
           </a:p>
@@ -6618,34 +6443,14 @@
       </p:sp>
       <p:sp>
         <p:nvSpPr>
-          <p:cNvPr id="8" name="Shape 5"/>
-          <p:cNvSpPr/>
-          <p:nvPr/>
-        </p:nvSpPr>
-        <p:spPr>
-          <a:xfrm>
-            <a:off x="502920" y="1801368"/>
-            <a:ext cx="384048" cy="384048"/>
-          </a:xfrm>
-          <a:prstGeom prst="ellipse">
-            <a:avLst/>
-          </a:prstGeom>
-          <a:solidFill>
-            <a:srgbClr val="E35205"/>
-          </a:solidFill>
-          <a:ln/>
-        </p:spPr>
-      </p:sp>
-      <p:sp>
-        <p:nvSpPr>
-          <p:cNvPr id="9" name="Text 6"/>
-          <p:cNvSpPr/>
-          <p:nvPr/>
-        </p:nvSpPr>
-        <p:spPr>
-          <a:xfrm>
-            <a:off x="502920" y="1801368"/>
-            <a:ext cx="384048" cy="384048"/>
+          <p:cNvPr id="8" name="Text 5"/>
+          <p:cNvSpPr/>
+          <p:nvPr/>
+        </p:nvSpPr>
+        <p:spPr>
+          <a:xfrm>
+            <a:off x="457200" y="4800600"/>
+            <a:ext cx="6949440" cy="274320"/>
           </a:xfrm>
           <a:prstGeom prst="rect">
             <a:avLst/>
@@ -6655,100 +6460,20 @@
         </p:spPr>
         <p:txBody>
           <a:bodyPr wrap="square" lIns="0" tIns="0" rIns="0" bIns="0" rtlCol="0" anchor="ctr"/>
-          <a:lstStyle/>
-          <a:p>
-            <a:pPr algn="ctr" indent="0" marL="0">
-              <a:buNone/>
-            </a:pPr>
-            <a:r>
-              <a:rPr lang="en-US" sz="1500" b="1" dirty="0">
-                <a:solidFill>
-                  <a:srgbClr val="0E1726"/>
-                </a:solidFill>
-                <a:latin typeface="Arial" pitchFamily="34" charset="0"/>
-                <a:ea typeface="Arial" pitchFamily="34" charset="-122"/>
-                <a:cs typeface="Arial" pitchFamily="34" charset="-120"/>
-              </a:rPr>
-              <a:t>5</a:t>
-            </a:r>
-            <a:endParaRPr lang="en-US" sz="1500" dirty="0"/>
-          </a:p>
-        </p:txBody>
-      </p:sp>
-      <p:sp>
-        <p:nvSpPr>
-          <p:cNvPr id="10" name="Text 7"/>
-          <p:cNvSpPr/>
-          <p:nvPr/>
-        </p:nvSpPr>
-        <p:spPr>
-          <a:xfrm>
-            <a:off x="1051560" y="1801368"/>
-            <a:ext cx="7589520" cy="402336"/>
-          </a:xfrm>
-          <a:prstGeom prst="rect">
-            <a:avLst/>
-          </a:prstGeom>
-          <a:noFill/>
-          <a:ln/>
-        </p:spPr>
-        <p:txBody>
-          <a:bodyPr wrap="square" lIns="0" tIns="0" rIns="0" bIns="0" rtlCol="0" anchor="ctr">
-            <a:normAutofit/>
-          </a:bodyPr>
           <a:lstStyle/>
           <a:p>
             <a:pPr indent="0" marL="0">
               <a:buNone/>
             </a:pPr>
             <a:r>
-              <a:rPr lang="en-US" sz="1350" dirty="0">
-                <a:solidFill>
-                  <a:srgbClr val="1F2937"/>
+              <a:rPr lang="en-US" sz="900" dirty="0">
+                <a:solidFill>
+                  <a:srgbClr val="64748B"/>
                 </a:solidFill>
                 <a:latin typeface="Calibri" pitchFamily="34" charset="0"/>
                 <a:ea typeface="Calibri" pitchFamily="34" charset="-122"/>
                 <a:cs typeface="Calibri" pitchFamily="34" charset="-120"/>
               </a:rPr>
-              <a:t>Rewrite the endpoints safely &amp; re-test</a:t>
-            </a:r>
-            <a:endParaRPr lang="en-US" sz="1350" dirty="0"/>
-          </a:p>
-        </p:txBody>
-      </p:sp>
-      <p:sp>
-        <p:nvSpPr>
-          <p:cNvPr id="11" name="Text 8"/>
-          <p:cNvSpPr/>
-          <p:nvPr/>
-        </p:nvSpPr>
-        <p:spPr>
-          <a:xfrm>
-            <a:off x="457200" y="4800600"/>
-            <a:ext cx="6949440" cy="274320"/>
-          </a:xfrm>
-          <a:prstGeom prst="rect">
-            <a:avLst/>
-          </a:prstGeom>
-          <a:noFill/>
-          <a:ln/>
-        </p:spPr>
-        <p:txBody>
-          <a:bodyPr wrap="square" lIns="0" tIns="0" rIns="0" bIns="0" rtlCol="0" anchor="ctr"/>
-          <a:lstStyle/>
-          <a:p>
-            <a:pPr indent="0" marL="0">
-              <a:buNone/>
-            </a:pPr>
-            <a:r>
-              <a:rPr lang="en-US" sz="900" dirty="0">
-                <a:solidFill>
-                  <a:srgbClr val="64748B"/>
-                </a:solidFill>
-                <a:latin typeface="Calibri" pitchFamily="34" charset="0"/>
-                <a:ea typeface="Calibri" pitchFamily="34" charset="-122"/>
-                <a:cs typeface="Calibri" pitchFamily="34" charset="-120"/>
-              </a:rPr>
               <a:t>Software Security · Week 4</a:t>
             </a:r>
             <a:endParaRPr lang="en-US" sz="900" dirty="0"/>
@@ -6757,7 +6482,7 @@
       </p:sp>
       <p:pic>
         <p:nvPicPr>
-          <p:cNvPr id="12" name="Image 1" descr="/Users/pop7/Library/CloudStorage/OneDrive-MonsterConnectCo.,Ltd/Lecture/KOSEN69 - software-security/slides/pptx/assets/logo-small.png">    </p:cNvPr>
+          <p:cNvPr id="9" name="Image 1" descr="/Users/pop7/Library/CloudStorage/OneDrive-MonsterConnectCo.,Ltd/Lecture/KOSEN69 - software-security/slides/pptx/assets/logo-small.png">    </p:cNvPr>
           <p:cNvPicPr>
             <a:picLocks noChangeAspect="1"/>
           </p:cNvPicPr>
@@ -7259,7 +6984,7 @@
                 <a:ea typeface="Arial" pitchFamily="34" charset="-122"/>
                 <a:cs typeface="Arial" pitchFamily="34" charset="-120"/>
               </a:rPr>
-              <a:t>Deliverable</a:t>
+              <a:t>Lab steps</a:t>
             </a:r>
             <a:endParaRPr lang="en-US" sz="2600" dirty="0"/>
           </a:p>
@@ -7274,24 +6999,17 @@
         <p:spPr>
           <a:xfrm>
             <a:off x="457200" y="1325880"/>
-            <a:ext cx="8229600" cy="1517904"/>
+            <a:ext cx="8229600" cy="822960"/>
           </a:xfrm>
           <a:prstGeom prst="roundRect">
             <a:avLst>
-              <a:gd name="adj" fmla="val 4819"/>
+              <a:gd name="adj" fmla="val 8889"/>
             </a:avLst>
           </a:prstGeom>
           <a:solidFill>
-            <a:srgbClr val="F1F5F9"/>
+            <a:srgbClr val="E8EDF3"/>
           </a:solidFill>
           <a:ln/>
-          <a:effectLst>
-            <a:outerShdw sx="100000" sy="100000" kx="0" ky="0" algn="bl" rotWithShape="0" blurRad="76200" dist="25400" dir="5400000">
-              <a:srgbClr val="000000">
-                <a:alpha val="12000"/>
-              </a:srgbClr>
-            </a:outerShdw>
-          </a:effectLst>
         </p:spPr>
       </p:sp>
       <p:sp>
@@ -7302,8 +7020,76 @@
         </p:nvSpPr>
         <p:spPr>
           <a:xfrm>
-            <a:off x="731520" y="1435608"/>
-            <a:ext cx="7680960" cy="1298448"/>
+            <a:off x="731520" y="1325880"/>
+            <a:ext cx="7680960" cy="822960"/>
+          </a:xfrm>
+          <a:prstGeom prst="rect">
+            <a:avLst/>
+          </a:prstGeom>
+          <a:noFill/>
+          <a:ln/>
+        </p:spPr>
+        <p:txBody>
+          <a:bodyPr wrap="square" lIns="0" tIns="0" rIns="0" bIns="0" rtlCol="0" anchor="ctr">
+            <a:normAutofit/>
+          </a:bodyPr>
+          <a:lstStyle/>
+          <a:p>
+            <a:pPr indent="0" marL="0">
+              <a:buNone/>
+            </a:pPr>
+            <a:r>
+              <a:rPr lang="en-US" sz="1400" i="1" dirty="0">
+                <a:solidFill>
+                  <a:srgbClr val="E35205"/>
+                </a:solidFill>
+                <a:latin typeface="Calibri" pitchFamily="34" charset="0"/>
+                <a:ea typeface="Calibri" pitchFamily="34" charset="-122"/>
+                <a:cs typeface="Calibri" pitchFamily="34" charset="-120"/>
+              </a:rPr>
+              <a:t>📋 Worksheet 4 — labs/week04-injection/worksheet.md (Part 3) · kickoff: docker compose up → http://localhost:8080</a:t>
+            </a:r>
+            <a:endParaRPr lang="en-US" sz="1400" dirty="0"/>
+          </a:p>
+        </p:txBody>
+      </p:sp>
+      <p:sp>
+        <p:nvSpPr>
+          <p:cNvPr id="7" name="Shape 4"/>
+          <p:cNvSpPr/>
+          <p:nvPr/>
+        </p:nvSpPr>
+        <p:spPr>
+          <a:xfrm>
+            <a:off x="457200" y="2313432"/>
+            <a:ext cx="8229600" cy="493776"/>
+          </a:xfrm>
+          <a:prstGeom prst="roundRect">
+            <a:avLst>
+              <a:gd name="adj" fmla="val 11111"/>
+            </a:avLst>
+          </a:prstGeom>
+          <a:solidFill>
+            <a:srgbClr val="0A1020"/>
+          </a:solidFill>
+          <a:ln w="12700">
+            <a:solidFill>
+              <a:srgbClr val="E8EDF3"/>
+            </a:solidFill>
+            <a:prstDash val="solid"/>
+          </a:ln>
+        </p:spPr>
+      </p:sp>
+      <p:sp>
+        <p:nvSpPr>
+          <p:cNvPr id="8" name="Text 5"/>
+          <p:cNvSpPr/>
+          <p:nvPr/>
+        </p:nvSpPr>
+        <p:spPr>
+          <a:xfrm>
+            <a:off x="640080" y="2386584"/>
+            <a:ext cx="7863840" cy="347472"/>
           </a:xfrm>
           <a:prstGeom prst="rect">
             <a:avLst/>
@@ -7317,15 +7103,111 @@
           </a:bodyPr>
           <a:lstStyle/>
           <a:p>
-            <a:pPr marL="342900" indent="-342900">
-              <a:spcAft>
-                <a:spcPts val="600"/>
-              </a:spcAft>
-              <a:buSzPct val="100000"/>
-              <a:buChar char="•"/>
-            </a:pPr>
-            <a:r>
-              <a:rPr lang="en-US" sz="1400" dirty="0">
+            <a:pPr indent="0" marL="0">
+              <a:buNone/>
+            </a:pPr>
+            <a:r>
+              <a:rPr lang="en-US" sz="1150" dirty="0">
+                <a:solidFill>
+                  <a:srgbClr val="9FE7D6"/>
+                </a:solidFill>
+                <a:latin typeface="Courier New" pitchFamily="34" charset="0"/>
+                <a:ea typeface="Courier New" pitchFamily="34" charset="-122"/>
+                <a:cs typeface="Courier New" pitchFamily="34" charset="-120"/>
+              </a:rPr>
+              <a:t>docker run --rm -p 80:80 vulnerables/web-dvwa   # optional extra target (or Juice Shop)</a:t>
+            </a:r>
+            <a:endParaRPr lang="en-US" sz="1150" dirty="0"/>
+          </a:p>
+        </p:txBody>
+      </p:sp>
+      <p:sp>
+        <p:nvSpPr>
+          <p:cNvPr id="9" name="Shape 6"/>
+          <p:cNvSpPr/>
+          <p:nvPr/>
+        </p:nvSpPr>
+        <p:spPr>
+          <a:xfrm>
+            <a:off x="502920" y="2971800"/>
+            <a:ext cx="384048" cy="384048"/>
+          </a:xfrm>
+          <a:prstGeom prst="ellipse">
+            <a:avLst/>
+          </a:prstGeom>
+          <a:solidFill>
+            <a:srgbClr val="E35205"/>
+          </a:solidFill>
+          <a:ln/>
+        </p:spPr>
+      </p:sp>
+      <p:sp>
+        <p:nvSpPr>
+          <p:cNvPr id="10" name="Text 7"/>
+          <p:cNvSpPr/>
+          <p:nvPr/>
+        </p:nvSpPr>
+        <p:spPr>
+          <a:xfrm>
+            <a:off x="502920" y="2971800"/>
+            <a:ext cx="384048" cy="384048"/>
+          </a:xfrm>
+          <a:prstGeom prst="rect">
+            <a:avLst/>
+          </a:prstGeom>
+          <a:noFill/>
+          <a:ln/>
+        </p:spPr>
+        <p:txBody>
+          <a:bodyPr wrap="square" lIns="0" tIns="0" rIns="0" bIns="0" rtlCol="0" anchor="ctr"/>
+          <a:lstStyle/>
+          <a:p>
+            <a:pPr algn="ctr" indent="0" marL="0">
+              <a:buNone/>
+            </a:pPr>
+            <a:r>
+              <a:rPr lang="en-US" sz="1500" b="1" dirty="0">
+                <a:solidFill>
+                  <a:srgbClr val="0E1726"/>
+                </a:solidFill>
+                <a:latin typeface="Arial" pitchFamily="34" charset="0"/>
+                <a:ea typeface="Arial" pitchFamily="34" charset="-122"/>
+                <a:cs typeface="Arial" pitchFamily="34" charset="-120"/>
+              </a:rPr>
+              <a:t>1</a:t>
+            </a:r>
+            <a:endParaRPr lang="en-US" sz="1500" dirty="0"/>
+          </a:p>
+        </p:txBody>
+      </p:sp>
+      <p:sp>
+        <p:nvSpPr>
+          <p:cNvPr id="11" name="Text 8"/>
+          <p:cNvSpPr/>
+          <p:nvPr/>
+        </p:nvSpPr>
+        <p:spPr>
+          <a:xfrm>
+            <a:off x="1051560" y="2971800"/>
+            <a:ext cx="7589520" cy="402336"/>
+          </a:xfrm>
+          <a:prstGeom prst="rect">
+            <a:avLst/>
+          </a:prstGeom>
+          <a:noFill/>
+          <a:ln/>
+        </p:spPr>
+        <p:txBody>
+          <a:bodyPr wrap="square" lIns="0" tIns="0" rIns="0" bIns="0" rtlCol="0" anchor="ctr">
+            <a:normAutofit/>
+          </a:bodyPr>
+          <a:lstStyle/>
+          <a:p>
+            <a:pPr indent="0" marL="0">
+              <a:buNone/>
+            </a:pPr>
+            <a:r>
+              <a:rPr lang="en-US" sz="1350" dirty="0">
                 <a:solidFill>
                   <a:srgbClr val="1F2937"/>
                 </a:solidFill>
@@ -7333,20 +7215,99 @@
                 <a:ea typeface="Calibri" pitchFamily="34" charset="-122"/>
                 <a:cs typeface="Calibri" pitchFamily="34" charset="-120"/>
               </a:rPr>
-              <a:t>Findings: each injection point + payload + impact (CWE-mapped)</a:t>
-            </a:r>
-            <a:endParaRPr lang="en-US" sz="1400" dirty="0"/>
-          </a:p>
-          <a:p>
-            <a:pPr marL="342900" indent="-342900">
-              <a:spcAft>
-                <a:spcPts val="600"/>
-              </a:spcAft>
-              <a:buSzPct val="100000"/>
-              <a:buChar char="•"/>
-            </a:pPr>
-            <a:r>
-              <a:rPr lang="en-US" sz="1400" dirty="0">
+              <a:t>Find an injectable parameter, bypass auth</a:t>
+            </a:r>
+            <a:endParaRPr lang="en-US" sz="1350" dirty="0"/>
+          </a:p>
+        </p:txBody>
+      </p:sp>
+      <p:sp>
+        <p:nvSpPr>
+          <p:cNvPr id="12" name="Shape 9"/>
+          <p:cNvSpPr/>
+          <p:nvPr/>
+        </p:nvSpPr>
+        <p:spPr>
+          <a:xfrm>
+            <a:off x="502920" y="3447288"/>
+            <a:ext cx="384048" cy="384048"/>
+          </a:xfrm>
+          <a:prstGeom prst="ellipse">
+            <a:avLst/>
+          </a:prstGeom>
+          <a:solidFill>
+            <a:srgbClr val="E35205"/>
+          </a:solidFill>
+          <a:ln/>
+        </p:spPr>
+      </p:sp>
+      <p:sp>
+        <p:nvSpPr>
+          <p:cNvPr id="13" name="Text 10"/>
+          <p:cNvSpPr/>
+          <p:nvPr/>
+        </p:nvSpPr>
+        <p:spPr>
+          <a:xfrm>
+            <a:off x="502920" y="3447288"/>
+            <a:ext cx="384048" cy="384048"/>
+          </a:xfrm>
+          <a:prstGeom prst="rect">
+            <a:avLst/>
+          </a:prstGeom>
+          <a:noFill/>
+          <a:ln/>
+        </p:spPr>
+        <p:txBody>
+          <a:bodyPr wrap="square" lIns="0" tIns="0" rIns="0" bIns="0" rtlCol="0" anchor="ctr"/>
+          <a:lstStyle/>
+          <a:p>
+            <a:pPr algn="ctr" indent="0" marL="0">
+              <a:buNone/>
+            </a:pPr>
+            <a:r>
+              <a:rPr lang="en-US" sz="1500" b="1" dirty="0">
+                <a:solidFill>
+                  <a:srgbClr val="0E1726"/>
+                </a:solidFill>
+                <a:latin typeface="Arial" pitchFamily="34" charset="0"/>
+                <a:ea typeface="Arial" pitchFamily="34" charset="-122"/>
+                <a:cs typeface="Arial" pitchFamily="34" charset="-120"/>
+              </a:rPr>
+              <a:t>2</a:t>
+            </a:r>
+            <a:endParaRPr lang="en-US" sz="1500" dirty="0"/>
+          </a:p>
+        </p:txBody>
+      </p:sp>
+      <p:sp>
+        <p:nvSpPr>
+          <p:cNvPr id="14" name="Text 11"/>
+          <p:cNvSpPr/>
+          <p:nvPr/>
+        </p:nvSpPr>
+        <p:spPr>
+          <a:xfrm>
+            <a:off x="1051560" y="3447288"/>
+            <a:ext cx="7589520" cy="402336"/>
+          </a:xfrm>
+          <a:prstGeom prst="rect">
+            <a:avLst/>
+          </a:prstGeom>
+          <a:noFill/>
+          <a:ln/>
+        </p:spPr>
+        <p:txBody>
+          <a:bodyPr wrap="square" lIns="0" tIns="0" rIns="0" bIns="0" rtlCol="0" anchor="ctr">
+            <a:normAutofit/>
+          </a:bodyPr>
+          <a:lstStyle/>
+          <a:p>
+            <a:pPr indent="0" marL="0">
+              <a:buNone/>
+            </a:pPr>
+            <a:r>
+              <a:rPr lang="en-US" sz="1350" dirty="0">
                 <a:solidFill>
                   <a:srgbClr val="1F2937"/>
                 </a:solidFill>
@@ -7354,20 +7315,99 @@
                 <a:ea typeface="Calibri" pitchFamily="34" charset="-122"/>
                 <a:cs typeface="Calibri" pitchFamily="34" charset="-120"/>
               </a:rPr>
-              <a:t>The fixed code (prepared statements / validation)</a:t>
-            </a:r>
-            <a:endParaRPr lang="en-US" sz="1400" dirty="0"/>
-          </a:p>
-          <a:p>
-            <a:pPr marL="342900" indent="-342900">
-              <a:spcAft>
-                <a:spcPts val="600"/>
-              </a:spcAft>
-              <a:buSzPct val="100000"/>
-              <a:buChar char="•"/>
-            </a:pPr>
-            <a:r>
-              <a:rPr lang="en-US" sz="1400" dirty="0">
+              <a:t>Extract data (UNION dump)</a:t>
+            </a:r>
+            <a:endParaRPr lang="en-US" sz="1350" dirty="0"/>
+          </a:p>
+        </p:txBody>
+      </p:sp>
+      <p:sp>
+        <p:nvSpPr>
+          <p:cNvPr id="15" name="Shape 12"/>
+          <p:cNvSpPr/>
+          <p:nvPr/>
+        </p:nvSpPr>
+        <p:spPr>
+          <a:xfrm>
+            <a:off x="502920" y="3922776"/>
+            <a:ext cx="384048" cy="384048"/>
+          </a:xfrm>
+          <a:prstGeom prst="ellipse">
+            <a:avLst/>
+          </a:prstGeom>
+          <a:solidFill>
+            <a:srgbClr val="E35205"/>
+          </a:solidFill>
+          <a:ln/>
+        </p:spPr>
+      </p:sp>
+      <p:sp>
+        <p:nvSpPr>
+          <p:cNvPr id="16" name="Text 13"/>
+          <p:cNvSpPr/>
+          <p:nvPr/>
+        </p:nvSpPr>
+        <p:spPr>
+          <a:xfrm>
+            <a:off x="502920" y="3922776"/>
+            <a:ext cx="384048" cy="384048"/>
+          </a:xfrm>
+          <a:prstGeom prst="rect">
+            <a:avLst/>
+          </a:prstGeom>
+          <a:noFill/>
+          <a:ln/>
+        </p:spPr>
+        <p:txBody>
+          <a:bodyPr wrap="square" lIns="0" tIns="0" rIns="0" bIns="0" rtlCol="0" anchor="ctr"/>
+          <a:lstStyle/>
+          <a:p>
+            <a:pPr algn="ctr" indent="0" marL="0">
+              <a:buNone/>
+            </a:pPr>
+            <a:r>
+              <a:rPr lang="en-US" sz="1500" b="1" dirty="0">
+                <a:solidFill>
+                  <a:srgbClr val="0E1726"/>
+                </a:solidFill>
+                <a:latin typeface="Arial" pitchFamily="34" charset="0"/>
+                <a:ea typeface="Arial" pitchFamily="34" charset="-122"/>
+                <a:cs typeface="Arial" pitchFamily="34" charset="-120"/>
+              </a:rPr>
+              <a:t>3</a:t>
+            </a:r>
+            <a:endParaRPr lang="en-US" sz="1500" dirty="0"/>
+          </a:p>
+        </p:txBody>
+      </p:sp>
+      <p:sp>
+        <p:nvSpPr>
+          <p:cNvPr id="17" name="Text 14"/>
+          <p:cNvSpPr/>
+          <p:nvPr/>
+        </p:nvSpPr>
+        <p:spPr>
+          <a:xfrm>
+            <a:off x="1051560" y="3922776"/>
+            <a:ext cx="7589520" cy="402336"/>
+          </a:xfrm>
+          <a:prstGeom prst="rect">
+            <a:avLst/>
+          </a:prstGeom>
+          <a:noFill/>
+          <a:ln/>
+        </p:spPr>
+        <p:txBody>
+          <a:bodyPr wrap="square" lIns="0" tIns="0" rIns="0" bIns="0" rtlCol="0" anchor="ctr">
+            <a:normAutofit/>
+          </a:bodyPr>
+          <a:lstStyle/>
+          <a:p>
+            <a:pPr indent="0" marL="0">
+              <a:buNone/>
+            </a:pPr>
+            <a:r>
+              <a:rPr lang="en-US" sz="1350" dirty="0">
                 <a:solidFill>
                   <a:srgbClr val="1F2937"/>
                 </a:solidFill>
@@ -7375,66 +7415,45 @@
                 <a:ea typeface="Calibri" pitchFamily="34" charset="-122"/>
                 <a:cs typeface="Calibri" pitchFamily="34" charset="-120"/>
               </a:rPr>
-              <a:t>Proof the payload no longer works</a:t>
-            </a:r>
-            <a:endParaRPr lang="en-US" sz="1400" dirty="0"/>
-          </a:p>
-          <a:p>
-            <a:pPr marL="342900" indent="-342900">
-              <a:spcAft>
-                <a:spcPts val="600"/>
-              </a:spcAft>
-              <a:buSzPct val="100000"/>
-              <a:buChar char="•"/>
-            </a:pPr>
-            <a:r>
-              <a:rPr lang="en-US" sz="1400" dirty="0">
-                <a:solidFill>
-                  <a:srgbClr val="1F2937"/>
+              <a:t>Achieve command injection</a:t>
+            </a:r>
+            <a:endParaRPr lang="en-US" sz="1350" dirty="0"/>
+          </a:p>
+        </p:txBody>
+      </p:sp>
+      <p:sp>
+        <p:nvSpPr>
+          <p:cNvPr id="18" name="Text 15"/>
+          <p:cNvSpPr/>
+          <p:nvPr/>
+        </p:nvSpPr>
+        <p:spPr>
+          <a:xfrm>
+            <a:off x="457200" y="4800600"/>
+            <a:ext cx="6949440" cy="274320"/>
+          </a:xfrm>
+          <a:prstGeom prst="rect">
+            <a:avLst/>
+          </a:prstGeom>
+          <a:noFill/>
+          <a:ln/>
+        </p:spPr>
+        <p:txBody>
+          <a:bodyPr wrap="square" lIns="0" tIns="0" rIns="0" bIns="0" rtlCol="0" anchor="ctr"/>
+          <a:lstStyle/>
+          <a:p>
+            <a:pPr indent="0" marL="0">
+              <a:buNone/>
+            </a:pPr>
+            <a:r>
+              <a:rPr lang="en-US" sz="900" dirty="0">
+                <a:solidFill>
+                  <a:srgbClr val="64748B"/>
                 </a:solidFill>
                 <a:latin typeface="Calibri" pitchFamily="34" charset="0"/>
                 <a:ea typeface="Calibri" pitchFamily="34" charset="-122"/>
                 <a:cs typeface="Calibri" pitchFamily="34" charset="-120"/>
               </a:rPr>
-              <a:t>+ Audit the AI / EiPE / Prompt Problem (see worksheet)</a:t>
-            </a:r>
-            <a:endParaRPr lang="en-US" sz="1400" dirty="0"/>
-          </a:p>
-        </p:txBody>
-      </p:sp>
-      <p:sp>
-        <p:nvSpPr>
-          <p:cNvPr id="7" name="Text 4"/>
-          <p:cNvSpPr/>
-          <p:nvPr/>
-        </p:nvSpPr>
-        <p:spPr>
-          <a:xfrm>
-            <a:off x="457200" y="4800600"/>
-            <a:ext cx="6949440" cy="274320"/>
-          </a:xfrm>
-          <a:prstGeom prst="rect">
-            <a:avLst/>
-          </a:prstGeom>
-          <a:noFill/>
-          <a:ln/>
-        </p:spPr>
-        <p:txBody>
-          <a:bodyPr wrap="square" lIns="0" tIns="0" rIns="0" bIns="0" rtlCol="0" anchor="ctr"/>
-          <a:lstStyle/>
-          <a:p>
-            <a:pPr indent="0" marL="0">
-              <a:buNone/>
-            </a:pPr>
-            <a:r>
-              <a:rPr lang="en-US" sz="900" dirty="0">
-                <a:solidFill>
-                  <a:srgbClr val="64748B"/>
-                </a:solidFill>
-                <a:latin typeface="Calibri" pitchFamily="34" charset="0"/>
-                <a:ea typeface="Calibri" pitchFamily="34" charset="-122"/>
-                <a:cs typeface="Calibri" pitchFamily="34" charset="-120"/>
-              </a:rPr>
               <a:t>Software Security · Week 4</a:t>
             </a:r>
             <a:endParaRPr lang="en-US" sz="900" dirty="0"/>
@@ -7443,7 +7462,7 @@
       </p:sp>
       <p:pic>
         <p:nvPicPr>
-          <p:cNvPr id="8" name="Image 1" descr="/Users/pop7/Library/CloudStorage/OneDrive-MonsterConnectCo.,Ltd/Lecture/KOSEN69 - software-security/slides/pptx/assets/logo-small.png">    </p:cNvPr>
+          <p:cNvPr id="19" name="Image 1" descr="/Users/pop7/Library/CloudStorage/OneDrive-MonsterConnectCo.,Ltd/Lecture/KOSEN69 - software-security/slides/pptx/assets/logo-small.png">    </p:cNvPr>
           <p:cNvPicPr>
             <a:picLocks noChangeAspect="1"/>
           </p:cNvPicPr>
@@ -7581,7 +7600,7 @@
                 <a:ea typeface="Arial" pitchFamily="34" charset="-122"/>
                 <a:cs typeface="Arial" pitchFamily="34" charset="-120"/>
               </a:rPr>
-              <a:t>Key takeaways</a:t>
+              <a:t>Lab steps (cont.)</a:t>
             </a:r>
             <a:endParaRPr lang="en-US" sz="2600" dirty="0"/>
           </a:p>
@@ -7595,25 +7614,16 @@
         </p:nvSpPr>
         <p:spPr>
           <a:xfrm>
-            <a:off x="457200" y="1325880"/>
-            <a:ext cx="8229600" cy="1207008"/>
-          </a:xfrm>
-          <a:prstGeom prst="roundRect">
-            <a:avLst>
-              <a:gd name="adj" fmla="val 6061"/>
-            </a:avLst>
+            <a:off x="502920" y="1325880"/>
+            <a:ext cx="384048" cy="384048"/>
+          </a:xfrm>
+          <a:prstGeom prst="ellipse">
+            <a:avLst/>
           </a:prstGeom>
           <a:solidFill>
-            <a:srgbClr val="F1F5F9"/>
+            <a:srgbClr val="E35205"/>
           </a:solidFill>
           <a:ln/>
-          <a:effectLst>
-            <a:outerShdw sx="100000" sy="100000" kx="0" ky="0" algn="bl" rotWithShape="0" blurRad="76200" dist="25400" dir="5400000">
-              <a:srgbClr val="000000">
-                <a:alpha val="12000"/>
-              </a:srgbClr>
-            </a:outerShdw>
-          </a:effectLst>
         </p:spPr>
       </p:sp>
       <p:sp>
@@ -7624,8 +7634,8 @@
         </p:nvSpPr>
         <p:spPr>
           <a:xfrm>
-            <a:off x="731520" y="1435608"/>
-            <a:ext cx="7680960" cy="987552"/>
+            <a:off x="502920" y="1325880"/>
+            <a:ext cx="384048" cy="384048"/>
           </a:xfrm>
           <a:prstGeom prst="rect">
             <a:avLst/>
@@ -7634,20 +7644,55 @@
           <a:ln/>
         </p:spPr>
         <p:txBody>
-          <a:bodyPr wrap="square" lIns="0" tIns="0" rIns="0" bIns="0" rtlCol="0" anchor="t">
+          <a:bodyPr wrap="square" lIns="0" tIns="0" rIns="0" bIns="0" rtlCol="0" anchor="ctr"/>
+          <a:lstStyle/>
+          <a:p>
+            <a:pPr algn="ctr" indent="0" marL="0">
+              <a:buNone/>
+            </a:pPr>
+            <a:r>
+              <a:rPr lang="en-US" sz="1500" b="1" dirty="0">
+                <a:solidFill>
+                  <a:srgbClr val="0E1726"/>
+                </a:solidFill>
+                <a:latin typeface="Arial" pitchFamily="34" charset="0"/>
+                <a:ea typeface="Arial" pitchFamily="34" charset="-122"/>
+                <a:cs typeface="Arial" pitchFamily="34" charset="-120"/>
+              </a:rPr>
+              <a:t>4</a:t>
+            </a:r>
+            <a:endParaRPr lang="en-US" sz="1500" dirty="0"/>
+          </a:p>
+        </p:txBody>
+      </p:sp>
+      <p:sp>
+        <p:nvSpPr>
+          <p:cNvPr id="7" name="Text 4"/>
+          <p:cNvSpPr/>
+          <p:nvPr/>
+        </p:nvSpPr>
+        <p:spPr>
+          <a:xfrm>
+            <a:off x="1051560" y="1325880"/>
+            <a:ext cx="7589520" cy="402336"/>
+          </a:xfrm>
+          <a:prstGeom prst="rect">
+            <a:avLst/>
+          </a:prstGeom>
+          <a:noFill/>
+          <a:ln/>
+        </p:spPr>
+        <p:txBody>
+          <a:bodyPr wrap="square" lIns="0" tIns="0" rIns="0" bIns="0" rtlCol="0" anchor="ctr">
             <a:normAutofit/>
           </a:bodyPr>
           <a:lstStyle/>
           <a:p>
-            <a:pPr marL="342900" indent="-342900">
-              <a:spcAft>
-                <a:spcPts val="600"/>
-              </a:spcAft>
-              <a:buSzPct val="100000"/>
-              <a:buChar char="•"/>
-            </a:pPr>
-            <a:r>
-              <a:rPr lang="en-US" sz="1400" dirty="0">
+            <a:pPr indent="0" marL="0">
+              <a:buNone/>
+            </a:pPr>
+            <a:r>
+              <a:rPr lang="en-US" sz="1350" dirty="0">
                 <a:solidFill>
                   <a:srgbClr val="1F2937"/>
                 </a:solidFill>
@@ -7655,20 +7700,99 @@
                 <a:ea typeface="Calibri" pitchFamily="34" charset="-122"/>
                 <a:cs typeface="Calibri" pitchFamily="34" charset="-120"/>
               </a:rPr>
-              <a:t>Never build interpreter strings from untrusted input</a:t>
-            </a:r>
-            <a:endParaRPr lang="en-US" sz="1400" dirty="0"/>
-          </a:p>
-          <a:p>
-            <a:pPr marL="342900" indent="-342900">
-              <a:spcAft>
-                <a:spcPts val="600"/>
-              </a:spcAft>
-              <a:buSzPct val="100000"/>
-              <a:buChar char="•"/>
-            </a:pPr>
-            <a:r>
-              <a:rPr lang="en-US" sz="1400" dirty="0">
+              <a:t>Probe the upload endpoint — document the missing control</a:t>
+            </a:r>
+            <a:endParaRPr lang="en-US" sz="1350" dirty="0"/>
+          </a:p>
+        </p:txBody>
+      </p:sp>
+      <p:sp>
+        <p:nvSpPr>
+          <p:cNvPr id="8" name="Shape 5"/>
+          <p:cNvSpPr/>
+          <p:nvPr/>
+        </p:nvSpPr>
+        <p:spPr>
+          <a:xfrm>
+            <a:off x="502920" y="1801368"/>
+            <a:ext cx="384048" cy="384048"/>
+          </a:xfrm>
+          <a:prstGeom prst="ellipse">
+            <a:avLst/>
+          </a:prstGeom>
+          <a:solidFill>
+            <a:srgbClr val="E35205"/>
+          </a:solidFill>
+          <a:ln/>
+        </p:spPr>
+      </p:sp>
+      <p:sp>
+        <p:nvSpPr>
+          <p:cNvPr id="9" name="Text 6"/>
+          <p:cNvSpPr/>
+          <p:nvPr/>
+        </p:nvSpPr>
+        <p:spPr>
+          <a:xfrm>
+            <a:off x="502920" y="1801368"/>
+            <a:ext cx="384048" cy="384048"/>
+          </a:xfrm>
+          <a:prstGeom prst="rect">
+            <a:avLst/>
+          </a:prstGeom>
+          <a:noFill/>
+          <a:ln/>
+        </p:spPr>
+        <p:txBody>
+          <a:bodyPr wrap="square" lIns="0" tIns="0" rIns="0" bIns="0" rtlCol="0" anchor="ctr"/>
+          <a:lstStyle/>
+          <a:p>
+            <a:pPr algn="ctr" indent="0" marL="0">
+              <a:buNone/>
+            </a:pPr>
+            <a:r>
+              <a:rPr lang="en-US" sz="1500" b="1" dirty="0">
+                <a:solidFill>
+                  <a:srgbClr val="0E1726"/>
+                </a:solidFill>
+                <a:latin typeface="Arial" pitchFamily="34" charset="0"/>
+                <a:ea typeface="Arial" pitchFamily="34" charset="-122"/>
+                <a:cs typeface="Arial" pitchFamily="34" charset="-120"/>
+              </a:rPr>
+              <a:t>5</a:t>
+            </a:r>
+            <a:endParaRPr lang="en-US" sz="1500" dirty="0"/>
+          </a:p>
+        </p:txBody>
+      </p:sp>
+      <p:sp>
+        <p:nvSpPr>
+          <p:cNvPr id="10" name="Text 7"/>
+          <p:cNvSpPr/>
+          <p:nvPr/>
+        </p:nvSpPr>
+        <p:spPr>
+          <a:xfrm>
+            <a:off x="1051560" y="1801368"/>
+            <a:ext cx="7589520" cy="402336"/>
+          </a:xfrm>
+          <a:prstGeom prst="rect">
+            <a:avLst/>
+          </a:prstGeom>
+          <a:noFill/>
+          <a:ln/>
+        </p:spPr>
+        <p:txBody>
+          <a:bodyPr wrap="square" lIns="0" tIns="0" rIns="0" bIns="0" rtlCol="0" anchor="ctr">
+            <a:normAutofit/>
+          </a:bodyPr>
+          <a:lstStyle/>
+          <a:p>
+            <a:pPr indent="0" marL="0">
+              <a:buNone/>
+            </a:pPr>
+            <a:r>
+              <a:rPr lang="en-US" sz="1350" dirty="0">
                 <a:solidFill>
                   <a:srgbClr val="1F2937"/>
                 </a:solidFill>
@@ -7676,66 +7800,45 @@
                 <a:ea typeface="Calibri" pitchFamily="34" charset="-122"/>
                 <a:cs typeface="Calibri" pitchFamily="34" charset="-120"/>
               </a:rPr>
-              <a:t>Parameterize first; validate as defense-in-depth</a:t>
-            </a:r>
-            <a:endParaRPr lang="en-US" sz="1400" dirty="0"/>
-          </a:p>
-          <a:p>
-            <a:pPr marL="342900" indent="-342900">
-              <a:spcAft>
-                <a:spcPts val="600"/>
-              </a:spcAft>
-              <a:buSzPct val="100000"/>
-              <a:buChar char="•"/>
-            </a:pPr>
-            <a:r>
-              <a:rPr lang="en-US" sz="1400" dirty="0">
-                <a:solidFill>
-                  <a:srgbClr val="1F2937"/>
+              <a:t>Rewrite the endpoints safely &amp; re-test</a:t>
+            </a:r>
+            <a:endParaRPr lang="en-US" sz="1350" dirty="0"/>
+          </a:p>
+        </p:txBody>
+      </p:sp>
+      <p:sp>
+        <p:nvSpPr>
+          <p:cNvPr id="11" name="Text 8"/>
+          <p:cNvSpPr/>
+          <p:nvPr/>
+        </p:nvSpPr>
+        <p:spPr>
+          <a:xfrm>
+            <a:off x="457200" y="4800600"/>
+            <a:ext cx="6949440" cy="274320"/>
+          </a:xfrm>
+          <a:prstGeom prst="rect">
+            <a:avLst/>
+          </a:prstGeom>
+          <a:noFill/>
+          <a:ln/>
+        </p:spPr>
+        <p:txBody>
+          <a:bodyPr wrap="square" lIns="0" tIns="0" rIns="0" bIns="0" rtlCol="0" anchor="ctr"/>
+          <a:lstStyle/>
+          <a:p>
+            <a:pPr indent="0" marL="0">
+              <a:buNone/>
+            </a:pPr>
+            <a:r>
+              <a:rPr lang="en-US" sz="900" dirty="0">
+                <a:solidFill>
+                  <a:srgbClr val="64748B"/>
                 </a:solidFill>
                 <a:latin typeface="Calibri" pitchFamily="34" charset="0"/>
                 <a:ea typeface="Calibri" pitchFamily="34" charset="-122"/>
                 <a:cs typeface="Calibri" pitchFamily="34" charset="-120"/>
               </a:rPr>
-              <a:t>Injection = data treated as code</a:t>
-            </a:r>
-            <a:endParaRPr lang="en-US" sz="1400" dirty="0"/>
-          </a:p>
-        </p:txBody>
-      </p:sp>
-      <p:sp>
-        <p:nvSpPr>
-          <p:cNvPr id="7" name="Text 4"/>
-          <p:cNvSpPr/>
-          <p:nvPr/>
-        </p:nvSpPr>
-        <p:spPr>
-          <a:xfrm>
-            <a:off x="457200" y="4800600"/>
-            <a:ext cx="6949440" cy="274320"/>
-          </a:xfrm>
-          <a:prstGeom prst="rect">
-            <a:avLst/>
-          </a:prstGeom>
-          <a:noFill/>
-          <a:ln/>
-        </p:spPr>
-        <p:txBody>
-          <a:bodyPr wrap="square" lIns="0" tIns="0" rIns="0" bIns="0" rtlCol="0" anchor="ctr"/>
-          <a:lstStyle/>
-          <a:p>
-            <a:pPr indent="0" marL="0">
-              <a:buNone/>
-            </a:pPr>
-            <a:r>
-              <a:rPr lang="en-US" sz="900" dirty="0">
-                <a:solidFill>
-                  <a:srgbClr val="64748B"/>
-                </a:solidFill>
-                <a:latin typeface="Calibri" pitchFamily="34" charset="0"/>
-                <a:ea typeface="Calibri" pitchFamily="34" charset="-122"/>
-                <a:cs typeface="Calibri" pitchFamily="34" charset="-120"/>
-              </a:rPr>
               <a:t>Software Security · Week 4</a:t>
             </a:r>
             <a:endParaRPr lang="en-US" sz="900" dirty="0"/>
@@ -7744,7 +7847,7 @@
       </p:sp>
       <p:pic>
         <p:nvPicPr>
-          <p:cNvPr id="8" name="Image 1" descr="/Users/pop7/Library/CloudStorage/OneDrive-MonsterConnectCo.,Ltd/Lecture/KOSEN69 - software-security/slides/pptx/assets/logo-small.png">    </p:cNvPr>
+          <p:cNvPr id="12" name="Image 1" descr="/Users/pop7/Library/CloudStorage/OneDrive-MonsterConnectCo.,Ltd/Lecture/KOSEN69 - software-security/slides/pptx/assets/logo-small.png">    </p:cNvPr>
           <p:cNvPicPr>
             <a:picLocks noChangeAspect="1"/>
           </p:cNvPicPr>
@@ -7800,6 +7903,629 @@
       </p:grpSpPr>
       <p:sp>
         <p:nvSpPr>
+          <p:cNvPr id="2" name="Shape 0"/>
+          <p:cNvSpPr/>
+          <p:nvPr/>
+        </p:nvSpPr>
+        <p:spPr>
+          <a:xfrm>
+            <a:off x="457200" y="384048"/>
+            <a:ext cx="530352" cy="530352"/>
+          </a:xfrm>
+          <a:prstGeom prst="ellipse">
+            <a:avLst/>
+          </a:prstGeom>
+          <a:solidFill>
+            <a:srgbClr val="E35205"/>
+          </a:solidFill>
+          <a:ln/>
+          <a:effectLst>
+            <a:outerShdw sx="100000" sy="100000" kx="0" ky="0" algn="bl" rotWithShape="0" blurRad="76200" dist="25400" dir="5400000">
+              <a:srgbClr val="000000">
+                <a:alpha val="12000"/>
+              </a:srgbClr>
+            </a:outerShdw>
+          </a:effectLst>
+        </p:spPr>
+      </p:sp>
+      <p:pic>
+        <p:nvPicPr>
+          <p:cNvPr id="3" name="Image 0" descr="preencoded.png">    </p:cNvPr>
+          <p:cNvPicPr>
+            <a:picLocks noChangeAspect="1"/>
+          </p:cNvPicPr>
+          <p:nvPr/>
+        </p:nvPicPr>
+        <p:blipFill>
+          <a:blip r:embed="rId1"/>
+          <a:stretch>
+            <a:fillRect/>
+          </a:stretch>
+        </p:blipFill>
+        <p:spPr>
+          <a:xfrm>
+            <a:off x="594360" y="521208"/>
+            <a:ext cx="256032" cy="256032"/>
+          </a:xfrm>
+          <a:prstGeom prst="rect">
+            <a:avLst/>
+          </a:prstGeom>
+        </p:spPr>
+      </p:pic>
+      <p:sp>
+        <p:nvSpPr>
+          <p:cNvPr id="4" name="Text 1"/>
+          <p:cNvSpPr/>
+          <p:nvPr/>
+        </p:nvSpPr>
+        <p:spPr>
+          <a:xfrm>
+            <a:off x="1143000" y="329184"/>
+            <a:ext cx="7498080" cy="603504"/>
+          </a:xfrm>
+          <a:prstGeom prst="rect">
+            <a:avLst/>
+          </a:prstGeom>
+          <a:noFill/>
+          <a:ln/>
+        </p:spPr>
+        <p:txBody>
+          <a:bodyPr wrap="square" lIns="0" tIns="0" rIns="0" bIns="0" rtlCol="0" anchor="ctr"/>
+          <a:lstStyle/>
+          <a:p>
+            <a:pPr indent="0" marL="0">
+              <a:buNone/>
+            </a:pPr>
+            <a:r>
+              <a:rPr lang="en-US" sz="2600" b="1" dirty="0">
+                <a:solidFill>
+                  <a:srgbClr val="1F2937"/>
+                </a:solidFill>
+                <a:latin typeface="Arial" pitchFamily="34" charset="0"/>
+                <a:ea typeface="Arial" pitchFamily="34" charset="-122"/>
+                <a:cs typeface="Arial" pitchFamily="34" charset="-120"/>
+              </a:rPr>
+              <a:t>Deliverable</a:t>
+            </a:r>
+            <a:endParaRPr lang="en-US" sz="2600" dirty="0"/>
+          </a:p>
+        </p:txBody>
+      </p:sp>
+      <p:sp>
+        <p:nvSpPr>
+          <p:cNvPr id="5" name="Shape 2"/>
+          <p:cNvSpPr/>
+          <p:nvPr/>
+        </p:nvSpPr>
+        <p:spPr>
+          <a:xfrm>
+            <a:off x="457200" y="1325880"/>
+            <a:ext cx="8229600" cy="1517904"/>
+          </a:xfrm>
+          <a:prstGeom prst="roundRect">
+            <a:avLst>
+              <a:gd name="adj" fmla="val 4819"/>
+            </a:avLst>
+          </a:prstGeom>
+          <a:solidFill>
+            <a:srgbClr val="F1F5F9"/>
+          </a:solidFill>
+          <a:ln/>
+          <a:effectLst>
+            <a:outerShdw sx="100000" sy="100000" kx="0" ky="0" algn="bl" rotWithShape="0" blurRad="76200" dist="25400" dir="5400000">
+              <a:srgbClr val="000000">
+                <a:alpha val="12000"/>
+              </a:srgbClr>
+            </a:outerShdw>
+          </a:effectLst>
+        </p:spPr>
+      </p:sp>
+      <p:sp>
+        <p:nvSpPr>
+          <p:cNvPr id="6" name="Text 3"/>
+          <p:cNvSpPr/>
+          <p:nvPr/>
+        </p:nvSpPr>
+        <p:spPr>
+          <a:xfrm>
+            <a:off x="731520" y="1435608"/>
+            <a:ext cx="7680960" cy="1298448"/>
+          </a:xfrm>
+          <a:prstGeom prst="rect">
+            <a:avLst/>
+          </a:prstGeom>
+          <a:noFill/>
+          <a:ln/>
+        </p:spPr>
+        <p:txBody>
+          <a:bodyPr wrap="square" lIns="0" tIns="0" rIns="0" bIns="0" rtlCol="0" anchor="t">
+            <a:normAutofit/>
+          </a:bodyPr>
+          <a:lstStyle/>
+          <a:p>
+            <a:pPr marL="342900" indent="-342900">
+              <a:spcAft>
+                <a:spcPts val="600"/>
+              </a:spcAft>
+              <a:buSzPct val="100000"/>
+              <a:buChar char="•"/>
+            </a:pPr>
+            <a:r>
+              <a:rPr lang="en-US" sz="1400" dirty="0">
+                <a:solidFill>
+                  <a:srgbClr val="1F2937"/>
+                </a:solidFill>
+                <a:latin typeface="Calibri" pitchFamily="34" charset="0"/>
+                <a:ea typeface="Calibri" pitchFamily="34" charset="-122"/>
+                <a:cs typeface="Calibri" pitchFamily="34" charset="-120"/>
+              </a:rPr>
+              <a:t>Findings: each injection point + payload + impact (CWE-mapped)</a:t>
+            </a:r>
+            <a:endParaRPr lang="en-US" sz="1400" dirty="0"/>
+          </a:p>
+          <a:p>
+            <a:pPr marL="342900" indent="-342900">
+              <a:spcAft>
+                <a:spcPts val="600"/>
+              </a:spcAft>
+              <a:buSzPct val="100000"/>
+              <a:buChar char="•"/>
+            </a:pPr>
+            <a:r>
+              <a:rPr lang="en-US" sz="1400" dirty="0">
+                <a:solidFill>
+                  <a:srgbClr val="1F2937"/>
+                </a:solidFill>
+                <a:latin typeface="Calibri" pitchFamily="34" charset="0"/>
+                <a:ea typeface="Calibri" pitchFamily="34" charset="-122"/>
+                <a:cs typeface="Calibri" pitchFamily="34" charset="-120"/>
+              </a:rPr>
+              <a:t>The fixed code (prepared statements / validation)</a:t>
+            </a:r>
+            <a:endParaRPr lang="en-US" sz="1400" dirty="0"/>
+          </a:p>
+          <a:p>
+            <a:pPr marL="342900" indent="-342900">
+              <a:spcAft>
+                <a:spcPts val="600"/>
+              </a:spcAft>
+              <a:buSzPct val="100000"/>
+              <a:buChar char="•"/>
+            </a:pPr>
+            <a:r>
+              <a:rPr lang="en-US" sz="1400" dirty="0">
+                <a:solidFill>
+                  <a:srgbClr val="1F2937"/>
+                </a:solidFill>
+                <a:latin typeface="Calibri" pitchFamily="34" charset="0"/>
+                <a:ea typeface="Calibri" pitchFamily="34" charset="-122"/>
+                <a:cs typeface="Calibri" pitchFamily="34" charset="-120"/>
+              </a:rPr>
+              <a:t>Proof the payload no longer works</a:t>
+            </a:r>
+            <a:endParaRPr lang="en-US" sz="1400" dirty="0"/>
+          </a:p>
+          <a:p>
+            <a:pPr marL="342900" indent="-342900">
+              <a:spcAft>
+                <a:spcPts val="600"/>
+              </a:spcAft>
+              <a:buSzPct val="100000"/>
+              <a:buChar char="•"/>
+            </a:pPr>
+            <a:r>
+              <a:rPr lang="en-US" sz="1400" dirty="0">
+                <a:solidFill>
+                  <a:srgbClr val="1F2937"/>
+                </a:solidFill>
+                <a:latin typeface="Calibri" pitchFamily="34" charset="0"/>
+                <a:ea typeface="Calibri" pitchFamily="34" charset="-122"/>
+                <a:cs typeface="Calibri" pitchFamily="34" charset="-120"/>
+              </a:rPr>
+              <a:t>+ Audit the AI / EiPE / Prompt Problem (see worksheet)</a:t>
+            </a:r>
+            <a:endParaRPr lang="en-US" sz="1400" dirty="0"/>
+          </a:p>
+        </p:txBody>
+      </p:sp>
+      <p:sp>
+        <p:nvSpPr>
+          <p:cNvPr id="7" name="Text 4"/>
+          <p:cNvSpPr/>
+          <p:nvPr/>
+        </p:nvSpPr>
+        <p:spPr>
+          <a:xfrm>
+            <a:off x="457200" y="4800600"/>
+            <a:ext cx="6949440" cy="274320"/>
+          </a:xfrm>
+          <a:prstGeom prst="rect">
+            <a:avLst/>
+          </a:prstGeom>
+          <a:noFill/>
+          <a:ln/>
+        </p:spPr>
+        <p:txBody>
+          <a:bodyPr wrap="square" lIns="0" tIns="0" rIns="0" bIns="0" rtlCol="0" anchor="ctr"/>
+          <a:lstStyle/>
+          <a:p>
+            <a:pPr indent="0" marL="0">
+              <a:buNone/>
+            </a:pPr>
+            <a:r>
+              <a:rPr lang="en-US" sz="900" dirty="0">
+                <a:solidFill>
+                  <a:srgbClr val="64748B"/>
+                </a:solidFill>
+                <a:latin typeface="Calibri" pitchFamily="34" charset="0"/>
+                <a:ea typeface="Calibri" pitchFamily="34" charset="-122"/>
+                <a:cs typeface="Calibri" pitchFamily="34" charset="-120"/>
+              </a:rPr>
+              <a:t>Software Security · Week 4</a:t>
+            </a:r>
+            <a:endParaRPr lang="en-US" sz="900" dirty="0"/>
+          </a:p>
+        </p:txBody>
+      </p:sp>
+      <p:pic>
+        <p:nvPicPr>
+          <p:cNvPr id="8" name="Image 1" descr="/Users/pop7/Library/CloudStorage/OneDrive-MonsterConnectCo.,Ltd/Lecture/KOSEN69 - software-security/slides/pptx/assets/logo-small.png">    </p:cNvPr>
+          <p:cNvPicPr>
+            <a:picLocks noChangeAspect="1"/>
+          </p:cNvPicPr>
+          <p:nvPr/>
+        </p:nvPicPr>
+        <p:blipFill>
+          <a:blip r:embed="rId2"/>
+          <a:stretch>
+            <a:fillRect/>
+          </a:stretch>
+        </p:blipFill>
+        <p:spPr>
+          <a:xfrm>
+            <a:off x="7882128" y="4700016"/>
+            <a:ext cx="768096" cy="356616"/>
+          </a:xfrm>
+          <a:prstGeom prst="rect">
+            <a:avLst/>
+          </a:prstGeom>
+        </p:spPr>
+      </p:pic>
+    </p:spTree>
+  </p:cSld>
+  <p:clrMapOvr>
+    <a:masterClrMapping/>
+  </p:clrMapOvr>
+</p:sld>
+</file>
+
+<file path=ppt/slides/slide23.xml><?xml version="1.0" encoding="utf-8"?>
+<p:sld xmlns:a="http://schemas.openxmlformats.org/drawingml/2006/main" xmlns:r="http://schemas.openxmlformats.org/officeDocument/2006/relationships" xmlns:p="http://schemas.openxmlformats.org/presentationml/2006/main">
+  <p:cSld name="Slide 23">
+    <p:bg>
+      <p:bgPr>
+        <a:solidFill>
+          <a:srgbClr val="FFFFFF"/>
+        </a:solidFill>
+      </p:bgPr>
+    </p:bg>
+    <p:spTree>
+      <p:nvGrpSpPr>
+        <p:cNvPr id="1" name=""/>
+        <p:cNvGrpSpPr/>
+        <p:nvPr/>
+      </p:nvGrpSpPr>
+      <p:grpSpPr>
+        <a:xfrm>
+          <a:off x="0" y="0"/>
+          <a:ext cx="0" cy="0"/>
+          <a:chOff x="0" y="0"/>
+          <a:chExt cx="0" cy="0"/>
+        </a:xfrm>
+      </p:grpSpPr>
+      <p:sp>
+        <p:nvSpPr>
+          <p:cNvPr id="2" name="Shape 0"/>
+          <p:cNvSpPr/>
+          <p:nvPr/>
+        </p:nvSpPr>
+        <p:spPr>
+          <a:xfrm>
+            <a:off x="457200" y="384048"/>
+            <a:ext cx="530352" cy="530352"/>
+          </a:xfrm>
+          <a:prstGeom prst="ellipse">
+            <a:avLst/>
+          </a:prstGeom>
+          <a:solidFill>
+            <a:srgbClr val="E35205"/>
+          </a:solidFill>
+          <a:ln/>
+          <a:effectLst>
+            <a:outerShdw sx="100000" sy="100000" kx="0" ky="0" algn="bl" rotWithShape="0" blurRad="76200" dist="25400" dir="5400000">
+              <a:srgbClr val="000000">
+                <a:alpha val="12000"/>
+              </a:srgbClr>
+            </a:outerShdw>
+          </a:effectLst>
+        </p:spPr>
+      </p:sp>
+      <p:pic>
+        <p:nvPicPr>
+          <p:cNvPr id="3" name="Image 0" descr="preencoded.png">    </p:cNvPr>
+          <p:cNvPicPr>
+            <a:picLocks noChangeAspect="1"/>
+          </p:cNvPicPr>
+          <p:nvPr/>
+        </p:nvPicPr>
+        <p:blipFill>
+          <a:blip r:embed="rId1"/>
+          <a:stretch>
+            <a:fillRect/>
+          </a:stretch>
+        </p:blipFill>
+        <p:spPr>
+          <a:xfrm>
+            <a:off x="594360" y="521208"/>
+            <a:ext cx="256032" cy="256032"/>
+          </a:xfrm>
+          <a:prstGeom prst="rect">
+            <a:avLst/>
+          </a:prstGeom>
+        </p:spPr>
+      </p:pic>
+      <p:sp>
+        <p:nvSpPr>
+          <p:cNvPr id="4" name="Text 1"/>
+          <p:cNvSpPr/>
+          <p:nvPr/>
+        </p:nvSpPr>
+        <p:spPr>
+          <a:xfrm>
+            <a:off x="1143000" y="329184"/>
+            <a:ext cx="7498080" cy="603504"/>
+          </a:xfrm>
+          <a:prstGeom prst="rect">
+            <a:avLst/>
+          </a:prstGeom>
+          <a:noFill/>
+          <a:ln/>
+        </p:spPr>
+        <p:txBody>
+          <a:bodyPr wrap="square" lIns="0" tIns="0" rIns="0" bIns="0" rtlCol="0" anchor="ctr"/>
+          <a:lstStyle/>
+          <a:p>
+            <a:pPr indent="0" marL="0">
+              <a:buNone/>
+            </a:pPr>
+            <a:r>
+              <a:rPr lang="en-US" sz="2600" b="1" dirty="0">
+                <a:solidFill>
+                  <a:srgbClr val="1F2937"/>
+                </a:solidFill>
+                <a:latin typeface="Arial" pitchFamily="34" charset="0"/>
+                <a:ea typeface="Arial" pitchFamily="34" charset="-122"/>
+                <a:cs typeface="Arial" pitchFamily="34" charset="-120"/>
+              </a:rPr>
+              <a:t>Key takeaways</a:t>
+            </a:r>
+            <a:endParaRPr lang="en-US" sz="2600" dirty="0"/>
+          </a:p>
+        </p:txBody>
+      </p:sp>
+      <p:sp>
+        <p:nvSpPr>
+          <p:cNvPr id="5" name="Shape 2"/>
+          <p:cNvSpPr/>
+          <p:nvPr/>
+        </p:nvSpPr>
+        <p:spPr>
+          <a:xfrm>
+            <a:off x="457200" y="1325880"/>
+            <a:ext cx="8229600" cy="1207008"/>
+          </a:xfrm>
+          <a:prstGeom prst="roundRect">
+            <a:avLst>
+              <a:gd name="adj" fmla="val 6061"/>
+            </a:avLst>
+          </a:prstGeom>
+          <a:solidFill>
+            <a:srgbClr val="F1F5F9"/>
+          </a:solidFill>
+          <a:ln/>
+          <a:effectLst>
+            <a:outerShdw sx="100000" sy="100000" kx="0" ky="0" algn="bl" rotWithShape="0" blurRad="76200" dist="25400" dir="5400000">
+              <a:srgbClr val="000000">
+                <a:alpha val="12000"/>
+              </a:srgbClr>
+            </a:outerShdw>
+          </a:effectLst>
+        </p:spPr>
+      </p:sp>
+      <p:sp>
+        <p:nvSpPr>
+          <p:cNvPr id="6" name="Text 3"/>
+          <p:cNvSpPr/>
+          <p:nvPr/>
+        </p:nvSpPr>
+        <p:spPr>
+          <a:xfrm>
+            <a:off x="731520" y="1435608"/>
+            <a:ext cx="7680960" cy="987552"/>
+          </a:xfrm>
+          <a:prstGeom prst="rect">
+            <a:avLst/>
+          </a:prstGeom>
+          <a:noFill/>
+          <a:ln/>
+        </p:spPr>
+        <p:txBody>
+          <a:bodyPr wrap="square" lIns="0" tIns="0" rIns="0" bIns="0" rtlCol="0" anchor="t">
+            <a:normAutofit/>
+          </a:bodyPr>
+          <a:lstStyle/>
+          <a:p>
+            <a:pPr marL="342900" indent="-342900">
+              <a:spcAft>
+                <a:spcPts val="600"/>
+              </a:spcAft>
+              <a:buSzPct val="100000"/>
+              <a:buChar char="•"/>
+            </a:pPr>
+            <a:r>
+              <a:rPr lang="en-US" sz="1400" dirty="0">
+                <a:solidFill>
+                  <a:srgbClr val="1F2937"/>
+                </a:solidFill>
+                <a:latin typeface="Calibri" pitchFamily="34" charset="0"/>
+                <a:ea typeface="Calibri" pitchFamily="34" charset="-122"/>
+                <a:cs typeface="Calibri" pitchFamily="34" charset="-120"/>
+              </a:rPr>
+              <a:t>Never build interpreter strings from untrusted input</a:t>
+            </a:r>
+            <a:endParaRPr lang="en-US" sz="1400" dirty="0"/>
+          </a:p>
+          <a:p>
+            <a:pPr marL="342900" indent="-342900">
+              <a:spcAft>
+                <a:spcPts val="600"/>
+              </a:spcAft>
+              <a:buSzPct val="100000"/>
+              <a:buChar char="•"/>
+            </a:pPr>
+            <a:r>
+              <a:rPr lang="en-US" sz="1400" dirty="0">
+                <a:solidFill>
+                  <a:srgbClr val="1F2937"/>
+                </a:solidFill>
+                <a:latin typeface="Calibri" pitchFamily="34" charset="0"/>
+                <a:ea typeface="Calibri" pitchFamily="34" charset="-122"/>
+                <a:cs typeface="Calibri" pitchFamily="34" charset="-120"/>
+              </a:rPr>
+              <a:t>Parameterize first; validate as defense-in-depth</a:t>
+            </a:r>
+            <a:endParaRPr lang="en-US" sz="1400" dirty="0"/>
+          </a:p>
+          <a:p>
+            <a:pPr marL="342900" indent="-342900">
+              <a:spcAft>
+                <a:spcPts val="600"/>
+              </a:spcAft>
+              <a:buSzPct val="100000"/>
+              <a:buChar char="•"/>
+            </a:pPr>
+            <a:r>
+              <a:rPr lang="en-US" sz="1400" dirty="0">
+                <a:solidFill>
+                  <a:srgbClr val="1F2937"/>
+                </a:solidFill>
+                <a:latin typeface="Calibri" pitchFamily="34" charset="0"/>
+                <a:ea typeface="Calibri" pitchFamily="34" charset="-122"/>
+                <a:cs typeface="Calibri" pitchFamily="34" charset="-120"/>
+              </a:rPr>
+              <a:t>Injection = data treated as code</a:t>
+            </a:r>
+            <a:endParaRPr lang="en-US" sz="1400" dirty="0"/>
+          </a:p>
+        </p:txBody>
+      </p:sp>
+      <p:sp>
+        <p:nvSpPr>
+          <p:cNvPr id="7" name="Text 4"/>
+          <p:cNvSpPr/>
+          <p:nvPr/>
+        </p:nvSpPr>
+        <p:spPr>
+          <a:xfrm>
+            <a:off x="457200" y="4800600"/>
+            <a:ext cx="6949440" cy="274320"/>
+          </a:xfrm>
+          <a:prstGeom prst="rect">
+            <a:avLst/>
+          </a:prstGeom>
+          <a:noFill/>
+          <a:ln/>
+        </p:spPr>
+        <p:txBody>
+          <a:bodyPr wrap="square" lIns="0" tIns="0" rIns="0" bIns="0" rtlCol="0" anchor="ctr"/>
+          <a:lstStyle/>
+          <a:p>
+            <a:pPr indent="0" marL="0">
+              <a:buNone/>
+            </a:pPr>
+            <a:r>
+              <a:rPr lang="en-US" sz="900" dirty="0">
+                <a:solidFill>
+                  <a:srgbClr val="64748B"/>
+                </a:solidFill>
+                <a:latin typeface="Calibri" pitchFamily="34" charset="0"/>
+                <a:ea typeface="Calibri" pitchFamily="34" charset="-122"/>
+                <a:cs typeface="Calibri" pitchFamily="34" charset="-120"/>
+              </a:rPr>
+              <a:t>Software Security · Week 4</a:t>
+            </a:r>
+            <a:endParaRPr lang="en-US" sz="900" dirty="0"/>
+          </a:p>
+        </p:txBody>
+      </p:sp>
+      <p:pic>
+        <p:nvPicPr>
+          <p:cNvPr id="8" name="Image 1" descr="/Users/pop7/Library/CloudStorage/OneDrive-MonsterConnectCo.,Ltd/Lecture/KOSEN69 - software-security/slides/pptx/assets/logo-small.png">    </p:cNvPr>
+          <p:cNvPicPr>
+            <a:picLocks noChangeAspect="1"/>
+          </p:cNvPicPr>
+          <p:nvPr/>
+        </p:nvPicPr>
+        <p:blipFill>
+          <a:blip r:embed="rId2"/>
+          <a:stretch>
+            <a:fillRect/>
+          </a:stretch>
+        </p:blipFill>
+        <p:spPr>
+          <a:xfrm>
+            <a:off x="7882128" y="4700016"/>
+            <a:ext cx="768096" cy="356616"/>
+          </a:xfrm>
+          <a:prstGeom prst="rect">
+            <a:avLst/>
+          </a:prstGeom>
+        </p:spPr>
+      </p:pic>
+    </p:spTree>
+  </p:cSld>
+  <p:clrMapOvr>
+    <a:masterClrMapping/>
+  </p:clrMapOvr>
+</p:sld>
+</file>
+
+<file path=ppt/slides/slide24.xml><?xml version="1.0" encoding="utf-8"?>
+<p:sld xmlns:a="http://schemas.openxmlformats.org/drawingml/2006/main" xmlns:r="http://schemas.openxmlformats.org/officeDocument/2006/relationships" xmlns:p="http://schemas.openxmlformats.org/presentationml/2006/main">
+  <p:cSld name="Slide 24">
+    <p:bg>
+      <p:bgPr>
+        <a:solidFill>
+          <a:srgbClr val="FFFFFF"/>
+        </a:solidFill>
+      </p:bgPr>
+    </p:bg>
+    <p:spTree>
+      <p:nvGrpSpPr>
+        <p:cNvPr id="1" name=""/>
+        <p:cNvGrpSpPr/>
+        <p:nvPr/>
+      </p:nvGrpSpPr>
+      <p:grpSpPr>
+        <a:xfrm>
+          <a:off x="0" y="0"/>
+          <a:ext cx="0" cy="0"/>
+          <a:chOff x="0" y="0"/>
+          <a:chExt cx="0" cy="0"/>
+        </a:xfrm>
+      </p:grpSpPr>
+      <p:sp>
+        <p:nvSpPr>
           <p:cNvPr id="2" name="Text 0"/>
           <p:cNvSpPr/>
           <p:nvPr/>
@@ -9067,7 +9793,7 @@
                 <a:ea typeface="Arial" pitchFamily="34" charset="-122"/>
                 <a:cs typeface="Arial" pitchFamily="34" charset="-120"/>
               </a:rPr>
-              <a:t>Auth bypass — anatomy of one payload</a:t>
+              <a:t>Try it — watch the parse tree change</a:t>
             </a:r>
             <a:endParaRPr lang="en-US" sz="2600" dirty="0"/>
           </a:p>
@@ -9082,7 +9808,7 @@
         <p:spPr>
           <a:xfrm>
             <a:off x="548640" y="1325880"/>
-            <a:ext cx="8046720" cy="548640"/>
+            <a:ext cx="8046720" cy="822960"/>
           </a:xfrm>
           <a:prstGeom prst="rect">
             <a:avLst/>
@@ -9108,206 +9834,13 @@
                 <a:ea typeface="Calibri" pitchFamily="34" charset="-122"/>
                 <a:cs typeface="Calibri" pitchFamily="34" charset="-120"/>
               </a:rPr>
-              <a:t>Inject into the username field:</a:t>
+              <a:t>Type an input. See exactly where the quote breaks out of the string.</a:t>
             </a:r>
             <a:endParaRPr lang="en-US" sz="1400" dirty="0"/>
           </a:p>
-        </p:txBody>
-      </p:sp>
-      <p:sp>
-        <p:nvSpPr>
-          <p:cNvPr id="6" name="Shape 3"/>
-          <p:cNvSpPr/>
-          <p:nvPr/>
-        </p:nvSpPr>
-        <p:spPr>
-          <a:xfrm>
-            <a:off x="457200" y="1965960"/>
-            <a:ext cx="8229600" cy="493776"/>
-          </a:xfrm>
-          <a:prstGeom prst="roundRect">
-            <a:avLst>
-              <a:gd name="adj" fmla="val 11111"/>
-            </a:avLst>
-          </a:prstGeom>
-          <a:solidFill>
-            <a:srgbClr val="0A1020"/>
-          </a:solidFill>
-          <a:ln w="12700">
-            <a:solidFill>
-              <a:srgbClr val="E8EDF3"/>
-            </a:solidFill>
-            <a:prstDash val="solid"/>
-          </a:ln>
-        </p:spPr>
-      </p:sp>
-      <p:sp>
-        <p:nvSpPr>
-          <p:cNvPr id="7" name="Text 4"/>
-          <p:cNvSpPr/>
-          <p:nvPr/>
-        </p:nvSpPr>
-        <p:spPr>
-          <a:xfrm>
-            <a:off x="640080" y="2039112"/>
-            <a:ext cx="7863840" cy="347472"/>
-          </a:xfrm>
-          <a:prstGeom prst="rect">
-            <a:avLst/>
-          </a:prstGeom>
-          <a:noFill/>
-          <a:ln/>
-        </p:spPr>
-        <p:txBody>
-          <a:bodyPr wrap="square" lIns="0" tIns="0" rIns="0" bIns="0" rtlCol="0" anchor="t">
-            <a:normAutofit/>
-          </a:bodyPr>
-          <a:lstStyle/>
           <a:p>
             <a:pPr indent="0" marL="0">
               <a:buNone/>
-            </a:pPr>
-            <a:r>
-              <a:rPr lang="en-US" sz="1150" dirty="0">
-                <a:solidFill>
-                  <a:srgbClr val="9FE7D6"/>
-                </a:solidFill>
-                <a:latin typeface="Courier New" pitchFamily="34" charset="0"/>
-                <a:ea typeface="Courier New" pitchFamily="34" charset="-122"/>
-                <a:cs typeface="Courier New" pitchFamily="34" charset="-120"/>
-              </a:rPr>
-              <a:t>alice'--</a:t>
-            </a:r>
-            <a:endParaRPr lang="en-US" sz="1150" dirty="0"/>
-          </a:p>
-        </p:txBody>
-      </p:sp>
-      <p:sp>
-        <p:nvSpPr>
-          <p:cNvPr id="8" name="Shape 5"/>
-          <p:cNvSpPr/>
-          <p:nvPr/>
-        </p:nvSpPr>
-        <p:spPr>
-          <a:xfrm>
-            <a:off x="457200" y="2624328"/>
-            <a:ext cx="8229600" cy="493776"/>
-          </a:xfrm>
-          <a:prstGeom prst="roundRect">
-            <a:avLst>
-              <a:gd name="adj" fmla="val 11111"/>
-            </a:avLst>
-          </a:prstGeom>
-          <a:solidFill>
-            <a:srgbClr val="0A1020"/>
-          </a:solidFill>
-          <a:ln w="12700">
-            <a:solidFill>
-              <a:srgbClr val="E8EDF3"/>
-            </a:solidFill>
-            <a:prstDash val="solid"/>
-          </a:ln>
-        </p:spPr>
-      </p:sp>
-      <p:sp>
-        <p:nvSpPr>
-          <p:cNvPr id="9" name="Text 6"/>
-          <p:cNvSpPr/>
-          <p:nvPr/>
-        </p:nvSpPr>
-        <p:spPr>
-          <a:xfrm>
-            <a:off x="640080" y="2697480"/>
-            <a:ext cx="7863840" cy="347472"/>
-          </a:xfrm>
-          <a:prstGeom prst="rect">
-            <a:avLst/>
-          </a:prstGeom>
-          <a:noFill/>
-          <a:ln/>
-        </p:spPr>
-        <p:txBody>
-          <a:bodyPr wrap="square" lIns="0" tIns="0" rIns="0" bIns="0" rtlCol="0" anchor="t">
-            <a:normAutofit/>
-          </a:bodyPr>
-          <a:lstStyle/>
-          <a:p>
-            <a:pPr indent="0" marL="0">
-              <a:buNone/>
-            </a:pPr>
-            <a:r>
-              <a:rPr lang="en-US" sz="1150" dirty="0">
-                <a:solidFill>
-                  <a:srgbClr val="9FE7D6"/>
-                </a:solidFill>
-                <a:latin typeface="Courier New" pitchFamily="34" charset="0"/>
-                <a:ea typeface="Courier New" pitchFamily="34" charset="-122"/>
-                <a:cs typeface="Courier New" pitchFamily="34" charset="-120"/>
-              </a:rPr>
-              <a:t>SELECT * FROM users WHERE username = 'alice'--' AND password = '...';</a:t>
-            </a:r>
-            <a:endParaRPr lang="en-US" sz="1150" dirty="0"/>
-          </a:p>
-        </p:txBody>
-      </p:sp>
-      <p:sp>
-        <p:nvSpPr>
-          <p:cNvPr id="10" name="Shape 7"/>
-          <p:cNvSpPr/>
-          <p:nvPr/>
-        </p:nvSpPr>
-        <p:spPr>
-          <a:xfrm>
-            <a:off x="457200" y="3282696"/>
-            <a:ext cx="8229600" cy="896112"/>
-          </a:xfrm>
-          <a:prstGeom prst="roundRect">
-            <a:avLst>
-              <a:gd name="adj" fmla="val 8163"/>
-            </a:avLst>
-          </a:prstGeom>
-          <a:solidFill>
-            <a:srgbClr val="F1F5F9"/>
-          </a:solidFill>
-          <a:ln/>
-          <a:effectLst>
-            <a:outerShdw sx="100000" sy="100000" kx="0" ky="0" algn="bl" rotWithShape="0" blurRad="76200" dist="25400" dir="5400000">
-              <a:srgbClr val="000000">
-                <a:alpha val="12000"/>
-              </a:srgbClr>
-            </a:outerShdw>
-          </a:effectLst>
-        </p:spPr>
-      </p:sp>
-      <p:sp>
-        <p:nvSpPr>
-          <p:cNvPr id="11" name="Text 8"/>
-          <p:cNvSpPr/>
-          <p:nvPr/>
-        </p:nvSpPr>
-        <p:spPr>
-          <a:xfrm>
-            <a:off x="731520" y="3392424"/>
-            <a:ext cx="7680960" cy="676656"/>
-          </a:xfrm>
-          <a:prstGeom prst="rect">
-            <a:avLst/>
-          </a:prstGeom>
-          <a:noFill/>
-          <a:ln/>
-        </p:spPr>
-        <p:txBody>
-          <a:bodyPr wrap="square" lIns="0" tIns="0" rIns="0" bIns="0" rtlCol="0" anchor="t">
-            <a:normAutofit/>
-          </a:bodyPr>
-          <a:lstStyle/>
-          <a:p>
-            <a:pPr marL="342900" indent="-342900">
-              <a:spcAft>
-                <a:spcPts val="600"/>
-              </a:spcAft>
-              <a:buSzPct val="100000"/>
-              <a:buChar char="•"/>
             </a:pPr>
             <a:r>
               <a:rPr lang="en-US" sz="1400" dirty="0">
@@ -9318,66 +9851,45 @@
                 <a:ea typeface="Calibri" pitchFamily="34" charset="-122"/>
                 <a:cs typeface="Calibri" pitchFamily="34" charset="-120"/>
               </a:rPr>
-              <a:t>' closes the string literal you're injected into</a:t>
+              <a:t>Try it live: /sim/sqli-parse (interactive simulation, web only)</a:t>
             </a:r>
             <a:endParaRPr lang="en-US" sz="1400" dirty="0"/>
           </a:p>
-          <a:p>
-            <a:pPr marL="342900" indent="-342900">
-              <a:spcAft>
-                <a:spcPts val="600"/>
-              </a:spcAft>
-              <a:buSzPct val="100000"/>
-              <a:buChar char="•"/>
-            </a:pPr>
-            <a:r>
-              <a:rPr lang="en-US" sz="1400" dirty="0">
-                <a:solidFill>
-                  <a:srgbClr val="1F2937"/>
+        </p:txBody>
+      </p:sp>
+      <p:sp>
+        <p:nvSpPr>
+          <p:cNvPr id="6" name="Text 3"/>
+          <p:cNvSpPr/>
+          <p:nvPr/>
+        </p:nvSpPr>
+        <p:spPr>
+          <a:xfrm>
+            <a:off x="457200" y="4800600"/>
+            <a:ext cx="6949440" cy="274320"/>
+          </a:xfrm>
+          <a:prstGeom prst="rect">
+            <a:avLst/>
+          </a:prstGeom>
+          <a:noFill/>
+          <a:ln/>
+        </p:spPr>
+        <p:txBody>
+          <a:bodyPr wrap="square" lIns="0" tIns="0" rIns="0" bIns="0" rtlCol="0" anchor="ctr"/>
+          <a:lstStyle/>
+          <a:p>
+            <a:pPr indent="0" marL="0">
+              <a:buNone/>
+            </a:pPr>
+            <a:r>
+              <a:rPr lang="en-US" sz="900" dirty="0">
+                <a:solidFill>
+                  <a:srgbClr val="64748B"/>
                 </a:solidFill>
                 <a:latin typeface="Calibri" pitchFamily="34" charset="0"/>
                 <a:ea typeface="Calibri" pitchFamily="34" charset="-122"/>
                 <a:cs typeface="Calibri" pitchFamily="34" charset="-120"/>
               </a:rPr>
-              <a:t>-- comments out everything after it, including the password check</a:t>
-            </a:r>
-            <a:endParaRPr lang="en-US" sz="1400" dirty="0"/>
-          </a:p>
-        </p:txBody>
-      </p:sp>
-      <p:sp>
-        <p:nvSpPr>
-          <p:cNvPr id="12" name="Text 9"/>
-          <p:cNvSpPr/>
-          <p:nvPr/>
-        </p:nvSpPr>
-        <p:spPr>
-          <a:xfrm>
-            <a:off x="457200" y="4800600"/>
-            <a:ext cx="6949440" cy="274320"/>
-          </a:xfrm>
-          <a:prstGeom prst="rect">
-            <a:avLst/>
-          </a:prstGeom>
-          <a:noFill/>
-          <a:ln/>
-        </p:spPr>
-        <p:txBody>
-          <a:bodyPr wrap="square" lIns="0" tIns="0" rIns="0" bIns="0" rtlCol="0" anchor="ctr"/>
-          <a:lstStyle/>
-          <a:p>
-            <a:pPr indent="0" marL="0">
-              <a:buNone/>
-            </a:pPr>
-            <a:r>
-              <a:rPr lang="en-US" sz="900" dirty="0">
-                <a:solidFill>
-                  <a:srgbClr val="64748B"/>
-                </a:solidFill>
-                <a:latin typeface="Calibri" pitchFamily="34" charset="0"/>
-                <a:ea typeface="Calibri" pitchFamily="34" charset="-122"/>
-                <a:cs typeface="Calibri" pitchFamily="34" charset="-120"/>
-              </a:rPr>
               <a:t>Software Security · Week 4</a:t>
             </a:r>
             <a:endParaRPr lang="en-US" sz="900" dirty="0"/>
@@ -9386,7 +9898,7 @@
       </p:sp>
       <p:pic>
         <p:nvPicPr>
-          <p:cNvPr id="13" name="Image 1" descr="/Users/pop7/Library/CloudStorage/OneDrive-MonsterConnectCo.,Ltd/Lecture/KOSEN69 - software-security/slides/pptx/assets/logo-small.png">    </p:cNvPr>
+          <p:cNvPr id="7" name="Image 1" descr="/Users/pop7/Library/CloudStorage/OneDrive-MonsterConnectCo.,Ltd/Lecture/KOSEN69 - software-security/slides/pptx/assets/logo-small.png">    </p:cNvPr>
           <p:cNvPicPr>
             <a:picLocks noChangeAspect="1"/>
           </p:cNvPicPr>
@@ -9524,7 +10036,7 @@
                 <a:ea typeface="Arial" pitchFamily="34" charset="-122"/>
                 <a:cs typeface="Arial" pitchFamily="34" charset="-120"/>
               </a:rPr>
-              <a:t>Auth bypass — anatomy of one payload (cont.)</a:t>
+              <a:t>Auth bypass — anatomy of one payload</a:t>
             </a:r>
             <a:endParaRPr lang="en-US" sz="2600" dirty="0"/>
           </a:p>
@@ -9532,18 +10044,195 @@
       </p:sp>
       <p:sp>
         <p:nvSpPr>
-          <p:cNvPr id="5" name="Shape 2"/>
-          <p:cNvSpPr/>
-          <p:nvPr/>
-        </p:nvSpPr>
-        <p:spPr>
-          <a:xfrm>
-            <a:off x="457200" y="1325880"/>
-            <a:ext cx="8229600" cy="987552"/>
+          <p:cNvPr id="5" name="Text 2"/>
+          <p:cNvSpPr/>
+          <p:nvPr/>
+        </p:nvSpPr>
+        <p:spPr>
+          <a:xfrm>
+            <a:off x="548640" y="1325880"/>
+            <a:ext cx="8046720" cy="548640"/>
+          </a:xfrm>
+          <a:prstGeom prst="rect">
+            <a:avLst/>
+          </a:prstGeom>
+          <a:noFill/>
+          <a:ln/>
+        </p:spPr>
+        <p:txBody>
+          <a:bodyPr wrap="square" lIns="0" tIns="0" rIns="0" bIns="0" rtlCol="0" anchor="t">
+            <a:normAutofit/>
+          </a:bodyPr>
+          <a:lstStyle/>
+          <a:p>
+            <a:pPr indent="0" marL="0">
+              <a:buNone/>
+            </a:pPr>
+            <a:r>
+              <a:rPr lang="en-US" sz="1400" dirty="0">
+                <a:solidFill>
+                  <a:srgbClr val="1F2937"/>
+                </a:solidFill>
+                <a:latin typeface="Calibri" pitchFamily="34" charset="0"/>
+                <a:ea typeface="Calibri" pitchFamily="34" charset="-122"/>
+                <a:cs typeface="Calibri" pitchFamily="34" charset="-120"/>
+              </a:rPr>
+              <a:t>Inject into the username field:</a:t>
+            </a:r>
+            <a:endParaRPr lang="en-US" sz="1400" dirty="0"/>
+          </a:p>
+        </p:txBody>
+      </p:sp>
+      <p:sp>
+        <p:nvSpPr>
+          <p:cNvPr id="6" name="Shape 3"/>
+          <p:cNvSpPr/>
+          <p:nvPr/>
+        </p:nvSpPr>
+        <p:spPr>
+          <a:xfrm>
+            <a:off x="457200" y="1965960"/>
+            <a:ext cx="8229600" cy="493776"/>
           </a:xfrm>
           <a:prstGeom prst="roundRect">
             <a:avLst>
-              <a:gd name="adj" fmla="val 7407"/>
+              <a:gd name="adj" fmla="val 11111"/>
+            </a:avLst>
+          </a:prstGeom>
+          <a:solidFill>
+            <a:srgbClr val="0A1020"/>
+          </a:solidFill>
+          <a:ln w="12700">
+            <a:solidFill>
+              <a:srgbClr val="E8EDF3"/>
+            </a:solidFill>
+            <a:prstDash val="solid"/>
+          </a:ln>
+        </p:spPr>
+      </p:sp>
+      <p:sp>
+        <p:nvSpPr>
+          <p:cNvPr id="7" name="Text 4"/>
+          <p:cNvSpPr/>
+          <p:nvPr/>
+        </p:nvSpPr>
+        <p:spPr>
+          <a:xfrm>
+            <a:off x="640080" y="2039112"/>
+            <a:ext cx="7863840" cy="347472"/>
+          </a:xfrm>
+          <a:prstGeom prst="rect">
+            <a:avLst/>
+          </a:prstGeom>
+          <a:noFill/>
+          <a:ln/>
+        </p:spPr>
+        <p:txBody>
+          <a:bodyPr wrap="square" lIns="0" tIns="0" rIns="0" bIns="0" rtlCol="0" anchor="t">
+            <a:normAutofit/>
+          </a:bodyPr>
+          <a:lstStyle/>
+          <a:p>
+            <a:pPr indent="0" marL="0">
+              <a:buNone/>
+            </a:pPr>
+            <a:r>
+              <a:rPr lang="en-US" sz="1150" dirty="0">
+                <a:solidFill>
+                  <a:srgbClr val="9FE7D6"/>
+                </a:solidFill>
+                <a:latin typeface="Courier New" pitchFamily="34" charset="0"/>
+                <a:ea typeface="Courier New" pitchFamily="34" charset="-122"/>
+                <a:cs typeface="Courier New" pitchFamily="34" charset="-120"/>
+              </a:rPr>
+              <a:t>alice'--</a:t>
+            </a:r>
+            <a:endParaRPr lang="en-US" sz="1150" dirty="0"/>
+          </a:p>
+        </p:txBody>
+      </p:sp>
+      <p:sp>
+        <p:nvSpPr>
+          <p:cNvPr id="8" name="Shape 5"/>
+          <p:cNvSpPr/>
+          <p:nvPr/>
+        </p:nvSpPr>
+        <p:spPr>
+          <a:xfrm>
+            <a:off x="457200" y="2624328"/>
+            <a:ext cx="8229600" cy="493776"/>
+          </a:xfrm>
+          <a:prstGeom prst="roundRect">
+            <a:avLst>
+              <a:gd name="adj" fmla="val 11111"/>
+            </a:avLst>
+          </a:prstGeom>
+          <a:solidFill>
+            <a:srgbClr val="0A1020"/>
+          </a:solidFill>
+          <a:ln w="12700">
+            <a:solidFill>
+              <a:srgbClr val="E8EDF3"/>
+            </a:solidFill>
+            <a:prstDash val="solid"/>
+          </a:ln>
+        </p:spPr>
+      </p:sp>
+      <p:sp>
+        <p:nvSpPr>
+          <p:cNvPr id="9" name="Text 6"/>
+          <p:cNvSpPr/>
+          <p:nvPr/>
+        </p:nvSpPr>
+        <p:spPr>
+          <a:xfrm>
+            <a:off x="640080" y="2697480"/>
+            <a:ext cx="7863840" cy="347472"/>
+          </a:xfrm>
+          <a:prstGeom prst="rect">
+            <a:avLst/>
+          </a:prstGeom>
+          <a:noFill/>
+          <a:ln/>
+        </p:spPr>
+        <p:txBody>
+          <a:bodyPr wrap="square" lIns="0" tIns="0" rIns="0" bIns="0" rtlCol="0" anchor="t">
+            <a:normAutofit/>
+          </a:bodyPr>
+          <a:lstStyle/>
+          <a:p>
+            <a:pPr indent="0" marL="0">
+              <a:buNone/>
+            </a:pPr>
+            <a:r>
+              <a:rPr lang="en-US" sz="1150" dirty="0">
+                <a:solidFill>
+                  <a:srgbClr val="9FE7D6"/>
+                </a:solidFill>
+                <a:latin typeface="Courier New" pitchFamily="34" charset="0"/>
+                <a:ea typeface="Courier New" pitchFamily="34" charset="-122"/>
+                <a:cs typeface="Courier New" pitchFamily="34" charset="-120"/>
+              </a:rPr>
+              <a:t>SELECT * FROM users WHERE username = 'alice'--' AND password = '...';</a:t>
+            </a:r>
+            <a:endParaRPr lang="en-US" sz="1150" dirty="0"/>
+          </a:p>
+        </p:txBody>
+      </p:sp>
+      <p:sp>
+        <p:nvSpPr>
+          <p:cNvPr id="10" name="Shape 7"/>
+          <p:cNvSpPr/>
+          <p:nvPr/>
+        </p:nvSpPr>
+        <p:spPr>
+          <a:xfrm>
+            <a:off x="457200" y="3282696"/>
+            <a:ext cx="8229600" cy="896112"/>
+          </a:xfrm>
+          <a:prstGeom prst="roundRect">
+            <a:avLst>
+              <a:gd name="adj" fmla="val 8163"/>
             </a:avLst>
           </a:prstGeom>
           <a:solidFill>
@@ -9561,14 +10250,14 @@
       </p:sp>
       <p:sp>
         <p:nvSpPr>
-          <p:cNvPr id="6" name="Text 3"/>
-          <p:cNvSpPr/>
-          <p:nvPr/>
-        </p:nvSpPr>
-        <p:spPr>
-          <a:xfrm>
-            <a:off x="731520" y="1435608"/>
-            <a:ext cx="7680960" cy="768096"/>
+          <p:cNvPr id="11" name="Text 8"/>
+          <p:cNvSpPr/>
+          <p:nvPr/>
+        </p:nvSpPr>
+        <p:spPr>
+          <a:xfrm>
+            <a:off x="731520" y="3392424"/>
+            <a:ext cx="7680960" cy="676656"/>
           </a:xfrm>
           <a:prstGeom prst="rect">
             <a:avLst/>
@@ -9598,45 +10287,66 @@
                 <a:ea typeface="Calibri" pitchFamily="34" charset="-122"/>
                 <a:cs typeface="Calibri" pitchFamily="34" charset="-120"/>
               </a:rPr>
-              <a:t>No trailing space, no LIMIT trick needed — this app is SQLite via fetchone(), not a MySQL row-count gate; don't carry over MySQL-specific folklore ("needs a space after --") — that's a different engine's quirk</a:t>
+              <a:t>' closes the string literal you're injected into</a:t>
             </a:r>
             <a:endParaRPr lang="en-US" sz="1400" dirty="0"/>
           </a:p>
-        </p:txBody>
-      </p:sp>
-      <p:sp>
-        <p:nvSpPr>
-          <p:cNvPr id="7" name="Text 4"/>
-          <p:cNvSpPr/>
-          <p:nvPr/>
-        </p:nvSpPr>
-        <p:spPr>
-          <a:xfrm>
-            <a:off x="457200" y="4800600"/>
-            <a:ext cx="6949440" cy="274320"/>
-          </a:xfrm>
-          <a:prstGeom prst="rect">
-            <a:avLst/>
-          </a:prstGeom>
-          <a:noFill/>
-          <a:ln/>
-        </p:spPr>
-        <p:txBody>
-          <a:bodyPr wrap="square" lIns="0" tIns="0" rIns="0" bIns="0" rtlCol="0" anchor="ctr"/>
-          <a:lstStyle/>
-          <a:p>
-            <a:pPr indent="0" marL="0">
-              <a:buNone/>
-            </a:pPr>
-            <a:r>
-              <a:rPr lang="en-US" sz="900" dirty="0">
-                <a:solidFill>
-                  <a:srgbClr val="64748B"/>
+          <a:p>
+            <a:pPr marL="342900" indent="-342900">
+              <a:spcAft>
+                <a:spcPts val="600"/>
+              </a:spcAft>
+              <a:buSzPct val="100000"/>
+              <a:buChar char="•"/>
+            </a:pPr>
+            <a:r>
+              <a:rPr lang="en-US" sz="1400" dirty="0">
+                <a:solidFill>
+                  <a:srgbClr val="1F2937"/>
                 </a:solidFill>
                 <a:latin typeface="Calibri" pitchFamily="34" charset="0"/>
                 <a:ea typeface="Calibri" pitchFamily="34" charset="-122"/>
                 <a:cs typeface="Calibri" pitchFamily="34" charset="-120"/>
               </a:rPr>
+              <a:t>-- comments out everything after it, including the password check</a:t>
+            </a:r>
+            <a:endParaRPr lang="en-US" sz="1400" dirty="0"/>
+          </a:p>
+        </p:txBody>
+      </p:sp>
+      <p:sp>
+        <p:nvSpPr>
+          <p:cNvPr id="12" name="Text 9"/>
+          <p:cNvSpPr/>
+          <p:nvPr/>
+        </p:nvSpPr>
+        <p:spPr>
+          <a:xfrm>
+            <a:off x="457200" y="4800600"/>
+            <a:ext cx="6949440" cy="274320"/>
+          </a:xfrm>
+          <a:prstGeom prst="rect">
+            <a:avLst/>
+          </a:prstGeom>
+          <a:noFill/>
+          <a:ln/>
+        </p:spPr>
+        <p:txBody>
+          <a:bodyPr wrap="square" lIns="0" tIns="0" rIns="0" bIns="0" rtlCol="0" anchor="ctr"/>
+          <a:lstStyle/>
+          <a:p>
+            <a:pPr indent="0" marL="0">
+              <a:buNone/>
+            </a:pPr>
+            <a:r>
+              <a:rPr lang="en-US" sz="900" dirty="0">
+                <a:solidFill>
+                  <a:srgbClr val="64748B"/>
+                </a:solidFill>
+                <a:latin typeface="Calibri" pitchFamily="34" charset="0"/>
+                <a:ea typeface="Calibri" pitchFamily="34" charset="-122"/>
+                <a:cs typeface="Calibri" pitchFamily="34" charset="-120"/>
+              </a:rPr>
               <a:t>Software Security · Week 4</a:t>
             </a:r>
             <a:endParaRPr lang="en-US" sz="900" dirty="0"/>
@@ -9645,7 +10355,7 @@
       </p:sp>
       <p:pic>
         <p:nvPicPr>
-          <p:cNvPr id="8" name="Image 1" descr="/Users/pop7/Library/CloudStorage/OneDrive-MonsterConnectCo.,Ltd/Lecture/KOSEN69 - software-security/slides/pptx/assets/logo-small.png">    </p:cNvPr>
+          <p:cNvPr id="13" name="Image 1" descr="/Users/pop7/Library/CloudStorage/OneDrive-MonsterConnectCo.,Ltd/Lecture/KOSEN69 - software-security/slides/pptx/assets/logo-small.png">    </p:cNvPr>
           <p:cNvPicPr>
             <a:picLocks noChangeAspect="1"/>
           </p:cNvPicPr>
@@ -9783,7 +10493,7 @@
                 <a:ea typeface="Arial" pitchFamily="34" charset="-122"/>
                 <a:cs typeface="Arial" pitchFamily="34" charset="-120"/>
               </a:rPr>
-              <a:t>Real-world impact</a:t>
+              <a:t>Auth bypass — anatomy of one payload (cont.)</a:t>
             </a:r>
             <a:endParaRPr lang="en-US" sz="2600" dirty="0"/>
           </a:p>
@@ -9798,11 +10508,11 @@
         <p:spPr>
           <a:xfrm>
             <a:off x="457200" y="1325880"/>
-            <a:ext cx="8229600" cy="1719072"/>
+            <a:ext cx="8229600" cy="987552"/>
           </a:xfrm>
           <a:prstGeom prst="roundRect">
             <a:avLst>
-              <a:gd name="adj" fmla="val 4255"/>
+              <a:gd name="adj" fmla="val 7407"/>
             </a:avLst>
           </a:prstGeom>
           <a:solidFill>
@@ -9827,7 +10537,7 @@
         <p:spPr>
           <a:xfrm>
             <a:off x="731520" y="1435608"/>
-            <a:ext cx="7680960" cy="1499616"/>
+            <a:ext cx="7680960" cy="768096"/>
           </a:xfrm>
           <a:prstGeom prst="rect">
             <a:avLst/>
@@ -9857,70 +10567,7 @@
                 <a:ea typeface="Calibri" pitchFamily="34" charset="-122"/>
                 <a:cs typeface="Calibri" pitchFamily="34" charset="-120"/>
               </a:rPr>
-              <a:t>Equifax (2017): unvalidated HTTP header → Struts RCE (CVE-2017-5638); 147M people, ~$700M settlement</a:t>
-            </a:r>
-            <a:endParaRPr lang="en-US" sz="1400" dirty="0"/>
-          </a:p>
-          <a:p>
-            <a:pPr marL="342900" indent="-342900">
-              <a:spcAft>
-                <a:spcPts val="600"/>
-              </a:spcAft>
-              <a:buSzPct val="100000"/>
-              <a:buChar char="•"/>
-            </a:pPr>
-            <a:r>
-              <a:rPr lang="en-US" sz="1400" dirty="0">
-                <a:solidFill>
-                  <a:srgbClr val="1F2937"/>
-                </a:solidFill>
-                <a:latin typeface="Calibri" pitchFamily="34" charset="0"/>
-                <a:ea typeface="Calibri" pitchFamily="34" charset="-122"/>
-                <a:cs typeface="Calibri" pitchFamily="34" charset="-120"/>
-              </a:rPr>
-              <a:t>Heartland (2008): SQLi into payment systems → 130M+ cards</a:t>
-            </a:r>
-            <a:endParaRPr lang="en-US" sz="1400" dirty="0"/>
-          </a:p>
-          <a:p>
-            <a:pPr marL="342900" indent="-342900">
-              <a:spcAft>
-                <a:spcPts val="600"/>
-              </a:spcAft>
-              <a:buSzPct val="100000"/>
-              <a:buChar char="•"/>
-            </a:pPr>
-            <a:r>
-              <a:rPr lang="en-US" sz="1400" dirty="0">
-                <a:solidFill>
-                  <a:srgbClr val="1F2937"/>
-                </a:solidFill>
-                <a:latin typeface="Calibri" pitchFamily="34" charset="0"/>
-                <a:ea typeface="Calibri" pitchFamily="34" charset="-122"/>
-                <a:cs typeface="Calibri" pitchFamily="34" charset="-120"/>
-              </a:rPr>
-              <a:t>Bulgaria: data on almost all adults leaked via SQLi</a:t>
-            </a:r>
-            <a:endParaRPr lang="en-US" sz="1400" dirty="0"/>
-          </a:p>
-          <a:p>
-            <a:pPr marL="342900" indent="-342900">
-              <a:spcAft>
-                <a:spcPts val="600"/>
-              </a:spcAft>
-              <a:buSzPct val="100000"/>
-              <a:buChar char="•"/>
-            </a:pPr>
-            <a:r>
-              <a:rPr lang="en-US" sz="1400" dirty="0">
-                <a:solidFill>
-                  <a:srgbClr val="1F2937"/>
-                </a:solidFill>
-                <a:latin typeface="Calibri" pitchFamily="34" charset="0"/>
-                <a:ea typeface="Calibri" pitchFamily="34" charset="-122"/>
-                <a:cs typeface="Calibri" pitchFamily="34" charset="-120"/>
-              </a:rPr>
-              <a:t>Impact: data leak/modification, full DB control, DoS, reputation</a:t>
+              <a:t>No trailing space, no LIMIT trick needed — this app is SQLite via fetchone(), not a MySQL row-count gate; don't carry over MySQL-specific folklore ("needs a space after --") — that's a different engine's quirk</a:t>
             </a:r>
             <a:endParaRPr lang="en-US" sz="1400" dirty="0"/>
           </a:p>
@@ -10105,7 +10752,7 @@
                 <a:ea typeface="Arial" pitchFamily="34" charset="-122"/>
                 <a:cs typeface="Arial" pitchFamily="34" charset="-120"/>
               </a:rPr>
-              <a:t>Validate: allow-list, not block-list</a:t>
+              <a:t>Real-world impact</a:t>
             </a:r>
             <a:endParaRPr lang="en-US" sz="2600" dirty="0"/>
           </a:p>
@@ -10120,11 +10767,11 @@
         <p:spPr>
           <a:xfrm>
             <a:off x="457200" y="1325880"/>
-            <a:ext cx="8229600" cy="1517904"/>
+            <a:ext cx="8229600" cy="1719072"/>
           </a:xfrm>
           <a:prstGeom prst="roundRect">
             <a:avLst>
-              <a:gd name="adj" fmla="val 4819"/>
+              <a:gd name="adj" fmla="val 4255"/>
             </a:avLst>
           </a:prstGeom>
           <a:solidFill>
@@ -10149,7 +10796,7 @@
         <p:spPr>
           <a:xfrm>
             <a:off x="731520" y="1435608"/>
-            <a:ext cx="7680960" cy="1298448"/>
+            <a:ext cx="7680960" cy="1499616"/>
           </a:xfrm>
           <a:prstGeom prst="rect">
             <a:avLst/>
@@ -10179,7 +10826,7 @@
                 <a:ea typeface="Calibri" pitchFamily="34" charset="-122"/>
                 <a:cs typeface="Calibri" pitchFamily="34" charset="-120"/>
               </a:rPr>
-              <a:t>Allow-list (preferred): accept only known-good (e.g. 0–9 for a phone)</a:t>
+              <a:t>Equifax (2017): unvalidated HTTP header → Struts RCE (CVE-2017-5638); 147M people, ~$700M settlement</a:t>
             </a:r>
             <a:endParaRPr lang="en-US" sz="1400" dirty="0"/>
           </a:p>
@@ -10200,7 +10847,7 @@
                 <a:ea typeface="Calibri" pitchFamily="34" charset="-122"/>
                 <a:cs typeface="Calibri" pitchFamily="34" charset="-120"/>
               </a:rPr>
-              <a:t>Block-list: ban known-bad → bypassed by new payloads</a:t>
+              <a:t>Heartland (2008): SQLi into payment systems → 130M+ cards</a:t>
             </a:r>
             <a:endParaRPr lang="en-US" sz="1400" dirty="0"/>
           </a:p>
@@ -10221,7 +10868,7 @@
                 <a:ea typeface="Calibri" pitchFamily="34" charset="-122"/>
                 <a:cs typeface="Calibri" pitchFamily="34" charset="-120"/>
               </a:rPr>
-              <a:t>Validate type · length · range · format</a:t>
+              <a:t>Bulgaria: data on almost all adults leaked via SQLi</a:t>
             </a:r>
             <a:endParaRPr lang="en-US" sz="1400" dirty="0"/>
           </a:p>
@@ -10242,7 +10889,7 @@
                 <a:ea typeface="Calibri" pitchFamily="34" charset="-122"/>
                 <a:cs typeface="Calibri" pitchFamily="34" charset="-120"/>
               </a:rPr>
-              <a:t>Client-side for UX, server-side for security</a:t>
+              <a:t>Impact: data leak/modification, full DB control, DoS, reputation</a:t>
             </a:r>
             <a:endParaRPr lang="en-US" sz="1400" dirty="0"/>
           </a:p>
